--- a/videoslides/arbeitsblatt-textgleichungen-a4.pptx
+++ b/videoslides/arbeitsblatt-textgleichungen-a4.pptx
@@ -1448,7 +1448,169 @@
         </p:nvSpPr>
         <p:spPr>
           <a:xfrm>
-            <a:off x="548640" y="502920"/>
+            <a:off x="548640" y="274320"/>
+            <a:ext cx="2926080" cy="731520"/>
+          </a:xfrm>
+          <a:prstGeom prst="rect">
+            <a:avLst/>
+          </a:prstGeom>
+          <a:noFill/>
+          <a:ln/>
+        </p:spPr>
+        <p:txBody>
+          <a:bodyPr wrap="square" lIns="0" tIns="0" rIns="0" bIns="0" rtlCol="0" anchor="ctr"/>
+          <a:lstStyle/>
+          <a:p>
+            <a:pPr indent="0" marL="0">
+              <a:buNone/>
+            </a:pPr>
+            <a:r>
+              <a:rPr lang="en-US" sz="3000" b="1" dirty="0">
+                <a:solidFill>
+                  <a:srgbClr val="475BA6"/>
+                </a:solidFill>
+                <a:latin typeface="Poppins" pitchFamily="34" charset="0"/>
+                <a:ea typeface="Poppins" pitchFamily="34" charset="-122"/>
+                <a:cs typeface="Poppins" pitchFamily="34" charset="-120"/>
+              </a:rPr>
+              <a:t>clever</a:t>
+            </a:r>
+            <a:pPr indent="0" marL="0">
+              <a:buNone/>
+            </a:pPr>
+            <a:r>
+              <a:rPr lang="en-US" sz="3000" b="1" dirty="0">
+                <a:solidFill>
+                  <a:srgbClr val="36448A"/>
+                </a:solidFill>
+                <a:latin typeface="Poppins" pitchFamily="34" charset="0"/>
+                <a:ea typeface="Poppins" pitchFamily="34" charset="-122"/>
+                <a:cs typeface="Poppins" pitchFamily="34" charset="-120"/>
+              </a:rPr>
+              <a:t>box</a:t>
+            </a:r>
+            <a:endParaRPr lang="en-US" sz="3000" dirty="0"/>
+          </a:p>
+        </p:txBody>
+      </p:sp>
+      <p:pic>
+        <p:nvPicPr>
+          <p:cNvPr id="4" name="Image 0" descr="QR-Code zu www.cleverbox.co.at">    </p:cNvPr>
+          <p:cNvPicPr>
+            <a:picLocks noChangeAspect="1"/>
+          </p:cNvPicPr>
+          <p:nvPr/>
+        </p:nvPicPr>
+        <p:blipFill>
+          <a:blip r:embed="rId1"/>
+          <a:stretch>
+            <a:fillRect/>
+          </a:stretch>
+        </p:blipFill>
+        <p:spPr>
+          <a:xfrm>
+            <a:off x="6144768" y="228600"/>
+            <a:ext cx="868680" cy="868680"/>
+          </a:xfrm>
+          <a:prstGeom prst="rect">
+            <a:avLst/>
+          </a:prstGeom>
+        </p:spPr>
+      </p:pic>
+      <p:sp>
+        <p:nvSpPr>
+          <p:cNvPr id="5" name="Text 1"/>
+          <p:cNvSpPr txBox="1"/>
+          <p:nvPr/>
+        </p:nvSpPr>
+        <p:spPr>
+          <a:xfrm>
+            <a:off x="3767328" y="274320"/>
+            <a:ext cx="2286000" cy="777240"/>
+          </a:xfrm>
+          <a:prstGeom prst="rect">
+            <a:avLst/>
+          </a:prstGeom>
+          <a:noFill/>
+          <a:ln/>
+        </p:spPr>
+        <p:txBody>
+          <a:bodyPr wrap="square" lIns="0" tIns="0" rIns="0" bIns="0" rtlCol="0" anchor="ctr"/>
+          <a:lstStyle/>
+          <a:p>
+            <a:pPr algn="r" indent="0" marL="0">
+              <a:lnSpc>
+                <a:spcPct val="120000"/>
+              </a:lnSpc>
+              <a:buNone/>
+            </a:pPr>
+            <a:r>
+              <a:rPr lang="en-US" sz="1000" dirty="0">
+                <a:solidFill>
+                  <a:srgbClr val="4A5F7A"/>
+                </a:solidFill>
+                <a:latin typeface="Poppins" pitchFamily="34" charset="0"/>
+                <a:ea typeface="Poppins" pitchFamily="34" charset="-122"/>
+                <a:cs typeface="Poppins" pitchFamily="34" charset="-120"/>
+              </a:rPr>
+              <a:t>Mehr Material:</a:t>
+            </a:r>
+            <a:endParaRPr lang="en-US" sz="1000" dirty="0"/>
+          </a:p>
+          <a:p>
+            <a:pPr algn="r" indent="0" marL="0">
+              <a:lnSpc>
+                <a:spcPct val="120000"/>
+              </a:lnSpc>
+              <a:buNone/>
+            </a:pPr>
+            <a:r>
+              <a:rPr lang="en-US" sz="1000" dirty="0">
+                <a:solidFill>
+                  <a:srgbClr val="4A5F7A"/>
+                </a:solidFill>
+                <a:latin typeface="Poppins" pitchFamily="34" charset="0"/>
+                <a:ea typeface="Poppins" pitchFamily="34" charset="-122"/>
+                <a:cs typeface="Poppins" pitchFamily="34" charset="-120"/>
+              </a:rPr>
+              <a:t>www.cleverbox.co.at</a:t>
+            </a:r>
+            <a:endParaRPr lang="en-US" sz="1000" dirty="0"/>
+          </a:p>
+        </p:txBody>
+      </p:sp>
+      <p:sp>
+        <p:nvSpPr>
+          <p:cNvPr id="6" name="Shape 2"/>
+          <p:cNvSpPr/>
+          <p:nvPr/>
+        </p:nvSpPr>
+        <p:spPr>
+          <a:xfrm>
+            <a:off x="548640" y="1188720"/>
+            <a:ext cx="6464808" cy="0"/>
+          </a:xfrm>
+          <a:prstGeom prst="line">
+            <a:avLst/>
+          </a:prstGeom>
+          <a:noFill/>
+          <a:ln w="15875">
+            <a:solidFill>
+              <a:srgbClr val="8DBBF2"/>
+            </a:solidFill>
+            <a:prstDash val="solid"/>
+          </a:ln>
+        </p:spPr>
+      </p:sp>
+      <p:sp>
+        <p:nvSpPr>
+          <p:cNvPr id="7" name="Text 3"/>
+          <p:cNvSpPr txBox="1"/>
+          <p:nvPr/>
+        </p:nvSpPr>
+        <p:spPr>
+          <a:xfrm>
+            <a:off x="548640" y="1371600"/>
             <a:ext cx="5486400" cy="365760"/>
           </a:xfrm>
           <a:prstGeom prst="rect">
@@ -1481,13 +1643,13 @@
       </p:sp>
       <p:sp>
         <p:nvSpPr>
-          <p:cNvPr id="4" name="Text 1"/>
-          <p:cNvSpPr txBox="1"/>
-          <p:nvPr/>
-        </p:nvSpPr>
-        <p:spPr>
-          <a:xfrm>
-            <a:off x="548640" y="868680"/>
+          <p:cNvPr id="8" name="Text 4"/>
+          <p:cNvSpPr txBox="1"/>
+          <p:nvPr/>
+        </p:nvSpPr>
+        <p:spPr>
+          <a:xfrm>
+            <a:off x="548640" y="1737360"/>
             <a:ext cx="6464808" cy="731520"/>
           </a:xfrm>
           <a:prstGeom prst="rect">
@@ -1543,13 +1705,13 @@
       </p:sp>
       <p:sp>
         <p:nvSpPr>
-          <p:cNvPr id="5" name="Text 2"/>
-          <p:cNvSpPr txBox="1"/>
-          <p:nvPr/>
-        </p:nvSpPr>
-        <p:spPr>
-          <a:xfrm>
-            <a:off x="548640" y="1783080"/>
+          <p:cNvPr id="9" name="Text 5"/>
+          <p:cNvSpPr txBox="1"/>
+          <p:nvPr/>
+        </p:nvSpPr>
+        <p:spPr>
+          <a:xfrm>
+            <a:off x="548640" y="2651760"/>
             <a:ext cx="822960" cy="365760"/>
           </a:xfrm>
           <a:prstGeom prst="rect">
@@ -1582,13 +1744,13 @@
       </p:sp>
       <p:sp>
         <p:nvSpPr>
-          <p:cNvPr id="6" name="Shape 3"/>
-          <p:cNvSpPr/>
-          <p:nvPr/>
-        </p:nvSpPr>
-        <p:spPr>
-          <a:xfrm>
-            <a:off x="1371600" y="2103120"/>
+          <p:cNvPr id="10" name="Shape 6"/>
+          <p:cNvSpPr/>
+          <p:nvPr/>
+        </p:nvSpPr>
+        <p:spPr>
+          <a:xfrm>
+            <a:off x="1371600" y="2971800"/>
             <a:ext cx="2743200" cy="0"/>
           </a:xfrm>
           <a:prstGeom prst="line">
@@ -1605,13 +1767,13 @@
       </p:sp>
       <p:sp>
         <p:nvSpPr>
-          <p:cNvPr id="7" name="Text 4"/>
-          <p:cNvSpPr txBox="1"/>
-          <p:nvPr/>
-        </p:nvSpPr>
-        <p:spPr>
-          <a:xfrm>
-            <a:off x="4389120" y="1783080"/>
+          <p:cNvPr id="11" name="Text 7"/>
+          <p:cNvSpPr txBox="1"/>
+          <p:nvPr/>
+        </p:nvSpPr>
+        <p:spPr>
+          <a:xfrm>
+            <a:off x="4389120" y="2651760"/>
             <a:ext cx="914400" cy="365760"/>
           </a:xfrm>
           <a:prstGeom prst="rect">
@@ -1644,13 +1806,13 @@
       </p:sp>
       <p:sp>
         <p:nvSpPr>
-          <p:cNvPr id="8" name="Shape 5"/>
-          <p:cNvSpPr/>
-          <p:nvPr/>
-        </p:nvSpPr>
-        <p:spPr>
-          <a:xfrm>
-            <a:off x="5303520" y="2103120"/>
+          <p:cNvPr id="12" name="Shape 8"/>
+          <p:cNvSpPr/>
+          <p:nvPr/>
+        </p:nvSpPr>
+        <p:spPr>
+          <a:xfrm>
+            <a:off x="5303520" y="2971800"/>
             <a:ext cx="1709928" cy="0"/>
           </a:xfrm>
           <a:prstGeom prst="line">
@@ -1667,13 +1829,13 @@
       </p:sp>
       <p:sp>
         <p:nvSpPr>
-          <p:cNvPr id="9" name="Text 6"/>
-          <p:cNvSpPr txBox="1"/>
-          <p:nvPr/>
-        </p:nvSpPr>
-        <p:spPr>
-          <a:xfrm>
-            <a:off x="548640" y="2286000"/>
+          <p:cNvPr id="13" name="Text 9"/>
+          <p:cNvSpPr txBox="1"/>
+          <p:nvPr/>
+        </p:nvSpPr>
+        <p:spPr>
+          <a:xfrm>
+            <a:off x="548640" y="3154680"/>
             <a:ext cx="6464808" cy="365760"/>
           </a:xfrm>
           <a:prstGeom prst="rect">
@@ -1706,13 +1868,13 @@
       </p:sp>
       <p:sp>
         <p:nvSpPr>
-          <p:cNvPr id="10" name="Shape 7"/>
-          <p:cNvSpPr/>
-          <p:nvPr/>
-        </p:nvSpPr>
-        <p:spPr>
-          <a:xfrm>
-            <a:off x="548640" y="2834640"/>
+          <p:cNvPr id="14" name="Shape 10"/>
+          <p:cNvSpPr/>
+          <p:nvPr/>
+        </p:nvSpPr>
+        <p:spPr>
+          <a:xfrm>
+            <a:off x="548640" y="3703320"/>
             <a:ext cx="6464808" cy="1956816"/>
           </a:xfrm>
           <a:prstGeom prst="roundRect">
@@ -1733,13 +1895,13 @@
       </p:sp>
       <p:sp>
         <p:nvSpPr>
-          <p:cNvPr id="11" name="Shape 8"/>
-          <p:cNvSpPr/>
-          <p:nvPr/>
-        </p:nvSpPr>
-        <p:spPr>
-          <a:xfrm>
-            <a:off x="749808" y="3035808"/>
+          <p:cNvPr id="15" name="Shape 11"/>
+          <p:cNvSpPr/>
+          <p:nvPr/>
+        </p:nvSpPr>
+        <p:spPr>
+          <a:xfrm>
+            <a:off x="749808" y="3904488"/>
             <a:ext cx="457200" cy="457200"/>
           </a:xfrm>
           <a:prstGeom prst="ellipse">
@@ -1758,13 +1920,13 @@
       </p:sp>
       <p:sp>
         <p:nvSpPr>
-          <p:cNvPr id="12" name="Text 9"/>
-          <p:cNvSpPr txBox="1"/>
-          <p:nvPr/>
-        </p:nvSpPr>
-        <p:spPr>
-          <a:xfrm>
-            <a:off x="749808" y="3035808"/>
+          <p:cNvPr id="16" name="Text 12"/>
+          <p:cNvSpPr txBox="1"/>
+          <p:nvPr/>
+        </p:nvSpPr>
+        <p:spPr>
+          <a:xfrm>
+            <a:off x="749808" y="3904488"/>
             <a:ext cx="457200" cy="457200"/>
           </a:xfrm>
           <a:prstGeom prst="rect">
@@ -1797,13 +1959,13 @@
       </p:sp>
       <p:sp>
         <p:nvSpPr>
-          <p:cNvPr id="13" name="Text 10"/>
-          <p:cNvSpPr txBox="1"/>
-          <p:nvPr/>
-        </p:nvSpPr>
-        <p:spPr>
-          <a:xfrm>
-            <a:off x="1417320" y="3017520"/>
+          <p:cNvPr id="17" name="Text 13"/>
+          <p:cNvSpPr txBox="1"/>
+          <p:nvPr/>
+        </p:nvSpPr>
+        <p:spPr>
+          <a:xfrm>
+            <a:off x="1417320" y="3886200"/>
             <a:ext cx="5367528" cy="585216"/>
           </a:xfrm>
           <a:prstGeom prst="rect">
@@ -1839,13 +2001,13 @@
       </p:sp>
       <p:sp>
         <p:nvSpPr>
-          <p:cNvPr id="14" name="Text 11"/>
-          <p:cNvSpPr txBox="1"/>
-          <p:nvPr/>
-        </p:nvSpPr>
-        <p:spPr>
-          <a:xfrm>
-            <a:off x="1417320" y="3739896"/>
+          <p:cNvPr id="18" name="Text 14"/>
+          <p:cNvSpPr txBox="1"/>
+          <p:nvPr/>
+        </p:nvSpPr>
+        <p:spPr>
+          <a:xfrm>
+            <a:off x="1417320" y="4608576"/>
             <a:ext cx="1188720" cy="365760"/>
           </a:xfrm>
           <a:prstGeom prst="rect">
@@ -1878,13 +2040,13 @@
       </p:sp>
       <p:sp>
         <p:nvSpPr>
-          <p:cNvPr id="15" name="Shape 12"/>
-          <p:cNvSpPr/>
-          <p:nvPr/>
-        </p:nvSpPr>
-        <p:spPr>
-          <a:xfrm>
-            <a:off x="2606040" y="4059936"/>
+          <p:cNvPr id="19" name="Shape 15"/>
+          <p:cNvSpPr/>
+          <p:nvPr/>
+        </p:nvSpPr>
+        <p:spPr>
+          <a:xfrm>
+            <a:off x="2606040" y="4928616"/>
             <a:ext cx="4178808" cy="0"/>
           </a:xfrm>
           <a:prstGeom prst="line">
@@ -1901,13 +2063,13 @@
       </p:sp>
       <p:sp>
         <p:nvSpPr>
-          <p:cNvPr id="16" name="Text 13"/>
-          <p:cNvSpPr txBox="1"/>
-          <p:nvPr/>
-        </p:nvSpPr>
-        <p:spPr>
-          <a:xfrm>
-            <a:off x="1417320" y="4197096"/>
+          <p:cNvPr id="20" name="Text 16"/>
+          <p:cNvSpPr txBox="1"/>
+          <p:nvPr/>
+        </p:nvSpPr>
+        <p:spPr>
+          <a:xfrm>
+            <a:off x="1417320" y="5065776"/>
             <a:ext cx="1188720" cy="365760"/>
           </a:xfrm>
           <a:prstGeom prst="rect">
@@ -1940,13 +2102,13 @@
       </p:sp>
       <p:sp>
         <p:nvSpPr>
-          <p:cNvPr id="17" name="Shape 14"/>
-          <p:cNvSpPr/>
-          <p:nvPr/>
-        </p:nvSpPr>
-        <p:spPr>
-          <a:xfrm>
-            <a:off x="2606040" y="4517136"/>
+          <p:cNvPr id="21" name="Shape 17"/>
+          <p:cNvSpPr/>
+          <p:nvPr/>
+        </p:nvSpPr>
+        <p:spPr>
+          <a:xfrm>
+            <a:off x="2606040" y="5385816"/>
             <a:ext cx="2743200" cy="0"/>
           </a:xfrm>
           <a:prstGeom prst="line">
@@ -1963,13 +2125,13 @@
       </p:sp>
       <p:sp>
         <p:nvSpPr>
-          <p:cNvPr id="18" name="Shape 15"/>
-          <p:cNvSpPr/>
-          <p:nvPr/>
-        </p:nvSpPr>
-        <p:spPr>
-          <a:xfrm>
-            <a:off x="548640" y="4928616"/>
+          <p:cNvPr id="22" name="Shape 18"/>
+          <p:cNvSpPr/>
+          <p:nvPr/>
+        </p:nvSpPr>
+        <p:spPr>
+          <a:xfrm>
+            <a:off x="548640" y="5797296"/>
             <a:ext cx="6464808" cy="1956816"/>
           </a:xfrm>
           <a:prstGeom prst="roundRect">
@@ -1990,13 +2152,13 @@
       </p:sp>
       <p:sp>
         <p:nvSpPr>
-          <p:cNvPr id="19" name="Shape 16"/>
-          <p:cNvSpPr/>
-          <p:nvPr/>
-        </p:nvSpPr>
-        <p:spPr>
-          <a:xfrm>
-            <a:off x="749808" y="5129784"/>
+          <p:cNvPr id="23" name="Shape 19"/>
+          <p:cNvSpPr/>
+          <p:nvPr/>
+        </p:nvSpPr>
+        <p:spPr>
+          <a:xfrm>
+            <a:off x="749808" y="5998464"/>
             <a:ext cx="457200" cy="457200"/>
           </a:xfrm>
           <a:prstGeom prst="ellipse">
@@ -2015,13 +2177,13 @@
       </p:sp>
       <p:sp>
         <p:nvSpPr>
-          <p:cNvPr id="20" name="Text 17"/>
-          <p:cNvSpPr txBox="1"/>
-          <p:nvPr/>
-        </p:nvSpPr>
-        <p:spPr>
-          <a:xfrm>
-            <a:off x="749808" y="5129784"/>
+          <p:cNvPr id="24" name="Text 20"/>
+          <p:cNvSpPr txBox="1"/>
+          <p:nvPr/>
+        </p:nvSpPr>
+        <p:spPr>
+          <a:xfrm>
+            <a:off x="749808" y="5998464"/>
             <a:ext cx="457200" cy="457200"/>
           </a:xfrm>
           <a:prstGeom prst="rect">
@@ -2054,13 +2216,13 @@
       </p:sp>
       <p:sp>
         <p:nvSpPr>
-          <p:cNvPr id="21" name="Text 18"/>
-          <p:cNvSpPr txBox="1"/>
-          <p:nvPr/>
-        </p:nvSpPr>
-        <p:spPr>
-          <a:xfrm>
-            <a:off x="1417320" y="5111496"/>
+          <p:cNvPr id="25" name="Text 21"/>
+          <p:cNvSpPr txBox="1"/>
+          <p:nvPr/>
+        </p:nvSpPr>
+        <p:spPr>
+          <a:xfrm>
+            <a:off x="1417320" y="5980176"/>
             <a:ext cx="5367528" cy="585216"/>
           </a:xfrm>
           <a:prstGeom prst="rect">
@@ -2096,13 +2258,13 @@
       </p:sp>
       <p:sp>
         <p:nvSpPr>
-          <p:cNvPr id="22" name="Text 19"/>
-          <p:cNvSpPr txBox="1"/>
-          <p:nvPr/>
-        </p:nvSpPr>
-        <p:spPr>
-          <a:xfrm>
-            <a:off x="1417320" y="5833872"/>
+          <p:cNvPr id="26" name="Text 22"/>
+          <p:cNvSpPr txBox="1"/>
+          <p:nvPr/>
+        </p:nvSpPr>
+        <p:spPr>
+          <a:xfrm>
+            <a:off x="1417320" y="6702552"/>
             <a:ext cx="1188720" cy="365760"/>
           </a:xfrm>
           <a:prstGeom prst="rect">
@@ -2135,13 +2297,13 @@
       </p:sp>
       <p:sp>
         <p:nvSpPr>
-          <p:cNvPr id="23" name="Shape 20"/>
-          <p:cNvSpPr/>
-          <p:nvPr/>
-        </p:nvSpPr>
-        <p:spPr>
-          <a:xfrm>
-            <a:off x="2606040" y="6153912"/>
+          <p:cNvPr id="27" name="Shape 23"/>
+          <p:cNvSpPr/>
+          <p:nvPr/>
+        </p:nvSpPr>
+        <p:spPr>
+          <a:xfrm>
+            <a:off x="2606040" y="7022592"/>
             <a:ext cx="4178808" cy="0"/>
           </a:xfrm>
           <a:prstGeom prst="line">
@@ -2158,13 +2320,13 @@
       </p:sp>
       <p:sp>
         <p:nvSpPr>
-          <p:cNvPr id="24" name="Text 21"/>
-          <p:cNvSpPr txBox="1"/>
-          <p:nvPr/>
-        </p:nvSpPr>
-        <p:spPr>
-          <a:xfrm>
-            <a:off x="1417320" y="6291072"/>
+          <p:cNvPr id="28" name="Text 24"/>
+          <p:cNvSpPr txBox="1"/>
+          <p:nvPr/>
+        </p:nvSpPr>
+        <p:spPr>
+          <a:xfrm>
+            <a:off x="1417320" y="7159752"/>
             <a:ext cx="1188720" cy="365760"/>
           </a:xfrm>
           <a:prstGeom prst="rect">
@@ -2197,13 +2359,13 @@
       </p:sp>
       <p:sp>
         <p:nvSpPr>
-          <p:cNvPr id="25" name="Shape 22"/>
-          <p:cNvSpPr/>
-          <p:nvPr/>
-        </p:nvSpPr>
-        <p:spPr>
-          <a:xfrm>
-            <a:off x="2606040" y="6611112"/>
+          <p:cNvPr id="29" name="Shape 25"/>
+          <p:cNvSpPr/>
+          <p:nvPr/>
+        </p:nvSpPr>
+        <p:spPr>
+          <a:xfrm>
+            <a:off x="2606040" y="7479792"/>
             <a:ext cx="2743200" cy="0"/>
           </a:xfrm>
           <a:prstGeom prst="line">
@@ -2220,13 +2382,13 @@
       </p:sp>
       <p:sp>
         <p:nvSpPr>
-          <p:cNvPr id="26" name="Shape 23"/>
-          <p:cNvSpPr/>
-          <p:nvPr/>
-        </p:nvSpPr>
-        <p:spPr>
-          <a:xfrm>
-            <a:off x="548640" y="7022592"/>
+          <p:cNvPr id="30" name="Shape 26"/>
+          <p:cNvSpPr/>
+          <p:nvPr/>
+        </p:nvSpPr>
+        <p:spPr>
+          <a:xfrm>
+            <a:off x="548640" y="7891272"/>
             <a:ext cx="6464808" cy="1956816"/>
           </a:xfrm>
           <a:prstGeom prst="roundRect">
@@ -2247,13 +2409,13 @@
       </p:sp>
       <p:sp>
         <p:nvSpPr>
-          <p:cNvPr id="27" name="Shape 24"/>
-          <p:cNvSpPr/>
-          <p:nvPr/>
-        </p:nvSpPr>
-        <p:spPr>
-          <a:xfrm>
-            <a:off x="749808" y="7223760"/>
+          <p:cNvPr id="31" name="Shape 27"/>
+          <p:cNvSpPr/>
+          <p:nvPr/>
+        </p:nvSpPr>
+        <p:spPr>
+          <a:xfrm>
+            <a:off x="749808" y="8092440"/>
             <a:ext cx="457200" cy="457200"/>
           </a:xfrm>
           <a:prstGeom prst="ellipse">
@@ -2272,13 +2434,13 @@
       </p:sp>
       <p:sp>
         <p:nvSpPr>
-          <p:cNvPr id="28" name="Text 25"/>
-          <p:cNvSpPr txBox="1"/>
-          <p:nvPr/>
-        </p:nvSpPr>
-        <p:spPr>
-          <a:xfrm>
-            <a:off x="749808" y="7223760"/>
+          <p:cNvPr id="32" name="Text 28"/>
+          <p:cNvSpPr txBox="1"/>
+          <p:nvPr/>
+        </p:nvSpPr>
+        <p:spPr>
+          <a:xfrm>
+            <a:off x="749808" y="8092440"/>
             <a:ext cx="457200" cy="457200"/>
           </a:xfrm>
           <a:prstGeom prst="rect">
@@ -2311,13 +2473,13 @@
       </p:sp>
       <p:sp>
         <p:nvSpPr>
-          <p:cNvPr id="29" name="Text 26"/>
-          <p:cNvSpPr txBox="1"/>
-          <p:nvPr/>
-        </p:nvSpPr>
-        <p:spPr>
-          <a:xfrm>
-            <a:off x="1417320" y="7205472"/>
+          <p:cNvPr id="33" name="Text 29"/>
+          <p:cNvSpPr txBox="1"/>
+          <p:nvPr/>
+        </p:nvSpPr>
+        <p:spPr>
+          <a:xfrm>
+            <a:off x="1417320" y="8074152"/>
             <a:ext cx="5367528" cy="585216"/>
           </a:xfrm>
           <a:prstGeom prst="rect">
@@ -2353,13 +2515,13 @@
       </p:sp>
       <p:sp>
         <p:nvSpPr>
-          <p:cNvPr id="30" name="Text 27"/>
-          <p:cNvSpPr txBox="1"/>
-          <p:nvPr/>
-        </p:nvSpPr>
-        <p:spPr>
-          <a:xfrm>
-            <a:off x="1417320" y="7927848"/>
+          <p:cNvPr id="34" name="Text 30"/>
+          <p:cNvSpPr txBox="1"/>
+          <p:nvPr/>
+        </p:nvSpPr>
+        <p:spPr>
+          <a:xfrm>
+            <a:off x="1417320" y="8796528"/>
             <a:ext cx="1188720" cy="365760"/>
           </a:xfrm>
           <a:prstGeom prst="rect">
@@ -2392,13 +2554,13 @@
       </p:sp>
       <p:sp>
         <p:nvSpPr>
-          <p:cNvPr id="31" name="Shape 28"/>
-          <p:cNvSpPr/>
-          <p:nvPr/>
-        </p:nvSpPr>
-        <p:spPr>
-          <a:xfrm>
-            <a:off x="2606040" y="8247888"/>
+          <p:cNvPr id="35" name="Shape 31"/>
+          <p:cNvSpPr/>
+          <p:nvPr/>
+        </p:nvSpPr>
+        <p:spPr>
+          <a:xfrm>
+            <a:off x="2606040" y="9116568"/>
             <a:ext cx="4178808" cy="0"/>
           </a:xfrm>
           <a:prstGeom prst="line">
@@ -2415,13 +2577,13 @@
       </p:sp>
       <p:sp>
         <p:nvSpPr>
-          <p:cNvPr id="32" name="Text 29"/>
-          <p:cNvSpPr txBox="1"/>
-          <p:nvPr/>
-        </p:nvSpPr>
-        <p:spPr>
-          <a:xfrm>
-            <a:off x="1417320" y="8385048"/>
+          <p:cNvPr id="36" name="Text 32"/>
+          <p:cNvSpPr txBox="1"/>
+          <p:nvPr/>
+        </p:nvSpPr>
+        <p:spPr>
+          <a:xfrm>
+            <a:off x="1417320" y="9253728"/>
             <a:ext cx="1188720" cy="365760"/>
           </a:xfrm>
           <a:prstGeom prst="rect">
@@ -2454,13 +2616,13 @@
       </p:sp>
       <p:sp>
         <p:nvSpPr>
-          <p:cNvPr id="33" name="Shape 30"/>
-          <p:cNvSpPr/>
-          <p:nvPr/>
-        </p:nvSpPr>
-        <p:spPr>
-          <a:xfrm>
-            <a:off x="2606040" y="8705088"/>
+          <p:cNvPr id="37" name="Shape 33"/>
+          <p:cNvSpPr/>
+          <p:nvPr/>
+        </p:nvSpPr>
+        <p:spPr>
+          <a:xfrm>
+            <a:off x="2606040" y="9573768"/>
             <a:ext cx="2743200" cy="0"/>
           </a:xfrm>
           <a:prstGeom prst="line">
@@ -2508,7 +2670,169 @@
         </p:nvSpPr>
         <p:spPr>
           <a:xfrm>
-            <a:off x="548640" y="502920"/>
+            <a:off x="548640" y="274320"/>
+            <a:ext cx="2926080" cy="731520"/>
+          </a:xfrm>
+          <a:prstGeom prst="rect">
+            <a:avLst/>
+          </a:prstGeom>
+          <a:noFill/>
+          <a:ln/>
+        </p:spPr>
+        <p:txBody>
+          <a:bodyPr wrap="square" lIns="0" tIns="0" rIns="0" bIns="0" rtlCol="0" anchor="ctr"/>
+          <a:lstStyle/>
+          <a:p>
+            <a:pPr indent="0" marL="0">
+              <a:buNone/>
+            </a:pPr>
+            <a:r>
+              <a:rPr lang="en-US" sz="3000" b="1" dirty="0">
+                <a:solidFill>
+                  <a:srgbClr val="475BA6"/>
+                </a:solidFill>
+                <a:latin typeface="Poppins" pitchFamily="34" charset="0"/>
+                <a:ea typeface="Poppins" pitchFamily="34" charset="-122"/>
+                <a:cs typeface="Poppins" pitchFamily="34" charset="-120"/>
+              </a:rPr>
+              <a:t>clever</a:t>
+            </a:r>
+            <a:pPr indent="0" marL="0">
+              <a:buNone/>
+            </a:pPr>
+            <a:r>
+              <a:rPr lang="en-US" sz="3000" b="1" dirty="0">
+                <a:solidFill>
+                  <a:srgbClr val="36448A"/>
+                </a:solidFill>
+                <a:latin typeface="Poppins" pitchFamily="34" charset="0"/>
+                <a:ea typeface="Poppins" pitchFamily="34" charset="-122"/>
+                <a:cs typeface="Poppins" pitchFamily="34" charset="-120"/>
+              </a:rPr>
+              <a:t>box</a:t>
+            </a:r>
+            <a:endParaRPr lang="en-US" sz="3000" dirty="0"/>
+          </a:p>
+        </p:txBody>
+      </p:sp>
+      <p:pic>
+        <p:nvPicPr>
+          <p:cNvPr id="4" name="Image 0" descr="QR-Code zu www.cleverbox.co.at">    </p:cNvPr>
+          <p:cNvPicPr>
+            <a:picLocks noChangeAspect="1"/>
+          </p:cNvPicPr>
+          <p:nvPr/>
+        </p:nvPicPr>
+        <p:blipFill>
+          <a:blip r:embed="rId1"/>
+          <a:stretch>
+            <a:fillRect/>
+          </a:stretch>
+        </p:blipFill>
+        <p:spPr>
+          <a:xfrm>
+            <a:off x="6144768" y="228600"/>
+            <a:ext cx="868680" cy="868680"/>
+          </a:xfrm>
+          <a:prstGeom prst="rect">
+            <a:avLst/>
+          </a:prstGeom>
+        </p:spPr>
+      </p:pic>
+      <p:sp>
+        <p:nvSpPr>
+          <p:cNvPr id="5" name="Text 1"/>
+          <p:cNvSpPr txBox="1"/>
+          <p:nvPr/>
+        </p:nvSpPr>
+        <p:spPr>
+          <a:xfrm>
+            <a:off x="3767328" y="274320"/>
+            <a:ext cx="2286000" cy="777240"/>
+          </a:xfrm>
+          <a:prstGeom prst="rect">
+            <a:avLst/>
+          </a:prstGeom>
+          <a:noFill/>
+          <a:ln/>
+        </p:spPr>
+        <p:txBody>
+          <a:bodyPr wrap="square" lIns="0" tIns="0" rIns="0" bIns="0" rtlCol="0" anchor="ctr"/>
+          <a:lstStyle/>
+          <a:p>
+            <a:pPr algn="r" indent="0" marL="0">
+              <a:lnSpc>
+                <a:spcPct val="120000"/>
+              </a:lnSpc>
+              <a:buNone/>
+            </a:pPr>
+            <a:r>
+              <a:rPr lang="en-US" sz="1000" dirty="0">
+                <a:solidFill>
+                  <a:srgbClr val="4A5F7A"/>
+                </a:solidFill>
+                <a:latin typeface="Poppins" pitchFamily="34" charset="0"/>
+                <a:ea typeface="Poppins" pitchFamily="34" charset="-122"/>
+                <a:cs typeface="Poppins" pitchFamily="34" charset="-120"/>
+              </a:rPr>
+              <a:t>Mehr Material:</a:t>
+            </a:r>
+            <a:endParaRPr lang="en-US" sz="1000" dirty="0"/>
+          </a:p>
+          <a:p>
+            <a:pPr algn="r" indent="0" marL="0">
+              <a:lnSpc>
+                <a:spcPct val="120000"/>
+              </a:lnSpc>
+              <a:buNone/>
+            </a:pPr>
+            <a:r>
+              <a:rPr lang="en-US" sz="1000" dirty="0">
+                <a:solidFill>
+                  <a:srgbClr val="4A5F7A"/>
+                </a:solidFill>
+                <a:latin typeface="Poppins" pitchFamily="34" charset="0"/>
+                <a:ea typeface="Poppins" pitchFamily="34" charset="-122"/>
+                <a:cs typeface="Poppins" pitchFamily="34" charset="-120"/>
+              </a:rPr>
+              <a:t>www.cleverbox.co.at</a:t>
+            </a:r>
+            <a:endParaRPr lang="en-US" sz="1000" dirty="0"/>
+          </a:p>
+        </p:txBody>
+      </p:sp>
+      <p:sp>
+        <p:nvSpPr>
+          <p:cNvPr id="6" name="Shape 2"/>
+          <p:cNvSpPr/>
+          <p:nvPr/>
+        </p:nvSpPr>
+        <p:spPr>
+          <a:xfrm>
+            <a:off x="548640" y="1188720"/>
+            <a:ext cx="6464808" cy="0"/>
+          </a:xfrm>
+          <a:prstGeom prst="line">
+            <a:avLst/>
+          </a:prstGeom>
+          <a:noFill/>
+          <a:ln w="15875">
+            <a:solidFill>
+              <a:srgbClr val="8DBBF2"/>
+            </a:solidFill>
+            <a:prstDash val="solid"/>
+          </a:ln>
+        </p:spPr>
+      </p:sp>
+      <p:sp>
+        <p:nvSpPr>
+          <p:cNvPr id="7" name="Text 3"/>
+          <p:cNvSpPr txBox="1"/>
+          <p:nvPr/>
+        </p:nvSpPr>
+        <p:spPr>
+          <a:xfrm>
+            <a:off x="548640" y="1371600"/>
             <a:ext cx="6400800" cy="365760"/>
           </a:xfrm>
           <a:prstGeom prst="rect">
@@ -2541,13 +2865,13 @@
       </p:sp>
       <p:sp>
         <p:nvSpPr>
-          <p:cNvPr id="4" name="Shape 1"/>
-          <p:cNvSpPr/>
-          <p:nvPr/>
-        </p:nvSpPr>
-        <p:spPr>
-          <a:xfrm>
-            <a:off x="548640" y="1097280"/>
+          <p:cNvPr id="8" name="Shape 4"/>
+          <p:cNvSpPr/>
+          <p:nvPr/>
+        </p:nvSpPr>
+        <p:spPr>
+          <a:xfrm>
+            <a:off x="548640" y="1965960"/>
             <a:ext cx="6464808" cy="1709928"/>
           </a:xfrm>
           <a:prstGeom prst="roundRect">
@@ -2568,13 +2892,13 @@
       </p:sp>
       <p:sp>
         <p:nvSpPr>
-          <p:cNvPr id="5" name="Shape 2"/>
-          <p:cNvSpPr/>
-          <p:nvPr/>
-        </p:nvSpPr>
-        <p:spPr>
-          <a:xfrm>
-            <a:off x="749808" y="1298448"/>
+          <p:cNvPr id="9" name="Shape 5"/>
+          <p:cNvSpPr/>
+          <p:nvPr/>
+        </p:nvSpPr>
+        <p:spPr>
+          <a:xfrm>
+            <a:off x="749808" y="2167128"/>
             <a:ext cx="457200" cy="457200"/>
           </a:xfrm>
           <a:prstGeom prst="ellipse">
@@ -2593,13 +2917,13 @@
       </p:sp>
       <p:sp>
         <p:nvSpPr>
-          <p:cNvPr id="6" name="Text 3"/>
-          <p:cNvSpPr txBox="1"/>
-          <p:nvPr/>
-        </p:nvSpPr>
-        <p:spPr>
-          <a:xfrm>
-            <a:off x="749808" y="1298448"/>
+          <p:cNvPr id="10" name="Text 6"/>
+          <p:cNvSpPr txBox="1"/>
+          <p:nvPr/>
+        </p:nvSpPr>
+        <p:spPr>
+          <a:xfrm>
+            <a:off x="749808" y="2167128"/>
             <a:ext cx="457200" cy="457200"/>
           </a:xfrm>
           <a:prstGeom prst="rect">
@@ -2632,13 +2956,13 @@
       </p:sp>
       <p:sp>
         <p:nvSpPr>
-          <p:cNvPr id="7" name="Text 4"/>
-          <p:cNvSpPr txBox="1"/>
-          <p:nvPr/>
-        </p:nvSpPr>
-        <p:spPr>
-          <a:xfrm>
-            <a:off x="1417320" y="1280160"/>
+          <p:cNvPr id="11" name="Text 7"/>
+          <p:cNvSpPr txBox="1"/>
+          <p:nvPr/>
+        </p:nvSpPr>
+        <p:spPr>
+          <a:xfrm>
+            <a:off x="1417320" y="2148840"/>
             <a:ext cx="5367528" cy="338328"/>
           </a:xfrm>
           <a:prstGeom prst="rect">
@@ -2674,13 +2998,13 @@
       </p:sp>
       <p:sp>
         <p:nvSpPr>
-          <p:cNvPr id="8" name="Text 5"/>
-          <p:cNvSpPr txBox="1"/>
-          <p:nvPr/>
-        </p:nvSpPr>
-        <p:spPr>
-          <a:xfrm>
-            <a:off x="1417320" y="1755648"/>
+          <p:cNvPr id="12" name="Text 8"/>
+          <p:cNvSpPr txBox="1"/>
+          <p:nvPr/>
+        </p:nvSpPr>
+        <p:spPr>
+          <a:xfrm>
+            <a:off x="1417320" y="2624328"/>
             <a:ext cx="1188720" cy="365760"/>
           </a:xfrm>
           <a:prstGeom prst="rect">
@@ -2713,13 +3037,13 @@
       </p:sp>
       <p:sp>
         <p:nvSpPr>
-          <p:cNvPr id="9" name="Shape 6"/>
-          <p:cNvSpPr/>
-          <p:nvPr/>
-        </p:nvSpPr>
-        <p:spPr>
-          <a:xfrm>
-            <a:off x="2606040" y="2075688"/>
+          <p:cNvPr id="13" name="Shape 9"/>
+          <p:cNvSpPr/>
+          <p:nvPr/>
+        </p:nvSpPr>
+        <p:spPr>
+          <a:xfrm>
+            <a:off x="2606040" y="2944368"/>
             <a:ext cx="4178808" cy="0"/>
           </a:xfrm>
           <a:prstGeom prst="line">
@@ -2736,13 +3060,13 @@
       </p:sp>
       <p:sp>
         <p:nvSpPr>
-          <p:cNvPr id="10" name="Text 7"/>
-          <p:cNvSpPr txBox="1"/>
-          <p:nvPr/>
-        </p:nvSpPr>
-        <p:spPr>
-          <a:xfrm>
-            <a:off x="1417320" y="2212848"/>
+          <p:cNvPr id="14" name="Text 10"/>
+          <p:cNvSpPr txBox="1"/>
+          <p:nvPr/>
+        </p:nvSpPr>
+        <p:spPr>
+          <a:xfrm>
+            <a:off x="1417320" y="3081528"/>
             <a:ext cx="1188720" cy="365760"/>
           </a:xfrm>
           <a:prstGeom prst="rect">
@@ -2775,13 +3099,13 @@
       </p:sp>
       <p:sp>
         <p:nvSpPr>
-          <p:cNvPr id="11" name="Shape 8"/>
-          <p:cNvSpPr/>
-          <p:nvPr/>
-        </p:nvSpPr>
-        <p:spPr>
-          <a:xfrm>
-            <a:off x="2606040" y="2532888"/>
+          <p:cNvPr id="15" name="Shape 11"/>
+          <p:cNvSpPr/>
+          <p:nvPr/>
+        </p:nvSpPr>
+        <p:spPr>
+          <a:xfrm>
+            <a:off x="2606040" y="3401568"/>
             <a:ext cx="2743200" cy="0"/>
           </a:xfrm>
           <a:prstGeom prst="line">
@@ -2798,13 +3122,13 @@
       </p:sp>
       <p:sp>
         <p:nvSpPr>
-          <p:cNvPr id="12" name="Shape 9"/>
-          <p:cNvSpPr/>
-          <p:nvPr/>
-        </p:nvSpPr>
-        <p:spPr>
-          <a:xfrm>
-            <a:off x="548640" y="2944368"/>
+          <p:cNvPr id="16" name="Shape 12"/>
+          <p:cNvSpPr/>
+          <p:nvPr/>
+        </p:nvSpPr>
+        <p:spPr>
+          <a:xfrm>
+            <a:off x="548640" y="3813048"/>
             <a:ext cx="6464808" cy="1709928"/>
           </a:xfrm>
           <a:prstGeom prst="roundRect">
@@ -2825,13 +3149,13 @@
       </p:sp>
       <p:sp>
         <p:nvSpPr>
-          <p:cNvPr id="13" name="Shape 10"/>
-          <p:cNvSpPr/>
-          <p:nvPr/>
-        </p:nvSpPr>
-        <p:spPr>
-          <a:xfrm>
-            <a:off x="749808" y="3145536"/>
+          <p:cNvPr id="17" name="Shape 13"/>
+          <p:cNvSpPr/>
+          <p:nvPr/>
+        </p:nvSpPr>
+        <p:spPr>
+          <a:xfrm>
+            <a:off x="749808" y="4014216"/>
             <a:ext cx="457200" cy="457200"/>
           </a:xfrm>
           <a:prstGeom prst="ellipse">
@@ -2850,13 +3174,13 @@
       </p:sp>
       <p:sp>
         <p:nvSpPr>
-          <p:cNvPr id="14" name="Text 11"/>
-          <p:cNvSpPr txBox="1"/>
-          <p:nvPr/>
-        </p:nvSpPr>
-        <p:spPr>
-          <a:xfrm>
-            <a:off x="749808" y="3145536"/>
+          <p:cNvPr id="18" name="Text 14"/>
+          <p:cNvSpPr txBox="1"/>
+          <p:nvPr/>
+        </p:nvSpPr>
+        <p:spPr>
+          <a:xfrm>
+            <a:off x="749808" y="4014216"/>
             <a:ext cx="457200" cy="457200"/>
           </a:xfrm>
           <a:prstGeom prst="rect">
@@ -2889,13 +3213,13 @@
       </p:sp>
       <p:sp>
         <p:nvSpPr>
-          <p:cNvPr id="15" name="Text 12"/>
-          <p:cNvSpPr txBox="1"/>
-          <p:nvPr/>
-        </p:nvSpPr>
-        <p:spPr>
-          <a:xfrm>
-            <a:off x="1417320" y="3127248"/>
+          <p:cNvPr id="19" name="Text 15"/>
+          <p:cNvSpPr txBox="1"/>
+          <p:nvPr/>
+        </p:nvSpPr>
+        <p:spPr>
+          <a:xfrm>
+            <a:off x="1417320" y="3995928"/>
             <a:ext cx="5367528" cy="338328"/>
           </a:xfrm>
           <a:prstGeom prst="rect">
@@ -2931,13 +3255,13 @@
       </p:sp>
       <p:sp>
         <p:nvSpPr>
-          <p:cNvPr id="16" name="Text 13"/>
-          <p:cNvSpPr txBox="1"/>
-          <p:nvPr/>
-        </p:nvSpPr>
-        <p:spPr>
-          <a:xfrm>
-            <a:off x="1417320" y="3602736"/>
+          <p:cNvPr id="20" name="Text 16"/>
+          <p:cNvSpPr txBox="1"/>
+          <p:nvPr/>
+        </p:nvSpPr>
+        <p:spPr>
+          <a:xfrm>
+            <a:off x="1417320" y="4471416"/>
             <a:ext cx="1188720" cy="365760"/>
           </a:xfrm>
           <a:prstGeom prst="rect">
@@ -2970,13 +3294,13 @@
       </p:sp>
       <p:sp>
         <p:nvSpPr>
-          <p:cNvPr id="17" name="Shape 14"/>
-          <p:cNvSpPr/>
-          <p:nvPr/>
-        </p:nvSpPr>
-        <p:spPr>
-          <a:xfrm>
-            <a:off x="2606040" y="3922776"/>
+          <p:cNvPr id="21" name="Shape 17"/>
+          <p:cNvSpPr/>
+          <p:nvPr/>
+        </p:nvSpPr>
+        <p:spPr>
+          <a:xfrm>
+            <a:off x="2606040" y="4791456"/>
             <a:ext cx="4178808" cy="0"/>
           </a:xfrm>
           <a:prstGeom prst="line">
@@ -2993,13 +3317,13 @@
       </p:sp>
       <p:sp>
         <p:nvSpPr>
-          <p:cNvPr id="18" name="Text 15"/>
-          <p:cNvSpPr txBox="1"/>
-          <p:nvPr/>
-        </p:nvSpPr>
-        <p:spPr>
-          <a:xfrm>
-            <a:off x="1417320" y="4059936"/>
+          <p:cNvPr id="22" name="Text 18"/>
+          <p:cNvSpPr txBox="1"/>
+          <p:nvPr/>
+        </p:nvSpPr>
+        <p:spPr>
+          <a:xfrm>
+            <a:off x="1417320" y="4928616"/>
             <a:ext cx="1188720" cy="365760"/>
           </a:xfrm>
           <a:prstGeom prst="rect">
@@ -3032,13 +3356,13 @@
       </p:sp>
       <p:sp>
         <p:nvSpPr>
-          <p:cNvPr id="19" name="Shape 16"/>
-          <p:cNvSpPr/>
-          <p:nvPr/>
-        </p:nvSpPr>
-        <p:spPr>
-          <a:xfrm>
-            <a:off x="2606040" y="4379976"/>
+          <p:cNvPr id="23" name="Shape 19"/>
+          <p:cNvSpPr/>
+          <p:nvPr/>
+        </p:nvSpPr>
+        <p:spPr>
+          <a:xfrm>
+            <a:off x="2606040" y="5248656"/>
             <a:ext cx="2743200" cy="0"/>
           </a:xfrm>
           <a:prstGeom prst="line">
@@ -3055,13 +3379,13 @@
       </p:sp>
       <p:sp>
         <p:nvSpPr>
-          <p:cNvPr id="20" name="Shape 17"/>
-          <p:cNvSpPr/>
-          <p:nvPr/>
-        </p:nvSpPr>
-        <p:spPr>
-          <a:xfrm>
-            <a:off x="548640" y="4791456"/>
+          <p:cNvPr id="24" name="Shape 20"/>
+          <p:cNvSpPr/>
+          <p:nvPr/>
+        </p:nvSpPr>
+        <p:spPr>
+          <a:xfrm>
+            <a:off x="548640" y="5660136"/>
             <a:ext cx="6464808" cy="1956816"/>
           </a:xfrm>
           <a:prstGeom prst="roundRect">
@@ -3082,13 +3406,13 @@
       </p:sp>
       <p:sp>
         <p:nvSpPr>
-          <p:cNvPr id="21" name="Shape 18"/>
-          <p:cNvSpPr/>
-          <p:nvPr/>
-        </p:nvSpPr>
-        <p:spPr>
-          <a:xfrm>
-            <a:off x="749808" y="4992624"/>
+          <p:cNvPr id="25" name="Shape 21"/>
+          <p:cNvSpPr/>
+          <p:nvPr/>
+        </p:nvSpPr>
+        <p:spPr>
+          <a:xfrm>
+            <a:off x="749808" y="5861304"/>
             <a:ext cx="457200" cy="457200"/>
           </a:xfrm>
           <a:prstGeom prst="ellipse">
@@ -3107,13 +3431,13 @@
       </p:sp>
       <p:sp>
         <p:nvSpPr>
-          <p:cNvPr id="22" name="Text 19"/>
-          <p:cNvSpPr txBox="1"/>
-          <p:nvPr/>
-        </p:nvSpPr>
-        <p:spPr>
-          <a:xfrm>
-            <a:off x="749808" y="4992624"/>
+          <p:cNvPr id="26" name="Text 22"/>
+          <p:cNvSpPr txBox="1"/>
+          <p:nvPr/>
+        </p:nvSpPr>
+        <p:spPr>
+          <a:xfrm>
+            <a:off x="749808" y="5861304"/>
             <a:ext cx="457200" cy="457200"/>
           </a:xfrm>
           <a:prstGeom prst="rect">
@@ -3146,13 +3470,13 @@
       </p:sp>
       <p:sp>
         <p:nvSpPr>
-          <p:cNvPr id="23" name="Text 20"/>
-          <p:cNvSpPr txBox="1"/>
-          <p:nvPr/>
-        </p:nvSpPr>
-        <p:spPr>
-          <a:xfrm>
-            <a:off x="1417320" y="4974336"/>
+          <p:cNvPr id="27" name="Text 23"/>
+          <p:cNvSpPr txBox="1"/>
+          <p:nvPr/>
+        </p:nvSpPr>
+        <p:spPr>
+          <a:xfrm>
+            <a:off x="1417320" y="5843016"/>
             <a:ext cx="5367528" cy="585216"/>
           </a:xfrm>
           <a:prstGeom prst="rect">
@@ -3188,13 +3512,13 @@
       </p:sp>
       <p:sp>
         <p:nvSpPr>
-          <p:cNvPr id="24" name="Text 21"/>
-          <p:cNvSpPr txBox="1"/>
-          <p:nvPr/>
-        </p:nvSpPr>
-        <p:spPr>
-          <a:xfrm>
-            <a:off x="1417320" y="5696712"/>
+          <p:cNvPr id="28" name="Text 24"/>
+          <p:cNvSpPr txBox="1"/>
+          <p:nvPr/>
+        </p:nvSpPr>
+        <p:spPr>
+          <a:xfrm>
+            <a:off x="1417320" y="6565392"/>
             <a:ext cx="1188720" cy="365760"/>
           </a:xfrm>
           <a:prstGeom prst="rect">
@@ -3227,13 +3551,13 @@
       </p:sp>
       <p:sp>
         <p:nvSpPr>
-          <p:cNvPr id="25" name="Shape 22"/>
-          <p:cNvSpPr/>
-          <p:nvPr/>
-        </p:nvSpPr>
-        <p:spPr>
-          <a:xfrm>
-            <a:off x="2606040" y="6016752"/>
+          <p:cNvPr id="29" name="Shape 25"/>
+          <p:cNvSpPr/>
+          <p:nvPr/>
+        </p:nvSpPr>
+        <p:spPr>
+          <a:xfrm>
+            <a:off x="2606040" y="6885432"/>
             <a:ext cx="4178808" cy="0"/>
           </a:xfrm>
           <a:prstGeom prst="line">
@@ -3250,13 +3574,13 @@
       </p:sp>
       <p:sp>
         <p:nvSpPr>
-          <p:cNvPr id="26" name="Text 23"/>
-          <p:cNvSpPr txBox="1"/>
-          <p:nvPr/>
-        </p:nvSpPr>
-        <p:spPr>
-          <a:xfrm>
-            <a:off x="1417320" y="6153912"/>
+          <p:cNvPr id="30" name="Text 26"/>
+          <p:cNvSpPr txBox="1"/>
+          <p:nvPr/>
+        </p:nvSpPr>
+        <p:spPr>
+          <a:xfrm>
+            <a:off x="1417320" y="7022592"/>
             <a:ext cx="1188720" cy="365760"/>
           </a:xfrm>
           <a:prstGeom prst="rect">
@@ -3289,13 +3613,13 @@
       </p:sp>
       <p:sp>
         <p:nvSpPr>
-          <p:cNvPr id="27" name="Shape 24"/>
-          <p:cNvSpPr/>
-          <p:nvPr/>
-        </p:nvSpPr>
-        <p:spPr>
-          <a:xfrm>
-            <a:off x="2606040" y="6473952"/>
+          <p:cNvPr id="31" name="Shape 27"/>
+          <p:cNvSpPr/>
+          <p:nvPr/>
+        </p:nvSpPr>
+        <p:spPr>
+          <a:xfrm>
+            <a:off x="2606040" y="7342632"/>
             <a:ext cx="2743200" cy="0"/>
           </a:xfrm>
           <a:prstGeom prst="line">
@@ -3312,13 +3636,13 @@
       </p:sp>
       <p:sp>
         <p:nvSpPr>
-          <p:cNvPr id="28" name="Shape 25"/>
-          <p:cNvSpPr/>
-          <p:nvPr/>
-        </p:nvSpPr>
-        <p:spPr>
-          <a:xfrm>
-            <a:off x="548640" y="6885432"/>
+          <p:cNvPr id="32" name="Shape 28"/>
+          <p:cNvSpPr/>
+          <p:nvPr/>
+        </p:nvSpPr>
+        <p:spPr>
+          <a:xfrm>
+            <a:off x="548640" y="7754112"/>
             <a:ext cx="6464808" cy="1956816"/>
           </a:xfrm>
           <a:prstGeom prst="roundRect">
@@ -3339,13 +3663,13 @@
       </p:sp>
       <p:sp>
         <p:nvSpPr>
-          <p:cNvPr id="29" name="Shape 26"/>
-          <p:cNvSpPr/>
-          <p:nvPr/>
-        </p:nvSpPr>
-        <p:spPr>
-          <a:xfrm>
-            <a:off x="749808" y="7086600"/>
+          <p:cNvPr id="33" name="Shape 29"/>
+          <p:cNvSpPr/>
+          <p:nvPr/>
+        </p:nvSpPr>
+        <p:spPr>
+          <a:xfrm>
+            <a:off x="749808" y="7955280"/>
             <a:ext cx="457200" cy="457200"/>
           </a:xfrm>
           <a:prstGeom prst="ellipse">
@@ -3364,13 +3688,13 @@
       </p:sp>
       <p:sp>
         <p:nvSpPr>
-          <p:cNvPr id="30" name="Text 27"/>
-          <p:cNvSpPr txBox="1"/>
-          <p:nvPr/>
-        </p:nvSpPr>
-        <p:spPr>
-          <a:xfrm>
-            <a:off x="749808" y="7086600"/>
+          <p:cNvPr id="34" name="Text 30"/>
+          <p:cNvSpPr txBox="1"/>
+          <p:nvPr/>
+        </p:nvSpPr>
+        <p:spPr>
+          <a:xfrm>
+            <a:off x="749808" y="7955280"/>
             <a:ext cx="457200" cy="457200"/>
           </a:xfrm>
           <a:prstGeom prst="rect">
@@ -3403,13 +3727,13 @@
       </p:sp>
       <p:sp>
         <p:nvSpPr>
-          <p:cNvPr id="31" name="Text 28"/>
-          <p:cNvSpPr txBox="1"/>
-          <p:nvPr/>
-        </p:nvSpPr>
-        <p:spPr>
-          <a:xfrm>
-            <a:off x="1417320" y="7068312"/>
+          <p:cNvPr id="35" name="Text 31"/>
+          <p:cNvSpPr txBox="1"/>
+          <p:nvPr/>
+        </p:nvSpPr>
+        <p:spPr>
+          <a:xfrm>
+            <a:off x="1417320" y="7936992"/>
             <a:ext cx="5367528" cy="585216"/>
           </a:xfrm>
           <a:prstGeom prst="rect">
@@ -3445,13 +3769,13 @@
       </p:sp>
       <p:sp>
         <p:nvSpPr>
-          <p:cNvPr id="32" name="Text 29"/>
-          <p:cNvSpPr txBox="1"/>
-          <p:nvPr/>
-        </p:nvSpPr>
-        <p:spPr>
-          <a:xfrm>
-            <a:off x="1417320" y="7790688"/>
+          <p:cNvPr id="36" name="Text 32"/>
+          <p:cNvSpPr txBox="1"/>
+          <p:nvPr/>
+        </p:nvSpPr>
+        <p:spPr>
+          <a:xfrm>
+            <a:off x="1417320" y="8659368"/>
             <a:ext cx="1188720" cy="365760"/>
           </a:xfrm>
           <a:prstGeom prst="rect">
@@ -3484,13 +3808,13 @@
       </p:sp>
       <p:sp>
         <p:nvSpPr>
-          <p:cNvPr id="33" name="Shape 30"/>
-          <p:cNvSpPr/>
-          <p:nvPr/>
-        </p:nvSpPr>
-        <p:spPr>
-          <a:xfrm>
-            <a:off x="2606040" y="8110728"/>
+          <p:cNvPr id="37" name="Shape 33"/>
+          <p:cNvSpPr/>
+          <p:nvPr/>
+        </p:nvSpPr>
+        <p:spPr>
+          <a:xfrm>
+            <a:off x="2606040" y="8979408"/>
             <a:ext cx="4178808" cy="0"/>
           </a:xfrm>
           <a:prstGeom prst="line">
@@ -3507,13 +3831,13 @@
       </p:sp>
       <p:sp>
         <p:nvSpPr>
-          <p:cNvPr id="34" name="Text 31"/>
-          <p:cNvSpPr txBox="1"/>
-          <p:nvPr/>
-        </p:nvSpPr>
-        <p:spPr>
-          <a:xfrm>
-            <a:off x="1417320" y="8247888"/>
+          <p:cNvPr id="38" name="Text 34"/>
+          <p:cNvSpPr txBox="1"/>
+          <p:nvPr/>
+        </p:nvSpPr>
+        <p:spPr>
+          <a:xfrm>
+            <a:off x="1417320" y="9116568"/>
             <a:ext cx="1188720" cy="365760"/>
           </a:xfrm>
           <a:prstGeom prst="rect">
@@ -3546,13 +3870,13 @@
       </p:sp>
       <p:sp>
         <p:nvSpPr>
-          <p:cNvPr id="35" name="Shape 32"/>
-          <p:cNvSpPr/>
-          <p:nvPr/>
-        </p:nvSpPr>
-        <p:spPr>
-          <a:xfrm>
-            <a:off x="2606040" y="8567928"/>
+          <p:cNvPr id="39" name="Shape 35"/>
+          <p:cNvSpPr/>
+          <p:nvPr/>
+        </p:nvSpPr>
+        <p:spPr>
+          <a:xfrm>
+            <a:off x="2606040" y="9436608"/>
             <a:ext cx="2743200" cy="0"/>
           </a:xfrm>
           <a:prstGeom prst="line">
@@ -3600,7 +3924,169 @@
         </p:nvSpPr>
         <p:spPr>
           <a:xfrm>
-            <a:off x="548640" y="502920"/>
+            <a:off x="548640" y="274320"/>
+            <a:ext cx="2926080" cy="731520"/>
+          </a:xfrm>
+          <a:prstGeom prst="rect">
+            <a:avLst/>
+          </a:prstGeom>
+          <a:noFill/>
+          <a:ln/>
+        </p:spPr>
+        <p:txBody>
+          <a:bodyPr wrap="square" lIns="0" tIns="0" rIns="0" bIns="0" rtlCol="0" anchor="ctr"/>
+          <a:lstStyle/>
+          <a:p>
+            <a:pPr indent="0" marL="0">
+              <a:buNone/>
+            </a:pPr>
+            <a:r>
+              <a:rPr lang="en-US" sz="3000" b="1" dirty="0">
+                <a:solidFill>
+                  <a:srgbClr val="475BA6"/>
+                </a:solidFill>
+                <a:latin typeface="Poppins" pitchFamily="34" charset="0"/>
+                <a:ea typeface="Poppins" pitchFamily="34" charset="-122"/>
+                <a:cs typeface="Poppins" pitchFamily="34" charset="-120"/>
+              </a:rPr>
+              <a:t>clever</a:t>
+            </a:r>
+            <a:pPr indent="0" marL="0">
+              <a:buNone/>
+            </a:pPr>
+            <a:r>
+              <a:rPr lang="en-US" sz="3000" b="1" dirty="0">
+                <a:solidFill>
+                  <a:srgbClr val="36448A"/>
+                </a:solidFill>
+                <a:latin typeface="Poppins" pitchFamily="34" charset="0"/>
+                <a:ea typeface="Poppins" pitchFamily="34" charset="-122"/>
+                <a:cs typeface="Poppins" pitchFamily="34" charset="-120"/>
+              </a:rPr>
+              <a:t>box</a:t>
+            </a:r>
+            <a:endParaRPr lang="en-US" sz="3000" dirty="0"/>
+          </a:p>
+        </p:txBody>
+      </p:sp>
+      <p:pic>
+        <p:nvPicPr>
+          <p:cNvPr id="4" name="Image 0" descr="QR-Code zu www.cleverbox.co.at">    </p:cNvPr>
+          <p:cNvPicPr>
+            <a:picLocks noChangeAspect="1"/>
+          </p:cNvPicPr>
+          <p:nvPr/>
+        </p:nvPicPr>
+        <p:blipFill>
+          <a:blip r:embed="rId1"/>
+          <a:stretch>
+            <a:fillRect/>
+          </a:stretch>
+        </p:blipFill>
+        <p:spPr>
+          <a:xfrm>
+            <a:off x="6144768" y="228600"/>
+            <a:ext cx="868680" cy="868680"/>
+          </a:xfrm>
+          <a:prstGeom prst="rect">
+            <a:avLst/>
+          </a:prstGeom>
+        </p:spPr>
+      </p:pic>
+      <p:sp>
+        <p:nvSpPr>
+          <p:cNvPr id="5" name="Text 1"/>
+          <p:cNvSpPr txBox="1"/>
+          <p:nvPr/>
+        </p:nvSpPr>
+        <p:spPr>
+          <a:xfrm>
+            <a:off x="3767328" y="274320"/>
+            <a:ext cx="2286000" cy="777240"/>
+          </a:xfrm>
+          <a:prstGeom prst="rect">
+            <a:avLst/>
+          </a:prstGeom>
+          <a:noFill/>
+          <a:ln/>
+        </p:spPr>
+        <p:txBody>
+          <a:bodyPr wrap="square" lIns="0" tIns="0" rIns="0" bIns="0" rtlCol="0" anchor="ctr"/>
+          <a:lstStyle/>
+          <a:p>
+            <a:pPr algn="r" indent="0" marL="0">
+              <a:lnSpc>
+                <a:spcPct val="120000"/>
+              </a:lnSpc>
+              <a:buNone/>
+            </a:pPr>
+            <a:r>
+              <a:rPr lang="en-US" sz="1000" dirty="0">
+                <a:solidFill>
+                  <a:srgbClr val="4A5F7A"/>
+                </a:solidFill>
+                <a:latin typeface="Poppins" pitchFamily="34" charset="0"/>
+                <a:ea typeface="Poppins" pitchFamily="34" charset="-122"/>
+                <a:cs typeface="Poppins" pitchFamily="34" charset="-120"/>
+              </a:rPr>
+              <a:t>Mehr Material:</a:t>
+            </a:r>
+            <a:endParaRPr lang="en-US" sz="1000" dirty="0"/>
+          </a:p>
+          <a:p>
+            <a:pPr algn="r" indent="0" marL="0">
+              <a:lnSpc>
+                <a:spcPct val="120000"/>
+              </a:lnSpc>
+              <a:buNone/>
+            </a:pPr>
+            <a:r>
+              <a:rPr lang="en-US" sz="1000" dirty="0">
+                <a:solidFill>
+                  <a:srgbClr val="4A5F7A"/>
+                </a:solidFill>
+                <a:latin typeface="Poppins" pitchFamily="34" charset="0"/>
+                <a:ea typeface="Poppins" pitchFamily="34" charset="-122"/>
+                <a:cs typeface="Poppins" pitchFamily="34" charset="-120"/>
+              </a:rPr>
+              <a:t>www.cleverbox.co.at</a:t>
+            </a:r>
+            <a:endParaRPr lang="en-US" sz="1000" dirty="0"/>
+          </a:p>
+        </p:txBody>
+      </p:sp>
+      <p:sp>
+        <p:nvSpPr>
+          <p:cNvPr id="6" name="Shape 2"/>
+          <p:cNvSpPr/>
+          <p:nvPr/>
+        </p:nvSpPr>
+        <p:spPr>
+          <a:xfrm>
+            <a:off x="548640" y="1188720"/>
+            <a:ext cx="6464808" cy="0"/>
+          </a:xfrm>
+          <a:prstGeom prst="line">
+            <a:avLst/>
+          </a:prstGeom>
+          <a:noFill/>
+          <a:ln w="15875">
+            <a:solidFill>
+              <a:srgbClr val="8DBBF2"/>
+            </a:solidFill>
+            <a:prstDash val="solid"/>
+          </a:ln>
+        </p:spPr>
+      </p:sp>
+      <p:sp>
+        <p:nvSpPr>
+          <p:cNvPr id="7" name="Text 3"/>
+          <p:cNvSpPr txBox="1"/>
+          <p:nvPr/>
+        </p:nvSpPr>
+        <p:spPr>
+          <a:xfrm>
+            <a:off x="548640" y="1371600"/>
             <a:ext cx="6400800" cy="365760"/>
           </a:xfrm>
           <a:prstGeom prst="rect">
@@ -3633,13 +4119,13 @@
       </p:sp>
       <p:sp>
         <p:nvSpPr>
-          <p:cNvPr id="4" name="Shape 1"/>
-          <p:cNvSpPr/>
-          <p:nvPr/>
-        </p:nvSpPr>
-        <p:spPr>
-          <a:xfrm>
-            <a:off x="548640" y="1097280"/>
+          <p:cNvPr id="8" name="Shape 4"/>
+          <p:cNvSpPr/>
+          <p:nvPr/>
+        </p:nvSpPr>
+        <p:spPr>
+          <a:xfrm>
+            <a:off x="548640" y="1965960"/>
             <a:ext cx="6464808" cy="1956816"/>
           </a:xfrm>
           <a:prstGeom prst="roundRect">
@@ -3660,13 +4146,13 @@
       </p:sp>
       <p:sp>
         <p:nvSpPr>
-          <p:cNvPr id="5" name="Shape 2"/>
-          <p:cNvSpPr/>
-          <p:nvPr/>
-        </p:nvSpPr>
-        <p:spPr>
-          <a:xfrm>
-            <a:off x="749808" y="1298448"/>
+          <p:cNvPr id="9" name="Shape 5"/>
+          <p:cNvSpPr/>
+          <p:nvPr/>
+        </p:nvSpPr>
+        <p:spPr>
+          <a:xfrm>
+            <a:off x="749808" y="2167128"/>
             <a:ext cx="457200" cy="457200"/>
           </a:xfrm>
           <a:prstGeom prst="ellipse">
@@ -3685,13 +4171,13 @@
       </p:sp>
       <p:sp>
         <p:nvSpPr>
-          <p:cNvPr id="6" name="Text 3"/>
-          <p:cNvSpPr txBox="1"/>
-          <p:nvPr/>
-        </p:nvSpPr>
-        <p:spPr>
-          <a:xfrm>
-            <a:off x="749808" y="1298448"/>
+          <p:cNvPr id="10" name="Text 6"/>
+          <p:cNvSpPr txBox="1"/>
+          <p:nvPr/>
+        </p:nvSpPr>
+        <p:spPr>
+          <a:xfrm>
+            <a:off x="749808" y="2167128"/>
             <a:ext cx="457200" cy="457200"/>
           </a:xfrm>
           <a:prstGeom prst="rect">
@@ -3724,13 +4210,13 @@
       </p:sp>
       <p:sp>
         <p:nvSpPr>
-          <p:cNvPr id="7" name="Text 4"/>
-          <p:cNvSpPr txBox="1"/>
-          <p:nvPr/>
-        </p:nvSpPr>
-        <p:spPr>
-          <a:xfrm>
-            <a:off x="1417320" y="1280160"/>
+          <p:cNvPr id="11" name="Text 7"/>
+          <p:cNvSpPr txBox="1"/>
+          <p:nvPr/>
+        </p:nvSpPr>
+        <p:spPr>
+          <a:xfrm>
+            <a:off x="1417320" y="2148840"/>
             <a:ext cx="5367528" cy="585216"/>
           </a:xfrm>
           <a:prstGeom prst="rect">
@@ -3766,13 +4252,13 @@
       </p:sp>
       <p:sp>
         <p:nvSpPr>
-          <p:cNvPr id="8" name="Text 5"/>
-          <p:cNvSpPr txBox="1"/>
-          <p:nvPr/>
-        </p:nvSpPr>
-        <p:spPr>
-          <a:xfrm>
-            <a:off x="1417320" y="2002536"/>
+          <p:cNvPr id="12" name="Text 8"/>
+          <p:cNvSpPr txBox="1"/>
+          <p:nvPr/>
+        </p:nvSpPr>
+        <p:spPr>
+          <a:xfrm>
+            <a:off x="1417320" y="2871216"/>
             <a:ext cx="1188720" cy="365760"/>
           </a:xfrm>
           <a:prstGeom prst="rect">
@@ -3805,13 +4291,13 @@
       </p:sp>
       <p:sp>
         <p:nvSpPr>
-          <p:cNvPr id="9" name="Shape 6"/>
-          <p:cNvSpPr/>
-          <p:nvPr/>
-        </p:nvSpPr>
-        <p:spPr>
-          <a:xfrm>
-            <a:off x="2606040" y="2322576"/>
+          <p:cNvPr id="13" name="Shape 9"/>
+          <p:cNvSpPr/>
+          <p:nvPr/>
+        </p:nvSpPr>
+        <p:spPr>
+          <a:xfrm>
+            <a:off x="2606040" y="3191256"/>
             <a:ext cx="4178808" cy="0"/>
           </a:xfrm>
           <a:prstGeom prst="line">
@@ -3828,13 +4314,13 @@
       </p:sp>
       <p:sp>
         <p:nvSpPr>
-          <p:cNvPr id="10" name="Text 7"/>
-          <p:cNvSpPr txBox="1"/>
-          <p:nvPr/>
-        </p:nvSpPr>
-        <p:spPr>
-          <a:xfrm>
-            <a:off x="1417320" y="2459736"/>
+          <p:cNvPr id="14" name="Text 10"/>
+          <p:cNvSpPr txBox="1"/>
+          <p:nvPr/>
+        </p:nvSpPr>
+        <p:spPr>
+          <a:xfrm>
+            <a:off x="1417320" y="3328416"/>
             <a:ext cx="1188720" cy="365760"/>
           </a:xfrm>
           <a:prstGeom prst="rect">
@@ -3867,13 +4353,13 @@
       </p:sp>
       <p:sp>
         <p:nvSpPr>
-          <p:cNvPr id="11" name="Shape 8"/>
-          <p:cNvSpPr/>
-          <p:nvPr/>
-        </p:nvSpPr>
-        <p:spPr>
-          <a:xfrm>
-            <a:off x="2606040" y="2779776"/>
+          <p:cNvPr id="15" name="Shape 11"/>
+          <p:cNvSpPr/>
+          <p:nvPr/>
+        </p:nvSpPr>
+        <p:spPr>
+          <a:xfrm>
+            <a:off x="2606040" y="3648456"/>
             <a:ext cx="2743200" cy="0"/>
           </a:xfrm>
           <a:prstGeom prst="line">
@@ -3890,13 +4376,13 @@
       </p:sp>
       <p:sp>
         <p:nvSpPr>
-          <p:cNvPr id="12" name="Shape 9"/>
-          <p:cNvSpPr/>
-          <p:nvPr/>
-        </p:nvSpPr>
-        <p:spPr>
-          <a:xfrm>
-            <a:off x="548640" y="3191256"/>
+          <p:cNvPr id="16" name="Shape 12"/>
+          <p:cNvSpPr/>
+          <p:nvPr/>
+        </p:nvSpPr>
+        <p:spPr>
+          <a:xfrm>
+            <a:off x="548640" y="4059936"/>
             <a:ext cx="6464808" cy="1956816"/>
           </a:xfrm>
           <a:prstGeom prst="roundRect">
@@ -3917,13 +4403,13 @@
       </p:sp>
       <p:sp>
         <p:nvSpPr>
-          <p:cNvPr id="13" name="Shape 10"/>
-          <p:cNvSpPr/>
-          <p:nvPr/>
-        </p:nvSpPr>
-        <p:spPr>
-          <a:xfrm>
-            <a:off x="749808" y="3392424"/>
+          <p:cNvPr id="17" name="Shape 13"/>
+          <p:cNvSpPr/>
+          <p:nvPr/>
+        </p:nvSpPr>
+        <p:spPr>
+          <a:xfrm>
+            <a:off x="749808" y="4261104"/>
             <a:ext cx="457200" cy="457200"/>
           </a:xfrm>
           <a:prstGeom prst="ellipse">
@@ -3942,13 +4428,13 @@
       </p:sp>
       <p:sp>
         <p:nvSpPr>
-          <p:cNvPr id="14" name="Text 11"/>
-          <p:cNvSpPr txBox="1"/>
-          <p:nvPr/>
-        </p:nvSpPr>
-        <p:spPr>
-          <a:xfrm>
-            <a:off x="749808" y="3392424"/>
+          <p:cNvPr id="18" name="Text 14"/>
+          <p:cNvSpPr txBox="1"/>
+          <p:nvPr/>
+        </p:nvSpPr>
+        <p:spPr>
+          <a:xfrm>
+            <a:off x="749808" y="4261104"/>
             <a:ext cx="457200" cy="457200"/>
           </a:xfrm>
           <a:prstGeom prst="rect">
@@ -3981,13 +4467,13 @@
       </p:sp>
       <p:sp>
         <p:nvSpPr>
-          <p:cNvPr id="15" name="Text 12"/>
-          <p:cNvSpPr txBox="1"/>
-          <p:nvPr/>
-        </p:nvSpPr>
-        <p:spPr>
-          <a:xfrm>
-            <a:off x="1417320" y="3374136"/>
+          <p:cNvPr id="19" name="Text 15"/>
+          <p:cNvSpPr txBox="1"/>
+          <p:nvPr/>
+        </p:nvSpPr>
+        <p:spPr>
+          <a:xfrm>
+            <a:off x="1417320" y="4242816"/>
             <a:ext cx="5367528" cy="585216"/>
           </a:xfrm>
           <a:prstGeom prst="rect">
@@ -4023,13 +4509,13 @@
       </p:sp>
       <p:sp>
         <p:nvSpPr>
-          <p:cNvPr id="16" name="Text 13"/>
-          <p:cNvSpPr txBox="1"/>
-          <p:nvPr/>
-        </p:nvSpPr>
-        <p:spPr>
-          <a:xfrm>
-            <a:off x="1417320" y="4096512"/>
+          <p:cNvPr id="20" name="Text 16"/>
+          <p:cNvSpPr txBox="1"/>
+          <p:nvPr/>
+        </p:nvSpPr>
+        <p:spPr>
+          <a:xfrm>
+            <a:off x="1417320" y="4965192"/>
             <a:ext cx="1188720" cy="365760"/>
           </a:xfrm>
           <a:prstGeom prst="rect">
@@ -4062,13 +4548,13 @@
       </p:sp>
       <p:sp>
         <p:nvSpPr>
-          <p:cNvPr id="17" name="Shape 14"/>
-          <p:cNvSpPr/>
-          <p:nvPr/>
-        </p:nvSpPr>
-        <p:spPr>
-          <a:xfrm>
-            <a:off x="2606040" y="4416552"/>
+          <p:cNvPr id="21" name="Shape 17"/>
+          <p:cNvSpPr/>
+          <p:nvPr/>
+        </p:nvSpPr>
+        <p:spPr>
+          <a:xfrm>
+            <a:off x="2606040" y="5285232"/>
             <a:ext cx="4178808" cy="0"/>
           </a:xfrm>
           <a:prstGeom prst="line">
@@ -4085,13 +4571,13 @@
       </p:sp>
       <p:sp>
         <p:nvSpPr>
-          <p:cNvPr id="18" name="Text 15"/>
-          <p:cNvSpPr txBox="1"/>
-          <p:nvPr/>
-        </p:nvSpPr>
-        <p:spPr>
-          <a:xfrm>
-            <a:off x="1417320" y="4553712"/>
+          <p:cNvPr id="22" name="Text 18"/>
+          <p:cNvSpPr txBox="1"/>
+          <p:nvPr/>
+        </p:nvSpPr>
+        <p:spPr>
+          <a:xfrm>
+            <a:off x="1417320" y="5422392"/>
             <a:ext cx="1188720" cy="365760"/>
           </a:xfrm>
           <a:prstGeom prst="rect">
@@ -4124,13 +4610,13 @@
       </p:sp>
       <p:sp>
         <p:nvSpPr>
-          <p:cNvPr id="19" name="Shape 16"/>
-          <p:cNvSpPr/>
-          <p:nvPr/>
-        </p:nvSpPr>
-        <p:spPr>
-          <a:xfrm>
-            <a:off x="2606040" y="4873752"/>
+          <p:cNvPr id="23" name="Shape 19"/>
+          <p:cNvSpPr/>
+          <p:nvPr/>
+        </p:nvSpPr>
+        <p:spPr>
+          <a:xfrm>
+            <a:off x="2606040" y="5742432"/>
             <a:ext cx="2743200" cy="0"/>
           </a:xfrm>
           <a:prstGeom prst="line">
@@ -4147,13 +4633,13 @@
       </p:sp>
       <p:sp>
         <p:nvSpPr>
-          <p:cNvPr id="20" name="Shape 17"/>
-          <p:cNvSpPr/>
-          <p:nvPr/>
-        </p:nvSpPr>
-        <p:spPr>
-          <a:xfrm>
-            <a:off x="548640" y="5285232"/>
+          <p:cNvPr id="24" name="Shape 20"/>
+          <p:cNvSpPr/>
+          <p:nvPr/>
+        </p:nvSpPr>
+        <p:spPr>
+          <a:xfrm>
+            <a:off x="548640" y="6153912"/>
             <a:ext cx="6464808" cy="1956816"/>
           </a:xfrm>
           <a:prstGeom prst="roundRect">
@@ -4174,13 +4660,13 @@
       </p:sp>
       <p:sp>
         <p:nvSpPr>
-          <p:cNvPr id="21" name="Shape 18"/>
-          <p:cNvSpPr/>
-          <p:nvPr/>
-        </p:nvSpPr>
-        <p:spPr>
-          <a:xfrm>
-            <a:off x="749808" y="5486400"/>
+          <p:cNvPr id="25" name="Shape 21"/>
+          <p:cNvSpPr/>
+          <p:nvPr/>
+        </p:nvSpPr>
+        <p:spPr>
+          <a:xfrm>
+            <a:off x="749808" y="6355080"/>
             <a:ext cx="457200" cy="457200"/>
           </a:xfrm>
           <a:prstGeom prst="ellipse">
@@ -4199,13 +4685,13 @@
       </p:sp>
       <p:sp>
         <p:nvSpPr>
-          <p:cNvPr id="22" name="Text 19"/>
-          <p:cNvSpPr txBox="1"/>
-          <p:nvPr/>
-        </p:nvSpPr>
-        <p:spPr>
-          <a:xfrm>
-            <a:off x="749808" y="5486400"/>
+          <p:cNvPr id="26" name="Text 22"/>
+          <p:cNvSpPr txBox="1"/>
+          <p:nvPr/>
+        </p:nvSpPr>
+        <p:spPr>
+          <a:xfrm>
+            <a:off x="749808" y="6355080"/>
             <a:ext cx="457200" cy="457200"/>
           </a:xfrm>
           <a:prstGeom prst="rect">
@@ -4238,13 +4724,13 @@
       </p:sp>
       <p:sp>
         <p:nvSpPr>
-          <p:cNvPr id="23" name="Text 20"/>
-          <p:cNvSpPr txBox="1"/>
-          <p:nvPr/>
-        </p:nvSpPr>
-        <p:spPr>
-          <a:xfrm>
-            <a:off x="1417320" y="5468112"/>
+          <p:cNvPr id="27" name="Text 23"/>
+          <p:cNvSpPr txBox="1"/>
+          <p:nvPr/>
+        </p:nvSpPr>
+        <p:spPr>
+          <a:xfrm>
+            <a:off x="1417320" y="6336792"/>
             <a:ext cx="5367528" cy="585216"/>
           </a:xfrm>
           <a:prstGeom prst="rect">
@@ -4280,13 +4766,13 @@
       </p:sp>
       <p:sp>
         <p:nvSpPr>
-          <p:cNvPr id="24" name="Text 21"/>
-          <p:cNvSpPr txBox="1"/>
-          <p:nvPr/>
-        </p:nvSpPr>
-        <p:spPr>
-          <a:xfrm>
-            <a:off x="1417320" y="6190488"/>
+          <p:cNvPr id="28" name="Text 24"/>
+          <p:cNvSpPr txBox="1"/>
+          <p:nvPr/>
+        </p:nvSpPr>
+        <p:spPr>
+          <a:xfrm>
+            <a:off x="1417320" y="7059168"/>
             <a:ext cx="1188720" cy="365760"/>
           </a:xfrm>
           <a:prstGeom prst="rect">
@@ -4319,13 +4805,13 @@
       </p:sp>
       <p:sp>
         <p:nvSpPr>
-          <p:cNvPr id="25" name="Shape 22"/>
-          <p:cNvSpPr/>
-          <p:nvPr/>
-        </p:nvSpPr>
-        <p:spPr>
-          <a:xfrm>
-            <a:off x="2606040" y="6510528"/>
+          <p:cNvPr id="29" name="Shape 25"/>
+          <p:cNvSpPr/>
+          <p:nvPr/>
+        </p:nvSpPr>
+        <p:spPr>
+          <a:xfrm>
+            <a:off x="2606040" y="7379208"/>
             <a:ext cx="4178808" cy="0"/>
           </a:xfrm>
           <a:prstGeom prst="line">
@@ -4342,13 +4828,13 @@
       </p:sp>
       <p:sp>
         <p:nvSpPr>
-          <p:cNvPr id="26" name="Text 23"/>
-          <p:cNvSpPr txBox="1"/>
-          <p:nvPr/>
-        </p:nvSpPr>
-        <p:spPr>
-          <a:xfrm>
-            <a:off x="1417320" y="6647688"/>
+          <p:cNvPr id="30" name="Text 26"/>
+          <p:cNvSpPr txBox="1"/>
+          <p:nvPr/>
+        </p:nvSpPr>
+        <p:spPr>
+          <a:xfrm>
+            <a:off x="1417320" y="7516368"/>
             <a:ext cx="1188720" cy="365760"/>
           </a:xfrm>
           <a:prstGeom prst="rect">
@@ -4381,270 +4867,13 @@
       </p:sp>
       <p:sp>
         <p:nvSpPr>
-          <p:cNvPr id="27" name="Shape 24"/>
-          <p:cNvSpPr/>
-          <p:nvPr/>
-        </p:nvSpPr>
-        <p:spPr>
-          <a:xfrm>
-            <a:off x="2606040" y="6967728"/>
-            <a:ext cx="2743200" cy="0"/>
-          </a:xfrm>
-          <a:prstGeom prst="line">
-            <a:avLst/>
-          </a:prstGeom>
-          <a:noFill/>
-          <a:ln w="15875">
-            <a:solidFill>
-              <a:srgbClr val="8DBBF2"/>
-            </a:solidFill>
-            <a:prstDash val="sysDot"/>
-          </a:ln>
-        </p:spPr>
-      </p:sp>
-      <p:sp>
-        <p:nvSpPr>
-          <p:cNvPr id="28" name="Shape 25"/>
-          <p:cNvSpPr/>
-          <p:nvPr/>
-        </p:nvSpPr>
-        <p:spPr>
-          <a:xfrm>
-            <a:off x="548640" y="7379208"/>
-            <a:ext cx="6464808" cy="1956816"/>
-          </a:xfrm>
-          <a:prstGeom prst="roundRect">
-            <a:avLst>
-              <a:gd name="adj" fmla="val 7009"/>
-            </a:avLst>
-          </a:prstGeom>
-          <a:solidFill>
-            <a:srgbClr val="FFFFFF"/>
-          </a:solidFill>
-          <a:ln w="15875">
-            <a:solidFill>
-              <a:srgbClr val="8DBBF2"/>
-            </a:solidFill>
-            <a:prstDash val="solid"/>
-          </a:ln>
-        </p:spPr>
-      </p:sp>
-      <p:sp>
-        <p:nvSpPr>
-          <p:cNvPr id="29" name="Shape 26"/>
-          <p:cNvSpPr/>
-          <p:nvPr/>
-        </p:nvSpPr>
-        <p:spPr>
-          <a:xfrm>
-            <a:off x="749808" y="7580376"/>
-            <a:ext cx="457200" cy="457200"/>
-          </a:xfrm>
-          <a:prstGeom prst="ellipse">
-            <a:avLst/>
-          </a:prstGeom>
-          <a:solidFill>
-            <a:srgbClr val="BCD6F5"/>
-          </a:solidFill>
-          <a:ln w="12700">
-            <a:solidFill>
-              <a:srgbClr val="BCD6F5"/>
-            </a:solidFill>
-            <a:prstDash val="solid"/>
-          </a:ln>
-        </p:spPr>
-      </p:sp>
-      <p:sp>
-        <p:nvSpPr>
-          <p:cNvPr id="30" name="Text 27"/>
-          <p:cNvSpPr txBox="1"/>
-          <p:nvPr/>
-        </p:nvSpPr>
-        <p:spPr>
-          <a:xfrm>
-            <a:off x="749808" y="7580376"/>
-            <a:ext cx="457200" cy="457200"/>
-          </a:xfrm>
-          <a:prstGeom prst="rect">
-            <a:avLst/>
-          </a:prstGeom>
-          <a:noFill/>
-          <a:ln/>
-        </p:spPr>
-        <p:txBody>
-          <a:bodyPr wrap="square" lIns="0" tIns="0" rIns="0" bIns="0" rtlCol="0" anchor="ctr"/>
-          <a:lstStyle/>
-          <a:p>
-            <a:pPr algn="ctr" indent="0" marL="0">
-              <a:buNone/>
-            </a:pPr>
-            <a:r>
-              <a:rPr lang="en-US" sz="1600" b="1" dirty="0">
-                <a:solidFill>
-                  <a:srgbClr val="0B1E3A"/>
-                </a:solidFill>
-                <a:latin typeface="Poppins" pitchFamily="34" charset="0"/>
-                <a:ea typeface="Poppins" pitchFamily="34" charset="-122"/>
-                <a:cs typeface="Poppins" pitchFamily="34" charset="-120"/>
-              </a:rPr>
-              <a:t>11</a:t>
-            </a:r>
-            <a:endParaRPr lang="en-US" sz="1600" dirty="0"/>
-          </a:p>
-        </p:txBody>
-      </p:sp>
-      <p:sp>
-        <p:nvSpPr>
-          <p:cNvPr id="31" name="Text 28"/>
-          <p:cNvSpPr txBox="1"/>
-          <p:nvPr/>
-        </p:nvSpPr>
-        <p:spPr>
-          <a:xfrm>
-            <a:off x="1417320" y="7562088"/>
-            <a:ext cx="5367528" cy="585216"/>
-          </a:xfrm>
-          <a:prstGeom prst="rect">
-            <a:avLst/>
-          </a:prstGeom>
-          <a:noFill/>
-          <a:ln/>
-        </p:spPr>
-        <p:txBody>
-          <a:bodyPr wrap="square" lIns="0" tIns="0" rIns="0" bIns="0" rtlCol="0" anchor="t"/>
-          <a:lstStyle/>
-          <a:p>
-            <a:pPr indent="0" marL="0">
-              <a:lnSpc>
-                <a:spcPct val="120000"/>
-              </a:lnSpc>
-              <a:buNone/>
-            </a:pPr>
-            <a:r>
-              <a:rPr lang="en-US" sz="1250" dirty="0">
-                <a:solidFill>
-                  <a:srgbClr val="0B1E3A"/>
-                </a:solidFill>
-                <a:latin typeface="Poppins" pitchFamily="34" charset="0"/>
-                <a:ea typeface="Poppins" pitchFamily="34" charset="-122"/>
-                <a:cs typeface="Poppins" pitchFamily="34" charset="-120"/>
-              </a:rPr>
-              <a:t>Verena ist um 8 Jahre älter als ihr Bruder Roman. Beide zusammen sind 32 Jahre alt. Wie alt ist Roman?</a:t>
-            </a:r>
-            <a:endParaRPr lang="en-US" sz="1250" dirty="0"/>
-          </a:p>
-        </p:txBody>
-      </p:sp>
-      <p:sp>
-        <p:nvSpPr>
-          <p:cNvPr id="32" name="Text 29"/>
-          <p:cNvSpPr txBox="1"/>
-          <p:nvPr/>
-        </p:nvSpPr>
-        <p:spPr>
-          <a:xfrm>
-            <a:off x="1417320" y="8284464"/>
-            <a:ext cx="1188720" cy="365760"/>
-          </a:xfrm>
-          <a:prstGeom prst="rect">
-            <a:avLst/>
-          </a:prstGeom>
-          <a:noFill/>
-          <a:ln/>
-        </p:spPr>
-        <p:txBody>
-          <a:bodyPr wrap="square" lIns="0" tIns="0" rIns="0" bIns="0" rtlCol="0" anchor="ctr"/>
-          <a:lstStyle/>
-          <a:p>
-            <a:pPr indent="0" marL="0">
-              <a:buNone/>
-            </a:pPr>
-            <a:r>
-              <a:rPr lang="en-US" sz="1000" dirty="0">
-                <a:solidFill>
-                  <a:srgbClr val="4A5F7A"/>
-                </a:solidFill>
-                <a:latin typeface="Poppins" pitchFamily="34" charset="0"/>
-                <a:ea typeface="Poppins" pitchFamily="34" charset="-122"/>
-                <a:cs typeface="Poppins" pitchFamily="34" charset="-120"/>
-              </a:rPr>
-              <a:t>Gleichung:</a:t>
-            </a:r>
-            <a:endParaRPr lang="en-US" sz="1000" dirty="0"/>
-          </a:p>
-        </p:txBody>
-      </p:sp>
-      <p:sp>
-        <p:nvSpPr>
-          <p:cNvPr id="33" name="Shape 30"/>
-          <p:cNvSpPr/>
-          <p:nvPr/>
-        </p:nvSpPr>
-        <p:spPr>
-          <a:xfrm>
-            <a:off x="2606040" y="8604504"/>
-            <a:ext cx="4178808" cy="0"/>
-          </a:xfrm>
-          <a:prstGeom prst="line">
-            <a:avLst/>
-          </a:prstGeom>
-          <a:noFill/>
-          <a:ln w="15875">
-            <a:solidFill>
-              <a:srgbClr val="8DBBF2"/>
-            </a:solidFill>
-            <a:prstDash val="sysDot"/>
-          </a:ln>
-        </p:spPr>
-      </p:sp>
-      <p:sp>
-        <p:nvSpPr>
-          <p:cNvPr id="34" name="Text 31"/>
-          <p:cNvSpPr txBox="1"/>
-          <p:nvPr/>
-        </p:nvSpPr>
-        <p:spPr>
-          <a:xfrm>
-            <a:off x="1417320" y="8741664"/>
-            <a:ext cx="1188720" cy="365760"/>
-          </a:xfrm>
-          <a:prstGeom prst="rect">
-            <a:avLst/>
-          </a:prstGeom>
-          <a:noFill/>
-          <a:ln/>
-        </p:spPr>
-        <p:txBody>
-          <a:bodyPr wrap="square" lIns="0" tIns="0" rIns="0" bIns="0" rtlCol="0" anchor="ctr"/>
-          <a:lstStyle/>
-          <a:p>
-            <a:pPr indent="0" marL="0">
-              <a:buNone/>
-            </a:pPr>
-            <a:r>
-              <a:rPr lang="en-US" sz="1000" dirty="0">
-                <a:solidFill>
-                  <a:srgbClr val="4A5F7A"/>
-                </a:solidFill>
-                <a:latin typeface="Poppins" pitchFamily="34" charset="0"/>
-                <a:ea typeface="Poppins" pitchFamily="34" charset="-122"/>
-                <a:cs typeface="Poppins" pitchFamily="34" charset="-120"/>
-              </a:rPr>
-              <a:t>Lösung:</a:t>
-            </a:r>
-            <a:endParaRPr lang="en-US" sz="1000" dirty="0"/>
-          </a:p>
-        </p:txBody>
-      </p:sp>
-      <p:sp>
-        <p:nvSpPr>
-          <p:cNvPr id="35" name="Shape 32"/>
-          <p:cNvSpPr/>
-          <p:nvPr/>
-        </p:nvSpPr>
-        <p:spPr>
-          <a:xfrm>
-            <a:off x="2606040" y="9061704"/>
+          <p:cNvPr id="31" name="Shape 27"/>
+          <p:cNvSpPr/>
+          <p:nvPr/>
+        </p:nvSpPr>
+        <p:spPr>
+          <a:xfrm>
+            <a:off x="2606040" y="7836408"/>
             <a:ext cx="2743200" cy="0"/>
           </a:xfrm>
           <a:prstGeom prst="line">
@@ -4692,7 +4921,169 @@
         </p:nvSpPr>
         <p:spPr>
           <a:xfrm>
-            <a:off x="548640" y="502920"/>
+            <a:off x="548640" y="274320"/>
+            <a:ext cx="2926080" cy="731520"/>
+          </a:xfrm>
+          <a:prstGeom prst="rect">
+            <a:avLst/>
+          </a:prstGeom>
+          <a:noFill/>
+          <a:ln/>
+        </p:spPr>
+        <p:txBody>
+          <a:bodyPr wrap="square" lIns="0" tIns="0" rIns="0" bIns="0" rtlCol="0" anchor="ctr"/>
+          <a:lstStyle/>
+          <a:p>
+            <a:pPr indent="0" marL="0">
+              <a:buNone/>
+            </a:pPr>
+            <a:r>
+              <a:rPr lang="en-US" sz="3000" b="1" dirty="0">
+                <a:solidFill>
+                  <a:srgbClr val="475BA6"/>
+                </a:solidFill>
+                <a:latin typeface="Poppins" pitchFamily="34" charset="0"/>
+                <a:ea typeface="Poppins" pitchFamily="34" charset="-122"/>
+                <a:cs typeface="Poppins" pitchFamily="34" charset="-120"/>
+              </a:rPr>
+              <a:t>clever</a:t>
+            </a:r>
+            <a:pPr indent="0" marL="0">
+              <a:buNone/>
+            </a:pPr>
+            <a:r>
+              <a:rPr lang="en-US" sz="3000" b="1" dirty="0">
+                <a:solidFill>
+                  <a:srgbClr val="36448A"/>
+                </a:solidFill>
+                <a:latin typeface="Poppins" pitchFamily="34" charset="0"/>
+                <a:ea typeface="Poppins" pitchFamily="34" charset="-122"/>
+                <a:cs typeface="Poppins" pitchFamily="34" charset="-120"/>
+              </a:rPr>
+              <a:t>box</a:t>
+            </a:r>
+            <a:endParaRPr lang="en-US" sz="3000" dirty="0"/>
+          </a:p>
+        </p:txBody>
+      </p:sp>
+      <p:pic>
+        <p:nvPicPr>
+          <p:cNvPr id="4" name="Image 0" descr="QR-Code zu www.cleverbox.co.at">    </p:cNvPr>
+          <p:cNvPicPr>
+            <a:picLocks noChangeAspect="1"/>
+          </p:cNvPicPr>
+          <p:nvPr/>
+        </p:nvPicPr>
+        <p:blipFill>
+          <a:blip r:embed="rId1"/>
+          <a:stretch>
+            <a:fillRect/>
+          </a:stretch>
+        </p:blipFill>
+        <p:spPr>
+          <a:xfrm>
+            <a:off x="6144768" y="228600"/>
+            <a:ext cx="868680" cy="868680"/>
+          </a:xfrm>
+          <a:prstGeom prst="rect">
+            <a:avLst/>
+          </a:prstGeom>
+        </p:spPr>
+      </p:pic>
+      <p:sp>
+        <p:nvSpPr>
+          <p:cNvPr id="5" name="Text 1"/>
+          <p:cNvSpPr txBox="1"/>
+          <p:nvPr/>
+        </p:nvSpPr>
+        <p:spPr>
+          <a:xfrm>
+            <a:off x="3767328" y="274320"/>
+            <a:ext cx="2286000" cy="777240"/>
+          </a:xfrm>
+          <a:prstGeom prst="rect">
+            <a:avLst/>
+          </a:prstGeom>
+          <a:noFill/>
+          <a:ln/>
+        </p:spPr>
+        <p:txBody>
+          <a:bodyPr wrap="square" lIns="0" tIns="0" rIns="0" bIns="0" rtlCol="0" anchor="ctr"/>
+          <a:lstStyle/>
+          <a:p>
+            <a:pPr algn="r" indent="0" marL="0">
+              <a:lnSpc>
+                <a:spcPct val="120000"/>
+              </a:lnSpc>
+              <a:buNone/>
+            </a:pPr>
+            <a:r>
+              <a:rPr lang="en-US" sz="1000" dirty="0">
+                <a:solidFill>
+                  <a:srgbClr val="4A5F7A"/>
+                </a:solidFill>
+                <a:latin typeface="Poppins" pitchFamily="34" charset="0"/>
+                <a:ea typeface="Poppins" pitchFamily="34" charset="-122"/>
+                <a:cs typeface="Poppins" pitchFamily="34" charset="-120"/>
+              </a:rPr>
+              <a:t>Mehr Material:</a:t>
+            </a:r>
+            <a:endParaRPr lang="en-US" sz="1000" dirty="0"/>
+          </a:p>
+          <a:p>
+            <a:pPr algn="r" indent="0" marL="0">
+              <a:lnSpc>
+                <a:spcPct val="120000"/>
+              </a:lnSpc>
+              <a:buNone/>
+            </a:pPr>
+            <a:r>
+              <a:rPr lang="en-US" sz="1000" dirty="0">
+                <a:solidFill>
+                  <a:srgbClr val="4A5F7A"/>
+                </a:solidFill>
+                <a:latin typeface="Poppins" pitchFamily="34" charset="0"/>
+                <a:ea typeface="Poppins" pitchFamily="34" charset="-122"/>
+                <a:cs typeface="Poppins" pitchFamily="34" charset="-120"/>
+              </a:rPr>
+              <a:t>www.cleverbox.co.at</a:t>
+            </a:r>
+            <a:endParaRPr lang="en-US" sz="1000" dirty="0"/>
+          </a:p>
+        </p:txBody>
+      </p:sp>
+      <p:sp>
+        <p:nvSpPr>
+          <p:cNvPr id="6" name="Shape 2"/>
+          <p:cNvSpPr/>
+          <p:nvPr/>
+        </p:nvSpPr>
+        <p:spPr>
+          <a:xfrm>
+            <a:off x="548640" y="1188720"/>
+            <a:ext cx="6464808" cy="0"/>
+          </a:xfrm>
+          <a:prstGeom prst="line">
+            <a:avLst/>
+          </a:prstGeom>
+          <a:noFill/>
+          <a:ln w="15875">
+            <a:solidFill>
+              <a:srgbClr val="8DBBF2"/>
+            </a:solidFill>
+            <a:prstDash val="solid"/>
+          </a:ln>
+        </p:spPr>
+      </p:sp>
+      <p:sp>
+        <p:nvSpPr>
+          <p:cNvPr id="7" name="Text 3"/>
+          <p:cNvSpPr txBox="1"/>
+          <p:nvPr/>
+        </p:nvSpPr>
+        <p:spPr>
+          <a:xfrm>
+            <a:off x="548640" y="1371600"/>
             <a:ext cx="6400800" cy="365760"/>
           </a:xfrm>
           <a:prstGeom prst="rect">
@@ -4725,18 +5116,18 @@
       </p:sp>
       <p:sp>
         <p:nvSpPr>
-          <p:cNvPr id="4" name="Shape 1"/>
-          <p:cNvSpPr/>
-          <p:nvPr/>
-        </p:nvSpPr>
-        <p:spPr>
-          <a:xfrm>
-            <a:off x="548640" y="1097280"/>
-            <a:ext cx="6464808" cy="2203704"/>
+          <p:cNvPr id="8" name="Shape 4"/>
+          <p:cNvSpPr/>
+          <p:nvPr/>
+        </p:nvSpPr>
+        <p:spPr>
+          <a:xfrm>
+            <a:off x="548640" y="1965960"/>
+            <a:ext cx="6464808" cy="1956816"/>
           </a:xfrm>
           <a:prstGeom prst="roundRect">
             <a:avLst>
-              <a:gd name="adj" fmla="val 6224"/>
+              <a:gd name="adj" fmla="val 7009"/>
             </a:avLst>
           </a:prstGeom>
           <a:solidFill>
@@ -4752,13 +5143,13 @@
       </p:sp>
       <p:sp>
         <p:nvSpPr>
-          <p:cNvPr id="5" name="Shape 2"/>
-          <p:cNvSpPr/>
-          <p:nvPr/>
-        </p:nvSpPr>
-        <p:spPr>
-          <a:xfrm>
-            <a:off x="749808" y="1298448"/>
+          <p:cNvPr id="9" name="Shape 5"/>
+          <p:cNvSpPr/>
+          <p:nvPr/>
+        </p:nvSpPr>
+        <p:spPr>
+          <a:xfrm>
+            <a:off x="749808" y="2167128"/>
             <a:ext cx="457200" cy="457200"/>
           </a:xfrm>
           <a:prstGeom prst="ellipse">
@@ -4777,13 +5168,13 @@
       </p:sp>
       <p:sp>
         <p:nvSpPr>
-          <p:cNvPr id="6" name="Text 3"/>
-          <p:cNvSpPr txBox="1"/>
-          <p:nvPr/>
-        </p:nvSpPr>
-        <p:spPr>
-          <a:xfrm>
-            <a:off x="749808" y="1298448"/>
+          <p:cNvPr id="10" name="Text 6"/>
+          <p:cNvSpPr txBox="1"/>
+          <p:nvPr/>
+        </p:nvSpPr>
+        <p:spPr>
+          <a:xfrm>
+            <a:off x="749808" y="2167128"/>
             <a:ext cx="457200" cy="457200"/>
           </a:xfrm>
           <a:prstGeom prst="rect">
@@ -4808,7 +5199,7 @@
                 <a:ea typeface="Poppins" pitchFamily="34" charset="-122"/>
                 <a:cs typeface="Poppins" pitchFamily="34" charset="-120"/>
               </a:rPr>
-              <a:t>12</a:t>
+              <a:t>11</a:t>
             </a:r>
             <a:endParaRPr lang="en-US" sz="1600" dirty="0"/>
           </a:p>
@@ -4816,14 +5207,14 @@
       </p:sp>
       <p:sp>
         <p:nvSpPr>
-          <p:cNvPr id="7" name="Text 4"/>
-          <p:cNvSpPr txBox="1"/>
-          <p:nvPr/>
-        </p:nvSpPr>
-        <p:spPr>
-          <a:xfrm>
-            <a:off x="1417320" y="1280160"/>
-            <a:ext cx="5367528" cy="832104"/>
+          <p:cNvPr id="11" name="Text 7"/>
+          <p:cNvSpPr txBox="1"/>
+          <p:nvPr/>
+        </p:nvSpPr>
+        <p:spPr>
+          <a:xfrm>
+            <a:off x="1417320" y="2148840"/>
+            <a:ext cx="5367528" cy="585216"/>
           </a:xfrm>
           <a:prstGeom prst="rect">
             <a:avLst/>
@@ -4850,7 +5241,7 @@
                 <a:ea typeface="Poppins" pitchFamily="34" charset="-122"/>
                 <a:cs typeface="Poppins" pitchFamily="34" charset="-120"/>
               </a:rPr>
-              <a:t>Petra, Konrad und Leon sind zusammen 42 Jahre alt. Leon ist um 5 Jahre älter als Petra und Konrad ist um 7 Jahre älter als Petra. Wie alt ist Leon?</a:t>
+              <a:t>Verena ist um 8 Jahre älter als ihr Bruder Roman. Beide zusammen sind 32 Jahre alt. Wie alt ist Roman?</a:t>
             </a:r>
             <a:endParaRPr lang="en-US" sz="1250" dirty="0"/>
           </a:p>
@@ -4858,13 +5249,13 @@
       </p:sp>
       <p:sp>
         <p:nvSpPr>
-          <p:cNvPr id="8" name="Text 5"/>
-          <p:cNvSpPr txBox="1"/>
-          <p:nvPr/>
-        </p:nvSpPr>
-        <p:spPr>
-          <a:xfrm>
-            <a:off x="1417320" y="2249424"/>
+          <p:cNvPr id="12" name="Text 8"/>
+          <p:cNvSpPr txBox="1"/>
+          <p:nvPr/>
+        </p:nvSpPr>
+        <p:spPr>
+          <a:xfrm>
+            <a:off x="1417320" y="2871216"/>
             <a:ext cx="1188720" cy="365760"/>
           </a:xfrm>
           <a:prstGeom prst="rect">
@@ -4897,13 +5288,13 @@
       </p:sp>
       <p:sp>
         <p:nvSpPr>
-          <p:cNvPr id="9" name="Shape 6"/>
-          <p:cNvSpPr/>
-          <p:nvPr/>
-        </p:nvSpPr>
-        <p:spPr>
-          <a:xfrm>
-            <a:off x="2606040" y="2569464"/>
+          <p:cNvPr id="13" name="Shape 9"/>
+          <p:cNvSpPr/>
+          <p:nvPr/>
+        </p:nvSpPr>
+        <p:spPr>
+          <a:xfrm>
+            <a:off x="2606040" y="3191256"/>
             <a:ext cx="4178808" cy="0"/>
           </a:xfrm>
           <a:prstGeom prst="line">
@@ -4920,13 +5311,13 @@
       </p:sp>
       <p:sp>
         <p:nvSpPr>
-          <p:cNvPr id="10" name="Text 7"/>
-          <p:cNvSpPr txBox="1"/>
-          <p:nvPr/>
-        </p:nvSpPr>
-        <p:spPr>
-          <a:xfrm>
-            <a:off x="1417320" y="2706624"/>
+          <p:cNvPr id="14" name="Text 10"/>
+          <p:cNvSpPr txBox="1"/>
+          <p:nvPr/>
+        </p:nvSpPr>
+        <p:spPr>
+          <a:xfrm>
+            <a:off x="1417320" y="3328416"/>
             <a:ext cx="1188720" cy="365760"/>
           </a:xfrm>
           <a:prstGeom prst="rect">
@@ -4959,13 +5350,13 @@
       </p:sp>
       <p:sp>
         <p:nvSpPr>
-          <p:cNvPr id="11" name="Shape 8"/>
-          <p:cNvSpPr/>
-          <p:nvPr/>
-        </p:nvSpPr>
-        <p:spPr>
-          <a:xfrm>
-            <a:off x="2606040" y="3026664"/>
+          <p:cNvPr id="15" name="Shape 11"/>
+          <p:cNvSpPr/>
+          <p:nvPr/>
+        </p:nvSpPr>
+        <p:spPr>
+          <a:xfrm>
+            <a:off x="2606040" y="3648456"/>
             <a:ext cx="2743200" cy="0"/>
           </a:xfrm>
           <a:prstGeom prst="line">
@@ -4982,13 +5373,13 @@
       </p:sp>
       <p:sp>
         <p:nvSpPr>
-          <p:cNvPr id="12" name="Shape 9"/>
-          <p:cNvSpPr/>
-          <p:nvPr/>
-        </p:nvSpPr>
-        <p:spPr>
-          <a:xfrm>
-            <a:off x="548640" y="3438144"/>
+          <p:cNvPr id="16" name="Shape 12"/>
+          <p:cNvSpPr/>
+          <p:nvPr/>
+        </p:nvSpPr>
+        <p:spPr>
+          <a:xfrm>
+            <a:off x="548640" y="4059936"/>
             <a:ext cx="6464808" cy="2203704"/>
           </a:xfrm>
           <a:prstGeom prst="roundRect">
@@ -5009,13 +5400,13 @@
       </p:sp>
       <p:sp>
         <p:nvSpPr>
-          <p:cNvPr id="13" name="Shape 10"/>
-          <p:cNvSpPr/>
-          <p:nvPr/>
-        </p:nvSpPr>
-        <p:spPr>
-          <a:xfrm>
-            <a:off x="749808" y="3639312"/>
+          <p:cNvPr id="17" name="Shape 13"/>
+          <p:cNvSpPr/>
+          <p:nvPr/>
+        </p:nvSpPr>
+        <p:spPr>
+          <a:xfrm>
+            <a:off x="749808" y="4261104"/>
             <a:ext cx="457200" cy="457200"/>
           </a:xfrm>
           <a:prstGeom prst="ellipse">
@@ -5034,13 +5425,13 @@
       </p:sp>
       <p:sp>
         <p:nvSpPr>
-          <p:cNvPr id="14" name="Text 11"/>
-          <p:cNvSpPr txBox="1"/>
-          <p:nvPr/>
-        </p:nvSpPr>
-        <p:spPr>
-          <a:xfrm>
-            <a:off x="749808" y="3639312"/>
+          <p:cNvPr id="18" name="Text 14"/>
+          <p:cNvSpPr txBox="1"/>
+          <p:nvPr/>
+        </p:nvSpPr>
+        <p:spPr>
+          <a:xfrm>
+            <a:off x="749808" y="4261104"/>
             <a:ext cx="457200" cy="457200"/>
           </a:xfrm>
           <a:prstGeom prst="rect">
@@ -5065,7 +5456,7 @@
                 <a:ea typeface="Poppins" pitchFamily="34" charset="-122"/>
                 <a:cs typeface="Poppins" pitchFamily="34" charset="-120"/>
               </a:rPr>
-              <a:t>13</a:t>
+              <a:t>12</a:t>
             </a:r>
             <a:endParaRPr lang="en-US" sz="1600" dirty="0"/>
           </a:p>
@@ -5073,13 +5464,13 @@
       </p:sp>
       <p:sp>
         <p:nvSpPr>
-          <p:cNvPr id="15" name="Text 12"/>
-          <p:cNvSpPr txBox="1"/>
-          <p:nvPr/>
-        </p:nvSpPr>
-        <p:spPr>
-          <a:xfrm>
-            <a:off x="1417320" y="3621024"/>
+          <p:cNvPr id="19" name="Text 15"/>
+          <p:cNvSpPr txBox="1"/>
+          <p:nvPr/>
+        </p:nvSpPr>
+        <p:spPr>
+          <a:xfrm>
+            <a:off x="1417320" y="4242816"/>
             <a:ext cx="5367528" cy="832104"/>
           </a:xfrm>
           <a:prstGeom prst="rect">
@@ -5107,7 +5498,7 @@
                 <a:ea typeface="Poppins" pitchFamily="34" charset="-122"/>
                 <a:cs typeface="Poppins" pitchFamily="34" charset="-120"/>
               </a:rPr>
-              <a:t>Anja, Armin und Alina sind zusammen 32 Jahre alt. Anja ist um 10 Jahre älter als Alina und Armin ist um 6 Jahre jünger als Anja. Wie alt ist Armin?</a:t>
+              <a:t>Petra, Konrad und Leon sind zusammen 42 Jahre alt. Leon ist um 5 Jahre älter als Petra und Konrad ist um 7 Jahre älter als Petra. Wie alt ist Leon?</a:t>
             </a:r>
             <a:endParaRPr lang="en-US" sz="1250" dirty="0"/>
           </a:p>
@@ -5115,13 +5506,13 @@
       </p:sp>
       <p:sp>
         <p:nvSpPr>
-          <p:cNvPr id="16" name="Text 13"/>
-          <p:cNvSpPr txBox="1"/>
-          <p:nvPr/>
-        </p:nvSpPr>
-        <p:spPr>
-          <a:xfrm>
-            <a:off x="1417320" y="4590288"/>
+          <p:cNvPr id="20" name="Text 16"/>
+          <p:cNvSpPr txBox="1"/>
+          <p:nvPr/>
+        </p:nvSpPr>
+        <p:spPr>
+          <a:xfrm>
+            <a:off x="1417320" y="5212080"/>
             <a:ext cx="1188720" cy="365760"/>
           </a:xfrm>
           <a:prstGeom prst="rect">
@@ -5154,13 +5545,13 @@
       </p:sp>
       <p:sp>
         <p:nvSpPr>
-          <p:cNvPr id="17" name="Shape 14"/>
-          <p:cNvSpPr/>
-          <p:nvPr/>
-        </p:nvSpPr>
-        <p:spPr>
-          <a:xfrm>
-            <a:off x="2606040" y="4910328"/>
+          <p:cNvPr id="21" name="Shape 17"/>
+          <p:cNvSpPr/>
+          <p:nvPr/>
+        </p:nvSpPr>
+        <p:spPr>
+          <a:xfrm>
+            <a:off x="2606040" y="5532120"/>
             <a:ext cx="4178808" cy="0"/>
           </a:xfrm>
           <a:prstGeom prst="line">
@@ -5177,13 +5568,13 @@
       </p:sp>
       <p:sp>
         <p:nvSpPr>
-          <p:cNvPr id="18" name="Text 15"/>
-          <p:cNvSpPr txBox="1"/>
-          <p:nvPr/>
-        </p:nvSpPr>
-        <p:spPr>
-          <a:xfrm>
-            <a:off x="1417320" y="5047488"/>
+          <p:cNvPr id="22" name="Text 18"/>
+          <p:cNvSpPr txBox="1"/>
+          <p:nvPr/>
+        </p:nvSpPr>
+        <p:spPr>
+          <a:xfrm>
+            <a:off x="1417320" y="5669280"/>
             <a:ext cx="1188720" cy="365760"/>
           </a:xfrm>
           <a:prstGeom prst="rect">
@@ -5216,13 +5607,13 @@
       </p:sp>
       <p:sp>
         <p:nvSpPr>
-          <p:cNvPr id="19" name="Shape 16"/>
-          <p:cNvSpPr/>
-          <p:nvPr/>
-        </p:nvSpPr>
-        <p:spPr>
-          <a:xfrm>
-            <a:off x="2606040" y="5367528"/>
+          <p:cNvPr id="23" name="Shape 19"/>
+          <p:cNvSpPr/>
+          <p:nvPr/>
+        </p:nvSpPr>
+        <p:spPr>
+          <a:xfrm>
+            <a:off x="2606040" y="5989320"/>
             <a:ext cx="2743200" cy="0"/>
           </a:xfrm>
           <a:prstGeom prst="line">
@@ -5239,18 +5630,18 @@
       </p:sp>
       <p:sp>
         <p:nvSpPr>
-          <p:cNvPr id="20" name="Shape 17"/>
-          <p:cNvSpPr/>
-          <p:nvPr/>
-        </p:nvSpPr>
-        <p:spPr>
-          <a:xfrm>
-            <a:off x="548640" y="5779008"/>
-            <a:ext cx="6464808" cy="3136392"/>
+          <p:cNvPr id="24" name="Shape 20"/>
+          <p:cNvSpPr/>
+          <p:nvPr/>
+        </p:nvSpPr>
+        <p:spPr>
+          <a:xfrm>
+            <a:off x="548640" y="6400800"/>
+            <a:ext cx="6464808" cy="2203704"/>
           </a:xfrm>
           <a:prstGeom prst="roundRect">
             <a:avLst>
-              <a:gd name="adj" fmla="val 4373"/>
+              <a:gd name="adj" fmla="val 6224"/>
             </a:avLst>
           </a:prstGeom>
           <a:solidFill>
@@ -5266,13 +5657,13 @@
       </p:sp>
       <p:sp>
         <p:nvSpPr>
-          <p:cNvPr id="21" name="Shape 18"/>
-          <p:cNvSpPr/>
-          <p:nvPr/>
-        </p:nvSpPr>
-        <p:spPr>
-          <a:xfrm>
-            <a:off x="749808" y="5980176"/>
+          <p:cNvPr id="25" name="Shape 21"/>
+          <p:cNvSpPr/>
+          <p:nvPr/>
+        </p:nvSpPr>
+        <p:spPr>
+          <a:xfrm>
+            <a:off x="749808" y="6601968"/>
             <a:ext cx="457200" cy="457200"/>
           </a:xfrm>
           <a:prstGeom prst="ellipse">
@@ -5291,13 +5682,13 @@
       </p:sp>
       <p:sp>
         <p:nvSpPr>
-          <p:cNvPr id="22" name="Text 19"/>
-          <p:cNvSpPr txBox="1"/>
-          <p:nvPr/>
-        </p:nvSpPr>
-        <p:spPr>
-          <a:xfrm>
-            <a:off x="749808" y="5980176"/>
+          <p:cNvPr id="26" name="Text 22"/>
+          <p:cNvSpPr txBox="1"/>
+          <p:nvPr/>
+        </p:nvSpPr>
+        <p:spPr>
+          <a:xfrm>
+            <a:off x="749808" y="6601968"/>
             <a:ext cx="457200" cy="457200"/>
           </a:xfrm>
           <a:prstGeom prst="rect">
@@ -5322,7 +5713,7 @@
                 <a:ea typeface="Poppins" pitchFamily="34" charset="-122"/>
                 <a:cs typeface="Poppins" pitchFamily="34" charset="-120"/>
               </a:rPr>
-              <a:t>14</a:t>
+              <a:t>13</a:t>
             </a:r>
             <a:endParaRPr lang="en-US" sz="1600" dirty="0"/>
           </a:p>
@@ -5330,14 +5721,14 @@
       </p:sp>
       <p:sp>
         <p:nvSpPr>
-          <p:cNvPr id="23" name="Text 20"/>
-          <p:cNvSpPr txBox="1"/>
-          <p:nvPr/>
-        </p:nvSpPr>
-        <p:spPr>
-          <a:xfrm>
-            <a:off x="1417320" y="5961888"/>
-            <a:ext cx="5367528" cy="1078992"/>
+          <p:cNvPr id="27" name="Text 23"/>
+          <p:cNvSpPr txBox="1"/>
+          <p:nvPr/>
+        </p:nvSpPr>
+        <p:spPr>
+          <a:xfrm>
+            <a:off x="1417320" y="6583680"/>
+            <a:ext cx="5367528" cy="832104"/>
           </a:xfrm>
           <a:prstGeom prst="rect">
             <a:avLst/>
@@ -5364,61 +5755,21 @@
                 <a:ea typeface="Poppins" pitchFamily="34" charset="-122"/>
                 <a:cs typeface="Poppins" pitchFamily="34" charset="-120"/>
               </a:rPr>
-              <a:t>In einem rechtwinkeligen Dreieck ist α viermal so groß wie β.</a:t>
+              <a:t>Anja, Armin und Alina sind zusammen 32 Jahre alt. Anja ist um 10 Jahre älter als Alina und Armin ist um 6 Jahre jünger als Anja. Wie alt ist Armin?</a:t>
             </a:r>
             <a:endParaRPr lang="en-US" sz="1250" dirty="0"/>
           </a:p>
-          <a:p>
-            <a:pPr indent="0" marL="0">
-              <a:lnSpc>
-                <a:spcPct val="120000"/>
-              </a:lnSpc>
-              <a:buNone/>
-            </a:pPr>
-            <a:r>
-              <a:rPr lang="en-US" sz="1250" dirty="0">
-                <a:solidFill>
-                  <a:srgbClr val="0B1E3A"/>
-                </a:solidFill>
-                <a:latin typeface="Poppins" pitchFamily="34" charset="0"/>
-                <a:ea typeface="Poppins" pitchFamily="34" charset="-122"/>
-                <a:cs typeface="Poppins" pitchFamily="34" charset="-120"/>
-              </a:rPr>
-              <a:t>a) Wie groß ist der rechte Winkel?</a:t>
-            </a:r>
-            <a:endParaRPr lang="en-US" sz="1250" dirty="0"/>
-          </a:p>
-          <a:p>
-            <a:pPr indent="0" marL="0">
-              <a:lnSpc>
-                <a:spcPct val="120000"/>
-              </a:lnSpc>
-              <a:buNone/>
-            </a:pPr>
-            <a:r>
-              <a:rPr lang="en-US" sz="1250" dirty="0">
-                <a:solidFill>
-                  <a:srgbClr val="0B1E3A"/>
-                </a:solidFill>
-                <a:latin typeface="Poppins" pitchFamily="34" charset="0"/>
-                <a:ea typeface="Poppins" pitchFamily="34" charset="-122"/>
-                <a:cs typeface="Poppins" pitchFamily="34" charset="-120"/>
-              </a:rPr>
-              <a:t>b) Wie groß ist α?</a:t>
-            </a:r>
-            <a:endParaRPr lang="en-US" sz="1250" dirty="0"/>
-          </a:p>
-        </p:txBody>
-      </p:sp>
-      <p:sp>
-        <p:nvSpPr>
-          <p:cNvPr id="24" name="Text 21"/>
-          <p:cNvSpPr txBox="1"/>
-          <p:nvPr/>
-        </p:nvSpPr>
-        <p:spPr>
-          <a:xfrm>
-            <a:off x="1417320" y="7178040"/>
+        </p:txBody>
+      </p:sp>
+      <p:sp>
+        <p:nvSpPr>
+          <p:cNvPr id="28" name="Text 24"/>
+          <p:cNvSpPr txBox="1"/>
+          <p:nvPr/>
+        </p:nvSpPr>
+        <p:spPr>
+          <a:xfrm>
+            <a:off x="1417320" y="7552944"/>
             <a:ext cx="1188720" cy="365760"/>
           </a:xfrm>
           <a:prstGeom prst="rect">
@@ -5451,13 +5802,13 @@
       </p:sp>
       <p:sp>
         <p:nvSpPr>
-          <p:cNvPr id="25" name="Shape 22"/>
-          <p:cNvSpPr/>
-          <p:nvPr/>
-        </p:nvSpPr>
-        <p:spPr>
-          <a:xfrm>
-            <a:off x="2606040" y="7498080"/>
+          <p:cNvPr id="29" name="Shape 25"/>
+          <p:cNvSpPr/>
+          <p:nvPr/>
+        </p:nvSpPr>
+        <p:spPr>
+          <a:xfrm>
+            <a:off x="2606040" y="7872984"/>
             <a:ext cx="4178808" cy="0"/>
           </a:xfrm>
           <a:prstGeom prst="line">
@@ -5474,14 +5825,14 @@
       </p:sp>
       <p:sp>
         <p:nvSpPr>
-          <p:cNvPr id="26" name="Text 23"/>
-          <p:cNvSpPr txBox="1"/>
-          <p:nvPr/>
-        </p:nvSpPr>
-        <p:spPr>
-          <a:xfrm>
-            <a:off x="1417320" y="7635240"/>
-            <a:ext cx="457200" cy="365760"/>
+          <p:cNvPr id="30" name="Text 26"/>
+          <p:cNvSpPr txBox="1"/>
+          <p:nvPr/>
+        </p:nvSpPr>
+        <p:spPr>
+          <a:xfrm>
+            <a:off x="1417320" y="8010144"/>
+            <a:ext cx="1188720" cy="365760"/>
           </a:xfrm>
           <a:prstGeom prst="rect">
             <a:avLst/>
@@ -5497,7 +5848,7 @@
               <a:buNone/>
             </a:pPr>
             <a:r>
-              <a:rPr lang="en-US" sz="1050" b="1" dirty="0">
+              <a:rPr lang="en-US" sz="1000" dirty="0">
                 <a:solidFill>
                   <a:srgbClr val="4A5F7A"/>
                 </a:solidFill>
@@ -5505,84 +5856,22 @@
                 <a:ea typeface="Poppins" pitchFamily="34" charset="-122"/>
                 <a:cs typeface="Poppins" pitchFamily="34" charset="-120"/>
               </a:rPr>
-              <a:t>a)</a:t>
-            </a:r>
-            <a:endParaRPr lang="en-US" sz="1050" dirty="0"/>
-          </a:p>
-        </p:txBody>
-      </p:sp>
-      <p:sp>
-        <p:nvSpPr>
-          <p:cNvPr id="27" name="Shape 24"/>
-          <p:cNvSpPr/>
-          <p:nvPr/>
-        </p:nvSpPr>
-        <p:spPr>
-          <a:xfrm>
-            <a:off x="1828800" y="7955280"/>
-            <a:ext cx="4956048" cy="0"/>
-          </a:xfrm>
-          <a:prstGeom prst="line">
-            <a:avLst/>
-          </a:prstGeom>
-          <a:noFill/>
-          <a:ln w="15875">
-            <a:solidFill>
-              <a:srgbClr val="8DBBF2"/>
-            </a:solidFill>
-            <a:prstDash val="sysDot"/>
-          </a:ln>
-        </p:spPr>
-      </p:sp>
-      <p:sp>
-        <p:nvSpPr>
-          <p:cNvPr id="28" name="Text 25"/>
-          <p:cNvSpPr txBox="1"/>
-          <p:nvPr/>
-        </p:nvSpPr>
-        <p:spPr>
-          <a:xfrm>
-            <a:off x="1417320" y="8138160"/>
-            <a:ext cx="457200" cy="365760"/>
-          </a:xfrm>
-          <a:prstGeom prst="rect">
-            <a:avLst/>
-          </a:prstGeom>
-          <a:noFill/>
-          <a:ln/>
-        </p:spPr>
-        <p:txBody>
-          <a:bodyPr wrap="square" lIns="0" tIns="0" rIns="0" bIns="0" rtlCol="0" anchor="ctr"/>
-          <a:lstStyle/>
-          <a:p>
-            <a:pPr indent="0" marL="0">
-              <a:buNone/>
-            </a:pPr>
-            <a:r>
-              <a:rPr lang="en-US" sz="1050" b="1" dirty="0">
-                <a:solidFill>
-                  <a:srgbClr val="4A5F7A"/>
-                </a:solidFill>
-                <a:latin typeface="Poppins" pitchFamily="34" charset="0"/>
-                <a:ea typeface="Poppins" pitchFamily="34" charset="-122"/>
-                <a:cs typeface="Poppins" pitchFamily="34" charset="-120"/>
-              </a:rPr>
-              <a:t>b)</a:t>
-            </a:r>
-            <a:endParaRPr lang="en-US" sz="1050" dirty="0"/>
-          </a:p>
-        </p:txBody>
-      </p:sp>
-      <p:sp>
-        <p:nvSpPr>
-          <p:cNvPr id="29" name="Shape 26"/>
-          <p:cNvSpPr/>
-          <p:nvPr/>
-        </p:nvSpPr>
-        <p:spPr>
-          <a:xfrm>
-            <a:off x="1828800" y="8458200"/>
-            <a:ext cx="4956048" cy="0"/>
+              <a:t>Lösung:</a:t>
+            </a:r>
+            <a:endParaRPr lang="en-US" sz="1000" dirty="0"/>
+          </a:p>
+        </p:txBody>
+      </p:sp>
+      <p:sp>
+        <p:nvSpPr>
+          <p:cNvPr id="31" name="Shape 27"/>
+          <p:cNvSpPr/>
+          <p:nvPr/>
+        </p:nvSpPr>
+        <p:spPr>
+          <a:xfrm>
+            <a:off x="2606040" y="8330184"/>
+            <a:ext cx="2743200" cy="0"/>
           </a:xfrm>
           <a:prstGeom prst="line">
             <a:avLst/>
@@ -5629,7 +5918,169 @@
         </p:nvSpPr>
         <p:spPr>
           <a:xfrm>
-            <a:off x="548640" y="502920"/>
+            <a:off x="548640" y="274320"/>
+            <a:ext cx="2926080" cy="731520"/>
+          </a:xfrm>
+          <a:prstGeom prst="rect">
+            <a:avLst/>
+          </a:prstGeom>
+          <a:noFill/>
+          <a:ln/>
+        </p:spPr>
+        <p:txBody>
+          <a:bodyPr wrap="square" lIns="0" tIns="0" rIns="0" bIns="0" rtlCol="0" anchor="ctr"/>
+          <a:lstStyle/>
+          <a:p>
+            <a:pPr indent="0" marL="0">
+              <a:buNone/>
+            </a:pPr>
+            <a:r>
+              <a:rPr lang="en-US" sz="3000" b="1" dirty="0">
+                <a:solidFill>
+                  <a:srgbClr val="475BA6"/>
+                </a:solidFill>
+                <a:latin typeface="Poppins" pitchFamily="34" charset="0"/>
+                <a:ea typeface="Poppins" pitchFamily="34" charset="-122"/>
+                <a:cs typeface="Poppins" pitchFamily="34" charset="-120"/>
+              </a:rPr>
+              <a:t>clever</a:t>
+            </a:r>
+            <a:pPr indent="0" marL="0">
+              <a:buNone/>
+            </a:pPr>
+            <a:r>
+              <a:rPr lang="en-US" sz="3000" b="1" dirty="0">
+                <a:solidFill>
+                  <a:srgbClr val="36448A"/>
+                </a:solidFill>
+                <a:latin typeface="Poppins" pitchFamily="34" charset="0"/>
+                <a:ea typeface="Poppins" pitchFamily="34" charset="-122"/>
+                <a:cs typeface="Poppins" pitchFamily="34" charset="-120"/>
+              </a:rPr>
+              <a:t>box</a:t>
+            </a:r>
+            <a:endParaRPr lang="en-US" sz="3000" dirty="0"/>
+          </a:p>
+        </p:txBody>
+      </p:sp>
+      <p:pic>
+        <p:nvPicPr>
+          <p:cNvPr id="4" name="Image 0" descr="QR-Code zu www.cleverbox.co.at">    </p:cNvPr>
+          <p:cNvPicPr>
+            <a:picLocks noChangeAspect="1"/>
+          </p:cNvPicPr>
+          <p:nvPr/>
+        </p:nvPicPr>
+        <p:blipFill>
+          <a:blip r:embed="rId1"/>
+          <a:stretch>
+            <a:fillRect/>
+          </a:stretch>
+        </p:blipFill>
+        <p:spPr>
+          <a:xfrm>
+            <a:off x="6144768" y="228600"/>
+            <a:ext cx="868680" cy="868680"/>
+          </a:xfrm>
+          <a:prstGeom prst="rect">
+            <a:avLst/>
+          </a:prstGeom>
+        </p:spPr>
+      </p:pic>
+      <p:sp>
+        <p:nvSpPr>
+          <p:cNvPr id="5" name="Text 1"/>
+          <p:cNvSpPr txBox="1"/>
+          <p:nvPr/>
+        </p:nvSpPr>
+        <p:spPr>
+          <a:xfrm>
+            <a:off x="3767328" y="274320"/>
+            <a:ext cx="2286000" cy="777240"/>
+          </a:xfrm>
+          <a:prstGeom prst="rect">
+            <a:avLst/>
+          </a:prstGeom>
+          <a:noFill/>
+          <a:ln/>
+        </p:spPr>
+        <p:txBody>
+          <a:bodyPr wrap="square" lIns="0" tIns="0" rIns="0" bIns="0" rtlCol="0" anchor="ctr"/>
+          <a:lstStyle/>
+          <a:p>
+            <a:pPr algn="r" indent="0" marL="0">
+              <a:lnSpc>
+                <a:spcPct val="120000"/>
+              </a:lnSpc>
+              <a:buNone/>
+            </a:pPr>
+            <a:r>
+              <a:rPr lang="en-US" sz="1000" dirty="0">
+                <a:solidFill>
+                  <a:srgbClr val="4A5F7A"/>
+                </a:solidFill>
+                <a:latin typeface="Poppins" pitchFamily="34" charset="0"/>
+                <a:ea typeface="Poppins" pitchFamily="34" charset="-122"/>
+                <a:cs typeface="Poppins" pitchFamily="34" charset="-120"/>
+              </a:rPr>
+              <a:t>Mehr Material:</a:t>
+            </a:r>
+            <a:endParaRPr lang="en-US" sz="1000" dirty="0"/>
+          </a:p>
+          <a:p>
+            <a:pPr algn="r" indent="0" marL="0">
+              <a:lnSpc>
+                <a:spcPct val="120000"/>
+              </a:lnSpc>
+              <a:buNone/>
+            </a:pPr>
+            <a:r>
+              <a:rPr lang="en-US" sz="1000" dirty="0">
+                <a:solidFill>
+                  <a:srgbClr val="4A5F7A"/>
+                </a:solidFill>
+                <a:latin typeface="Poppins" pitchFamily="34" charset="0"/>
+                <a:ea typeface="Poppins" pitchFamily="34" charset="-122"/>
+                <a:cs typeface="Poppins" pitchFamily="34" charset="-120"/>
+              </a:rPr>
+              <a:t>www.cleverbox.co.at</a:t>
+            </a:r>
+            <a:endParaRPr lang="en-US" sz="1000" dirty="0"/>
+          </a:p>
+        </p:txBody>
+      </p:sp>
+      <p:sp>
+        <p:nvSpPr>
+          <p:cNvPr id="6" name="Shape 2"/>
+          <p:cNvSpPr/>
+          <p:nvPr/>
+        </p:nvSpPr>
+        <p:spPr>
+          <a:xfrm>
+            <a:off x="548640" y="1188720"/>
+            <a:ext cx="6464808" cy="0"/>
+          </a:xfrm>
+          <a:prstGeom prst="line">
+            <a:avLst/>
+          </a:prstGeom>
+          <a:noFill/>
+          <a:ln w="15875">
+            <a:solidFill>
+              <a:srgbClr val="8DBBF2"/>
+            </a:solidFill>
+            <a:prstDash val="solid"/>
+          </a:ln>
+        </p:spPr>
+      </p:sp>
+      <p:sp>
+        <p:nvSpPr>
+          <p:cNvPr id="7" name="Text 3"/>
+          <p:cNvSpPr txBox="1"/>
+          <p:nvPr/>
+        </p:nvSpPr>
+        <p:spPr>
+          <a:xfrm>
+            <a:off x="548640" y="1371600"/>
             <a:ext cx="6400800" cy="365760"/>
           </a:xfrm>
           <a:prstGeom prst="rect">
@@ -5662,18 +6113,18 @@
       </p:sp>
       <p:sp>
         <p:nvSpPr>
-          <p:cNvPr id="4" name="Shape 1"/>
-          <p:cNvSpPr/>
-          <p:nvPr/>
-        </p:nvSpPr>
-        <p:spPr>
-          <a:xfrm>
-            <a:off x="548640" y="1097280"/>
-            <a:ext cx="6464808" cy="2203704"/>
+          <p:cNvPr id="8" name="Shape 4"/>
+          <p:cNvSpPr/>
+          <p:nvPr/>
+        </p:nvSpPr>
+        <p:spPr>
+          <a:xfrm>
+            <a:off x="548640" y="1965960"/>
+            <a:ext cx="6464808" cy="3136392"/>
           </a:xfrm>
           <a:prstGeom prst="roundRect">
             <a:avLst>
-              <a:gd name="adj" fmla="val 6224"/>
+              <a:gd name="adj" fmla="val 4373"/>
             </a:avLst>
           </a:prstGeom>
           <a:solidFill>
@@ -5689,13 +6140,13 @@
       </p:sp>
       <p:sp>
         <p:nvSpPr>
-          <p:cNvPr id="5" name="Shape 2"/>
-          <p:cNvSpPr/>
-          <p:nvPr/>
-        </p:nvSpPr>
-        <p:spPr>
-          <a:xfrm>
-            <a:off x="749808" y="1298448"/>
+          <p:cNvPr id="9" name="Shape 5"/>
+          <p:cNvSpPr/>
+          <p:nvPr/>
+        </p:nvSpPr>
+        <p:spPr>
+          <a:xfrm>
+            <a:off x="749808" y="2167128"/>
             <a:ext cx="457200" cy="457200"/>
           </a:xfrm>
           <a:prstGeom prst="ellipse">
@@ -5714,13 +6165,13 @@
       </p:sp>
       <p:sp>
         <p:nvSpPr>
-          <p:cNvPr id="6" name="Text 3"/>
-          <p:cNvSpPr txBox="1"/>
-          <p:nvPr/>
-        </p:nvSpPr>
-        <p:spPr>
-          <a:xfrm>
-            <a:off x="749808" y="1298448"/>
+          <p:cNvPr id="10" name="Text 6"/>
+          <p:cNvSpPr txBox="1"/>
+          <p:nvPr/>
+        </p:nvSpPr>
+        <p:spPr>
+          <a:xfrm>
+            <a:off x="749808" y="2167128"/>
             <a:ext cx="457200" cy="457200"/>
           </a:xfrm>
           <a:prstGeom prst="rect">
@@ -5745,7 +6196,7 @@
                 <a:ea typeface="Poppins" pitchFamily="34" charset="-122"/>
                 <a:cs typeface="Poppins" pitchFamily="34" charset="-120"/>
               </a:rPr>
-              <a:t>15</a:t>
+              <a:t>14</a:t>
             </a:r>
             <a:endParaRPr lang="en-US" sz="1600" dirty="0"/>
           </a:p>
@@ -5753,14 +6204,14 @@
       </p:sp>
       <p:sp>
         <p:nvSpPr>
-          <p:cNvPr id="7" name="Text 4"/>
-          <p:cNvSpPr txBox="1"/>
-          <p:nvPr/>
-        </p:nvSpPr>
-        <p:spPr>
-          <a:xfrm>
-            <a:off x="1417320" y="1280160"/>
-            <a:ext cx="5367528" cy="832104"/>
+          <p:cNvPr id="11" name="Text 7"/>
+          <p:cNvSpPr txBox="1"/>
+          <p:nvPr/>
+        </p:nvSpPr>
+        <p:spPr>
+          <a:xfrm>
+            <a:off x="1417320" y="2148840"/>
+            <a:ext cx="5367528" cy="1078992"/>
           </a:xfrm>
           <a:prstGeom prst="rect">
             <a:avLst/>
@@ -5787,21 +6238,61 @@
                 <a:ea typeface="Poppins" pitchFamily="34" charset="-122"/>
                 <a:cs typeface="Poppins" pitchFamily="34" charset="-120"/>
               </a:rPr>
-              <a:t>Georg, Nicole und Carina sind zusammen 43 Jahre alt. Georg ist um 7 Jahre älter als Nicole und Carina ist um 9 Jahre älter als Nicole. Wie alt ist Nicole?</a:t>
+              <a:t>In einem rechtwinkeligen Dreieck ist α viermal so groß wie β.</a:t>
             </a:r>
             <a:endParaRPr lang="en-US" sz="1250" dirty="0"/>
           </a:p>
-        </p:txBody>
-      </p:sp>
-      <p:sp>
-        <p:nvSpPr>
-          <p:cNvPr id="8" name="Text 5"/>
-          <p:cNvSpPr txBox="1"/>
-          <p:nvPr/>
-        </p:nvSpPr>
-        <p:spPr>
-          <a:xfrm>
-            <a:off x="1417320" y="2249424"/>
+          <a:p>
+            <a:pPr indent="0" marL="0">
+              <a:lnSpc>
+                <a:spcPct val="120000"/>
+              </a:lnSpc>
+              <a:buNone/>
+            </a:pPr>
+            <a:r>
+              <a:rPr lang="en-US" sz="1250" dirty="0">
+                <a:solidFill>
+                  <a:srgbClr val="0B1E3A"/>
+                </a:solidFill>
+                <a:latin typeface="Poppins" pitchFamily="34" charset="0"/>
+                <a:ea typeface="Poppins" pitchFamily="34" charset="-122"/>
+                <a:cs typeface="Poppins" pitchFamily="34" charset="-120"/>
+              </a:rPr>
+              <a:t>a) Wie groß ist der rechte Winkel?</a:t>
+            </a:r>
+            <a:endParaRPr lang="en-US" sz="1250" dirty="0"/>
+          </a:p>
+          <a:p>
+            <a:pPr indent="0" marL="0">
+              <a:lnSpc>
+                <a:spcPct val="120000"/>
+              </a:lnSpc>
+              <a:buNone/>
+            </a:pPr>
+            <a:r>
+              <a:rPr lang="en-US" sz="1250" dirty="0">
+                <a:solidFill>
+                  <a:srgbClr val="0B1E3A"/>
+                </a:solidFill>
+                <a:latin typeface="Poppins" pitchFamily="34" charset="0"/>
+                <a:ea typeface="Poppins" pitchFamily="34" charset="-122"/>
+                <a:cs typeface="Poppins" pitchFamily="34" charset="-120"/>
+              </a:rPr>
+              <a:t>b) Wie groß ist α?</a:t>
+            </a:r>
+            <a:endParaRPr lang="en-US" sz="1250" dirty="0"/>
+          </a:p>
+        </p:txBody>
+      </p:sp>
+      <p:sp>
+        <p:nvSpPr>
+          <p:cNvPr id="12" name="Text 8"/>
+          <p:cNvSpPr txBox="1"/>
+          <p:nvPr/>
+        </p:nvSpPr>
+        <p:spPr>
+          <a:xfrm>
+            <a:off x="1417320" y="3364992"/>
             <a:ext cx="1188720" cy="365760"/>
           </a:xfrm>
           <a:prstGeom prst="rect">
@@ -5834,13 +6325,13 @@
       </p:sp>
       <p:sp>
         <p:nvSpPr>
-          <p:cNvPr id="9" name="Shape 6"/>
-          <p:cNvSpPr/>
-          <p:nvPr/>
-        </p:nvSpPr>
-        <p:spPr>
-          <a:xfrm>
-            <a:off x="2606040" y="2569464"/>
+          <p:cNvPr id="13" name="Shape 9"/>
+          <p:cNvSpPr/>
+          <p:nvPr/>
+        </p:nvSpPr>
+        <p:spPr>
+          <a:xfrm>
+            <a:off x="2606040" y="3685032"/>
             <a:ext cx="4178808" cy="0"/>
           </a:xfrm>
           <a:prstGeom prst="line">
@@ -5857,14 +6348,14 @@
       </p:sp>
       <p:sp>
         <p:nvSpPr>
-          <p:cNvPr id="10" name="Text 7"/>
-          <p:cNvSpPr txBox="1"/>
-          <p:nvPr/>
-        </p:nvSpPr>
-        <p:spPr>
-          <a:xfrm>
-            <a:off x="1417320" y="2706624"/>
-            <a:ext cx="1188720" cy="365760"/>
+          <p:cNvPr id="14" name="Text 10"/>
+          <p:cNvSpPr txBox="1"/>
+          <p:nvPr/>
+        </p:nvSpPr>
+        <p:spPr>
+          <a:xfrm>
+            <a:off x="1417320" y="3822192"/>
+            <a:ext cx="457200" cy="365760"/>
           </a:xfrm>
           <a:prstGeom prst="rect">
             <a:avLst/>
@@ -5880,7 +6371,7 @@
               <a:buNone/>
             </a:pPr>
             <a:r>
-              <a:rPr lang="en-US" sz="1000" dirty="0">
+              <a:rPr lang="en-US" sz="1050" b="1" dirty="0">
                 <a:solidFill>
                   <a:srgbClr val="4A5F7A"/>
                 </a:solidFill>
@@ -5888,22 +6379,22 @@
                 <a:ea typeface="Poppins" pitchFamily="34" charset="-122"/>
                 <a:cs typeface="Poppins" pitchFamily="34" charset="-120"/>
               </a:rPr>
-              <a:t>Lösung:</a:t>
-            </a:r>
-            <a:endParaRPr lang="en-US" sz="1000" dirty="0"/>
-          </a:p>
-        </p:txBody>
-      </p:sp>
-      <p:sp>
-        <p:nvSpPr>
-          <p:cNvPr id="11" name="Shape 8"/>
-          <p:cNvSpPr/>
-          <p:nvPr/>
-        </p:nvSpPr>
-        <p:spPr>
-          <a:xfrm>
-            <a:off x="2606040" y="3026664"/>
-            <a:ext cx="2743200" cy="0"/>
+              <a:t>a)</a:t>
+            </a:r>
+            <a:endParaRPr lang="en-US" sz="1050" dirty="0"/>
+          </a:p>
+        </p:txBody>
+      </p:sp>
+      <p:sp>
+        <p:nvSpPr>
+          <p:cNvPr id="15" name="Shape 11"/>
+          <p:cNvSpPr/>
+          <p:nvPr/>
+        </p:nvSpPr>
+        <p:spPr>
+          <a:xfrm>
+            <a:off x="1828800" y="4142232"/>
+            <a:ext cx="4956048" cy="0"/>
           </a:xfrm>
           <a:prstGeom prst="line">
             <a:avLst/>
@@ -5919,13 +6410,75 @@
       </p:sp>
       <p:sp>
         <p:nvSpPr>
-          <p:cNvPr id="12" name="Shape 9"/>
-          <p:cNvSpPr/>
-          <p:nvPr/>
-        </p:nvSpPr>
-        <p:spPr>
-          <a:xfrm>
-            <a:off x="548640" y="3438144"/>
+          <p:cNvPr id="16" name="Text 12"/>
+          <p:cNvSpPr txBox="1"/>
+          <p:nvPr/>
+        </p:nvSpPr>
+        <p:spPr>
+          <a:xfrm>
+            <a:off x="1417320" y="4325112"/>
+            <a:ext cx="457200" cy="365760"/>
+          </a:xfrm>
+          <a:prstGeom prst="rect">
+            <a:avLst/>
+          </a:prstGeom>
+          <a:noFill/>
+          <a:ln/>
+        </p:spPr>
+        <p:txBody>
+          <a:bodyPr wrap="square" lIns="0" tIns="0" rIns="0" bIns="0" rtlCol="0" anchor="ctr"/>
+          <a:lstStyle/>
+          <a:p>
+            <a:pPr indent="0" marL="0">
+              <a:buNone/>
+            </a:pPr>
+            <a:r>
+              <a:rPr lang="en-US" sz="1050" b="1" dirty="0">
+                <a:solidFill>
+                  <a:srgbClr val="4A5F7A"/>
+                </a:solidFill>
+                <a:latin typeface="Poppins" pitchFamily="34" charset="0"/>
+                <a:ea typeface="Poppins" pitchFamily="34" charset="-122"/>
+                <a:cs typeface="Poppins" pitchFamily="34" charset="-120"/>
+              </a:rPr>
+              <a:t>b)</a:t>
+            </a:r>
+            <a:endParaRPr lang="en-US" sz="1050" dirty="0"/>
+          </a:p>
+        </p:txBody>
+      </p:sp>
+      <p:sp>
+        <p:nvSpPr>
+          <p:cNvPr id="17" name="Shape 13"/>
+          <p:cNvSpPr/>
+          <p:nvPr/>
+        </p:nvSpPr>
+        <p:spPr>
+          <a:xfrm>
+            <a:off x="1828800" y="4645152"/>
+            <a:ext cx="4956048" cy="0"/>
+          </a:xfrm>
+          <a:prstGeom prst="line">
+            <a:avLst/>
+          </a:prstGeom>
+          <a:noFill/>
+          <a:ln w="15875">
+            <a:solidFill>
+              <a:srgbClr val="8DBBF2"/>
+            </a:solidFill>
+            <a:prstDash val="sysDot"/>
+          </a:ln>
+        </p:spPr>
+      </p:sp>
+      <p:sp>
+        <p:nvSpPr>
+          <p:cNvPr id="18" name="Shape 14"/>
+          <p:cNvSpPr/>
+          <p:nvPr/>
+        </p:nvSpPr>
+        <p:spPr>
+          <a:xfrm>
+            <a:off x="548640" y="5239512"/>
             <a:ext cx="6464808" cy="2203704"/>
           </a:xfrm>
           <a:prstGeom prst="roundRect">
@@ -5946,13 +6499,13 @@
       </p:sp>
       <p:sp>
         <p:nvSpPr>
-          <p:cNvPr id="13" name="Shape 10"/>
-          <p:cNvSpPr/>
-          <p:nvPr/>
-        </p:nvSpPr>
-        <p:spPr>
-          <a:xfrm>
-            <a:off x="749808" y="3639312"/>
+          <p:cNvPr id="19" name="Shape 15"/>
+          <p:cNvSpPr/>
+          <p:nvPr/>
+        </p:nvSpPr>
+        <p:spPr>
+          <a:xfrm>
+            <a:off x="749808" y="5440680"/>
             <a:ext cx="457200" cy="457200"/>
           </a:xfrm>
           <a:prstGeom prst="ellipse">
@@ -5971,13 +6524,13 @@
       </p:sp>
       <p:sp>
         <p:nvSpPr>
-          <p:cNvPr id="14" name="Text 11"/>
-          <p:cNvSpPr txBox="1"/>
-          <p:nvPr/>
-        </p:nvSpPr>
-        <p:spPr>
-          <a:xfrm>
-            <a:off x="749808" y="3639312"/>
+          <p:cNvPr id="20" name="Text 16"/>
+          <p:cNvSpPr txBox="1"/>
+          <p:nvPr/>
+        </p:nvSpPr>
+        <p:spPr>
+          <a:xfrm>
+            <a:off x="749808" y="5440680"/>
             <a:ext cx="457200" cy="457200"/>
           </a:xfrm>
           <a:prstGeom prst="rect">
@@ -6002,7 +6555,7 @@
                 <a:ea typeface="Poppins" pitchFamily="34" charset="-122"/>
                 <a:cs typeface="Poppins" pitchFamily="34" charset="-120"/>
               </a:rPr>
-              <a:t>16</a:t>
+              <a:t>15</a:t>
             </a:r>
             <a:endParaRPr lang="en-US" sz="1600" dirty="0"/>
           </a:p>
@@ -6010,13 +6563,13 @@
       </p:sp>
       <p:sp>
         <p:nvSpPr>
-          <p:cNvPr id="15" name="Text 12"/>
-          <p:cNvSpPr txBox="1"/>
-          <p:nvPr/>
-        </p:nvSpPr>
-        <p:spPr>
-          <a:xfrm>
-            <a:off x="1417320" y="3621024"/>
+          <p:cNvPr id="21" name="Text 17"/>
+          <p:cNvSpPr txBox="1"/>
+          <p:nvPr/>
+        </p:nvSpPr>
+        <p:spPr>
+          <a:xfrm>
+            <a:off x="1417320" y="5422392"/>
             <a:ext cx="5367528" cy="832104"/>
           </a:xfrm>
           <a:prstGeom prst="rect">
@@ -6044,7 +6597,7 @@
                 <a:ea typeface="Poppins" pitchFamily="34" charset="-122"/>
                 <a:cs typeface="Poppins" pitchFamily="34" charset="-120"/>
               </a:rPr>
-              <a:t>Pia, Johannes und Elisabeth sind zusammen 39 Jahre alt. Pia ist um 4 Jahre älter als Elisabeth und Johannes ist um 2 Jahre jünger als Pia. Wie alt ist Pia?</a:t>
+              <a:t>Georg, Nicole und Carina sind zusammen 43 Jahre alt. Georg ist um 7 Jahre älter als Nicole und Carina ist um 9 Jahre älter als Nicole. Wie alt ist Nicole?</a:t>
             </a:r>
             <a:endParaRPr lang="en-US" sz="1250" dirty="0"/>
           </a:p>
@@ -6052,13 +6605,13 @@
       </p:sp>
       <p:sp>
         <p:nvSpPr>
-          <p:cNvPr id="16" name="Text 13"/>
-          <p:cNvSpPr txBox="1"/>
-          <p:nvPr/>
-        </p:nvSpPr>
-        <p:spPr>
-          <a:xfrm>
-            <a:off x="1417320" y="4590288"/>
+          <p:cNvPr id="22" name="Text 18"/>
+          <p:cNvSpPr txBox="1"/>
+          <p:nvPr/>
+        </p:nvSpPr>
+        <p:spPr>
+          <a:xfrm>
+            <a:off x="1417320" y="6391656"/>
             <a:ext cx="1188720" cy="365760"/>
           </a:xfrm>
           <a:prstGeom prst="rect">
@@ -6091,13 +6644,13 @@
       </p:sp>
       <p:sp>
         <p:nvSpPr>
-          <p:cNvPr id="17" name="Shape 14"/>
-          <p:cNvSpPr/>
-          <p:nvPr/>
-        </p:nvSpPr>
-        <p:spPr>
-          <a:xfrm>
-            <a:off x="2606040" y="4910328"/>
+          <p:cNvPr id="23" name="Shape 19"/>
+          <p:cNvSpPr/>
+          <p:nvPr/>
+        </p:nvSpPr>
+        <p:spPr>
+          <a:xfrm>
+            <a:off x="2606040" y="6711696"/>
             <a:ext cx="4178808" cy="0"/>
           </a:xfrm>
           <a:prstGeom prst="line">
@@ -6114,13 +6667,13 @@
       </p:sp>
       <p:sp>
         <p:nvSpPr>
-          <p:cNvPr id="18" name="Text 15"/>
-          <p:cNvSpPr txBox="1"/>
-          <p:nvPr/>
-        </p:nvSpPr>
-        <p:spPr>
-          <a:xfrm>
-            <a:off x="1417320" y="5047488"/>
+          <p:cNvPr id="24" name="Text 20"/>
+          <p:cNvSpPr txBox="1"/>
+          <p:nvPr/>
+        </p:nvSpPr>
+        <p:spPr>
+          <a:xfrm>
+            <a:off x="1417320" y="6848856"/>
             <a:ext cx="1188720" cy="365760"/>
           </a:xfrm>
           <a:prstGeom prst="rect">
@@ -6153,13 +6706,270 @@
       </p:sp>
       <p:sp>
         <p:nvSpPr>
-          <p:cNvPr id="19" name="Shape 16"/>
-          <p:cNvSpPr/>
-          <p:nvPr/>
-        </p:nvSpPr>
-        <p:spPr>
-          <a:xfrm>
-            <a:off x="2606040" y="5367528"/>
+          <p:cNvPr id="25" name="Shape 21"/>
+          <p:cNvSpPr/>
+          <p:nvPr/>
+        </p:nvSpPr>
+        <p:spPr>
+          <a:xfrm>
+            <a:off x="2606040" y="7168896"/>
+            <a:ext cx="2743200" cy="0"/>
+          </a:xfrm>
+          <a:prstGeom prst="line">
+            <a:avLst/>
+          </a:prstGeom>
+          <a:noFill/>
+          <a:ln w="15875">
+            <a:solidFill>
+              <a:srgbClr val="8DBBF2"/>
+            </a:solidFill>
+            <a:prstDash val="sysDot"/>
+          </a:ln>
+        </p:spPr>
+      </p:sp>
+      <p:sp>
+        <p:nvSpPr>
+          <p:cNvPr id="26" name="Shape 22"/>
+          <p:cNvSpPr/>
+          <p:nvPr/>
+        </p:nvSpPr>
+        <p:spPr>
+          <a:xfrm>
+            <a:off x="548640" y="7580376"/>
+            <a:ext cx="6464808" cy="2203704"/>
+          </a:xfrm>
+          <a:prstGeom prst="roundRect">
+            <a:avLst>
+              <a:gd name="adj" fmla="val 6224"/>
+            </a:avLst>
+          </a:prstGeom>
+          <a:solidFill>
+            <a:srgbClr val="FFFFFF"/>
+          </a:solidFill>
+          <a:ln w="15875">
+            <a:solidFill>
+              <a:srgbClr val="8DBBF2"/>
+            </a:solidFill>
+            <a:prstDash val="solid"/>
+          </a:ln>
+        </p:spPr>
+      </p:sp>
+      <p:sp>
+        <p:nvSpPr>
+          <p:cNvPr id="27" name="Shape 23"/>
+          <p:cNvSpPr/>
+          <p:nvPr/>
+        </p:nvSpPr>
+        <p:spPr>
+          <a:xfrm>
+            <a:off x="749808" y="7781544"/>
+            <a:ext cx="457200" cy="457200"/>
+          </a:xfrm>
+          <a:prstGeom prst="ellipse">
+            <a:avLst/>
+          </a:prstGeom>
+          <a:solidFill>
+            <a:srgbClr val="BCD6F5"/>
+          </a:solidFill>
+          <a:ln w="12700">
+            <a:solidFill>
+              <a:srgbClr val="BCD6F5"/>
+            </a:solidFill>
+            <a:prstDash val="solid"/>
+          </a:ln>
+        </p:spPr>
+      </p:sp>
+      <p:sp>
+        <p:nvSpPr>
+          <p:cNvPr id="28" name="Text 24"/>
+          <p:cNvSpPr txBox="1"/>
+          <p:nvPr/>
+        </p:nvSpPr>
+        <p:spPr>
+          <a:xfrm>
+            <a:off x="749808" y="7781544"/>
+            <a:ext cx="457200" cy="457200"/>
+          </a:xfrm>
+          <a:prstGeom prst="rect">
+            <a:avLst/>
+          </a:prstGeom>
+          <a:noFill/>
+          <a:ln/>
+        </p:spPr>
+        <p:txBody>
+          <a:bodyPr wrap="square" lIns="0" tIns="0" rIns="0" bIns="0" rtlCol="0" anchor="ctr"/>
+          <a:lstStyle/>
+          <a:p>
+            <a:pPr algn="ctr" indent="0" marL="0">
+              <a:buNone/>
+            </a:pPr>
+            <a:r>
+              <a:rPr lang="en-US" sz="1600" b="1" dirty="0">
+                <a:solidFill>
+                  <a:srgbClr val="0B1E3A"/>
+                </a:solidFill>
+                <a:latin typeface="Poppins" pitchFamily="34" charset="0"/>
+                <a:ea typeface="Poppins" pitchFamily="34" charset="-122"/>
+                <a:cs typeface="Poppins" pitchFamily="34" charset="-120"/>
+              </a:rPr>
+              <a:t>16</a:t>
+            </a:r>
+            <a:endParaRPr lang="en-US" sz="1600" dirty="0"/>
+          </a:p>
+        </p:txBody>
+      </p:sp>
+      <p:sp>
+        <p:nvSpPr>
+          <p:cNvPr id="29" name="Text 25"/>
+          <p:cNvSpPr txBox="1"/>
+          <p:nvPr/>
+        </p:nvSpPr>
+        <p:spPr>
+          <a:xfrm>
+            <a:off x="1417320" y="7763256"/>
+            <a:ext cx="5367528" cy="832104"/>
+          </a:xfrm>
+          <a:prstGeom prst="rect">
+            <a:avLst/>
+          </a:prstGeom>
+          <a:noFill/>
+          <a:ln/>
+        </p:spPr>
+        <p:txBody>
+          <a:bodyPr wrap="square" lIns="0" tIns="0" rIns="0" bIns="0" rtlCol="0" anchor="t"/>
+          <a:lstStyle/>
+          <a:p>
+            <a:pPr indent="0" marL="0">
+              <a:lnSpc>
+                <a:spcPct val="120000"/>
+              </a:lnSpc>
+              <a:buNone/>
+            </a:pPr>
+            <a:r>
+              <a:rPr lang="en-US" sz="1250" dirty="0">
+                <a:solidFill>
+                  <a:srgbClr val="0B1E3A"/>
+                </a:solidFill>
+                <a:latin typeface="Poppins" pitchFamily="34" charset="0"/>
+                <a:ea typeface="Poppins" pitchFamily="34" charset="-122"/>
+                <a:cs typeface="Poppins" pitchFamily="34" charset="-120"/>
+              </a:rPr>
+              <a:t>Pia, Johannes und Elisabeth sind zusammen 39 Jahre alt. Pia ist um 4 Jahre älter als Elisabeth und Johannes ist um 2 Jahre jünger als Pia. Wie alt ist Pia?</a:t>
+            </a:r>
+            <a:endParaRPr lang="en-US" sz="1250" dirty="0"/>
+          </a:p>
+        </p:txBody>
+      </p:sp>
+      <p:sp>
+        <p:nvSpPr>
+          <p:cNvPr id="30" name="Text 26"/>
+          <p:cNvSpPr txBox="1"/>
+          <p:nvPr/>
+        </p:nvSpPr>
+        <p:spPr>
+          <a:xfrm>
+            <a:off x="1417320" y="8732520"/>
+            <a:ext cx="1188720" cy="365760"/>
+          </a:xfrm>
+          <a:prstGeom prst="rect">
+            <a:avLst/>
+          </a:prstGeom>
+          <a:noFill/>
+          <a:ln/>
+        </p:spPr>
+        <p:txBody>
+          <a:bodyPr wrap="square" lIns="0" tIns="0" rIns="0" bIns="0" rtlCol="0" anchor="ctr"/>
+          <a:lstStyle/>
+          <a:p>
+            <a:pPr indent="0" marL="0">
+              <a:buNone/>
+            </a:pPr>
+            <a:r>
+              <a:rPr lang="en-US" sz="1000" dirty="0">
+                <a:solidFill>
+                  <a:srgbClr val="4A5F7A"/>
+                </a:solidFill>
+                <a:latin typeface="Poppins" pitchFamily="34" charset="0"/>
+                <a:ea typeface="Poppins" pitchFamily="34" charset="-122"/>
+                <a:cs typeface="Poppins" pitchFamily="34" charset="-120"/>
+              </a:rPr>
+              <a:t>Gleichung:</a:t>
+            </a:r>
+            <a:endParaRPr lang="en-US" sz="1000" dirty="0"/>
+          </a:p>
+        </p:txBody>
+      </p:sp>
+      <p:sp>
+        <p:nvSpPr>
+          <p:cNvPr id="31" name="Shape 27"/>
+          <p:cNvSpPr/>
+          <p:nvPr/>
+        </p:nvSpPr>
+        <p:spPr>
+          <a:xfrm>
+            <a:off x="2606040" y="9052560"/>
+            <a:ext cx="4178808" cy="0"/>
+          </a:xfrm>
+          <a:prstGeom prst="line">
+            <a:avLst/>
+          </a:prstGeom>
+          <a:noFill/>
+          <a:ln w="15875">
+            <a:solidFill>
+              <a:srgbClr val="8DBBF2"/>
+            </a:solidFill>
+            <a:prstDash val="sysDot"/>
+          </a:ln>
+        </p:spPr>
+      </p:sp>
+      <p:sp>
+        <p:nvSpPr>
+          <p:cNvPr id="32" name="Text 28"/>
+          <p:cNvSpPr txBox="1"/>
+          <p:nvPr/>
+        </p:nvSpPr>
+        <p:spPr>
+          <a:xfrm>
+            <a:off x="1417320" y="9189720"/>
+            <a:ext cx="1188720" cy="365760"/>
+          </a:xfrm>
+          <a:prstGeom prst="rect">
+            <a:avLst/>
+          </a:prstGeom>
+          <a:noFill/>
+          <a:ln/>
+        </p:spPr>
+        <p:txBody>
+          <a:bodyPr wrap="square" lIns="0" tIns="0" rIns="0" bIns="0" rtlCol="0" anchor="ctr"/>
+          <a:lstStyle/>
+          <a:p>
+            <a:pPr indent="0" marL="0">
+              <a:buNone/>
+            </a:pPr>
+            <a:r>
+              <a:rPr lang="en-US" sz="1000" dirty="0">
+                <a:solidFill>
+                  <a:srgbClr val="4A5F7A"/>
+                </a:solidFill>
+                <a:latin typeface="Poppins" pitchFamily="34" charset="0"/>
+                <a:ea typeface="Poppins" pitchFamily="34" charset="-122"/>
+                <a:cs typeface="Poppins" pitchFamily="34" charset="-120"/>
+              </a:rPr>
+              <a:t>Lösung:</a:t>
+            </a:r>
+            <a:endParaRPr lang="en-US" sz="1000" dirty="0"/>
+          </a:p>
+        </p:txBody>
+      </p:sp>
+      <p:sp>
+        <p:nvSpPr>
+          <p:cNvPr id="33" name="Shape 29"/>
+          <p:cNvSpPr/>
+          <p:nvPr/>
+        </p:nvSpPr>
+        <p:spPr>
+          <a:xfrm>
+            <a:off x="2606040" y="9509760"/>
             <a:ext cx="2743200" cy="0"/>
           </a:xfrm>
           <a:prstGeom prst="line">

--- a/videoslides/arbeitsblatt-textgleichungen-a4.pptx
+++ b/videoslides/arbeitsblatt-textgleichungen-a4.pptx
@@ -1440,62 +1440,9 @@
           <a:chExt cx="0" cy="0"/>
         </a:xfrm>
       </p:grpSpPr>
-      <p:sp>
-        <p:nvSpPr>
-          <p:cNvPr id="3" name="Text 0"/>
-          <p:cNvSpPr txBox="1"/>
-          <p:nvPr/>
-        </p:nvSpPr>
-        <p:spPr>
-          <a:xfrm>
-            <a:off x="548640" y="274320"/>
-            <a:ext cx="2926080" cy="731520"/>
-          </a:xfrm>
-          <a:prstGeom prst="rect">
-            <a:avLst/>
-          </a:prstGeom>
-          <a:noFill/>
-          <a:ln/>
-        </p:spPr>
-        <p:txBody>
-          <a:bodyPr wrap="square" lIns="0" tIns="0" rIns="0" bIns="0" rtlCol="0" anchor="ctr"/>
-          <a:lstStyle/>
-          <a:p>
-            <a:pPr indent="0" marL="0">
-              <a:buNone/>
-            </a:pPr>
-            <a:r>
-              <a:rPr lang="en-US" sz="3000" b="1" dirty="0">
-                <a:solidFill>
-                  <a:srgbClr val="475BA6"/>
-                </a:solidFill>
-                <a:latin typeface="Poppins" pitchFamily="34" charset="0"/>
-                <a:ea typeface="Poppins" pitchFamily="34" charset="-122"/>
-                <a:cs typeface="Poppins" pitchFamily="34" charset="-120"/>
-              </a:rPr>
-              <a:t>clever</a:t>
-            </a:r>
-            <a:pPr indent="0" marL="0">
-              <a:buNone/>
-            </a:pPr>
-            <a:r>
-              <a:rPr lang="en-US" sz="3000" b="1" dirty="0">
-                <a:solidFill>
-                  <a:srgbClr val="36448A"/>
-                </a:solidFill>
-                <a:latin typeface="Poppins" pitchFamily="34" charset="0"/>
-                <a:ea typeface="Poppins" pitchFamily="34" charset="-122"/>
-                <a:cs typeface="Poppins" pitchFamily="34" charset="-120"/>
-              </a:rPr>
-              <a:t>box</a:t>
-            </a:r>
-            <a:endParaRPr lang="en-US" sz="3000" dirty="0"/>
-          </a:p>
-        </p:txBody>
-      </p:sp>
       <p:pic>
         <p:nvPicPr>
-          <p:cNvPr id="4" name="Image 0" descr="QR-Code zu www.cleverbox.co.at">    </p:cNvPr>
+          <p:cNvPr id="3" name="Image 0" descr="cleverbox – modern. kostenlos. lehrreich.">    </p:cNvPr>
           <p:cNvPicPr>
             <a:picLocks noChangeAspect="1"/>
           </p:cNvPicPr>
@@ -1509,6 +1456,30 @@
         </p:blipFill>
         <p:spPr>
           <a:xfrm>
+            <a:off x="548640" y="201168"/>
+            <a:ext cx="2331720" cy="864835"/>
+          </a:xfrm>
+          <a:prstGeom prst="rect">
+            <a:avLst/>
+          </a:prstGeom>
+        </p:spPr>
+      </p:pic>
+      <p:pic>
+        <p:nvPicPr>
+          <p:cNvPr id="4" name="Image 1" descr="QR-Code zu www.cleverbox.co.at">    </p:cNvPr>
+          <p:cNvPicPr>
+            <a:picLocks noChangeAspect="1"/>
+          </p:cNvPicPr>
+          <p:nvPr/>
+        </p:nvPicPr>
+        <p:blipFill>
+          <a:blip r:embed="rId2"/>
+          <a:stretch>
+            <a:fillRect/>
+          </a:stretch>
+        </p:blipFill>
+        <p:spPr>
+          <a:xfrm>
             <a:off x="6144768" y="228600"/>
             <a:ext cx="868680" cy="868680"/>
           </a:xfrm>
@@ -1519,7 +1490,7 @@
       </p:pic>
       <p:sp>
         <p:nvSpPr>
-          <p:cNvPr id="5" name="Text 1"/>
+          <p:cNvPr id="5" name="Text 0"/>
           <p:cNvSpPr txBox="1"/>
           <p:nvPr/>
         </p:nvSpPr>
@@ -1581,7 +1552,7 @@
       </p:sp>
       <p:sp>
         <p:nvSpPr>
-          <p:cNvPr id="6" name="Shape 2"/>
+          <p:cNvPr id="6" name="Shape 1"/>
           <p:cNvSpPr/>
           <p:nvPr/>
         </p:nvSpPr>
@@ -1604,7 +1575,7 @@
       </p:sp>
       <p:sp>
         <p:nvSpPr>
-          <p:cNvPr id="7" name="Text 3"/>
+          <p:cNvPr id="7" name="Text 2"/>
           <p:cNvSpPr txBox="1"/>
           <p:nvPr/>
         </p:nvSpPr>
@@ -1643,7 +1614,7 @@
       </p:sp>
       <p:sp>
         <p:nvSpPr>
-          <p:cNvPr id="8" name="Text 4"/>
+          <p:cNvPr id="8" name="Text 3"/>
           <p:cNvSpPr txBox="1"/>
           <p:nvPr/>
         </p:nvSpPr>
@@ -1705,7 +1676,7 @@
       </p:sp>
       <p:sp>
         <p:nvSpPr>
-          <p:cNvPr id="9" name="Text 5"/>
+          <p:cNvPr id="9" name="Text 4"/>
           <p:cNvSpPr txBox="1"/>
           <p:nvPr/>
         </p:nvSpPr>
@@ -1744,7 +1715,7 @@
       </p:sp>
       <p:sp>
         <p:nvSpPr>
-          <p:cNvPr id="10" name="Shape 6"/>
+          <p:cNvPr id="10" name="Shape 5"/>
           <p:cNvSpPr/>
           <p:nvPr/>
         </p:nvSpPr>
@@ -1767,7 +1738,7 @@
       </p:sp>
       <p:sp>
         <p:nvSpPr>
-          <p:cNvPr id="11" name="Text 7"/>
+          <p:cNvPr id="11" name="Text 6"/>
           <p:cNvSpPr txBox="1"/>
           <p:nvPr/>
         </p:nvSpPr>
@@ -1806,7 +1777,7 @@
       </p:sp>
       <p:sp>
         <p:nvSpPr>
-          <p:cNvPr id="12" name="Shape 8"/>
+          <p:cNvPr id="12" name="Shape 7"/>
           <p:cNvSpPr/>
           <p:nvPr/>
         </p:nvSpPr>
@@ -1829,7 +1800,7 @@
       </p:sp>
       <p:sp>
         <p:nvSpPr>
-          <p:cNvPr id="13" name="Text 9"/>
+          <p:cNvPr id="13" name="Text 8"/>
           <p:cNvSpPr txBox="1"/>
           <p:nvPr/>
         </p:nvSpPr>
@@ -1868,7 +1839,7 @@
       </p:sp>
       <p:sp>
         <p:nvSpPr>
-          <p:cNvPr id="14" name="Shape 10"/>
+          <p:cNvPr id="14" name="Shape 9"/>
           <p:cNvSpPr/>
           <p:nvPr/>
         </p:nvSpPr>
@@ -1895,7 +1866,7 @@
       </p:sp>
       <p:sp>
         <p:nvSpPr>
-          <p:cNvPr id="15" name="Shape 11"/>
+          <p:cNvPr id="15" name="Shape 10"/>
           <p:cNvSpPr/>
           <p:nvPr/>
         </p:nvSpPr>
@@ -1920,7 +1891,7 @@
       </p:sp>
       <p:sp>
         <p:nvSpPr>
-          <p:cNvPr id="16" name="Text 12"/>
+          <p:cNvPr id="16" name="Text 11"/>
           <p:cNvSpPr txBox="1"/>
           <p:nvPr/>
         </p:nvSpPr>
@@ -1959,7 +1930,7 @@
       </p:sp>
       <p:sp>
         <p:nvSpPr>
-          <p:cNvPr id="17" name="Text 13"/>
+          <p:cNvPr id="17" name="Text 12"/>
           <p:cNvSpPr txBox="1"/>
           <p:nvPr/>
         </p:nvSpPr>
@@ -2001,7 +1972,7 @@
       </p:sp>
       <p:sp>
         <p:nvSpPr>
-          <p:cNvPr id="18" name="Text 14"/>
+          <p:cNvPr id="18" name="Text 13"/>
           <p:cNvSpPr txBox="1"/>
           <p:nvPr/>
         </p:nvSpPr>
@@ -2040,7 +2011,7 @@
       </p:sp>
       <p:sp>
         <p:nvSpPr>
-          <p:cNvPr id="19" name="Shape 15"/>
+          <p:cNvPr id="19" name="Shape 14"/>
           <p:cNvSpPr/>
           <p:nvPr/>
         </p:nvSpPr>
@@ -2063,7 +2034,7 @@
       </p:sp>
       <p:sp>
         <p:nvSpPr>
-          <p:cNvPr id="20" name="Text 16"/>
+          <p:cNvPr id="20" name="Text 15"/>
           <p:cNvSpPr txBox="1"/>
           <p:nvPr/>
         </p:nvSpPr>
@@ -2102,7 +2073,7 @@
       </p:sp>
       <p:sp>
         <p:nvSpPr>
-          <p:cNvPr id="21" name="Shape 17"/>
+          <p:cNvPr id="21" name="Shape 16"/>
           <p:cNvSpPr/>
           <p:nvPr/>
         </p:nvSpPr>
@@ -2125,7 +2096,7 @@
       </p:sp>
       <p:sp>
         <p:nvSpPr>
-          <p:cNvPr id="22" name="Shape 18"/>
+          <p:cNvPr id="22" name="Shape 17"/>
           <p:cNvSpPr/>
           <p:nvPr/>
         </p:nvSpPr>
@@ -2152,7 +2123,7 @@
       </p:sp>
       <p:sp>
         <p:nvSpPr>
-          <p:cNvPr id="23" name="Shape 19"/>
+          <p:cNvPr id="23" name="Shape 18"/>
           <p:cNvSpPr/>
           <p:nvPr/>
         </p:nvSpPr>
@@ -2177,7 +2148,7 @@
       </p:sp>
       <p:sp>
         <p:nvSpPr>
-          <p:cNvPr id="24" name="Text 20"/>
+          <p:cNvPr id="24" name="Text 19"/>
           <p:cNvSpPr txBox="1"/>
           <p:nvPr/>
         </p:nvSpPr>
@@ -2216,7 +2187,7 @@
       </p:sp>
       <p:sp>
         <p:nvSpPr>
-          <p:cNvPr id="25" name="Text 21"/>
+          <p:cNvPr id="25" name="Text 20"/>
           <p:cNvSpPr txBox="1"/>
           <p:nvPr/>
         </p:nvSpPr>
@@ -2258,7 +2229,7 @@
       </p:sp>
       <p:sp>
         <p:nvSpPr>
-          <p:cNvPr id="26" name="Text 22"/>
+          <p:cNvPr id="26" name="Text 21"/>
           <p:cNvSpPr txBox="1"/>
           <p:nvPr/>
         </p:nvSpPr>
@@ -2297,7 +2268,7 @@
       </p:sp>
       <p:sp>
         <p:nvSpPr>
-          <p:cNvPr id="27" name="Shape 23"/>
+          <p:cNvPr id="27" name="Shape 22"/>
           <p:cNvSpPr/>
           <p:nvPr/>
         </p:nvSpPr>
@@ -2320,7 +2291,7 @@
       </p:sp>
       <p:sp>
         <p:nvSpPr>
-          <p:cNvPr id="28" name="Text 24"/>
+          <p:cNvPr id="28" name="Text 23"/>
           <p:cNvSpPr txBox="1"/>
           <p:nvPr/>
         </p:nvSpPr>
@@ -2359,7 +2330,7 @@
       </p:sp>
       <p:sp>
         <p:nvSpPr>
-          <p:cNvPr id="29" name="Shape 25"/>
+          <p:cNvPr id="29" name="Shape 24"/>
           <p:cNvSpPr/>
           <p:nvPr/>
         </p:nvSpPr>
@@ -2382,7 +2353,7 @@
       </p:sp>
       <p:sp>
         <p:nvSpPr>
-          <p:cNvPr id="30" name="Shape 26"/>
+          <p:cNvPr id="30" name="Shape 25"/>
           <p:cNvSpPr/>
           <p:nvPr/>
         </p:nvSpPr>
@@ -2409,7 +2380,7 @@
       </p:sp>
       <p:sp>
         <p:nvSpPr>
-          <p:cNvPr id="31" name="Shape 27"/>
+          <p:cNvPr id="31" name="Shape 26"/>
           <p:cNvSpPr/>
           <p:nvPr/>
         </p:nvSpPr>
@@ -2434,7 +2405,7 @@
       </p:sp>
       <p:sp>
         <p:nvSpPr>
-          <p:cNvPr id="32" name="Text 28"/>
+          <p:cNvPr id="32" name="Text 27"/>
           <p:cNvSpPr txBox="1"/>
           <p:nvPr/>
         </p:nvSpPr>
@@ -2473,7 +2444,7 @@
       </p:sp>
       <p:sp>
         <p:nvSpPr>
-          <p:cNvPr id="33" name="Text 29"/>
+          <p:cNvPr id="33" name="Text 28"/>
           <p:cNvSpPr txBox="1"/>
           <p:nvPr/>
         </p:nvSpPr>
@@ -2515,7 +2486,7 @@
       </p:sp>
       <p:sp>
         <p:nvSpPr>
-          <p:cNvPr id="34" name="Text 30"/>
+          <p:cNvPr id="34" name="Text 29"/>
           <p:cNvSpPr txBox="1"/>
           <p:nvPr/>
         </p:nvSpPr>
@@ -2554,7 +2525,7 @@
       </p:sp>
       <p:sp>
         <p:nvSpPr>
-          <p:cNvPr id="35" name="Shape 31"/>
+          <p:cNvPr id="35" name="Shape 30"/>
           <p:cNvSpPr/>
           <p:nvPr/>
         </p:nvSpPr>
@@ -2577,7 +2548,7 @@
       </p:sp>
       <p:sp>
         <p:nvSpPr>
-          <p:cNvPr id="36" name="Text 32"/>
+          <p:cNvPr id="36" name="Text 31"/>
           <p:cNvSpPr txBox="1"/>
           <p:nvPr/>
         </p:nvSpPr>
@@ -2616,7 +2587,7 @@
       </p:sp>
       <p:sp>
         <p:nvSpPr>
-          <p:cNvPr id="37" name="Shape 33"/>
+          <p:cNvPr id="37" name="Shape 32"/>
           <p:cNvSpPr/>
           <p:nvPr/>
         </p:nvSpPr>
@@ -2662,62 +2633,9 @@
           <a:chExt cx="0" cy="0"/>
         </a:xfrm>
       </p:grpSpPr>
-      <p:sp>
-        <p:nvSpPr>
-          <p:cNvPr id="3" name="Text 0"/>
-          <p:cNvSpPr txBox="1"/>
-          <p:nvPr/>
-        </p:nvSpPr>
-        <p:spPr>
-          <a:xfrm>
-            <a:off x="548640" y="274320"/>
-            <a:ext cx="2926080" cy="731520"/>
-          </a:xfrm>
-          <a:prstGeom prst="rect">
-            <a:avLst/>
-          </a:prstGeom>
-          <a:noFill/>
-          <a:ln/>
-        </p:spPr>
-        <p:txBody>
-          <a:bodyPr wrap="square" lIns="0" tIns="0" rIns="0" bIns="0" rtlCol="0" anchor="ctr"/>
-          <a:lstStyle/>
-          <a:p>
-            <a:pPr indent="0" marL="0">
-              <a:buNone/>
-            </a:pPr>
-            <a:r>
-              <a:rPr lang="en-US" sz="3000" b="1" dirty="0">
-                <a:solidFill>
-                  <a:srgbClr val="475BA6"/>
-                </a:solidFill>
-                <a:latin typeface="Poppins" pitchFamily="34" charset="0"/>
-                <a:ea typeface="Poppins" pitchFamily="34" charset="-122"/>
-                <a:cs typeface="Poppins" pitchFamily="34" charset="-120"/>
-              </a:rPr>
-              <a:t>clever</a:t>
-            </a:r>
-            <a:pPr indent="0" marL="0">
-              <a:buNone/>
-            </a:pPr>
-            <a:r>
-              <a:rPr lang="en-US" sz="3000" b="1" dirty="0">
-                <a:solidFill>
-                  <a:srgbClr val="36448A"/>
-                </a:solidFill>
-                <a:latin typeface="Poppins" pitchFamily="34" charset="0"/>
-                <a:ea typeface="Poppins" pitchFamily="34" charset="-122"/>
-                <a:cs typeface="Poppins" pitchFamily="34" charset="-120"/>
-              </a:rPr>
-              <a:t>box</a:t>
-            </a:r>
-            <a:endParaRPr lang="en-US" sz="3000" dirty="0"/>
-          </a:p>
-        </p:txBody>
-      </p:sp>
       <p:pic>
         <p:nvPicPr>
-          <p:cNvPr id="4" name="Image 0" descr="QR-Code zu www.cleverbox.co.at">    </p:cNvPr>
+          <p:cNvPr id="3" name="Image 0" descr="cleverbox – modern. kostenlos. lehrreich.">    </p:cNvPr>
           <p:cNvPicPr>
             <a:picLocks noChangeAspect="1"/>
           </p:cNvPicPr>
@@ -2731,6 +2649,30 @@
         </p:blipFill>
         <p:spPr>
           <a:xfrm>
+            <a:off x="548640" y="201168"/>
+            <a:ext cx="2331720" cy="864835"/>
+          </a:xfrm>
+          <a:prstGeom prst="rect">
+            <a:avLst/>
+          </a:prstGeom>
+        </p:spPr>
+      </p:pic>
+      <p:pic>
+        <p:nvPicPr>
+          <p:cNvPr id="4" name="Image 1" descr="QR-Code zu www.cleverbox.co.at">    </p:cNvPr>
+          <p:cNvPicPr>
+            <a:picLocks noChangeAspect="1"/>
+          </p:cNvPicPr>
+          <p:nvPr/>
+        </p:nvPicPr>
+        <p:blipFill>
+          <a:blip r:embed="rId2"/>
+          <a:stretch>
+            <a:fillRect/>
+          </a:stretch>
+        </p:blipFill>
+        <p:spPr>
+          <a:xfrm>
             <a:off x="6144768" y="228600"/>
             <a:ext cx="868680" cy="868680"/>
           </a:xfrm>
@@ -2741,7 +2683,7 @@
       </p:pic>
       <p:sp>
         <p:nvSpPr>
-          <p:cNvPr id="5" name="Text 1"/>
+          <p:cNvPr id="5" name="Text 0"/>
           <p:cNvSpPr txBox="1"/>
           <p:nvPr/>
         </p:nvSpPr>
@@ -2803,7 +2745,7 @@
       </p:sp>
       <p:sp>
         <p:nvSpPr>
-          <p:cNvPr id="6" name="Shape 2"/>
+          <p:cNvPr id="6" name="Shape 1"/>
           <p:cNvSpPr/>
           <p:nvPr/>
         </p:nvSpPr>
@@ -2826,7 +2768,7 @@
       </p:sp>
       <p:sp>
         <p:nvSpPr>
-          <p:cNvPr id="7" name="Text 3"/>
+          <p:cNvPr id="7" name="Text 2"/>
           <p:cNvSpPr txBox="1"/>
           <p:nvPr/>
         </p:nvSpPr>
@@ -2865,7 +2807,7 @@
       </p:sp>
       <p:sp>
         <p:nvSpPr>
-          <p:cNvPr id="8" name="Shape 4"/>
+          <p:cNvPr id="8" name="Shape 3"/>
           <p:cNvSpPr/>
           <p:nvPr/>
         </p:nvSpPr>
@@ -2892,7 +2834,7 @@
       </p:sp>
       <p:sp>
         <p:nvSpPr>
-          <p:cNvPr id="9" name="Shape 5"/>
+          <p:cNvPr id="9" name="Shape 4"/>
           <p:cNvSpPr/>
           <p:nvPr/>
         </p:nvSpPr>
@@ -2917,7 +2859,7 @@
       </p:sp>
       <p:sp>
         <p:nvSpPr>
-          <p:cNvPr id="10" name="Text 6"/>
+          <p:cNvPr id="10" name="Text 5"/>
           <p:cNvSpPr txBox="1"/>
           <p:nvPr/>
         </p:nvSpPr>
@@ -2956,7 +2898,7 @@
       </p:sp>
       <p:sp>
         <p:nvSpPr>
-          <p:cNvPr id="11" name="Text 7"/>
+          <p:cNvPr id="11" name="Text 6"/>
           <p:cNvSpPr txBox="1"/>
           <p:nvPr/>
         </p:nvSpPr>
@@ -2998,7 +2940,7 @@
       </p:sp>
       <p:sp>
         <p:nvSpPr>
-          <p:cNvPr id="12" name="Text 8"/>
+          <p:cNvPr id="12" name="Text 7"/>
           <p:cNvSpPr txBox="1"/>
           <p:nvPr/>
         </p:nvSpPr>
@@ -3037,7 +2979,7 @@
       </p:sp>
       <p:sp>
         <p:nvSpPr>
-          <p:cNvPr id="13" name="Shape 9"/>
+          <p:cNvPr id="13" name="Shape 8"/>
           <p:cNvSpPr/>
           <p:nvPr/>
         </p:nvSpPr>
@@ -3060,7 +3002,7 @@
       </p:sp>
       <p:sp>
         <p:nvSpPr>
-          <p:cNvPr id="14" name="Text 10"/>
+          <p:cNvPr id="14" name="Text 9"/>
           <p:cNvSpPr txBox="1"/>
           <p:nvPr/>
         </p:nvSpPr>
@@ -3099,7 +3041,7 @@
       </p:sp>
       <p:sp>
         <p:nvSpPr>
-          <p:cNvPr id="15" name="Shape 11"/>
+          <p:cNvPr id="15" name="Shape 10"/>
           <p:cNvSpPr/>
           <p:nvPr/>
         </p:nvSpPr>
@@ -3122,7 +3064,7 @@
       </p:sp>
       <p:sp>
         <p:nvSpPr>
-          <p:cNvPr id="16" name="Shape 12"/>
+          <p:cNvPr id="16" name="Shape 11"/>
           <p:cNvSpPr/>
           <p:nvPr/>
         </p:nvSpPr>
@@ -3149,7 +3091,7 @@
       </p:sp>
       <p:sp>
         <p:nvSpPr>
-          <p:cNvPr id="17" name="Shape 13"/>
+          <p:cNvPr id="17" name="Shape 12"/>
           <p:cNvSpPr/>
           <p:nvPr/>
         </p:nvSpPr>
@@ -3174,7 +3116,7 @@
       </p:sp>
       <p:sp>
         <p:nvSpPr>
-          <p:cNvPr id="18" name="Text 14"/>
+          <p:cNvPr id="18" name="Text 13"/>
           <p:cNvSpPr txBox="1"/>
           <p:nvPr/>
         </p:nvSpPr>
@@ -3213,7 +3155,7 @@
       </p:sp>
       <p:sp>
         <p:nvSpPr>
-          <p:cNvPr id="19" name="Text 15"/>
+          <p:cNvPr id="19" name="Text 14"/>
           <p:cNvSpPr txBox="1"/>
           <p:nvPr/>
         </p:nvSpPr>
@@ -3255,7 +3197,7 @@
       </p:sp>
       <p:sp>
         <p:nvSpPr>
-          <p:cNvPr id="20" name="Text 16"/>
+          <p:cNvPr id="20" name="Text 15"/>
           <p:cNvSpPr txBox="1"/>
           <p:nvPr/>
         </p:nvSpPr>
@@ -3294,7 +3236,7 @@
       </p:sp>
       <p:sp>
         <p:nvSpPr>
-          <p:cNvPr id="21" name="Shape 17"/>
+          <p:cNvPr id="21" name="Shape 16"/>
           <p:cNvSpPr/>
           <p:nvPr/>
         </p:nvSpPr>
@@ -3317,7 +3259,7 @@
       </p:sp>
       <p:sp>
         <p:nvSpPr>
-          <p:cNvPr id="22" name="Text 18"/>
+          <p:cNvPr id="22" name="Text 17"/>
           <p:cNvSpPr txBox="1"/>
           <p:nvPr/>
         </p:nvSpPr>
@@ -3356,7 +3298,7 @@
       </p:sp>
       <p:sp>
         <p:nvSpPr>
-          <p:cNvPr id="23" name="Shape 19"/>
+          <p:cNvPr id="23" name="Shape 18"/>
           <p:cNvSpPr/>
           <p:nvPr/>
         </p:nvSpPr>
@@ -3379,7 +3321,7 @@
       </p:sp>
       <p:sp>
         <p:nvSpPr>
-          <p:cNvPr id="24" name="Shape 20"/>
+          <p:cNvPr id="24" name="Shape 19"/>
           <p:cNvSpPr/>
           <p:nvPr/>
         </p:nvSpPr>
@@ -3406,7 +3348,7 @@
       </p:sp>
       <p:sp>
         <p:nvSpPr>
-          <p:cNvPr id="25" name="Shape 21"/>
+          <p:cNvPr id="25" name="Shape 20"/>
           <p:cNvSpPr/>
           <p:nvPr/>
         </p:nvSpPr>
@@ -3431,7 +3373,7 @@
       </p:sp>
       <p:sp>
         <p:nvSpPr>
-          <p:cNvPr id="26" name="Text 22"/>
+          <p:cNvPr id="26" name="Text 21"/>
           <p:cNvSpPr txBox="1"/>
           <p:nvPr/>
         </p:nvSpPr>
@@ -3470,7 +3412,7 @@
       </p:sp>
       <p:sp>
         <p:nvSpPr>
-          <p:cNvPr id="27" name="Text 23"/>
+          <p:cNvPr id="27" name="Text 22"/>
           <p:cNvSpPr txBox="1"/>
           <p:nvPr/>
         </p:nvSpPr>
@@ -3512,7 +3454,7 @@
       </p:sp>
       <p:sp>
         <p:nvSpPr>
-          <p:cNvPr id="28" name="Text 24"/>
+          <p:cNvPr id="28" name="Text 23"/>
           <p:cNvSpPr txBox="1"/>
           <p:nvPr/>
         </p:nvSpPr>
@@ -3551,7 +3493,7 @@
       </p:sp>
       <p:sp>
         <p:nvSpPr>
-          <p:cNvPr id="29" name="Shape 25"/>
+          <p:cNvPr id="29" name="Shape 24"/>
           <p:cNvSpPr/>
           <p:nvPr/>
         </p:nvSpPr>
@@ -3574,7 +3516,7 @@
       </p:sp>
       <p:sp>
         <p:nvSpPr>
-          <p:cNvPr id="30" name="Text 26"/>
+          <p:cNvPr id="30" name="Text 25"/>
           <p:cNvSpPr txBox="1"/>
           <p:nvPr/>
         </p:nvSpPr>
@@ -3613,7 +3555,7 @@
       </p:sp>
       <p:sp>
         <p:nvSpPr>
-          <p:cNvPr id="31" name="Shape 27"/>
+          <p:cNvPr id="31" name="Shape 26"/>
           <p:cNvSpPr/>
           <p:nvPr/>
         </p:nvSpPr>
@@ -3636,7 +3578,7 @@
       </p:sp>
       <p:sp>
         <p:nvSpPr>
-          <p:cNvPr id="32" name="Shape 28"/>
+          <p:cNvPr id="32" name="Shape 27"/>
           <p:cNvSpPr/>
           <p:nvPr/>
         </p:nvSpPr>
@@ -3663,7 +3605,7 @@
       </p:sp>
       <p:sp>
         <p:nvSpPr>
-          <p:cNvPr id="33" name="Shape 29"/>
+          <p:cNvPr id="33" name="Shape 28"/>
           <p:cNvSpPr/>
           <p:nvPr/>
         </p:nvSpPr>
@@ -3688,7 +3630,7 @@
       </p:sp>
       <p:sp>
         <p:nvSpPr>
-          <p:cNvPr id="34" name="Text 30"/>
+          <p:cNvPr id="34" name="Text 29"/>
           <p:cNvSpPr txBox="1"/>
           <p:nvPr/>
         </p:nvSpPr>
@@ -3727,7 +3669,7 @@
       </p:sp>
       <p:sp>
         <p:nvSpPr>
-          <p:cNvPr id="35" name="Text 31"/>
+          <p:cNvPr id="35" name="Text 30"/>
           <p:cNvSpPr txBox="1"/>
           <p:nvPr/>
         </p:nvSpPr>
@@ -3769,7 +3711,7 @@
       </p:sp>
       <p:sp>
         <p:nvSpPr>
-          <p:cNvPr id="36" name="Text 32"/>
+          <p:cNvPr id="36" name="Text 31"/>
           <p:cNvSpPr txBox="1"/>
           <p:nvPr/>
         </p:nvSpPr>
@@ -3808,7 +3750,7 @@
       </p:sp>
       <p:sp>
         <p:nvSpPr>
-          <p:cNvPr id="37" name="Shape 33"/>
+          <p:cNvPr id="37" name="Shape 32"/>
           <p:cNvSpPr/>
           <p:nvPr/>
         </p:nvSpPr>
@@ -3831,7 +3773,7 @@
       </p:sp>
       <p:sp>
         <p:nvSpPr>
-          <p:cNvPr id="38" name="Text 34"/>
+          <p:cNvPr id="38" name="Text 33"/>
           <p:cNvSpPr txBox="1"/>
           <p:nvPr/>
         </p:nvSpPr>
@@ -3870,7 +3812,7 @@
       </p:sp>
       <p:sp>
         <p:nvSpPr>
-          <p:cNvPr id="39" name="Shape 35"/>
+          <p:cNvPr id="39" name="Shape 34"/>
           <p:cNvSpPr/>
           <p:nvPr/>
         </p:nvSpPr>
@@ -3916,62 +3858,9 @@
           <a:chExt cx="0" cy="0"/>
         </a:xfrm>
       </p:grpSpPr>
-      <p:sp>
-        <p:nvSpPr>
-          <p:cNvPr id="3" name="Text 0"/>
-          <p:cNvSpPr txBox="1"/>
-          <p:nvPr/>
-        </p:nvSpPr>
-        <p:spPr>
-          <a:xfrm>
-            <a:off x="548640" y="274320"/>
-            <a:ext cx="2926080" cy="731520"/>
-          </a:xfrm>
-          <a:prstGeom prst="rect">
-            <a:avLst/>
-          </a:prstGeom>
-          <a:noFill/>
-          <a:ln/>
-        </p:spPr>
-        <p:txBody>
-          <a:bodyPr wrap="square" lIns="0" tIns="0" rIns="0" bIns="0" rtlCol="0" anchor="ctr"/>
-          <a:lstStyle/>
-          <a:p>
-            <a:pPr indent="0" marL="0">
-              <a:buNone/>
-            </a:pPr>
-            <a:r>
-              <a:rPr lang="en-US" sz="3000" b="1" dirty="0">
-                <a:solidFill>
-                  <a:srgbClr val="475BA6"/>
-                </a:solidFill>
-                <a:latin typeface="Poppins" pitchFamily="34" charset="0"/>
-                <a:ea typeface="Poppins" pitchFamily="34" charset="-122"/>
-                <a:cs typeface="Poppins" pitchFamily="34" charset="-120"/>
-              </a:rPr>
-              <a:t>clever</a:t>
-            </a:r>
-            <a:pPr indent="0" marL="0">
-              <a:buNone/>
-            </a:pPr>
-            <a:r>
-              <a:rPr lang="en-US" sz="3000" b="1" dirty="0">
-                <a:solidFill>
-                  <a:srgbClr val="36448A"/>
-                </a:solidFill>
-                <a:latin typeface="Poppins" pitchFamily="34" charset="0"/>
-                <a:ea typeface="Poppins" pitchFamily="34" charset="-122"/>
-                <a:cs typeface="Poppins" pitchFamily="34" charset="-120"/>
-              </a:rPr>
-              <a:t>box</a:t>
-            </a:r>
-            <a:endParaRPr lang="en-US" sz="3000" dirty="0"/>
-          </a:p>
-        </p:txBody>
-      </p:sp>
       <p:pic>
         <p:nvPicPr>
-          <p:cNvPr id="4" name="Image 0" descr="QR-Code zu www.cleverbox.co.at">    </p:cNvPr>
+          <p:cNvPr id="3" name="Image 0" descr="cleverbox – modern. kostenlos. lehrreich.">    </p:cNvPr>
           <p:cNvPicPr>
             <a:picLocks noChangeAspect="1"/>
           </p:cNvPicPr>
@@ -3985,6 +3874,30 @@
         </p:blipFill>
         <p:spPr>
           <a:xfrm>
+            <a:off x="548640" y="201168"/>
+            <a:ext cx="2331720" cy="864835"/>
+          </a:xfrm>
+          <a:prstGeom prst="rect">
+            <a:avLst/>
+          </a:prstGeom>
+        </p:spPr>
+      </p:pic>
+      <p:pic>
+        <p:nvPicPr>
+          <p:cNvPr id="4" name="Image 1" descr="QR-Code zu www.cleverbox.co.at">    </p:cNvPr>
+          <p:cNvPicPr>
+            <a:picLocks noChangeAspect="1"/>
+          </p:cNvPicPr>
+          <p:nvPr/>
+        </p:nvPicPr>
+        <p:blipFill>
+          <a:blip r:embed="rId2"/>
+          <a:stretch>
+            <a:fillRect/>
+          </a:stretch>
+        </p:blipFill>
+        <p:spPr>
+          <a:xfrm>
             <a:off x="6144768" y="228600"/>
             <a:ext cx="868680" cy="868680"/>
           </a:xfrm>
@@ -3995,7 +3908,7 @@
       </p:pic>
       <p:sp>
         <p:nvSpPr>
-          <p:cNvPr id="5" name="Text 1"/>
+          <p:cNvPr id="5" name="Text 0"/>
           <p:cNvSpPr txBox="1"/>
           <p:nvPr/>
         </p:nvSpPr>
@@ -4057,7 +3970,7 @@
       </p:sp>
       <p:sp>
         <p:nvSpPr>
-          <p:cNvPr id="6" name="Shape 2"/>
+          <p:cNvPr id="6" name="Shape 1"/>
           <p:cNvSpPr/>
           <p:nvPr/>
         </p:nvSpPr>
@@ -4080,7 +3993,7 @@
       </p:sp>
       <p:sp>
         <p:nvSpPr>
-          <p:cNvPr id="7" name="Text 3"/>
+          <p:cNvPr id="7" name="Text 2"/>
           <p:cNvSpPr txBox="1"/>
           <p:nvPr/>
         </p:nvSpPr>
@@ -4119,7 +4032,7 @@
       </p:sp>
       <p:sp>
         <p:nvSpPr>
-          <p:cNvPr id="8" name="Shape 4"/>
+          <p:cNvPr id="8" name="Shape 3"/>
           <p:cNvSpPr/>
           <p:nvPr/>
         </p:nvSpPr>
@@ -4146,7 +4059,7 @@
       </p:sp>
       <p:sp>
         <p:nvSpPr>
-          <p:cNvPr id="9" name="Shape 5"/>
+          <p:cNvPr id="9" name="Shape 4"/>
           <p:cNvSpPr/>
           <p:nvPr/>
         </p:nvSpPr>
@@ -4171,7 +4084,7 @@
       </p:sp>
       <p:sp>
         <p:nvSpPr>
-          <p:cNvPr id="10" name="Text 6"/>
+          <p:cNvPr id="10" name="Text 5"/>
           <p:cNvSpPr txBox="1"/>
           <p:nvPr/>
         </p:nvSpPr>
@@ -4210,7 +4123,7 @@
       </p:sp>
       <p:sp>
         <p:nvSpPr>
-          <p:cNvPr id="11" name="Text 7"/>
+          <p:cNvPr id="11" name="Text 6"/>
           <p:cNvSpPr txBox="1"/>
           <p:nvPr/>
         </p:nvSpPr>
@@ -4252,7 +4165,7 @@
       </p:sp>
       <p:sp>
         <p:nvSpPr>
-          <p:cNvPr id="12" name="Text 8"/>
+          <p:cNvPr id="12" name="Text 7"/>
           <p:cNvSpPr txBox="1"/>
           <p:nvPr/>
         </p:nvSpPr>
@@ -4291,7 +4204,7 @@
       </p:sp>
       <p:sp>
         <p:nvSpPr>
-          <p:cNvPr id="13" name="Shape 9"/>
+          <p:cNvPr id="13" name="Shape 8"/>
           <p:cNvSpPr/>
           <p:nvPr/>
         </p:nvSpPr>
@@ -4314,7 +4227,7 @@
       </p:sp>
       <p:sp>
         <p:nvSpPr>
-          <p:cNvPr id="14" name="Text 10"/>
+          <p:cNvPr id="14" name="Text 9"/>
           <p:cNvSpPr txBox="1"/>
           <p:nvPr/>
         </p:nvSpPr>
@@ -4353,7 +4266,7 @@
       </p:sp>
       <p:sp>
         <p:nvSpPr>
-          <p:cNvPr id="15" name="Shape 11"/>
+          <p:cNvPr id="15" name="Shape 10"/>
           <p:cNvSpPr/>
           <p:nvPr/>
         </p:nvSpPr>
@@ -4376,7 +4289,7 @@
       </p:sp>
       <p:sp>
         <p:nvSpPr>
-          <p:cNvPr id="16" name="Shape 12"/>
+          <p:cNvPr id="16" name="Shape 11"/>
           <p:cNvSpPr/>
           <p:nvPr/>
         </p:nvSpPr>
@@ -4403,7 +4316,7 @@
       </p:sp>
       <p:sp>
         <p:nvSpPr>
-          <p:cNvPr id="17" name="Shape 13"/>
+          <p:cNvPr id="17" name="Shape 12"/>
           <p:cNvSpPr/>
           <p:nvPr/>
         </p:nvSpPr>
@@ -4428,7 +4341,7 @@
       </p:sp>
       <p:sp>
         <p:nvSpPr>
-          <p:cNvPr id="18" name="Text 14"/>
+          <p:cNvPr id="18" name="Text 13"/>
           <p:cNvSpPr txBox="1"/>
           <p:nvPr/>
         </p:nvSpPr>
@@ -4467,7 +4380,7 @@
       </p:sp>
       <p:sp>
         <p:nvSpPr>
-          <p:cNvPr id="19" name="Text 15"/>
+          <p:cNvPr id="19" name="Text 14"/>
           <p:cNvSpPr txBox="1"/>
           <p:nvPr/>
         </p:nvSpPr>
@@ -4509,7 +4422,7 @@
       </p:sp>
       <p:sp>
         <p:nvSpPr>
-          <p:cNvPr id="20" name="Text 16"/>
+          <p:cNvPr id="20" name="Text 15"/>
           <p:cNvSpPr txBox="1"/>
           <p:nvPr/>
         </p:nvSpPr>
@@ -4548,7 +4461,7 @@
       </p:sp>
       <p:sp>
         <p:nvSpPr>
-          <p:cNvPr id="21" name="Shape 17"/>
+          <p:cNvPr id="21" name="Shape 16"/>
           <p:cNvSpPr/>
           <p:nvPr/>
         </p:nvSpPr>
@@ -4571,7 +4484,7 @@
       </p:sp>
       <p:sp>
         <p:nvSpPr>
-          <p:cNvPr id="22" name="Text 18"/>
+          <p:cNvPr id="22" name="Text 17"/>
           <p:cNvSpPr txBox="1"/>
           <p:nvPr/>
         </p:nvSpPr>
@@ -4610,7 +4523,7 @@
       </p:sp>
       <p:sp>
         <p:nvSpPr>
-          <p:cNvPr id="23" name="Shape 19"/>
+          <p:cNvPr id="23" name="Shape 18"/>
           <p:cNvSpPr/>
           <p:nvPr/>
         </p:nvSpPr>
@@ -4633,7 +4546,7 @@
       </p:sp>
       <p:sp>
         <p:nvSpPr>
-          <p:cNvPr id="24" name="Shape 20"/>
+          <p:cNvPr id="24" name="Shape 19"/>
           <p:cNvSpPr/>
           <p:nvPr/>
         </p:nvSpPr>
@@ -4660,7 +4573,7 @@
       </p:sp>
       <p:sp>
         <p:nvSpPr>
-          <p:cNvPr id="25" name="Shape 21"/>
+          <p:cNvPr id="25" name="Shape 20"/>
           <p:cNvSpPr/>
           <p:nvPr/>
         </p:nvSpPr>
@@ -4685,7 +4598,7 @@
       </p:sp>
       <p:sp>
         <p:nvSpPr>
-          <p:cNvPr id="26" name="Text 22"/>
+          <p:cNvPr id="26" name="Text 21"/>
           <p:cNvSpPr txBox="1"/>
           <p:nvPr/>
         </p:nvSpPr>
@@ -4724,7 +4637,7 @@
       </p:sp>
       <p:sp>
         <p:nvSpPr>
-          <p:cNvPr id="27" name="Text 23"/>
+          <p:cNvPr id="27" name="Text 22"/>
           <p:cNvSpPr txBox="1"/>
           <p:nvPr/>
         </p:nvSpPr>
@@ -4766,7 +4679,7 @@
       </p:sp>
       <p:sp>
         <p:nvSpPr>
-          <p:cNvPr id="28" name="Text 24"/>
+          <p:cNvPr id="28" name="Text 23"/>
           <p:cNvSpPr txBox="1"/>
           <p:nvPr/>
         </p:nvSpPr>
@@ -4805,7 +4718,7 @@
       </p:sp>
       <p:sp>
         <p:nvSpPr>
-          <p:cNvPr id="29" name="Shape 25"/>
+          <p:cNvPr id="29" name="Shape 24"/>
           <p:cNvSpPr/>
           <p:nvPr/>
         </p:nvSpPr>
@@ -4828,7 +4741,7 @@
       </p:sp>
       <p:sp>
         <p:nvSpPr>
-          <p:cNvPr id="30" name="Text 26"/>
+          <p:cNvPr id="30" name="Text 25"/>
           <p:cNvSpPr txBox="1"/>
           <p:nvPr/>
         </p:nvSpPr>
@@ -4867,7 +4780,7 @@
       </p:sp>
       <p:sp>
         <p:nvSpPr>
-          <p:cNvPr id="31" name="Shape 27"/>
+          <p:cNvPr id="31" name="Shape 26"/>
           <p:cNvSpPr/>
           <p:nvPr/>
         </p:nvSpPr>
@@ -4913,62 +4826,9 @@
           <a:chExt cx="0" cy="0"/>
         </a:xfrm>
       </p:grpSpPr>
-      <p:sp>
-        <p:nvSpPr>
-          <p:cNvPr id="3" name="Text 0"/>
-          <p:cNvSpPr txBox="1"/>
-          <p:nvPr/>
-        </p:nvSpPr>
-        <p:spPr>
-          <a:xfrm>
-            <a:off x="548640" y="274320"/>
-            <a:ext cx="2926080" cy="731520"/>
-          </a:xfrm>
-          <a:prstGeom prst="rect">
-            <a:avLst/>
-          </a:prstGeom>
-          <a:noFill/>
-          <a:ln/>
-        </p:spPr>
-        <p:txBody>
-          <a:bodyPr wrap="square" lIns="0" tIns="0" rIns="0" bIns="0" rtlCol="0" anchor="ctr"/>
-          <a:lstStyle/>
-          <a:p>
-            <a:pPr indent="0" marL="0">
-              <a:buNone/>
-            </a:pPr>
-            <a:r>
-              <a:rPr lang="en-US" sz="3000" b="1" dirty="0">
-                <a:solidFill>
-                  <a:srgbClr val="475BA6"/>
-                </a:solidFill>
-                <a:latin typeface="Poppins" pitchFamily="34" charset="0"/>
-                <a:ea typeface="Poppins" pitchFamily="34" charset="-122"/>
-                <a:cs typeface="Poppins" pitchFamily="34" charset="-120"/>
-              </a:rPr>
-              <a:t>clever</a:t>
-            </a:r>
-            <a:pPr indent="0" marL="0">
-              <a:buNone/>
-            </a:pPr>
-            <a:r>
-              <a:rPr lang="en-US" sz="3000" b="1" dirty="0">
-                <a:solidFill>
-                  <a:srgbClr val="36448A"/>
-                </a:solidFill>
-                <a:latin typeface="Poppins" pitchFamily="34" charset="0"/>
-                <a:ea typeface="Poppins" pitchFamily="34" charset="-122"/>
-                <a:cs typeface="Poppins" pitchFamily="34" charset="-120"/>
-              </a:rPr>
-              <a:t>box</a:t>
-            </a:r>
-            <a:endParaRPr lang="en-US" sz="3000" dirty="0"/>
-          </a:p>
-        </p:txBody>
-      </p:sp>
       <p:pic>
         <p:nvPicPr>
-          <p:cNvPr id="4" name="Image 0" descr="QR-Code zu www.cleverbox.co.at">    </p:cNvPr>
+          <p:cNvPr id="3" name="Image 0" descr="cleverbox – modern. kostenlos. lehrreich.">    </p:cNvPr>
           <p:cNvPicPr>
             <a:picLocks noChangeAspect="1"/>
           </p:cNvPicPr>
@@ -4982,6 +4842,30 @@
         </p:blipFill>
         <p:spPr>
           <a:xfrm>
+            <a:off x="548640" y="201168"/>
+            <a:ext cx="2331720" cy="864835"/>
+          </a:xfrm>
+          <a:prstGeom prst="rect">
+            <a:avLst/>
+          </a:prstGeom>
+        </p:spPr>
+      </p:pic>
+      <p:pic>
+        <p:nvPicPr>
+          <p:cNvPr id="4" name="Image 1" descr="QR-Code zu www.cleverbox.co.at">    </p:cNvPr>
+          <p:cNvPicPr>
+            <a:picLocks noChangeAspect="1"/>
+          </p:cNvPicPr>
+          <p:nvPr/>
+        </p:nvPicPr>
+        <p:blipFill>
+          <a:blip r:embed="rId2"/>
+          <a:stretch>
+            <a:fillRect/>
+          </a:stretch>
+        </p:blipFill>
+        <p:spPr>
+          <a:xfrm>
             <a:off x="6144768" y="228600"/>
             <a:ext cx="868680" cy="868680"/>
           </a:xfrm>
@@ -4992,7 +4876,7 @@
       </p:pic>
       <p:sp>
         <p:nvSpPr>
-          <p:cNvPr id="5" name="Text 1"/>
+          <p:cNvPr id="5" name="Text 0"/>
           <p:cNvSpPr txBox="1"/>
           <p:nvPr/>
         </p:nvSpPr>
@@ -5054,7 +4938,7 @@
       </p:sp>
       <p:sp>
         <p:nvSpPr>
-          <p:cNvPr id="6" name="Shape 2"/>
+          <p:cNvPr id="6" name="Shape 1"/>
           <p:cNvSpPr/>
           <p:nvPr/>
         </p:nvSpPr>
@@ -5077,7 +4961,7 @@
       </p:sp>
       <p:sp>
         <p:nvSpPr>
-          <p:cNvPr id="7" name="Text 3"/>
+          <p:cNvPr id="7" name="Text 2"/>
           <p:cNvSpPr txBox="1"/>
           <p:nvPr/>
         </p:nvSpPr>
@@ -5116,7 +5000,7 @@
       </p:sp>
       <p:sp>
         <p:nvSpPr>
-          <p:cNvPr id="8" name="Shape 4"/>
+          <p:cNvPr id="8" name="Shape 3"/>
           <p:cNvSpPr/>
           <p:nvPr/>
         </p:nvSpPr>
@@ -5143,7 +5027,7 @@
       </p:sp>
       <p:sp>
         <p:nvSpPr>
-          <p:cNvPr id="9" name="Shape 5"/>
+          <p:cNvPr id="9" name="Shape 4"/>
           <p:cNvSpPr/>
           <p:nvPr/>
         </p:nvSpPr>
@@ -5168,7 +5052,7 @@
       </p:sp>
       <p:sp>
         <p:nvSpPr>
-          <p:cNvPr id="10" name="Text 6"/>
+          <p:cNvPr id="10" name="Text 5"/>
           <p:cNvSpPr txBox="1"/>
           <p:nvPr/>
         </p:nvSpPr>
@@ -5207,7 +5091,7 @@
       </p:sp>
       <p:sp>
         <p:nvSpPr>
-          <p:cNvPr id="11" name="Text 7"/>
+          <p:cNvPr id="11" name="Text 6"/>
           <p:cNvSpPr txBox="1"/>
           <p:nvPr/>
         </p:nvSpPr>
@@ -5249,7 +5133,7 @@
       </p:sp>
       <p:sp>
         <p:nvSpPr>
-          <p:cNvPr id="12" name="Text 8"/>
+          <p:cNvPr id="12" name="Text 7"/>
           <p:cNvSpPr txBox="1"/>
           <p:nvPr/>
         </p:nvSpPr>
@@ -5288,7 +5172,7 @@
       </p:sp>
       <p:sp>
         <p:nvSpPr>
-          <p:cNvPr id="13" name="Shape 9"/>
+          <p:cNvPr id="13" name="Shape 8"/>
           <p:cNvSpPr/>
           <p:nvPr/>
         </p:nvSpPr>
@@ -5311,7 +5195,7 @@
       </p:sp>
       <p:sp>
         <p:nvSpPr>
-          <p:cNvPr id="14" name="Text 10"/>
+          <p:cNvPr id="14" name="Text 9"/>
           <p:cNvSpPr txBox="1"/>
           <p:nvPr/>
         </p:nvSpPr>
@@ -5350,7 +5234,7 @@
       </p:sp>
       <p:sp>
         <p:nvSpPr>
-          <p:cNvPr id="15" name="Shape 11"/>
+          <p:cNvPr id="15" name="Shape 10"/>
           <p:cNvSpPr/>
           <p:nvPr/>
         </p:nvSpPr>
@@ -5373,7 +5257,7 @@
       </p:sp>
       <p:sp>
         <p:nvSpPr>
-          <p:cNvPr id="16" name="Shape 12"/>
+          <p:cNvPr id="16" name="Shape 11"/>
           <p:cNvSpPr/>
           <p:nvPr/>
         </p:nvSpPr>
@@ -5400,7 +5284,7 @@
       </p:sp>
       <p:sp>
         <p:nvSpPr>
-          <p:cNvPr id="17" name="Shape 13"/>
+          <p:cNvPr id="17" name="Shape 12"/>
           <p:cNvSpPr/>
           <p:nvPr/>
         </p:nvSpPr>
@@ -5425,7 +5309,7 @@
       </p:sp>
       <p:sp>
         <p:nvSpPr>
-          <p:cNvPr id="18" name="Text 14"/>
+          <p:cNvPr id="18" name="Text 13"/>
           <p:cNvSpPr txBox="1"/>
           <p:nvPr/>
         </p:nvSpPr>
@@ -5464,7 +5348,7 @@
       </p:sp>
       <p:sp>
         <p:nvSpPr>
-          <p:cNvPr id="19" name="Text 15"/>
+          <p:cNvPr id="19" name="Text 14"/>
           <p:cNvSpPr txBox="1"/>
           <p:nvPr/>
         </p:nvSpPr>
@@ -5506,7 +5390,7 @@
       </p:sp>
       <p:sp>
         <p:nvSpPr>
-          <p:cNvPr id="20" name="Text 16"/>
+          <p:cNvPr id="20" name="Text 15"/>
           <p:cNvSpPr txBox="1"/>
           <p:nvPr/>
         </p:nvSpPr>
@@ -5545,7 +5429,7 @@
       </p:sp>
       <p:sp>
         <p:nvSpPr>
-          <p:cNvPr id="21" name="Shape 17"/>
+          <p:cNvPr id="21" name="Shape 16"/>
           <p:cNvSpPr/>
           <p:nvPr/>
         </p:nvSpPr>
@@ -5568,7 +5452,7 @@
       </p:sp>
       <p:sp>
         <p:nvSpPr>
-          <p:cNvPr id="22" name="Text 18"/>
+          <p:cNvPr id="22" name="Text 17"/>
           <p:cNvSpPr txBox="1"/>
           <p:nvPr/>
         </p:nvSpPr>
@@ -5607,7 +5491,7 @@
       </p:sp>
       <p:sp>
         <p:nvSpPr>
-          <p:cNvPr id="23" name="Shape 19"/>
+          <p:cNvPr id="23" name="Shape 18"/>
           <p:cNvSpPr/>
           <p:nvPr/>
         </p:nvSpPr>
@@ -5630,7 +5514,7 @@
       </p:sp>
       <p:sp>
         <p:nvSpPr>
-          <p:cNvPr id="24" name="Shape 20"/>
+          <p:cNvPr id="24" name="Shape 19"/>
           <p:cNvSpPr/>
           <p:nvPr/>
         </p:nvSpPr>
@@ -5657,7 +5541,7 @@
       </p:sp>
       <p:sp>
         <p:nvSpPr>
-          <p:cNvPr id="25" name="Shape 21"/>
+          <p:cNvPr id="25" name="Shape 20"/>
           <p:cNvSpPr/>
           <p:nvPr/>
         </p:nvSpPr>
@@ -5682,7 +5566,7 @@
       </p:sp>
       <p:sp>
         <p:nvSpPr>
-          <p:cNvPr id="26" name="Text 22"/>
+          <p:cNvPr id="26" name="Text 21"/>
           <p:cNvSpPr txBox="1"/>
           <p:nvPr/>
         </p:nvSpPr>
@@ -5721,7 +5605,7 @@
       </p:sp>
       <p:sp>
         <p:nvSpPr>
-          <p:cNvPr id="27" name="Text 23"/>
+          <p:cNvPr id="27" name="Text 22"/>
           <p:cNvSpPr txBox="1"/>
           <p:nvPr/>
         </p:nvSpPr>
@@ -5763,7 +5647,7 @@
       </p:sp>
       <p:sp>
         <p:nvSpPr>
-          <p:cNvPr id="28" name="Text 24"/>
+          <p:cNvPr id="28" name="Text 23"/>
           <p:cNvSpPr txBox="1"/>
           <p:nvPr/>
         </p:nvSpPr>
@@ -5802,7 +5686,7 @@
       </p:sp>
       <p:sp>
         <p:nvSpPr>
-          <p:cNvPr id="29" name="Shape 25"/>
+          <p:cNvPr id="29" name="Shape 24"/>
           <p:cNvSpPr/>
           <p:nvPr/>
         </p:nvSpPr>
@@ -5825,7 +5709,7 @@
       </p:sp>
       <p:sp>
         <p:nvSpPr>
-          <p:cNvPr id="30" name="Text 26"/>
+          <p:cNvPr id="30" name="Text 25"/>
           <p:cNvSpPr txBox="1"/>
           <p:nvPr/>
         </p:nvSpPr>
@@ -5864,7 +5748,7 @@
       </p:sp>
       <p:sp>
         <p:nvSpPr>
-          <p:cNvPr id="31" name="Shape 27"/>
+          <p:cNvPr id="31" name="Shape 26"/>
           <p:cNvSpPr/>
           <p:nvPr/>
         </p:nvSpPr>
@@ -5910,62 +5794,9 @@
           <a:chExt cx="0" cy="0"/>
         </a:xfrm>
       </p:grpSpPr>
-      <p:sp>
-        <p:nvSpPr>
-          <p:cNvPr id="3" name="Text 0"/>
-          <p:cNvSpPr txBox="1"/>
-          <p:nvPr/>
-        </p:nvSpPr>
-        <p:spPr>
-          <a:xfrm>
-            <a:off x="548640" y="274320"/>
-            <a:ext cx="2926080" cy="731520"/>
-          </a:xfrm>
-          <a:prstGeom prst="rect">
-            <a:avLst/>
-          </a:prstGeom>
-          <a:noFill/>
-          <a:ln/>
-        </p:spPr>
-        <p:txBody>
-          <a:bodyPr wrap="square" lIns="0" tIns="0" rIns="0" bIns="0" rtlCol="0" anchor="ctr"/>
-          <a:lstStyle/>
-          <a:p>
-            <a:pPr indent="0" marL="0">
-              <a:buNone/>
-            </a:pPr>
-            <a:r>
-              <a:rPr lang="en-US" sz="3000" b="1" dirty="0">
-                <a:solidFill>
-                  <a:srgbClr val="475BA6"/>
-                </a:solidFill>
-                <a:latin typeface="Poppins" pitchFamily="34" charset="0"/>
-                <a:ea typeface="Poppins" pitchFamily="34" charset="-122"/>
-                <a:cs typeface="Poppins" pitchFamily="34" charset="-120"/>
-              </a:rPr>
-              <a:t>clever</a:t>
-            </a:r>
-            <a:pPr indent="0" marL="0">
-              <a:buNone/>
-            </a:pPr>
-            <a:r>
-              <a:rPr lang="en-US" sz="3000" b="1" dirty="0">
-                <a:solidFill>
-                  <a:srgbClr val="36448A"/>
-                </a:solidFill>
-                <a:latin typeface="Poppins" pitchFamily="34" charset="0"/>
-                <a:ea typeface="Poppins" pitchFamily="34" charset="-122"/>
-                <a:cs typeface="Poppins" pitchFamily="34" charset="-120"/>
-              </a:rPr>
-              <a:t>box</a:t>
-            </a:r>
-            <a:endParaRPr lang="en-US" sz="3000" dirty="0"/>
-          </a:p>
-        </p:txBody>
-      </p:sp>
       <p:pic>
         <p:nvPicPr>
-          <p:cNvPr id="4" name="Image 0" descr="QR-Code zu www.cleverbox.co.at">    </p:cNvPr>
+          <p:cNvPr id="3" name="Image 0" descr="cleverbox – modern. kostenlos. lehrreich.">    </p:cNvPr>
           <p:cNvPicPr>
             <a:picLocks noChangeAspect="1"/>
           </p:cNvPicPr>
@@ -5979,6 +5810,30 @@
         </p:blipFill>
         <p:spPr>
           <a:xfrm>
+            <a:off x="548640" y="201168"/>
+            <a:ext cx="2331720" cy="864835"/>
+          </a:xfrm>
+          <a:prstGeom prst="rect">
+            <a:avLst/>
+          </a:prstGeom>
+        </p:spPr>
+      </p:pic>
+      <p:pic>
+        <p:nvPicPr>
+          <p:cNvPr id="4" name="Image 1" descr="QR-Code zu www.cleverbox.co.at">    </p:cNvPr>
+          <p:cNvPicPr>
+            <a:picLocks noChangeAspect="1"/>
+          </p:cNvPicPr>
+          <p:nvPr/>
+        </p:nvPicPr>
+        <p:blipFill>
+          <a:blip r:embed="rId2"/>
+          <a:stretch>
+            <a:fillRect/>
+          </a:stretch>
+        </p:blipFill>
+        <p:spPr>
+          <a:xfrm>
             <a:off x="6144768" y="228600"/>
             <a:ext cx="868680" cy="868680"/>
           </a:xfrm>
@@ -5989,7 +5844,7 @@
       </p:pic>
       <p:sp>
         <p:nvSpPr>
-          <p:cNvPr id="5" name="Text 1"/>
+          <p:cNvPr id="5" name="Text 0"/>
           <p:cNvSpPr txBox="1"/>
           <p:nvPr/>
         </p:nvSpPr>
@@ -6051,7 +5906,7 @@
       </p:sp>
       <p:sp>
         <p:nvSpPr>
-          <p:cNvPr id="6" name="Shape 2"/>
+          <p:cNvPr id="6" name="Shape 1"/>
           <p:cNvSpPr/>
           <p:nvPr/>
         </p:nvSpPr>
@@ -6074,7 +5929,7 @@
       </p:sp>
       <p:sp>
         <p:nvSpPr>
-          <p:cNvPr id="7" name="Text 3"/>
+          <p:cNvPr id="7" name="Text 2"/>
           <p:cNvSpPr txBox="1"/>
           <p:nvPr/>
         </p:nvSpPr>
@@ -6113,7 +5968,7 @@
       </p:sp>
       <p:sp>
         <p:nvSpPr>
-          <p:cNvPr id="8" name="Shape 4"/>
+          <p:cNvPr id="8" name="Shape 3"/>
           <p:cNvSpPr/>
           <p:nvPr/>
         </p:nvSpPr>
@@ -6140,7 +5995,7 @@
       </p:sp>
       <p:sp>
         <p:nvSpPr>
-          <p:cNvPr id="9" name="Shape 5"/>
+          <p:cNvPr id="9" name="Shape 4"/>
           <p:cNvSpPr/>
           <p:nvPr/>
         </p:nvSpPr>
@@ -6165,7 +6020,7 @@
       </p:sp>
       <p:sp>
         <p:nvSpPr>
-          <p:cNvPr id="10" name="Text 6"/>
+          <p:cNvPr id="10" name="Text 5"/>
           <p:cNvSpPr txBox="1"/>
           <p:nvPr/>
         </p:nvSpPr>
@@ -6204,7 +6059,7 @@
       </p:sp>
       <p:sp>
         <p:nvSpPr>
-          <p:cNvPr id="11" name="Text 7"/>
+          <p:cNvPr id="11" name="Text 6"/>
           <p:cNvSpPr txBox="1"/>
           <p:nvPr/>
         </p:nvSpPr>
@@ -6286,7 +6141,7 @@
       </p:sp>
       <p:sp>
         <p:nvSpPr>
-          <p:cNvPr id="12" name="Text 8"/>
+          <p:cNvPr id="12" name="Text 7"/>
           <p:cNvSpPr txBox="1"/>
           <p:nvPr/>
         </p:nvSpPr>
@@ -6325,7 +6180,7 @@
       </p:sp>
       <p:sp>
         <p:nvSpPr>
-          <p:cNvPr id="13" name="Shape 9"/>
+          <p:cNvPr id="13" name="Shape 8"/>
           <p:cNvSpPr/>
           <p:nvPr/>
         </p:nvSpPr>
@@ -6348,7 +6203,7 @@
       </p:sp>
       <p:sp>
         <p:nvSpPr>
-          <p:cNvPr id="14" name="Text 10"/>
+          <p:cNvPr id="14" name="Text 9"/>
           <p:cNvSpPr txBox="1"/>
           <p:nvPr/>
         </p:nvSpPr>
@@ -6387,7 +6242,7 @@
       </p:sp>
       <p:sp>
         <p:nvSpPr>
-          <p:cNvPr id="15" name="Shape 11"/>
+          <p:cNvPr id="15" name="Shape 10"/>
           <p:cNvSpPr/>
           <p:nvPr/>
         </p:nvSpPr>
@@ -6410,7 +6265,7 @@
       </p:sp>
       <p:sp>
         <p:nvSpPr>
-          <p:cNvPr id="16" name="Text 12"/>
+          <p:cNvPr id="16" name="Text 11"/>
           <p:cNvSpPr txBox="1"/>
           <p:nvPr/>
         </p:nvSpPr>
@@ -6449,7 +6304,7 @@
       </p:sp>
       <p:sp>
         <p:nvSpPr>
-          <p:cNvPr id="17" name="Shape 13"/>
+          <p:cNvPr id="17" name="Shape 12"/>
           <p:cNvSpPr/>
           <p:nvPr/>
         </p:nvSpPr>
@@ -6472,7 +6327,7 @@
       </p:sp>
       <p:sp>
         <p:nvSpPr>
-          <p:cNvPr id="18" name="Shape 14"/>
+          <p:cNvPr id="18" name="Shape 13"/>
           <p:cNvSpPr/>
           <p:nvPr/>
         </p:nvSpPr>
@@ -6499,7 +6354,7 @@
       </p:sp>
       <p:sp>
         <p:nvSpPr>
-          <p:cNvPr id="19" name="Shape 15"/>
+          <p:cNvPr id="19" name="Shape 14"/>
           <p:cNvSpPr/>
           <p:nvPr/>
         </p:nvSpPr>
@@ -6524,7 +6379,7 @@
       </p:sp>
       <p:sp>
         <p:nvSpPr>
-          <p:cNvPr id="20" name="Text 16"/>
+          <p:cNvPr id="20" name="Text 15"/>
           <p:cNvSpPr txBox="1"/>
           <p:nvPr/>
         </p:nvSpPr>
@@ -6563,7 +6418,7 @@
       </p:sp>
       <p:sp>
         <p:nvSpPr>
-          <p:cNvPr id="21" name="Text 17"/>
+          <p:cNvPr id="21" name="Text 16"/>
           <p:cNvSpPr txBox="1"/>
           <p:nvPr/>
         </p:nvSpPr>
@@ -6605,7 +6460,7 @@
       </p:sp>
       <p:sp>
         <p:nvSpPr>
-          <p:cNvPr id="22" name="Text 18"/>
+          <p:cNvPr id="22" name="Text 17"/>
           <p:cNvSpPr txBox="1"/>
           <p:nvPr/>
         </p:nvSpPr>
@@ -6644,7 +6499,7 @@
       </p:sp>
       <p:sp>
         <p:nvSpPr>
-          <p:cNvPr id="23" name="Shape 19"/>
+          <p:cNvPr id="23" name="Shape 18"/>
           <p:cNvSpPr/>
           <p:nvPr/>
         </p:nvSpPr>
@@ -6667,7 +6522,7 @@
       </p:sp>
       <p:sp>
         <p:nvSpPr>
-          <p:cNvPr id="24" name="Text 20"/>
+          <p:cNvPr id="24" name="Text 19"/>
           <p:cNvSpPr txBox="1"/>
           <p:nvPr/>
         </p:nvSpPr>
@@ -6706,7 +6561,7 @@
       </p:sp>
       <p:sp>
         <p:nvSpPr>
-          <p:cNvPr id="25" name="Shape 21"/>
+          <p:cNvPr id="25" name="Shape 20"/>
           <p:cNvSpPr/>
           <p:nvPr/>
         </p:nvSpPr>
@@ -6729,7 +6584,7 @@
       </p:sp>
       <p:sp>
         <p:nvSpPr>
-          <p:cNvPr id="26" name="Shape 22"/>
+          <p:cNvPr id="26" name="Shape 21"/>
           <p:cNvSpPr/>
           <p:nvPr/>
         </p:nvSpPr>
@@ -6756,7 +6611,7 @@
       </p:sp>
       <p:sp>
         <p:nvSpPr>
-          <p:cNvPr id="27" name="Shape 23"/>
+          <p:cNvPr id="27" name="Shape 22"/>
           <p:cNvSpPr/>
           <p:nvPr/>
         </p:nvSpPr>
@@ -6781,7 +6636,7 @@
       </p:sp>
       <p:sp>
         <p:nvSpPr>
-          <p:cNvPr id="28" name="Text 24"/>
+          <p:cNvPr id="28" name="Text 23"/>
           <p:cNvSpPr txBox="1"/>
           <p:nvPr/>
         </p:nvSpPr>
@@ -6820,7 +6675,7 @@
       </p:sp>
       <p:sp>
         <p:nvSpPr>
-          <p:cNvPr id="29" name="Text 25"/>
+          <p:cNvPr id="29" name="Text 24"/>
           <p:cNvSpPr txBox="1"/>
           <p:nvPr/>
         </p:nvSpPr>
@@ -6862,7 +6717,7 @@
       </p:sp>
       <p:sp>
         <p:nvSpPr>
-          <p:cNvPr id="30" name="Text 26"/>
+          <p:cNvPr id="30" name="Text 25"/>
           <p:cNvSpPr txBox="1"/>
           <p:nvPr/>
         </p:nvSpPr>
@@ -6901,7 +6756,7 @@
       </p:sp>
       <p:sp>
         <p:nvSpPr>
-          <p:cNvPr id="31" name="Shape 27"/>
+          <p:cNvPr id="31" name="Shape 26"/>
           <p:cNvSpPr/>
           <p:nvPr/>
         </p:nvSpPr>
@@ -6924,7 +6779,7 @@
       </p:sp>
       <p:sp>
         <p:nvSpPr>
-          <p:cNvPr id="32" name="Text 28"/>
+          <p:cNvPr id="32" name="Text 27"/>
           <p:cNvSpPr txBox="1"/>
           <p:nvPr/>
         </p:nvSpPr>
@@ -6963,7 +6818,7 @@
       </p:sp>
       <p:sp>
         <p:nvSpPr>
-          <p:cNvPr id="33" name="Shape 29"/>
+          <p:cNvPr id="33" name="Shape 28"/>
           <p:cNvSpPr/>
           <p:nvPr/>
         </p:nvSpPr>

--- a/videoslides/arbeitsblatt-textgleichungen-a4.pptx
+++ b/videoslides/arbeitsblatt-textgleichungen-a4.pptx
@@ -7,12 +7,9 @@
   <p:sldIdLst>
     <p:sldId id="256" r:id="rId2"/>
     <p:sldId id="257" r:id="rId3"/>
-    <p:sldId id="258" r:id="rId4"/>
-    <p:sldId id="259" r:id="rId5"/>
-    <p:sldId id="260" r:id="rId6"/>
   </p:sldIdLst>
   <p:notesMasterIdLst>
-    <p:notesMasterId r:id="rId7"/>
+    <p:notesMasterId r:id="rId4"/>
   </p:notesMasterIdLst>
   <p:sldSz cx="7562088" cy="10689336"/>
   <p:notesSz cx="10689336" cy="7562088"/>
@@ -618,270 +615,6 @@
             <a:fld id="{F7021451-1387-4CA6-816F-3879F97B5CBC}" type="slidenum">
               <a:rPr lang="en-US"/>
               <a:t>2</a:t>
-            </a:fld>
-            <a:endParaRPr lang="en-US"/>
-          </a:p>
-        </p:txBody>
-      </p:sp>
-    </p:spTree>
-    <p:extLst>
-      <p:ext uri="{BB962C8B-B14F-4D97-AF65-F5344CB8AC3E}">
-        <p14:creationId xmlns:p14="http://schemas.microsoft.com/office/powerpoint/2010/main" val="1024086991"/>
-      </p:ext>
-    </p:extLst>
-  </p:cSld>
-  <p:clrMapOvr>
-    <a:masterClrMapping/>
-  </p:clrMapOvr>
-</p:notes>
-</file>
-
-<file path=ppt/notesSlides/notesSlide3.xml><?xml version="1.0" encoding="utf-8"?>
-<p:notes xmlns:a="http://schemas.openxmlformats.org/drawingml/2006/main" xmlns:r="http://schemas.openxmlformats.org/officeDocument/2006/relationships" xmlns:p="http://schemas.openxmlformats.org/presentationml/2006/main">
-  <p:cSld>
-    <p:spTree>
-      <p:nvGrpSpPr>
-        <p:cNvPr id="1" name=""/>
-        <p:cNvGrpSpPr/>
-        <p:nvPr/>
-      </p:nvGrpSpPr>
-      <p:grpSpPr>
-        <a:xfrm>
-          <a:off x="0" y="0"/>
-          <a:ext cx="0" cy="0"/>
-          <a:chOff x="0" y="0"/>
-          <a:chExt cx="0" cy="0"/>
-        </a:xfrm>
-      </p:grpSpPr>
-      <p:sp>
-        <p:nvSpPr>
-          <p:cNvPr id="2" name="Slide Image Placeholder 1"/>
-          <p:cNvSpPr>
-            <a:spLocks noGrp="1" noRot="1" noChangeAspect="1"/>
-          </p:cNvSpPr>
-          <p:nvPr>
-            <p:ph type="sldImg"/>
-          </p:nvPr>
-        </p:nvSpPr>
-        <p:spPr/>
-      </p:sp>
-      <p:sp>
-        <p:nvSpPr>
-          <p:cNvPr id="3" name="Notes Placeholder 2"/>
-          <p:cNvSpPr>
-            <a:spLocks noGrp="1"/>
-          </p:cNvSpPr>
-          <p:nvPr>
-            <p:ph type="body" idx="1"/>
-          </p:nvPr>
-        </p:nvSpPr>
-        <p:spPr/>
-        <p:txBody>
-          <a:bodyPr/>
-          <a:lstStyle/>
-          <a:p>
-            <a:r>
-              <a:rPr lang="en-US" dirty="0"/>
-              <a:t>Seite 3</a:t>
-            </a:r>
-            <a:endParaRPr lang="en-US" dirty="0"/>
-          </a:p>
-        </p:txBody>
-      </p:sp>
-      <p:sp>
-        <p:nvSpPr>
-          <p:cNvPr id="4" name="Slide Number Placeholder 3"/>
-          <p:cNvSpPr>
-            <a:spLocks noGrp="1"/>
-          </p:cNvSpPr>
-          <p:nvPr>
-            <p:ph type="sldNum" sz="quarter" idx="10"/>
-          </p:nvPr>
-        </p:nvSpPr>
-        <p:spPr/>
-        <p:txBody>
-          <a:bodyPr/>
-          <a:lstStyle/>
-          <a:p>
-            <a:fld id="{F7021451-1387-4CA6-816F-3879F97B5CBC}" type="slidenum">
-              <a:rPr lang="en-US"/>
-              <a:t>3</a:t>
-            </a:fld>
-            <a:endParaRPr lang="en-US"/>
-          </a:p>
-        </p:txBody>
-      </p:sp>
-    </p:spTree>
-    <p:extLst>
-      <p:ext uri="{BB962C8B-B14F-4D97-AF65-F5344CB8AC3E}">
-        <p14:creationId xmlns:p14="http://schemas.microsoft.com/office/powerpoint/2010/main" val="1024086991"/>
-      </p:ext>
-    </p:extLst>
-  </p:cSld>
-  <p:clrMapOvr>
-    <a:masterClrMapping/>
-  </p:clrMapOvr>
-</p:notes>
-</file>
-
-<file path=ppt/notesSlides/notesSlide4.xml><?xml version="1.0" encoding="utf-8"?>
-<p:notes xmlns:a="http://schemas.openxmlformats.org/drawingml/2006/main" xmlns:r="http://schemas.openxmlformats.org/officeDocument/2006/relationships" xmlns:p="http://schemas.openxmlformats.org/presentationml/2006/main">
-  <p:cSld>
-    <p:spTree>
-      <p:nvGrpSpPr>
-        <p:cNvPr id="1" name=""/>
-        <p:cNvGrpSpPr/>
-        <p:nvPr/>
-      </p:nvGrpSpPr>
-      <p:grpSpPr>
-        <a:xfrm>
-          <a:off x="0" y="0"/>
-          <a:ext cx="0" cy="0"/>
-          <a:chOff x="0" y="0"/>
-          <a:chExt cx="0" cy="0"/>
-        </a:xfrm>
-      </p:grpSpPr>
-      <p:sp>
-        <p:nvSpPr>
-          <p:cNvPr id="2" name="Slide Image Placeholder 1"/>
-          <p:cNvSpPr>
-            <a:spLocks noGrp="1" noRot="1" noChangeAspect="1"/>
-          </p:cNvSpPr>
-          <p:nvPr>
-            <p:ph type="sldImg"/>
-          </p:nvPr>
-        </p:nvSpPr>
-        <p:spPr/>
-      </p:sp>
-      <p:sp>
-        <p:nvSpPr>
-          <p:cNvPr id="3" name="Notes Placeholder 2"/>
-          <p:cNvSpPr>
-            <a:spLocks noGrp="1"/>
-          </p:cNvSpPr>
-          <p:nvPr>
-            <p:ph type="body" idx="1"/>
-          </p:nvPr>
-        </p:nvSpPr>
-        <p:spPr/>
-        <p:txBody>
-          <a:bodyPr/>
-          <a:lstStyle/>
-          <a:p>
-            <a:r>
-              <a:rPr lang="en-US" dirty="0"/>
-              <a:t>Seite 4</a:t>
-            </a:r>
-            <a:endParaRPr lang="en-US" dirty="0"/>
-          </a:p>
-        </p:txBody>
-      </p:sp>
-      <p:sp>
-        <p:nvSpPr>
-          <p:cNvPr id="4" name="Slide Number Placeholder 3"/>
-          <p:cNvSpPr>
-            <a:spLocks noGrp="1"/>
-          </p:cNvSpPr>
-          <p:nvPr>
-            <p:ph type="sldNum" sz="quarter" idx="10"/>
-          </p:nvPr>
-        </p:nvSpPr>
-        <p:spPr/>
-        <p:txBody>
-          <a:bodyPr/>
-          <a:lstStyle/>
-          <a:p>
-            <a:fld id="{F7021451-1387-4CA6-816F-3879F97B5CBC}" type="slidenum">
-              <a:rPr lang="en-US"/>
-              <a:t>4</a:t>
-            </a:fld>
-            <a:endParaRPr lang="en-US"/>
-          </a:p>
-        </p:txBody>
-      </p:sp>
-    </p:spTree>
-    <p:extLst>
-      <p:ext uri="{BB962C8B-B14F-4D97-AF65-F5344CB8AC3E}">
-        <p14:creationId xmlns:p14="http://schemas.microsoft.com/office/powerpoint/2010/main" val="1024086991"/>
-      </p:ext>
-    </p:extLst>
-  </p:cSld>
-  <p:clrMapOvr>
-    <a:masterClrMapping/>
-  </p:clrMapOvr>
-</p:notes>
-</file>
-
-<file path=ppt/notesSlides/notesSlide5.xml><?xml version="1.0" encoding="utf-8"?>
-<p:notes xmlns:a="http://schemas.openxmlformats.org/drawingml/2006/main" xmlns:r="http://schemas.openxmlformats.org/officeDocument/2006/relationships" xmlns:p="http://schemas.openxmlformats.org/presentationml/2006/main">
-  <p:cSld>
-    <p:spTree>
-      <p:nvGrpSpPr>
-        <p:cNvPr id="1" name=""/>
-        <p:cNvGrpSpPr/>
-        <p:nvPr/>
-      </p:nvGrpSpPr>
-      <p:grpSpPr>
-        <a:xfrm>
-          <a:off x="0" y="0"/>
-          <a:ext cx="0" cy="0"/>
-          <a:chOff x="0" y="0"/>
-          <a:chExt cx="0" cy="0"/>
-        </a:xfrm>
-      </p:grpSpPr>
-      <p:sp>
-        <p:nvSpPr>
-          <p:cNvPr id="2" name="Slide Image Placeholder 1"/>
-          <p:cNvSpPr>
-            <a:spLocks noGrp="1" noRot="1" noChangeAspect="1"/>
-          </p:cNvSpPr>
-          <p:nvPr>
-            <p:ph type="sldImg"/>
-          </p:nvPr>
-        </p:nvSpPr>
-        <p:spPr/>
-      </p:sp>
-      <p:sp>
-        <p:nvSpPr>
-          <p:cNvPr id="3" name="Notes Placeholder 2"/>
-          <p:cNvSpPr>
-            <a:spLocks noGrp="1"/>
-          </p:cNvSpPr>
-          <p:nvPr>
-            <p:ph type="body" idx="1"/>
-          </p:nvPr>
-        </p:nvSpPr>
-        <p:spPr/>
-        <p:txBody>
-          <a:bodyPr/>
-          <a:lstStyle/>
-          <a:p>
-            <a:r>
-              <a:rPr lang="en-US" dirty="0"/>
-              <a:t>Seite 5</a:t>
-            </a:r>
-            <a:endParaRPr lang="en-US" dirty="0"/>
-          </a:p>
-        </p:txBody>
-      </p:sp>
-      <p:sp>
-        <p:nvSpPr>
-          <p:cNvPr id="4" name="Slide Number Placeholder 3"/>
-          <p:cNvSpPr>
-            <a:spLocks noGrp="1"/>
-          </p:cNvSpPr>
-          <p:nvPr>
-            <p:ph type="sldNum" sz="quarter" idx="10"/>
-          </p:nvPr>
-        </p:nvSpPr>
-        <p:spPr/>
-        <p:txBody>
-          <a:bodyPr/>
-          <a:lstStyle/>
-          <a:p>
-            <a:fld id="{F7021451-1387-4CA6-816F-3879F97B5CBC}" type="slidenum">
-              <a:rPr lang="en-US"/>
-              <a:t>5</a:t>
             </a:fld>
             <a:endParaRPr lang="en-US"/>
           </a:p>
@@ -1581,7 +1314,7 @@
         </p:nvSpPr>
         <p:spPr>
           <a:xfrm>
-            <a:off x="548640" y="1371600"/>
+            <a:off x="548640" y="1325880"/>
             <a:ext cx="5486400" cy="365760"/>
           </a:xfrm>
           <a:prstGeom prst="rect">
@@ -1620,8 +1353,8 @@
         </p:nvSpPr>
         <p:spPr>
           <a:xfrm>
-            <a:off x="548640" y="1737360"/>
-            <a:ext cx="6464808" cy="731520"/>
+            <a:off x="548640" y="1645920"/>
+            <a:ext cx="6464808" cy="640080"/>
           </a:xfrm>
           <a:prstGeom prst="rect">
             <a:avLst/>
@@ -1640,7 +1373,7 @@
               <a:buNone/>
             </a:pPr>
             <a:r>
-              <a:rPr lang="en-US" sz="3000" dirty="0">
+              <a:rPr lang="en-US" sz="2600" dirty="0">
                 <a:solidFill>
                   <a:srgbClr val="0B1E3A"/>
                 </a:solidFill>
@@ -1657,7 +1390,7 @@
               <a:buNone/>
             </a:pPr>
             <a:r>
-              <a:rPr lang="en-US" sz="3000" dirty="0">
+              <a:rPr lang="en-US" sz="2600" dirty="0">
                 <a:solidFill>
                   <a:srgbClr val="14459A"/>
                 </a:solidFill>
@@ -1670,7 +1403,7 @@
               </a:rPr>
               <a:t>Textgleichungen</a:t>
             </a:r>
-            <a:endParaRPr lang="en-US" sz="3000" dirty="0"/>
+            <a:endParaRPr lang="en-US" sz="2600" dirty="0"/>
           </a:p>
         </p:txBody>
       </p:sp>
@@ -1682,8 +1415,8 @@
         </p:nvSpPr>
         <p:spPr>
           <a:xfrm>
-            <a:off x="548640" y="2651760"/>
-            <a:ext cx="822960" cy="365760"/>
+            <a:off x="548640" y="2377440"/>
+            <a:ext cx="731520" cy="320040"/>
           </a:xfrm>
           <a:prstGeom prst="rect">
             <a:avLst/>
@@ -1699,7 +1432,7 @@
               <a:buNone/>
             </a:pPr>
             <a:r>
-              <a:rPr lang="en-US" sz="1200" b="1" dirty="0">
+              <a:rPr lang="en-US" sz="1100" b="1" dirty="0">
                 <a:solidFill>
                   <a:srgbClr val="4A5F7A"/>
                 </a:solidFill>
@@ -1709,7 +1442,7 @@
               </a:rPr>
               <a:t>Name:</a:t>
             </a:r>
-            <a:endParaRPr lang="en-US" sz="1200" dirty="0"/>
+            <a:endParaRPr lang="en-US" sz="1100" dirty="0"/>
           </a:p>
         </p:txBody>
       </p:sp>
@@ -1721,7 +1454,7 @@
         </p:nvSpPr>
         <p:spPr>
           <a:xfrm>
-            <a:off x="1371600" y="2971800"/>
+            <a:off x="1280160" y="2651760"/>
             <a:ext cx="2743200" cy="0"/>
           </a:xfrm>
           <a:prstGeom prst="line">
@@ -1744,8 +1477,8 @@
         </p:nvSpPr>
         <p:spPr>
           <a:xfrm>
-            <a:off x="4389120" y="2651760"/>
-            <a:ext cx="914400" cy="365760"/>
+            <a:off x="4297680" y="2377440"/>
+            <a:ext cx="822960" cy="320040"/>
           </a:xfrm>
           <a:prstGeom prst="rect">
             <a:avLst/>
@@ -1761,7 +1494,7 @@
               <a:buNone/>
             </a:pPr>
             <a:r>
-              <a:rPr lang="en-US" sz="1200" b="1" dirty="0">
+              <a:rPr lang="en-US" sz="1100" b="1" dirty="0">
                 <a:solidFill>
                   <a:srgbClr val="4A5F7A"/>
                 </a:solidFill>
@@ -1771,7 +1504,7 @@
               </a:rPr>
               <a:t>Datum:</a:t>
             </a:r>
-            <a:endParaRPr lang="en-US" sz="1200" dirty="0"/>
+            <a:endParaRPr lang="en-US" sz="1100" dirty="0"/>
           </a:p>
         </p:txBody>
       </p:sp>
@@ -1783,8 +1516,8 @@
         </p:nvSpPr>
         <p:spPr>
           <a:xfrm>
-            <a:off x="5303520" y="2971800"/>
-            <a:ext cx="1709928" cy="0"/>
+            <a:off x="5120640" y="2651760"/>
+            <a:ext cx="1892808" cy="0"/>
           </a:xfrm>
           <a:prstGeom prst="line">
             <a:avLst/>
@@ -1806,51 +1539,51 @@
         </p:nvSpPr>
         <p:spPr>
           <a:xfrm>
+            <a:off x="548640" y="2743200"/>
+            <a:ext cx="6464808" cy="320040"/>
+          </a:xfrm>
+          <a:prstGeom prst="rect">
+            <a:avLst/>
+          </a:prstGeom>
+          <a:noFill/>
+          <a:ln/>
+        </p:spPr>
+        <p:txBody>
+          <a:bodyPr wrap="square" lIns="0" tIns="0" rIns="0" bIns="0" rtlCol="0" anchor="ctr"/>
+          <a:lstStyle/>
+          <a:p>
+            <a:pPr indent="0" marL="0">
+              <a:buNone/>
+            </a:pPr>
+            <a:r>
+              <a:rPr lang="en-US" sz="1000" dirty="0">
+                <a:solidFill>
+                  <a:srgbClr val="4A5F7A"/>
+                </a:solidFill>
+                <a:latin typeface="Poppins" pitchFamily="34" charset="0"/>
+                <a:ea typeface="Poppins" pitchFamily="34" charset="-122"/>
+                <a:cs typeface="Poppins" pitchFamily="34" charset="-120"/>
+              </a:rPr>
+              <a:t>Stelle zu jeder Aufgabe eine Gleichung auf und löse sie.</a:t>
+            </a:r>
+            <a:endParaRPr lang="en-US" sz="1000" dirty="0"/>
+          </a:p>
+        </p:txBody>
+      </p:sp>
+      <p:sp>
+        <p:nvSpPr>
+          <p:cNvPr id="14" name="Shape 9"/>
+          <p:cNvSpPr/>
+          <p:nvPr/>
+        </p:nvSpPr>
+        <p:spPr>
+          <a:xfrm>
             <a:off x="548640" y="3154680"/>
-            <a:ext cx="6464808" cy="365760"/>
-          </a:xfrm>
-          <a:prstGeom prst="rect">
-            <a:avLst/>
-          </a:prstGeom>
-          <a:noFill/>
-          <a:ln/>
-        </p:spPr>
-        <p:txBody>
-          <a:bodyPr wrap="square" lIns="0" tIns="0" rIns="0" bIns="0" rtlCol="0" anchor="ctr"/>
-          <a:lstStyle/>
-          <a:p>
-            <a:pPr indent="0" marL="0">
-              <a:buNone/>
-            </a:pPr>
-            <a:r>
-              <a:rPr lang="en-US" sz="1100" dirty="0">
-                <a:solidFill>
-                  <a:srgbClr val="4A5F7A"/>
-                </a:solidFill>
-                <a:latin typeface="Poppins" pitchFamily="34" charset="0"/>
-                <a:ea typeface="Poppins" pitchFamily="34" charset="-122"/>
-                <a:cs typeface="Poppins" pitchFamily="34" charset="-120"/>
-              </a:rPr>
-              <a:t>Stelle zu jeder Aufgabe eine Gleichung auf und löse sie.</a:t>
-            </a:r>
-            <a:endParaRPr lang="en-US" sz="1100" dirty="0"/>
-          </a:p>
-        </p:txBody>
-      </p:sp>
-      <p:sp>
-        <p:nvSpPr>
-          <p:cNvPr id="14" name="Shape 9"/>
-          <p:cNvSpPr/>
-          <p:nvPr/>
-        </p:nvSpPr>
-        <p:spPr>
-          <a:xfrm>
-            <a:off x="548640" y="3703320"/>
-            <a:ext cx="6464808" cy="1956816"/>
+            <a:ext cx="3154680" cy="1604772"/>
           </a:xfrm>
           <a:prstGeom prst="roundRect">
             <a:avLst>
-              <a:gd name="adj" fmla="val 7009"/>
+              <a:gd name="adj" fmla="val 8547"/>
             </a:avLst>
           </a:prstGeom>
           <a:solidFill>
@@ -1872,8 +1605,8 @@
         </p:nvSpPr>
         <p:spPr>
           <a:xfrm>
-            <a:off x="749808" y="3904488"/>
-            <a:ext cx="457200" cy="457200"/>
+            <a:off x="676656" y="3282696"/>
+            <a:ext cx="384048" cy="384048"/>
           </a:xfrm>
           <a:prstGeom prst="ellipse">
             <a:avLst/>
@@ -1897,8 +1630,8 @@
         </p:nvSpPr>
         <p:spPr>
           <a:xfrm>
-            <a:off x="749808" y="3904488"/>
-            <a:ext cx="457200" cy="457200"/>
+            <a:off x="676656" y="3282696"/>
+            <a:ext cx="384048" cy="384048"/>
           </a:xfrm>
           <a:prstGeom prst="rect">
             <a:avLst/>
@@ -1936,8 +1669,8 @@
         </p:nvSpPr>
         <p:spPr>
           <a:xfrm>
-            <a:off x="1417320" y="3886200"/>
-            <a:ext cx="5367528" cy="585216"/>
+            <a:off x="1188720" y="3282696"/>
+            <a:ext cx="2377440" cy="617220"/>
           </a:xfrm>
           <a:prstGeom prst="rect">
             <a:avLst/>
@@ -1951,12 +1684,12 @@
           <a:p>
             <a:pPr indent="0" marL="0">
               <a:lnSpc>
-                <a:spcPct val="120000"/>
+                <a:spcPct val="110000"/>
               </a:lnSpc>
               <a:buNone/>
             </a:pPr>
             <a:r>
-              <a:rPr lang="en-US" sz="1250" dirty="0">
+              <a:rPr lang="en-US" sz="1150" dirty="0">
                 <a:solidFill>
                   <a:srgbClr val="0B1E3A"/>
                 </a:solidFill>
@@ -1966,7 +1699,7 @@
               </a:rPr>
               <a:t>Vergrößert man 33 um eine Zahl, so erhält man 54. Wie lautet die Zahl?</a:t>
             </a:r>
-            <a:endParaRPr lang="en-US" sz="1250" dirty="0"/>
+            <a:endParaRPr lang="en-US" sz="1150" dirty="0"/>
           </a:p>
         </p:txBody>
       </p:sp>
@@ -1978,8 +1711,8 @@
         </p:nvSpPr>
         <p:spPr>
           <a:xfrm>
-            <a:off x="1417320" y="4608576"/>
-            <a:ext cx="1188720" cy="365760"/>
+            <a:off x="731520" y="4027932"/>
+            <a:ext cx="914400" cy="274320"/>
           </a:xfrm>
           <a:prstGeom prst="rect">
             <a:avLst/>
@@ -1995,7 +1728,7 @@
               <a:buNone/>
             </a:pPr>
             <a:r>
-              <a:rPr lang="en-US" sz="1000" dirty="0">
+              <a:rPr lang="en-US" sz="900" dirty="0">
                 <a:solidFill>
                   <a:srgbClr val="4A5F7A"/>
                 </a:solidFill>
@@ -2005,7 +1738,7 @@
               </a:rPr>
               <a:t>Gleichung:</a:t>
             </a:r>
-            <a:endParaRPr lang="en-US" sz="1000" dirty="0"/>
+            <a:endParaRPr lang="en-US" sz="900" dirty="0"/>
           </a:p>
         </p:txBody>
       </p:sp>
@@ -2017,8 +1750,8 @@
         </p:nvSpPr>
         <p:spPr>
           <a:xfrm>
-            <a:off x="2606040" y="4928616"/>
-            <a:ext cx="4178808" cy="0"/>
+            <a:off x="1554480" y="4274820"/>
+            <a:ext cx="1965960" cy="0"/>
           </a:xfrm>
           <a:prstGeom prst="line">
             <a:avLst/>
@@ -2040,8 +1773,8 @@
         </p:nvSpPr>
         <p:spPr>
           <a:xfrm>
-            <a:off x="1417320" y="5065776"/>
-            <a:ext cx="1188720" cy="365760"/>
+            <a:off x="731520" y="4329684"/>
+            <a:ext cx="914400" cy="274320"/>
           </a:xfrm>
           <a:prstGeom prst="rect">
             <a:avLst/>
@@ -2057,7 +1790,7 @@
               <a:buNone/>
             </a:pPr>
             <a:r>
-              <a:rPr lang="en-US" sz="1000" dirty="0">
+              <a:rPr lang="en-US" sz="900" dirty="0">
                 <a:solidFill>
                   <a:srgbClr val="4A5F7A"/>
                 </a:solidFill>
@@ -2067,7 +1800,7 @@
               </a:rPr>
               <a:t>Lösung:</a:t>
             </a:r>
-            <a:endParaRPr lang="en-US" sz="1000" dirty="0"/>
+            <a:endParaRPr lang="en-US" sz="900" dirty="0"/>
           </a:p>
         </p:txBody>
       </p:sp>
@@ -2079,8 +1812,8 @@
         </p:nvSpPr>
         <p:spPr>
           <a:xfrm>
-            <a:off x="2606040" y="5385816"/>
-            <a:ext cx="2743200" cy="0"/>
+            <a:off x="1554480" y="4576572"/>
+            <a:ext cx="1965960" cy="0"/>
           </a:xfrm>
           <a:prstGeom prst="line">
             <a:avLst/>
@@ -2102,12 +1835,12 @@
         </p:nvSpPr>
         <p:spPr>
           <a:xfrm>
-            <a:off x="548640" y="5797296"/>
-            <a:ext cx="6464808" cy="1956816"/>
+            <a:off x="3858768" y="3154680"/>
+            <a:ext cx="3154680" cy="1604772"/>
           </a:xfrm>
           <a:prstGeom prst="roundRect">
             <a:avLst>
-              <a:gd name="adj" fmla="val 7009"/>
+              <a:gd name="adj" fmla="val 8547"/>
             </a:avLst>
           </a:prstGeom>
           <a:solidFill>
@@ -2129,8 +1862,8 @@
         </p:nvSpPr>
         <p:spPr>
           <a:xfrm>
-            <a:off x="749808" y="5998464"/>
-            <a:ext cx="457200" cy="457200"/>
+            <a:off x="3986784" y="3282696"/>
+            <a:ext cx="384048" cy="384048"/>
           </a:xfrm>
           <a:prstGeom prst="ellipse">
             <a:avLst/>
@@ -2154,8 +1887,8 @@
         </p:nvSpPr>
         <p:spPr>
           <a:xfrm>
-            <a:off x="749808" y="5998464"/>
-            <a:ext cx="457200" cy="457200"/>
+            <a:off x="3986784" y="3282696"/>
+            <a:ext cx="384048" cy="384048"/>
           </a:xfrm>
           <a:prstGeom prst="rect">
             <a:avLst/>
@@ -2193,8 +1926,8 @@
         </p:nvSpPr>
         <p:spPr>
           <a:xfrm>
-            <a:off x="1417320" y="5980176"/>
-            <a:ext cx="5367528" cy="585216"/>
+            <a:off x="4498848" y="3282696"/>
+            <a:ext cx="2377440" cy="617220"/>
           </a:xfrm>
           <a:prstGeom prst="rect">
             <a:avLst/>
@@ -2208,12 +1941,12 @@
           <a:p>
             <a:pPr indent="0" marL="0">
               <a:lnSpc>
-                <a:spcPct val="120000"/>
+                <a:spcPct val="110000"/>
               </a:lnSpc>
               <a:buNone/>
             </a:pPr>
             <a:r>
-              <a:rPr lang="en-US" sz="1250" dirty="0">
+              <a:rPr lang="en-US" sz="1150" dirty="0">
                 <a:solidFill>
                   <a:srgbClr val="0B1E3A"/>
                 </a:solidFill>
@@ -2223,7 +1956,7 @@
               </a:rPr>
               <a:t>Verkleinert man 33 um eine Zahl, so erhält man 17. Wie lautet die Zahl?</a:t>
             </a:r>
-            <a:endParaRPr lang="en-US" sz="1250" dirty="0"/>
+            <a:endParaRPr lang="en-US" sz="1150" dirty="0"/>
           </a:p>
         </p:txBody>
       </p:sp>
@@ -2235,8 +1968,8 @@
         </p:nvSpPr>
         <p:spPr>
           <a:xfrm>
-            <a:off x="1417320" y="6702552"/>
-            <a:ext cx="1188720" cy="365760"/>
+            <a:off x="4041648" y="4027932"/>
+            <a:ext cx="914400" cy="274320"/>
           </a:xfrm>
           <a:prstGeom prst="rect">
             <a:avLst/>
@@ -2252,7 +1985,7 @@
               <a:buNone/>
             </a:pPr>
             <a:r>
-              <a:rPr lang="en-US" sz="1000" dirty="0">
+              <a:rPr lang="en-US" sz="900" dirty="0">
                 <a:solidFill>
                   <a:srgbClr val="4A5F7A"/>
                 </a:solidFill>
@@ -2262,7 +1995,7 @@
               </a:rPr>
               <a:t>Gleichung:</a:t>
             </a:r>
-            <a:endParaRPr lang="en-US" sz="1000" dirty="0"/>
+            <a:endParaRPr lang="en-US" sz="900" dirty="0"/>
           </a:p>
         </p:txBody>
       </p:sp>
@@ -2274,8 +2007,8 @@
         </p:nvSpPr>
         <p:spPr>
           <a:xfrm>
-            <a:off x="2606040" y="7022592"/>
-            <a:ext cx="4178808" cy="0"/>
+            <a:off x="4864608" y="4274820"/>
+            <a:ext cx="1965960" cy="0"/>
           </a:xfrm>
           <a:prstGeom prst="line">
             <a:avLst/>
@@ -2297,8 +2030,8 @@
         </p:nvSpPr>
         <p:spPr>
           <a:xfrm>
-            <a:off x="1417320" y="7159752"/>
-            <a:ext cx="1188720" cy="365760"/>
+            <a:off x="4041648" y="4329684"/>
+            <a:ext cx="914400" cy="274320"/>
           </a:xfrm>
           <a:prstGeom prst="rect">
             <a:avLst/>
@@ -2314,7 +2047,7 @@
               <a:buNone/>
             </a:pPr>
             <a:r>
-              <a:rPr lang="en-US" sz="1000" dirty="0">
+              <a:rPr lang="en-US" sz="900" dirty="0">
                 <a:solidFill>
                   <a:srgbClr val="4A5F7A"/>
                 </a:solidFill>
@@ -2324,7 +2057,7 @@
               </a:rPr>
               <a:t>Lösung:</a:t>
             </a:r>
-            <a:endParaRPr lang="en-US" sz="1000" dirty="0"/>
+            <a:endParaRPr lang="en-US" sz="900" dirty="0"/>
           </a:p>
         </p:txBody>
       </p:sp>
@@ -2336,8 +2069,8 @@
         </p:nvSpPr>
         <p:spPr>
           <a:xfrm>
-            <a:off x="2606040" y="7479792"/>
-            <a:ext cx="2743200" cy="0"/>
+            <a:off x="4864608" y="4576572"/>
+            <a:ext cx="1965960" cy="0"/>
           </a:xfrm>
           <a:prstGeom prst="line">
             <a:avLst/>
@@ -2359,12 +2092,12 @@
         </p:nvSpPr>
         <p:spPr>
           <a:xfrm>
-            <a:off x="548640" y="7891272"/>
-            <a:ext cx="6464808" cy="1956816"/>
+            <a:off x="548640" y="4869180"/>
+            <a:ext cx="3154680" cy="1604772"/>
           </a:xfrm>
           <a:prstGeom prst="roundRect">
             <a:avLst>
-              <a:gd name="adj" fmla="val 7009"/>
+              <a:gd name="adj" fmla="val 8547"/>
             </a:avLst>
           </a:prstGeom>
           <a:solidFill>
@@ -2386,8 +2119,8 @@
         </p:nvSpPr>
         <p:spPr>
           <a:xfrm>
-            <a:off x="749808" y="8092440"/>
-            <a:ext cx="457200" cy="457200"/>
+            <a:off x="676656" y="4997196"/>
+            <a:ext cx="384048" cy="384048"/>
           </a:xfrm>
           <a:prstGeom prst="ellipse">
             <a:avLst/>
@@ -2411,8 +2144,8 @@
         </p:nvSpPr>
         <p:spPr>
           <a:xfrm>
-            <a:off x="749808" y="8092440"/>
-            <a:ext cx="457200" cy="457200"/>
+            <a:off x="676656" y="4997196"/>
+            <a:ext cx="384048" cy="384048"/>
           </a:xfrm>
           <a:prstGeom prst="rect">
             <a:avLst/>
@@ -2450,8 +2183,8 @@
         </p:nvSpPr>
         <p:spPr>
           <a:xfrm>
-            <a:off x="1417320" y="8074152"/>
-            <a:ext cx="5367528" cy="585216"/>
+            <a:off x="1188720" y="4997196"/>
+            <a:ext cx="2377440" cy="617220"/>
           </a:xfrm>
           <a:prstGeom prst="rect">
             <a:avLst/>
@@ -2465,12 +2198,12 @@
           <a:p>
             <a:pPr indent="0" marL="0">
               <a:lnSpc>
-                <a:spcPct val="120000"/>
+                <a:spcPct val="110000"/>
               </a:lnSpc>
               <a:buNone/>
             </a:pPr>
             <a:r>
-              <a:rPr lang="en-US" sz="1250" dirty="0">
+              <a:rPr lang="en-US" sz="1150" dirty="0">
                 <a:solidFill>
                   <a:srgbClr val="0B1E3A"/>
                 </a:solidFill>
@@ -2480,7 +2213,7 @@
               </a:rPr>
               <a:t>Verkleinert man eine Zahl um 33, so erhält man 17. Wie lautet die Zahl?</a:t>
             </a:r>
-            <a:endParaRPr lang="en-US" sz="1250" dirty="0"/>
+            <a:endParaRPr lang="en-US" sz="1150" dirty="0"/>
           </a:p>
         </p:txBody>
       </p:sp>
@@ -2492,8 +2225,8 @@
         </p:nvSpPr>
         <p:spPr>
           <a:xfrm>
-            <a:off x="1417320" y="8796528"/>
-            <a:ext cx="1188720" cy="365760"/>
+            <a:off x="731520" y="5742432"/>
+            <a:ext cx="914400" cy="274320"/>
           </a:xfrm>
           <a:prstGeom prst="rect">
             <a:avLst/>
@@ -2509,7 +2242,7 @@
               <a:buNone/>
             </a:pPr>
             <a:r>
-              <a:rPr lang="en-US" sz="1000" dirty="0">
+              <a:rPr lang="en-US" sz="900" dirty="0">
                 <a:solidFill>
                   <a:srgbClr val="4A5F7A"/>
                 </a:solidFill>
@@ -2519,7 +2252,7 @@
               </a:rPr>
               <a:t>Gleichung:</a:t>
             </a:r>
-            <a:endParaRPr lang="en-US" sz="1000" dirty="0"/>
+            <a:endParaRPr lang="en-US" sz="900" dirty="0"/>
           </a:p>
         </p:txBody>
       </p:sp>
@@ -2531,8 +2264,8 @@
         </p:nvSpPr>
         <p:spPr>
           <a:xfrm>
-            <a:off x="2606040" y="9116568"/>
-            <a:ext cx="4178808" cy="0"/>
+            <a:off x="1554480" y="5989320"/>
+            <a:ext cx="1965960" cy="0"/>
           </a:xfrm>
           <a:prstGeom prst="line">
             <a:avLst/>
@@ -2554,8 +2287,8 @@
         </p:nvSpPr>
         <p:spPr>
           <a:xfrm>
-            <a:off x="1417320" y="9253728"/>
-            <a:ext cx="1188720" cy="365760"/>
+            <a:off x="731520" y="6044184"/>
+            <a:ext cx="914400" cy="274320"/>
           </a:xfrm>
           <a:prstGeom prst="rect">
             <a:avLst/>
@@ -2571,7 +2304,7 @@
               <a:buNone/>
             </a:pPr>
             <a:r>
-              <a:rPr lang="en-US" sz="1000" dirty="0">
+              <a:rPr lang="en-US" sz="900" dirty="0">
                 <a:solidFill>
                   <a:srgbClr val="4A5F7A"/>
                 </a:solidFill>
@@ -2581,7 +2314,7 @@
               </a:rPr>
               <a:t>Lösung:</a:t>
             </a:r>
-            <a:endParaRPr lang="en-US" sz="1000" dirty="0"/>
+            <a:endParaRPr lang="en-US" sz="900" dirty="0"/>
           </a:p>
         </p:txBody>
       </p:sp>
@@ -2593,8 +2326,1293 @@
         </p:nvSpPr>
         <p:spPr>
           <a:xfrm>
-            <a:off x="2606040" y="9573768"/>
-            <a:ext cx="2743200" cy="0"/>
+            <a:off x="1554480" y="6291072"/>
+            <a:ext cx="1965960" cy="0"/>
+          </a:xfrm>
+          <a:prstGeom prst="line">
+            <a:avLst/>
+          </a:prstGeom>
+          <a:noFill/>
+          <a:ln w="15875">
+            <a:solidFill>
+              <a:srgbClr val="8DBBF2"/>
+            </a:solidFill>
+            <a:prstDash val="sysDot"/>
+          </a:ln>
+        </p:spPr>
+      </p:sp>
+      <p:sp>
+        <p:nvSpPr>
+          <p:cNvPr id="38" name="Shape 33"/>
+          <p:cNvSpPr/>
+          <p:nvPr/>
+        </p:nvSpPr>
+        <p:spPr>
+          <a:xfrm>
+            <a:off x="3858768" y="4869180"/>
+            <a:ext cx="3154680" cy="1604772"/>
+          </a:xfrm>
+          <a:prstGeom prst="roundRect">
+            <a:avLst>
+              <a:gd name="adj" fmla="val 8547"/>
+            </a:avLst>
+          </a:prstGeom>
+          <a:solidFill>
+            <a:srgbClr val="FFFFFF"/>
+          </a:solidFill>
+          <a:ln w="15875">
+            <a:solidFill>
+              <a:srgbClr val="8DBBF2"/>
+            </a:solidFill>
+            <a:prstDash val="solid"/>
+          </a:ln>
+        </p:spPr>
+      </p:sp>
+      <p:sp>
+        <p:nvSpPr>
+          <p:cNvPr id="39" name="Shape 34"/>
+          <p:cNvSpPr/>
+          <p:nvPr/>
+        </p:nvSpPr>
+        <p:spPr>
+          <a:xfrm>
+            <a:off x="3986784" y="4997196"/>
+            <a:ext cx="384048" cy="384048"/>
+          </a:xfrm>
+          <a:prstGeom prst="ellipse">
+            <a:avLst/>
+          </a:prstGeom>
+          <a:solidFill>
+            <a:srgbClr val="BCD6F5"/>
+          </a:solidFill>
+          <a:ln w="12700">
+            <a:solidFill>
+              <a:srgbClr val="BCD6F5"/>
+            </a:solidFill>
+            <a:prstDash val="solid"/>
+          </a:ln>
+        </p:spPr>
+      </p:sp>
+      <p:sp>
+        <p:nvSpPr>
+          <p:cNvPr id="40" name="Text 35"/>
+          <p:cNvSpPr txBox="1"/>
+          <p:nvPr/>
+        </p:nvSpPr>
+        <p:spPr>
+          <a:xfrm>
+            <a:off x="3986784" y="4997196"/>
+            <a:ext cx="384048" cy="384048"/>
+          </a:xfrm>
+          <a:prstGeom prst="rect">
+            <a:avLst/>
+          </a:prstGeom>
+          <a:noFill/>
+          <a:ln/>
+        </p:spPr>
+        <p:txBody>
+          <a:bodyPr wrap="square" lIns="0" tIns="0" rIns="0" bIns="0" rtlCol="0" anchor="ctr"/>
+          <a:lstStyle/>
+          <a:p>
+            <a:pPr algn="ctr" indent="0" marL="0">
+              <a:buNone/>
+            </a:pPr>
+            <a:r>
+              <a:rPr lang="en-US" sz="1600" b="1" dirty="0">
+                <a:solidFill>
+                  <a:srgbClr val="0B1E3A"/>
+                </a:solidFill>
+                <a:latin typeface="Poppins" pitchFamily="34" charset="0"/>
+                <a:ea typeface="Poppins" pitchFamily="34" charset="-122"/>
+                <a:cs typeface="Poppins" pitchFamily="34" charset="-120"/>
+              </a:rPr>
+              <a:t>4</a:t>
+            </a:r>
+            <a:endParaRPr lang="en-US" sz="1600" dirty="0"/>
+          </a:p>
+        </p:txBody>
+      </p:sp>
+      <p:sp>
+        <p:nvSpPr>
+          <p:cNvPr id="41" name="Text 36"/>
+          <p:cNvSpPr txBox="1"/>
+          <p:nvPr/>
+        </p:nvSpPr>
+        <p:spPr>
+          <a:xfrm>
+            <a:off x="4498848" y="4997196"/>
+            <a:ext cx="2377440" cy="411480"/>
+          </a:xfrm>
+          <a:prstGeom prst="rect">
+            <a:avLst/>
+          </a:prstGeom>
+          <a:noFill/>
+          <a:ln/>
+        </p:spPr>
+        <p:txBody>
+          <a:bodyPr wrap="square" lIns="0" tIns="0" rIns="0" bIns="0" rtlCol="0" anchor="t"/>
+          <a:lstStyle/>
+          <a:p>
+            <a:pPr indent="0" marL="0">
+              <a:lnSpc>
+                <a:spcPct val="110000"/>
+              </a:lnSpc>
+              <a:buNone/>
+            </a:pPr>
+            <a:r>
+              <a:rPr lang="en-US" sz="1150" dirty="0">
+                <a:solidFill>
+                  <a:srgbClr val="0B1E3A"/>
+                </a:solidFill>
+                <a:latin typeface="Poppins" pitchFamily="34" charset="0"/>
+                <a:ea typeface="Poppins" pitchFamily="34" charset="-122"/>
+                <a:cs typeface="Poppins" pitchFamily="34" charset="-120"/>
+              </a:rPr>
+              <a:t>Das Doppelte einer Zahl ist 48. Wie lautet die Zahl?</a:t>
+            </a:r>
+            <a:endParaRPr lang="en-US" sz="1150" dirty="0"/>
+          </a:p>
+        </p:txBody>
+      </p:sp>
+      <p:sp>
+        <p:nvSpPr>
+          <p:cNvPr id="42" name="Text 37"/>
+          <p:cNvSpPr txBox="1"/>
+          <p:nvPr/>
+        </p:nvSpPr>
+        <p:spPr>
+          <a:xfrm>
+            <a:off x="4041648" y="5536692"/>
+            <a:ext cx="914400" cy="274320"/>
+          </a:xfrm>
+          <a:prstGeom prst="rect">
+            <a:avLst/>
+          </a:prstGeom>
+          <a:noFill/>
+          <a:ln/>
+        </p:spPr>
+        <p:txBody>
+          <a:bodyPr wrap="square" lIns="0" tIns="0" rIns="0" bIns="0" rtlCol="0" anchor="ctr"/>
+          <a:lstStyle/>
+          <a:p>
+            <a:pPr indent="0" marL="0">
+              <a:buNone/>
+            </a:pPr>
+            <a:r>
+              <a:rPr lang="en-US" sz="900" dirty="0">
+                <a:solidFill>
+                  <a:srgbClr val="4A5F7A"/>
+                </a:solidFill>
+                <a:latin typeface="Poppins" pitchFamily="34" charset="0"/>
+                <a:ea typeface="Poppins" pitchFamily="34" charset="-122"/>
+                <a:cs typeface="Poppins" pitchFamily="34" charset="-120"/>
+              </a:rPr>
+              <a:t>Gleichung:</a:t>
+            </a:r>
+            <a:endParaRPr lang="en-US" sz="900" dirty="0"/>
+          </a:p>
+        </p:txBody>
+      </p:sp>
+      <p:sp>
+        <p:nvSpPr>
+          <p:cNvPr id="43" name="Shape 38"/>
+          <p:cNvSpPr/>
+          <p:nvPr/>
+        </p:nvSpPr>
+        <p:spPr>
+          <a:xfrm>
+            <a:off x="4864608" y="5783580"/>
+            <a:ext cx="1965960" cy="0"/>
+          </a:xfrm>
+          <a:prstGeom prst="line">
+            <a:avLst/>
+          </a:prstGeom>
+          <a:noFill/>
+          <a:ln w="15875">
+            <a:solidFill>
+              <a:srgbClr val="8DBBF2"/>
+            </a:solidFill>
+            <a:prstDash val="sysDot"/>
+          </a:ln>
+        </p:spPr>
+      </p:sp>
+      <p:sp>
+        <p:nvSpPr>
+          <p:cNvPr id="44" name="Text 39"/>
+          <p:cNvSpPr txBox="1"/>
+          <p:nvPr/>
+        </p:nvSpPr>
+        <p:spPr>
+          <a:xfrm>
+            <a:off x="4041648" y="5838444"/>
+            <a:ext cx="914400" cy="274320"/>
+          </a:xfrm>
+          <a:prstGeom prst="rect">
+            <a:avLst/>
+          </a:prstGeom>
+          <a:noFill/>
+          <a:ln/>
+        </p:spPr>
+        <p:txBody>
+          <a:bodyPr wrap="square" lIns="0" tIns="0" rIns="0" bIns="0" rtlCol="0" anchor="ctr"/>
+          <a:lstStyle/>
+          <a:p>
+            <a:pPr indent="0" marL="0">
+              <a:buNone/>
+            </a:pPr>
+            <a:r>
+              <a:rPr lang="en-US" sz="900" dirty="0">
+                <a:solidFill>
+                  <a:srgbClr val="4A5F7A"/>
+                </a:solidFill>
+                <a:latin typeface="Poppins" pitchFamily="34" charset="0"/>
+                <a:ea typeface="Poppins" pitchFamily="34" charset="-122"/>
+                <a:cs typeface="Poppins" pitchFamily="34" charset="-120"/>
+              </a:rPr>
+              <a:t>Lösung:</a:t>
+            </a:r>
+            <a:endParaRPr lang="en-US" sz="900" dirty="0"/>
+          </a:p>
+        </p:txBody>
+      </p:sp>
+      <p:sp>
+        <p:nvSpPr>
+          <p:cNvPr id="45" name="Shape 40"/>
+          <p:cNvSpPr/>
+          <p:nvPr/>
+        </p:nvSpPr>
+        <p:spPr>
+          <a:xfrm>
+            <a:off x="4864608" y="6085332"/>
+            <a:ext cx="1965960" cy="0"/>
+          </a:xfrm>
+          <a:prstGeom prst="line">
+            <a:avLst/>
+          </a:prstGeom>
+          <a:noFill/>
+          <a:ln w="15875">
+            <a:solidFill>
+              <a:srgbClr val="8DBBF2"/>
+            </a:solidFill>
+            <a:prstDash val="sysDot"/>
+          </a:ln>
+        </p:spPr>
+      </p:sp>
+      <p:sp>
+        <p:nvSpPr>
+          <p:cNvPr id="46" name="Shape 41"/>
+          <p:cNvSpPr/>
+          <p:nvPr/>
+        </p:nvSpPr>
+        <p:spPr>
+          <a:xfrm>
+            <a:off x="548640" y="6583680"/>
+            <a:ext cx="3154680" cy="1604772"/>
+          </a:xfrm>
+          <a:prstGeom prst="roundRect">
+            <a:avLst>
+              <a:gd name="adj" fmla="val 8547"/>
+            </a:avLst>
+          </a:prstGeom>
+          <a:solidFill>
+            <a:srgbClr val="FFFFFF"/>
+          </a:solidFill>
+          <a:ln w="15875">
+            <a:solidFill>
+              <a:srgbClr val="8DBBF2"/>
+            </a:solidFill>
+            <a:prstDash val="solid"/>
+          </a:ln>
+        </p:spPr>
+      </p:sp>
+      <p:sp>
+        <p:nvSpPr>
+          <p:cNvPr id="47" name="Shape 42"/>
+          <p:cNvSpPr/>
+          <p:nvPr/>
+        </p:nvSpPr>
+        <p:spPr>
+          <a:xfrm>
+            <a:off x="676656" y="6711696"/>
+            <a:ext cx="384048" cy="384048"/>
+          </a:xfrm>
+          <a:prstGeom prst="ellipse">
+            <a:avLst/>
+          </a:prstGeom>
+          <a:solidFill>
+            <a:srgbClr val="BCD6F5"/>
+          </a:solidFill>
+          <a:ln w="12700">
+            <a:solidFill>
+              <a:srgbClr val="BCD6F5"/>
+            </a:solidFill>
+            <a:prstDash val="solid"/>
+          </a:ln>
+        </p:spPr>
+      </p:sp>
+      <p:sp>
+        <p:nvSpPr>
+          <p:cNvPr id="48" name="Text 43"/>
+          <p:cNvSpPr txBox="1"/>
+          <p:nvPr/>
+        </p:nvSpPr>
+        <p:spPr>
+          <a:xfrm>
+            <a:off x="676656" y="6711696"/>
+            <a:ext cx="384048" cy="384048"/>
+          </a:xfrm>
+          <a:prstGeom prst="rect">
+            <a:avLst/>
+          </a:prstGeom>
+          <a:noFill/>
+          <a:ln/>
+        </p:spPr>
+        <p:txBody>
+          <a:bodyPr wrap="square" lIns="0" tIns="0" rIns="0" bIns="0" rtlCol="0" anchor="ctr"/>
+          <a:lstStyle/>
+          <a:p>
+            <a:pPr algn="ctr" indent="0" marL="0">
+              <a:buNone/>
+            </a:pPr>
+            <a:r>
+              <a:rPr lang="en-US" sz="1600" b="1" dirty="0">
+                <a:solidFill>
+                  <a:srgbClr val="0B1E3A"/>
+                </a:solidFill>
+                <a:latin typeface="Poppins" pitchFamily="34" charset="0"/>
+                <a:ea typeface="Poppins" pitchFamily="34" charset="-122"/>
+                <a:cs typeface="Poppins" pitchFamily="34" charset="-120"/>
+              </a:rPr>
+              <a:t>5</a:t>
+            </a:r>
+            <a:endParaRPr lang="en-US" sz="1600" dirty="0"/>
+          </a:p>
+        </p:txBody>
+      </p:sp>
+      <p:sp>
+        <p:nvSpPr>
+          <p:cNvPr id="49" name="Text 44"/>
+          <p:cNvSpPr txBox="1"/>
+          <p:nvPr/>
+        </p:nvSpPr>
+        <p:spPr>
+          <a:xfrm>
+            <a:off x="1188720" y="6711696"/>
+            <a:ext cx="2377440" cy="411480"/>
+          </a:xfrm>
+          <a:prstGeom prst="rect">
+            <a:avLst/>
+          </a:prstGeom>
+          <a:noFill/>
+          <a:ln/>
+        </p:spPr>
+        <p:txBody>
+          <a:bodyPr wrap="square" lIns="0" tIns="0" rIns="0" bIns="0" rtlCol="0" anchor="t"/>
+          <a:lstStyle/>
+          <a:p>
+            <a:pPr indent="0" marL="0">
+              <a:lnSpc>
+                <a:spcPct val="110000"/>
+              </a:lnSpc>
+              <a:buNone/>
+            </a:pPr>
+            <a:r>
+              <a:rPr lang="en-US" sz="1150" dirty="0">
+                <a:solidFill>
+                  <a:srgbClr val="0B1E3A"/>
+                </a:solidFill>
+                <a:latin typeface="Poppins" pitchFamily="34" charset="0"/>
+                <a:ea typeface="Poppins" pitchFamily="34" charset="-122"/>
+                <a:cs typeface="Poppins" pitchFamily="34" charset="-120"/>
+              </a:rPr>
+              <a:t>Das Dreifache einer Zahl ist 81. Wie lautet die Zahl?</a:t>
+            </a:r>
+            <a:endParaRPr lang="en-US" sz="1150" dirty="0"/>
+          </a:p>
+        </p:txBody>
+      </p:sp>
+      <p:sp>
+        <p:nvSpPr>
+          <p:cNvPr id="50" name="Text 45"/>
+          <p:cNvSpPr txBox="1"/>
+          <p:nvPr/>
+        </p:nvSpPr>
+        <p:spPr>
+          <a:xfrm>
+            <a:off x="731520" y="7251192"/>
+            <a:ext cx="914400" cy="274320"/>
+          </a:xfrm>
+          <a:prstGeom prst="rect">
+            <a:avLst/>
+          </a:prstGeom>
+          <a:noFill/>
+          <a:ln/>
+        </p:spPr>
+        <p:txBody>
+          <a:bodyPr wrap="square" lIns="0" tIns="0" rIns="0" bIns="0" rtlCol="0" anchor="ctr"/>
+          <a:lstStyle/>
+          <a:p>
+            <a:pPr indent="0" marL="0">
+              <a:buNone/>
+            </a:pPr>
+            <a:r>
+              <a:rPr lang="en-US" sz="900" dirty="0">
+                <a:solidFill>
+                  <a:srgbClr val="4A5F7A"/>
+                </a:solidFill>
+                <a:latin typeface="Poppins" pitchFamily="34" charset="0"/>
+                <a:ea typeface="Poppins" pitchFamily="34" charset="-122"/>
+                <a:cs typeface="Poppins" pitchFamily="34" charset="-120"/>
+              </a:rPr>
+              <a:t>Gleichung:</a:t>
+            </a:r>
+            <a:endParaRPr lang="en-US" sz="900" dirty="0"/>
+          </a:p>
+        </p:txBody>
+      </p:sp>
+      <p:sp>
+        <p:nvSpPr>
+          <p:cNvPr id="51" name="Shape 46"/>
+          <p:cNvSpPr/>
+          <p:nvPr/>
+        </p:nvSpPr>
+        <p:spPr>
+          <a:xfrm>
+            <a:off x="1554480" y="7498080"/>
+            <a:ext cx="1965960" cy="0"/>
+          </a:xfrm>
+          <a:prstGeom prst="line">
+            <a:avLst/>
+          </a:prstGeom>
+          <a:noFill/>
+          <a:ln w="15875">
+            <a:solidFill>
+              <a:srgbClr val="8DBBF2"/>
+            </a:solidFill>
+            <a:prstDash val="sysDot"/>
+          </a:ln>
+        </p:spPr>
+      </p:sp>
+      <p:sp>
+        <p:nvSpPr>
+          <p:cNvPr id="52" name="Text 47"/>
+          <p:cNvSpPr txBox="1"/>
+          <p:nvPr/>
+        </p:nvSpPr>
+        <p:spPr>
+          <a:xfrm>
+            <a:off x="731520" y="7552944"/>
+            <a:ext cx="914400" cy="274320"/>
+          </a:xfrm>
+          <a:prstGeom prst="rect">
+            <a:avLst/>
+          </a:prstGeom>
+          <a:noFill/>
+          <a:ln/>
+        </p:spPr>
+        <p:txBody>
+          <a:bodyPr wrap="square" lIns="0" tIns="0" rIns="0" bIns="0" rtlCol="0" anchor="ctr"/>
+          <a:lstStyle/>
+          <a:p>
+            <a:pPr indent="0" marL="0">
+              <a:buNone/>
+            </a:pPr>
+            <a:r>
+              <a:rPr lang="en-US" sz="900" dirty="0">
+                <a:solidFill>
+                  <a:srgbClr val="4A5F7A"/>
+                </a:solidFill>
+                <a:latin typeface="Poppins" pitchFamily="34" charset="0"/>
+                <a:ea typeface="Poppins" pitchFamily="34" charset="-122"/>
+                <a:cs typeface="Poppins" pitchFamily="34" charset="-120"/>
+              </a:rPr>
+              <a:t>Lösung:</a:t>
+            </a:r>
+            <a:endParaRPr lang="en-US" sz="900" dirty="0"/>
+          </a:p>
+        </p:txBody>
+      </p:sp>
+      <p:sp>
+        <p:nvSpPr>
+          <p:cNvPr id="53" name="Shape 48"/>
+          <p:cNvSpPr/>
+          <p:nvPr/>
+        </p:nvSpPr>
+        <p:spPr>
+          <a:xfrm>
+            <a:off x="1554480" y="7799832"/>
+            <a:ext cx="1965960" cy="0"/>
+          </a:xfrm>
+          <a:prstGeom prst="line">
+            <a:avLst/>
+          </a:prstGeom>
+          <a:noFill/>
+          <a:ln w="15875">
+            <a:solidFill>
+              <a:srgbClr val="8DBBF2"/>
+            </a:solidFill>
+            <a:prstDash val="sysDot"/>
+          </a:ln>
+        </p:spPr>
+      </p:sp>
+      <p:sp>
+        <p:nvSpPr>
+          <p:cNvPr id="54" name="Shape 49"/>
+          <p:cNvSpPr/>
+          <p:nvPr/>
+        </p:nvSpPr>
+        <p:spPr>
+          <a:xfrm>
+            <a:off x="3858768" y="6583680"/>
+            <a:ext cx="3154680" cy="1604772"/>
+          </a:xfrm>
+          <a:prstGeom prst="roundRect">
+            <a:avLst>
+              <a:gd name="adj" fmla="val 8547"/>
+            </a:avLst>
+          </a:prstGeom>
+          <a:solidFill>
+            <a:srgbClr val="FFFFFF"/>
+          </a:solidFill>
+          <a:ln w="15875">
+            <a:solidFill>
+              <a:srgbClr val="8DBBF2"/>
+            </a:solidFill>
+            <a:prstDash val="solid"/>
+          </a:ln>
+        </p:spPr>
+      </p:sp>
+      <p:sp>
+        <p:nvSpPr>
+          <p:cNvPr id="55" name="Shape 50"/>
+          <p:cNvSpPr/>
+          <p:nvPr/>
+        </p:nvSpPr>
+        <p:spPr>
+          <a:xfrm>
+            <a:off x="3986784" y="6711696"/>
+            <a:ext cx="384048" cy="384048"/>
+          </a:xfrm>
+          <a:prstGeom prst="ellipse">
+            <a:avLst/>
+          </a:prstGeom>
+          <a:solidFill>
+            <a:srgbClr val="BCD6F5"/>
+          </a:solidFill>
+          <a:ln w="12700">
+            <a:solidFill>
+              <a:srgbClr val="BCD6F5"/>
+            </a:solidFill>
+            <a:prstDash val="solid"/>
+          </a:ln>
+        </p:spPr>
+      </p:sp>
+      <p:sp>
+        <p:nvSpPr>
+          <p:cNvPr id="56" name="Text 51"/>
+          <p:cNvSpPr txBox="1"/>
+          <p:nvPr/>
+        </p:nvSpPr>
+        <p:spPr>
+          <a:xfrm>
+            <a:off x="3986784" y="6711696"/>
+            <a:ext cx="384048" cy="384048"/>
+          </a:xfrm>
+          <a:prstGeom prst="rect">
+            <a:avLst/>
+          </a:prstGeom>
+          <a:noFill/>
+          <a:ln/>
+        </p:spPr>
+        <p:txBody>
+          <a:bodyPr wrap="square" lIns="0" tIns="0" rIns="0" bIns="0" rtlCol="0" anchor="ctr"/>
+          <a:lstStyle/>
+          <a:p>
+            <a:pPr algn="ctr" indent="0" marL="0">
+              <a:buNone/>
+            </a:pPr>
+            <a:r>
+              <a:rPr lang="en-US" sz="1600" b="1" dirty="0">
+                <a:solidFill>
+                  <a:srgbClr val="0B1E3A"/>
+                </a:solidFill>
+                <a:latin typeface="Poppins" pitchFamily="34" charset="0"/>
+                <a:ea typeface="Poppins" pitchFamily="34" charset="-122"/>
+                <a:cs typeface="Poppins" pitchFamily="34" charset="-120"/>
+              </a:rPr>
+              <a:t>6</a:t>
+            </a:r>
+            <a:endParaRPr lang="en-US" sz="1600" dirty="0"/>
+          </a:p>
+        </p:txBody>
+      </p:sp>
+      <p:sp>
+        <p:nvSpPr>
+          <p:cNvPr id="57" name="Text 52"/>
+          <p:cNvSpPr txBox="1"/>
+          <p:nvPr/>
+        </p:nvSpPr>
+        <p:spPr>
+          <a:xfrm>
+            <a:off x="4498848" y="6711696"/>
+            <a:ext cx="2377440" cy="617220"/>
+          </a:xfrm>
+          <a:prstGeom prst="rect">
+            <a:avLst/>
+          </a:prstGeom>
+          <a:noFill/>
+          <a:ln/>
+        </p:spPr>
+        <p:txBody>
+          <a:bodyPr wrap="square" lIns="0" tIns="0" rIns="0" bIns="0" rtlCol="0" anchor="t"/>
+          <a:lstStyle/>
+          <a:p>
+            <a:pPr indent="0" marL="0">
+              <a:lnSpc>
+                <a:spcPct val="110000"/>
+              </a:lnSpc>
+              <a:buNone/>
+            </a:pPr>
+            <a:r>
+              <a:rPr lang="en-US" sz="1150" dirty="0">
+                <a:solidFill>
+                  <a:srgbClr val="0B1E3A"/>
+                </a:solidFill>
+                <a:latin typeface="Poppins" pitchFamily="34" charset="0"/>
+                <a:ea typeface="Poppins" pitchFamily="34" charset="-122"/>
+                <a:cs typeface="Poppins" pitchFamily="34" charset="-120"/>
+              </a:rPr>
+              <a:t>Das Doppelte einer Zahl ist 7 kleiner als 43. Wie lautet die Zahl?</a:t>
+            </a:r>
+            <a:endParaRPr lang="en-US" sz="1150" dirty="0"/>
+          </a:p>
+        </p:txBody>
+      </p:sp>
+      <p:sp>
+        <p:nvSpPr>
+          <p:cNvPr id="58" name="Text 53"/>
+          <p:cNvSpPr txBox="1"/>
+          <p:nvPr/>
+        </p:nvSpPr>
+        <p:spPr>
+          <a:xfrm>
+            <a:off x="4041648" y="7456932"/>
+            <a:ext cx="914400" cy="274320"/>
+          </a:xfrm>
+          <a:prstGeom prst="rect">
+            <a:avLst/>
+          </a:prstGeom>
+          <a:noFill/>
+          <a:ln/>
+        </p:spPr>
+        <p:txBody>
+          <a:bodyPr wrap="square" lIns="0" tIns="0" rIns="0" bIns="0" rtlCol="0" anchor="ctr"/>
+          <a:lstStyle/>
+          <a:p>
+            <a:pPr indent="0" marL="0">
+              <a:buNone/>
+            </a:pPr>
+            <a:r>
+              <a:rPr lang="en-US" sz="900" dirty="0">
+                <a:solidFill>
+                  <a:srgbClr val="4A5F7A"/>
+                </a:solidFill>
+                <a:latin typeface="Poppins" pitchFamily="34" charset="0"/>
+                <a:ea typeface="Poppins" pitchFamily="34" charset="-122"/>
+                <a:cs typeface="Poppins" pitchFamily="34" charset="-120"/>
+              </a:rPr>
+              <a:t>Gleichung:</a:t>
+            </a:r>
+            <a:endParaRPr lang="en-US" sz="900" dirty="0"/>
+          </a:p>
+        </p:txBody>
+      </p:sp>
+      <p:sp>
+        <p:nvSpPr>
+          <p:cNvPr id="59" name="Shape 54"/>
+          <p:cNvSpPr/>
+          <p:nvPr/>
+        </p:nvSpPr>
+        <p:spPr>
+          <a:xfrm>
+            <a:off x="4864608" y="7703820"/>
+            <a:ext cx="1965960" cy="0"/>
+          </a:xfrm>
+          <a:prstGeom prst="line">
+            <a:avLst/>
+          </a:prstGeom>
+          <a:noFill/>
+          <a:ln w="15875">
+            <a:solidFill>
+              <a:srgbClr val="8DBBF2"/>
+            </a:solidFill>
+            <a:prstDash val="sysDot"/>
+          </a:ln>
+        </p:spPr>
+      </p:sp>
+      <p:sp>
+        <p:nvSpPr>
+          <p:cNvPr id="60" name="Text 55"/>
+          <p:cNvSpPr txBox="1"/>
+          <p:nvPr/>
+        </p:nvSpPr>
+        <p:spPr>
+          <a:xfrm>
+            <a:off x="4041648" y="7758684"/>
+            <a:ext cx="914400" cy="274320"/>
+          </a:xfrm>
+          <a:prstGeom prst="rect">
+            <a:avLst/>
+          </a:prstGeom>
+          <a:noFill/>
+          <a:ln/>
+        </p:spPr>
+        <p:txBody>
+          <a:bodyPr wrap="square" lIns="0" tIns="0" rIns="0" bIns="0" rtlCol="0" anchor="ctr"/>
+          <a:lstStyle/>
+          <a:p>
+            <a:pPr indent="0" marL="0">
+              <a:buNone/>
+            </a:pPr>
+            <a:r>
+              <a:rPr lang="en-US" sz="900" dirty="0">
+                <a:solidFill>
+                  <a:srgbClr val="4A5F7A"/>
+                </a:solidFill>
+                <a:latin typeface="Poppins" pitchFamily="34" charset="0"/>
+                <a:ea typeface="Poppins" pitchFamily="34" charset="-122"/>
+                <a:cs typeface="Poppins" pitchFamily="34" charset="-120"/>
+              </a:rPr>
+              <a:t>Lösung:</a:t>
+            </a:r>
+            <a:endParaRPr lang="en-US" sz="900" dirty="0"/>
+          </a:p>
+        </p:txBody>
+      </p:sp>
+      <p:sp>
+        <p:nvSpPr>
+          <p:cNvPr id="61" name="Shape 56"/>
+          <p:cNvSpPr/>
+          <p:nvPr/>
+        </p:nvSpPr>
+        <p:spPr>
+          <a:xfrm>
+            <a:off x="4864608" y="8005572"/>
+            <a:ext cx="1965960" cy="0"/>
+          </a:xfrm>
+          <a:prstGeom prst="line">
+            <a:avLst/>
+          </a:prstGeom>
+          <a:noFill/>
+          <a:ln w="15875">
+            <a:solidFill>
+              <a:srgbClr val="8DBBF2"/>
+            </a:solidFill>
+            <a:prstDash val="sysDot"/>
+          </a:ln>
+        </p:spPr>
+      </p:sp>
+      <p:sp>
+        <p:nvSpPr>
+          <p:cNvPr id="62" name="Shape 57"/>
+          <p:cNvSpPr/>
+          <p:nvPr/>
+        </p:nvSpPr>
+        <p:spPr>
+          <a:xfrm>
+            <a:off x="548640" y="8298180"/>
+            <a:ext cx="3154680" cy="1810512"/>
+          </a:xfrm>
+          <a:prstGeom prst="roundRect">
+            <a:avLst>
+              <a:gd name="adj" fmla="val 7576"/>
+            </a:avLst>
+          </a:prstGeom>
+          <a:solidFill>
+            <a:srgbClr val="FFFFFF"/>
+          </a:solidFill>
+          <a:ln w="15875">
+            <a:solidFill>
+              <a:srgbClr val="8DBBF2"/>
+            </a:solidFill>
+            <a:prstDash val="solid"/>
+          </a:ln>
+        </p:spPr>
+      </p:sp>
+      <p:sp>
+        <p:nvSpPr>
+          <p:cNvPr id="63" name="Shape 58"/>
+          <p:cNvSpPr/>
+          <p:nvPr/>
+        </p:nvSpPr>
+        <p:spPr>
+          <a:xfrm>
+            <a:off x="676656" y="8426196"/>
+            <a:ext cx="384048" cy="384048"/>
+          </a:xfrm>
+          <a:prstGeom prst="ellipse">
+            <a:avLst/>
+          </a:prstGeom>
+          <a:solidFill>
+            <a:srgbClr val="BCD6F5"/>
+          </a:solidFill>
+          <a:ln w="12700">
+            <a:solidFill>
+              <a:srgbClr val="BCD6F5"/>
+            </a:solidFill>
+            <a:prstDash val="solid"/>
+          </a:ln>
+        </p:spPr>
+      </p:sp>
+      <p:sp>
+        <p:nvSpPr>
+          <p:cNvPr id="64" name="Text 59"/>
+          <p:cNvSpPr txBox="1"/>
+          <p:nvPr/>
+        </p:nvSpPr>
+        <p:spPr>
+          <a:xfrm>
+            <a:off x="676656" y="8426196"/>
+            <a:ext cx="384048" cy="384048"/>
+          </a:xfrm>
+          <a:prstGeom prst="rect">
+            <a:avLst/>
+          </a:prstGeom>
+          <a:noFill/>
+          <a:ln/>
+        </p:spPr>
+        <p:txBody>
+          <a:bodyPr wrap="square" lIns="0" tIns="0" rIns="0" bIns="0" rtlCol="0" anchor="ctr"/>
+          <a:lstStyle/>
+          <a:p>
+            <a:pPr algn="ctr" indent="0" marL="0">
+              <a:buNone/>
+            </a:pPr>
+            <a:r>
+              <a:rPr lang="en-US" sz="1600" b="1" dirty="0">
+                <a:solidFill>
+                  <a:srgbClr val="0B1E3A"/>
+                </a:solidFill>
+                <a:latin typeface="Poppins" pitchFamily="34" charset="0"/>
+                <a:ea typeface="Poppins" pitchFamily="34" charset="-122"/>
+                <a:cs typeface="Poppins" pitchFamily="34" charset="-120"/>
+              </a:rPr>
+              <a:t>7</a:t>
+            </a:r>
+            <a:endParaRPr lang="en-US" sz="1600" dirty="0"/>
+          </a:p>
+        </p:txBody>
+      </p:sp>
+      <p:sp>
+        <p:nvSpPr>
+          <p:cNvPr id="65" name="Text 60"/>
+          <p:cNvSpPr txBox="1"/>
+          <p:nvPr/>
+        </p:nvSpPr>
+        <p:spPr>
+          <a:xfrm>
+            <a:off x="1188720" y="8426196"/>
+            <a:ext cx="2377440" cy="617220"/>
+          </a:xfrm>
+          <a:prstGeom prst="rect">
+            <a:avLst/>
+          </a:prstGeom>
+          <a:noFill/>
+          <a:ln/>
+        </p:spPr>
+        <p:txBody>
+          <a:bodyPr wrap="square" lIns="0" tIns="0" rIns="0" bIns="0" rtlCol="0" anchor="t"/>
+          <a:lstStyle/>
+          <a:p>
+            <a:pPr indent="0" marL="0">
+              <a:lnSpc>
+                <a:spcPct val="110000"/>
+              </a:lnSpc>
+              <a:buNone/>
+            </a:pPr>
+            <a:r>
+              <a:rPr lang="en-US" sz="1150" dirty="0">
+                <a:solidFill>
+                  <a:srgbClr val="0B1E3A"/>
+                </a:solidFill>
+                <a:latin typeface="Poppins" pitchFamily="34" charset="0"/>
+                <a:ea typeface="Poppins" pitchFamily="34" charset="-122"/>
+                <a:cs typeface="Poppins" pitchFamily="34" charset="-120"/>
+              </a:rPr>
+              <a:t>Das Dreifache einer Zahl ist um 11 größer als 76. Wie lautet die Zahl?</a:t>
+            </a:r>
+            <a:endParaRPr lang="en-US" sz="1150" dirty="0"/>
+          </a:p>
+        </p:txBody>
+      </p:sp>
+      <p:sp>
+        <p:nvSpPr>
+          <p:cNvPr id="66" name="Text 61"/>
+          <p:cNvSpPr txBox="1"/>
+          <p:nvPr/>
+        </p:nvSpPr>
+        <p:spPr>
+          <a:xfrm>
+            <a:off x="731520" y="9171432"/>
+            <a:ext cx="914400" cy="274320"/>
+          </a:xfrm>
+          <a:prstGeom prst="rect">
+            <a:avLst/>
+          </a:prstGeom>
+          <a:noFill/>
+          <a:ln/>
+        </p:spPr>
+        <p:txBody>
+          <a:bodyPr wrap="square" lIns="0" tIns="0" rIns="0" bIns="0" rtlCol="0" anchor="ctr"/>
+          <a:lstStyle/>
+          <a:p>
+            <a:pPr indent="0" marL="0">
+              <a:buNone/>
+            </a:pPr>
+            <a:r>
+              <a:rPr lang="en-US" sz="900" dirty="0">
+                <a:solidFill>
+                  <a:srgbClr val="4A5F7A"/>
+                </a:solidFill>
+                <a:latin typeface="Poppins" pitchFamily="34" charset="0"/>
+                <a:ea typeface="Poppins" pitchFamily="34" charset="-122"/>
+                <a:cs typeface="Poppins" pitchFamily="34" charset="-120"/>
+              </a:rPr>
+              <a:t>Gleichung:</a:t>
+            </a:r>
+            <a:endParaRPr lang="en-US" sz="900" dirty="0"/>
+          </a:p>
+        </p:txBody>
+      </p:sp>
+      <p:sp>
+        <p:nvSpPr>
+          <p:cNvPr id="67" name="Shape 62"/>
+          <p:cNvSpPr/>
+          <p:nvPr/>
+        </p:nvSpPr>
+        <p:spPr>
+          <a:xfrm>
+            <a:off x="1554480" y="9418320"/>
+            <a:ext cx="1965960" cy="0"/>
+          </a:xfrm>
+          <a:prstGeom prst="line">
+            <a:avLst/>
+          </a:prstGeom>
+          <a:noFill/>
+          <a:ln w="15875">
+            <a:solidFill>
+              <a:srgbClr val="8DBBF2"/>
+            </a:solidFill>
+            <a:prstDash val="sysDot"/>
+          </a:ln>
+        </p:spPr>
+      </p:sp>
+      <p:sp>
+        <p:nvSpPr>
+          <p:cNvPr id="68" name="Text 63"/>
+          <p:cNvSpPr txBox="1"/>
+          <p:nvPr/>
+        </p:nvSpPr>
+        <p:spPr>
+          <a:xfrm>
+            <a:off x="731520" y="9473184"/>
+            <a:ext cx="914400" cy="274320"/>
+          </a:xfrm>
+          <a:prstGeom prst="rect">
+            <a:avLst/>
+          </a:prstGeom>
+          <a:noFill/>
+          <a:ln/>
+        </p:spPr>
+        <p:txBody>
+          <a:bodyPr wrap="square" lIns="0" tIns="0" rIns="0" bIns="0" rtlCol="0" anchor="ctr"/>
+          <a:lstStyle/>
+          <a:p>
+            <a:pPr indent="0" marL="0">
+              <a:buNone/>
+            </a:pPr>
+            <a:r>
+              <a:rPr lang="en-US" sz="900" dirty="0">
+                <a:solidFill>
+                  <a:srgbClr val="4A5F7A"/>
+                </a:solidFill>
+                <a:latin typeface="Poppins" pitchFamily="34" charset="0"/>
+                <a:ea typeface="Poppins" pitchFamily="34" charset="-122"/>
+                <a:cs typeface="Poppins" pitchFamily="34" charset="-120"/>
+              </a:rPr>
+              <a:t>Lösung:</a:t>
+            </a:r>
+            <a:endParaRPr lang="en-US" sz="900" dirty="0"/>
+          </a:p>
+        </p:txBody>
+      </p:sp>
+      <p:sp>
+        <p:nvSpPr>
+          <p:cNvPr id="69" name="Shape 64"/>
+          <p:cNvSpPr/>
+          <p:nvPr/>
+        </p:nvSpPr>
+        <p:spPr>
+          <a:xfrm>
+            <a:off x="1554480" y="9720072"/>
+            <a:ext cx="1965960" cy="0"/>
+          </a:xfrm>
+          <a:prstGeom prst="line">
+            <a:avLst/>
+          </a:prstGeom>
+          <a:noFill/>
+          <a:ln w="15875">
+            <a:solidFill>
+              <a:srgbClr val="8DBBF2"/>
+            </a:solidFill>
+            <a:prstDash val="sysDot"/>
+          </a:ln>
+        </p:spPr>
+      </p:sp>
+      <p:sp>
+        <p:nvSpPr>
+          <p:cNvPr id="70" name="Shape 65"/>
+          <p:cNvSpPr/>
+          <p:nvPr/>
+        </p:nvSpPr>
+        <p:spPr>
+          <a:xfrm>
+            <a:off x="3858768" y="8298180"/>
+            <a:ext cx="3154680" cy="1810512"/>
+          </a:xfrm>
+          <a:prstGeom prst="roundRect">
+            <a:avLst>
+              <a:gd name="adj" fmla="val 7576"/>
+            </a:avLst>
+          </a:prstGeom>
+          <a:solidFill>
+            <a:srgbClr val="FFFFFF"/>
+          </a:solidFill>
+          <a:ln w="15875">
+            <a:solidFill>
+              <a:srgbClr val="8DBBF2"/>
+            </a:solidFill>
+            <a:prstDash val="solid"/>
+          </a:ln>
+        </p:spPr>
+      </p:sp>
+      <p:sp>
+        <p:nvSpPr>
+          <p:cNvPr id="71" name="Shape 66"/>
+          <p:cNvSpPr/>
+          <p:nvPr/>
+        </p:nvSpPr>
+        <p:spPr>
+          <a:xfrm>
+            <a:off x="3986784" y="8426196"/>
+            <a:ext cx="384048" cy="384048"/>
+          </a:xfrm>
+          <a:prstGeom prst="ellipse">
+            <a:avLst/>
+          </a:prstGeom>
+          <a:solidFill>
+            <a:srgbClr val="BCD6F5"/>
+          </a:solidFill>
+          <a:ln w="12700">
+            <a:solidFill>
+              <a:srgbClr val="BCD6F5"/>
+            </a:solidFill>
+            <a:prstDash val="solid"/>
+          </a:ln>
+        </p:spPr>
+      </p:sp>
+      <p:sp>
+        <p:nvSpPr>
+          <p:cNvPr id="72" name="Text 67"/>
+          <p:cNvSpPr txBox="1"/>
+          <p:nvPr/>
+        </p:nvSpPr>
+        <p:spPr>
+          <a:xfrm>
+            <a:off x="3986784" y="8426196"/>
+            <a:ext cx="384048" cy="384048"/>
+          </a:xfrm>
+          <a:prstGeom prst="rect">
+            <a:avLst/>
+          </a:prstGeom>
+          <a:noFill/>
+          <a:ln/>
+        </p:spPr>
+        <p:txBody>
+          <a:bodyPr wrap="square" lIns="0" tIns="0" rIns="0" bIns="0" rtlCol="0" anchor="ctr"/>
+          <a:lstStyle/>
+          <a:p>
+            <a:pPr algn="ctr" indent="0" marL="0">
+              <a:buNone/>
+            </a:pPr>
+            <a:r>
+              <a:rPr lang="en-US" sz="1600" b="1" dirty="0">
+                <a:solidFill>
+                  <a:srgbClr val="0B1E3A"/>
+                </a:solidFill>
+                <a:latin typeface="Poppins" pitchFamily="34" charset="0"/>
+                <a:ea typeface="Poppins" pitchFamily="34" charset="-122"/>
+                <a:cs typeface="Poppins" pitchFamily="34" charset="-120"/>
+              </a:rPr>
+              <a:t>8</a:t>
+            </a:r>
+            <a:endParaRPr lang="en-US" sz="1600" dirty="0"/>
+          </a:p>
+        </p:txBody>
+      </p:sp>
+      <p:sp>
+        <p:nvSpPr>
+          <p:cNvPr id="73" name="Text 68"/>
+          <p:cNvSpPr txBox="1"/>
+          <p:nvPr/>
+        </p:nvSpPr>
+        <p:spPr>
+          <a:xfrm>
+            <a:off x="4498848" y="8426196"/>
+            <a:ext cx="2377440" cy="822960"/>
+          </a:xfrm>
+          <a:prstGeom prst="rect">
+            <a:avLst/>
+          </a:prstGeom>
+          <a:noFill/>
+          <a:ln/>
+        </p:spPr>
+        <p:txBody>
+          <a:bodyPr wrap="square" lIns="0" tIns="0" rIns="0" bIns="0" rtlCol="0" anchor="t"/>
+          <a:lstStyle/>
+          <a:p>
+            <a:pPr indent="0" marL="0">
+              <a:lnSpc>
+                <a:spcPct val="110000"/>
+              </a:lnSpc>
+              <a:buNone/>
+            </a:pPr>
+            <a:r>
+              <a:rPr lang="en-US" sz="1150" dirty="0">
+                <a:solidFill>
+                  <a:srgbClr val="0B1E3A"/>
+                </a:solidFill>
+                <a:latin typeface="Poppins" pitchFamily="34" charset="0"/>
+                <a:ea typeface="Poppins" pitchFamily="34" charset="-122"/>
+                <a:cs typeface="Poppins" pitchFamily="34" charset="-120"/>
+              </a:rPr>
+              <a:t>Zieht man vom 11fachen einer Zahl das Dreifache dieser Zahl ab, so erhält man 56. Wie lautet die Zahl?</a:t>
+            </a:r>
+            <a:endParaRPr lang="en-US" sz="1150" dirty="0"/>
+          </a:p>
+        </p:txBody>
+      </p:sp>
+      <p:sp>
+        <p:nvSpPr>
+          <p:cNvPr id="74" name="Text 69"/>
+          <p:cNvSpPr txBox="1"/>
+          <p:nvPr/>
+        </p:nvSpPr>
+        <p:spPr>
+          <a:xfrm>
+            <a:off x="4041648" y="9377172"/>
+            <a:ext cx="914400" cy="274320"/>
+          </a:xfrm>
+          <a:prstGeom prst="rect">
+            <a:avLst/>
+          </a:prstGeom>
+          <a:noFill/>
+          <a:ln/>
+        </p:spPr>
+        <p:txBody>
+          <a:bodyPr wrap="square" lIns="0" tIns="0" rIns="0" bIns="0" rtlCol="0" anchor="ctr"/>
+          <a:lstStyle/>
+          <a:p>
+            <a:pPr indent="0" marL="0">
+              <a:buNone/>
+            </a:pPr>
+            <a:r>
+              <a:rPr lang="en-US" sz="900" dirty="0">
+                <a:solidFill>
+                  <a:srgbClr val="4A5F7A"/>
+                </a:solidFill>
+                <a:latin typeface="Poppins" pitchFamily="34" charset="0"/>
+                <a:ea typeface="Poppins" pitchFamily="34" charset="-122"/>
+                <a:cs typeface="Poppins" pitchFamily="34" charset="-120"/>
+              </a:rPr>
+              <a:t>Gleichung:</a:t>
+            </a:r>
+            <a:endParaRPr lang="en-US" sz="900" dirty="0"/>
+          </a:p>
+        </p:txBody>
+      </p:sp>
+      <p:sp>
+        <p:nvSpPr>
+          <p:cNvPr id="75" name="Shape 70"/>
+          <p:cNvSpPr/>
+          <p:nvPr/>
+        </p:nvSpPr>
+        <p:spPr>
+          <a:xfrm>
+            <a:off x="4864608" y="9624060"/>
+            <a:ext cx="1965960" cy="0"/>
+          </a:xfrm>
+          <a:prstGeom prst="line">
+            <a:avLst/>
+          </a:prstGeom>
+          <a:noFill/>
+          <a:ln w="15875">
+            <a:solidFill>
+              <a:srgbClr val="8DBBF2"/>
+            </a:solidFill>
+            <a:prstDash val="sysDot"/>
+          </a:ln>
+        </p:spPr>
+      </p:sp>
+      <p:sp>
+        <p:nvSpPr>
+          <p:cNvPr id="76" name="Text 71"/>
+          <p:cNvSpPr txBox="1"/>
+          <p:nvPr/>
+        </p:nvSpPr>
+        <p:spPr>
+          <a:xfrm>
+            <a:off x="4041648" y="9678924"/>
+            <a:ext cx="914400" cy="274320"/>
+          </a:xfrm>
+          <a:prstGeom prst="rect">
+            <a:avLst/>
+          </a:prstGeom>
+          <a:noFill/>
+          <a:ln/>
+        </p:spPr>
+        <p:txBody>
+          <a:bodyPr wrap="square" lIns="0" tIns="0" rIns="0" bIns="0" rtlCol="0" anchor="ctr"/>
+          <a:lstStyle/>
+          <a:p>
+            <a:pPr indent="0" marL="0">
+              <a:buNone/>
+            </a:pPr>
+            <a:r>
+              <a:rPr lang="en-US" sz="900" dirty="0">
+                <a:solidFill>
+                  <a:srgbClr val="4A5F7A"/>
+                </a:solidFill>
+                <a:latin typeface="Poppins" pitchFamily="34" charset="0"/>
+                <a:ea typeface="Poppins" pitchFamily="34" charset="-122"/>
+                <a:cs typeface="Poppins" pitchFamily="34" charset="-120"/>
+              </a:rPr>
+              <a:t>Lösung:</a:t>
+            </a:r>
+            <a:endParaRPr lang="en-US" sz="900" dirty="0"/>
+          </a:p>
+        </p:txBody>
+      </p:sp>
+      <p:sp>
+        <p:nvSpPr>
+          <p:cNvPr id="77" name="Shape 72"/>
+          <p:cNvSpPr/>
+          <p:nvPr/>
+        </p:nvSpPr>
+        <p:spPr>
+          <a:xfrm>
+            <a:off x="4864608" y="9925812"/>
+            <a:ext cx="1965960" cy="0"/>
           </a:xfrm>
           <a:prstGeom prst="line">
             <a:avLst/>
@@ -2768,57 +3786,18 @@
       </p:sp>
       <p:sp>
         <p:nvSpPr>
-          <p:cNvPr id="7" name="Text 2"/>
-          <p:cNvSpPr txBox="1"/>
+          <p:cNvPr id="7" name="Shape 2"/>
+          <p:cNvSpPr/>
           <p:nvPr/>
         </p:nvSpPr>
         <p:spPr>
           <a:xfrm>
             <a:off x="548640" y="1371600"/>
-            <a:ext cx="6400800" cy="365760"/>
-          </a:xfrm>
-          <a:prstGeom prst="rect">
-            <a:avLst/>
-          </a:prstGeom>
-          <a:noFill/>
-          <a:ln/>
-        </p:spPr>
-        <p:txBody>
-          <a:bodyPr wrap="square" lIns="0" tIns="0" rIns="0" bIns="0" rtlCol="0" anchor="t"/>
-          <a:lstStyle/>
-          <a:p>
-            <a:pPr indent="0" marL="0">
-              <a:buNone/>
-            </a:pPr>
-            <a:r>
-              <a:rPr lang="en-US" sz="1800" b="1" dirty="0">
-                <a:solidFill>
-                  <a:srgbClr val="14459A"/>
-                </a:solidFill>
-                <a:latin typeface="Poppins" pitchFamily="34" charset="0"/>
-                <a:ea typeface="Poppins" pitchFamily="34" charset="-122"/>
-                <a:cs typeface="Poppins" pitchFamily="34" charset="-120"/>
-              </a:rPr>
-              <a:t>Einfache Textgleichungen · Seite 2</a:t>
-            </a:r>
-            <a:endParaRPr lang="en-US" sz="1800" dirty="0"/>
-          </a:p>
-        </p:txBody>
-      </p:sp>
-      <p:sp>
-        <p:nvSpPr>
-          <p:cNvPr id="8" name="Shape 3"/>
-          <p:cNvSpPr/>
-          <p:nvPr/>
-        </p:nvSpPr>
-        <p:spPr>
-          <a:xfrm>
-            <a:off x="548640" y="1965960"/>
-            <a:ext cx="6464808" cy="1709928"/>
+            <a:ext cx="3154680" cy="1810512"/>
           </a:xfrm>
           <a:prstGeom prst="roundRect">
             <a:avLst>
-              <a:gd name="adj" fmla="val 8021"/>
+              <a:gd name="adj" fmla="val 7576"/>
             </a:avLst>
           </a:prstGeom>
           <a:solidFill>
@@ -2834,14 +3813,14 @@
       </p:sp>
       <p:sp>
         <p:nvSpPr>
-          <p:cNvPr id="9" name="Shape 4"/>
-          <p:cNvSpPr/>
-          <p:nvPr/>
-        </p:nvSpPr>
-        <p:spPr>
-          <a:xfrm>
-            <a:off x="749808" y="2167128"/>
-            <a:ext cx="457200" cy="457200"/>
+          <p:cNvPr id="8" name="Shape 3"/>
+          <p:cNvSpPr/>
+          <p:nvPr/>
+        </p:nvSpPr>
+        <p:spPr>
+          <a:xfrm>
+            <a:off x="676656" y="1499616"/>
+            <a:ext cx="384048" cy="384048"/>
           </a:xfrm>
           <a:prstGeom prst="ellipse">
             <a:avLst/>
@@ -2859,53 +3838,53 @@
       </p:sp>
       <p:sp>
         <p:nvSpPr>
+          <p:cNvPr id="9" name="Text 4"/>
+          <p:cNvSpPr txBox="1"/>
+          <p:nvPr/>
+        </p:nvSpPr>
+        <p:spPr>
+          <a:xfrm>
+            <a:off x="676656" y="1499616"/>
+            <a:ext cx="384048" cy="384048"/>
+          </a:xfrm>
+          <a:prstGeom prst="rect">
+            <a:avLst/>
+          </a:prstGeom>
+          <a:noFill/>
+          <a:ln/>
+        </p:spPr>
+        <p:txBody>
+          <a:bodyPr wrap="square" lIns="0" tIns="0" rIns="0" bIns="0" rtlCol="0" anchor="ctr"/>
+          <a:lstStyle/>
+          <a:p>
+            <a:pPr algn="ctr" indent="0" marL="0">
+              <a:buNone/>
+            </a:pPr>
+            <a:r>
+              <a:rPr lang="en-US" sz="1600" b="1" dirty="0">
+                <a:solidFill>
+                  <a:srgbClr val="0B1E3A"/>
+                </a:solidFill>
+                <a:latin typeface="Poppins" pitchFamily="34" charset="0"/>
+                <a:ea typeface="Poppins" pitchFamily="34" charset="-122"/>
+                <a:cs typeface="Poppins" pitchFamily="34" charset="-120"/>
+              </a:rPr>
+              <a:t>9</a:t>
+            </a:r>
+            <a:endParaRPr lang="en-US" sz="1600" dirty="0"/>
+          </a:p>
+        </p:txBody>
+      </p:sp>
+      <p:sp>
+        <p:nvSpPr>
           <p:cNvPr id="10" name="Text 5"/>
           <p:cNvSpPr txBox="1"/>
           <p:nvPr/>
         </p:nvSpPr>
         <p:spPr>
           <a:xfrm>
-            <a:off x="749808" y="2167128"/>
-            <a:ext cx="457200" cy="457200"/>
-          </a:xfrm>
-          <a:prstGeom prst="rect">
-            <a:avLst/>
-          </a:prstGeom>
-          <a:noFill/>
-          <a:ln/>
-        </p:spPr>
-        <p:txBody>
-          <a:bodyPr wrap="square" lIns="0" tIns="0" rIns="0" bIns="0" rtlCol="0" anchor="ctr"/>
-          <a:lstStyle/>
-          <a:p>
-            <a:pPr algn="ctr" indent="0" marL="0">
-              <a:buNone/>
-            </a:pPr>
-            <a:r>
-              <a:rPr lang="en-US" sz="1600" b="1" dirty="0">
-                <a:solidFill>
-                  <a:srgbClr val="0B1E3A"/>
-                </a:solidFill>
-                <a:latin typeface="Poppins" pitchFamily="34" charset="0"/>
-                <a:ea typeface="Poppins" pitchFamily="34" charset="-122"/>
-                <a:cs typeface="Poppins" pitchFamily="34" charset="-120"/>
-              </a:rPr>
-              <a:t>4</a:t>
-            </a:r>
-            <a:endParaRPr lang="en-US" sz="1600" dirty="0"/>
-          </a:p>
-        </p:txBody>
-      </p:sp>
-      <p:sp>
-        <p:nvSpPr>
-          <p:cNvPr id="11" name="Text 6"/>
-          <p:cNvSpPr txBox="1"/>
-          <p:nvPr/>
-        </p:nvSpPr>
-        <p:spPr>
-          <a:xfrm>
-            <a:off x="1417320" y="2148840"/>
-            <a:ext cx="5367528" cy="338328"/>
+            <a:off x="1188720" y="1499616"/>
+            <a:ext cx="2377440" cy="617220"/>
           </a:xfrm>
           <a:prstGeom prst="rect">
             <a:avLst/>
@@ -2919,12 +3898,12 @@
           <a:p>
             <a:pPr indent="0" marL="0">
               <a:lnSpc>
-                <a:spcPct val="120000"/>
+                <a:spcPct val="110000"/>
               </a:lnSpc>
               <a:buNone/>
             </a:pPr>
             <a:r>
-              <a:rPr lang="en-US" sz="1250" dirty="0">
+              <a:rPr lang="en-US" sz="1150" dirty="0">
                 <a:solidFill>
                   <a:srgbClr val="0B1E3A"/>
                 </a:solidFill>
@@ -2932,22 +3911,22 @@
                 <a:ea typeface="Poppins" pitchFamily="34" charset="-122"/>
                 <a:cs typeface="Poppins" pitchFamily="34" charset="-120"/>
               </a:rPr>
-              <a:t>Das Doppelte einer Zahl ist 48. Wie lautet die Zahl?</a:t>
-            </a:r>
-            <a:endParaRPr lang="en-US" sz="1250" dirty="0"/>
-          </a:p>
-        </p:txBody>
-      </p:sp>
-      <p:sp>
-        <p:nvSpPr>
-          <p:cNvPr id="12" name="Text 7"/>
-          <p:cNvSpPr txBox="1"/>
-          <p:nvPr/>
-        </p:nvSpPr>
-        <p:spPr>
-          <a:xfrm>
-            <a:off x="1417320" y="2624328"/>
-            <a:ext cx="1188720" cy="365760"/>
+              <a:t>Vermindert man das Dreifache einer Zahl um 9, so erhält man 27. Wie lautet die Zahl?</a:t>
+            </a:r>
+            <a:endParaRPr lang="en-US" sz="1150" dirty="0"/>
+          </a:p>
+        </p:txBody>
+      </p:sp>
+      <p:sp>
+        <p:nvSpPr>
+          <p:cNvPr id="11" name="Text 6"/>
+          <p:cNvSpPr txBox="1"/>
+          <p:nvPr/>
+        </p:nvSpPr>
+        <p:spPr>
+          <a:xfrm>
+            <a:off x="731520" y="2244852"/>
+            <a:ext cx="914400" cy="274320"/>
           </a:xfrm>
           <a:prstGeom prst="rect">
             <a:avLst/>
@@ -2963,7 +3942,7 @@
               <a:buNone/>
             </a:pPr>
             <a:r>
-              <a:rPr lang="en-US" sz="1000" dirty="0">
+              <a:rPr lang="en-US" sz="900" dirty="0">
                 <a:solidFill>
                   <a:srgbClr val="4A5F7A"/>
                 </a:solidFill>
@@ -2973,20 +3952,20 @@
               </a:rPr>
               <a:t>Gleichung:</a:t>
             </a:r>
-            <a:endParaRPr lang="en-US" sz="1000" dirty="0"/>
-          </a:p>
-        </p:txBody>
-      </p:sp>
-      <p:sp>
-        <p:nvSpPr>
-          <p:cNvPr id="13" name="Shape 8"/>
-          <p:cNvSpPr/>
-          <p:nvPr/>
-        </p:nvSpPr>
-        <p:spPr>
-          <a:xfrm>
-            <a:off x="2606040" y="2944368"/>
-            <a:ext cx="4178808" cy="0"/>
+            <a:endParaRPr lang="en-US" sz="900" dirty="0"/>
+          </a:p>
+        </p:txBody>
+      </p:sp>
+      <p:sp>
+        <p:nvSpPr>
+          <p:cNvPr id="12" name="Shape 7"/>
+          <p:cNvSpPr/>
+          <p:nvPr/>
+        </p:nvSpPr>
+        <p:spPr>
+          <a:xfrm>
+            <a:off x="1554480" y="2491740"/>
+            <a:ext cx="1965960" cy="0"/>
           </a:xfrm>
           <a:prstGeom prst="line">
             <a:avLst/>
@@ -3002,14 +3981,14 @@
       </p:sp>
       <p:sp>
         <p:nvSpPr>
-          <p:cNvPr id="14" name="Text 9"/>
-          <p:cNvSpPr txBox="1"/>
-          <p:nvPr/>
-        </p:nvSpPr>
-        <p:spPr>
-          <a:xfrm>
-            <a:off x="1417320" y="3081528"/>
-            <a:ext cx="1188720" cy="365760"/>
+          <p:cNvPr id="13" name="Text 8"/>
+          <p:cNvSpPr txBox="1"/>
+          <p:nvPr/>
+        </p:nvSpPr>
+        <p:spPr>
+          <a:xfrm>
+            <a:off x="731520" y="2546604"/>
+            <a:ext cx="914400" cy="274320"/>
           </a:xfrm>
           <a:prstGeom prst="rect">
             <a:avLst/>
@@ -3025,7 +4004,7 @@
               <a:buNone/>
             </a:pPr>
             <a:r>
-              <a:rPr lang="en-US" sz="1000" dirty="0">
+              <a:rPr lang="en-US" sz="900" dirty="0">
                 <a:solidFill>
                   <a:srgbClr val="4A5F7A"/>
                 </a:solidFill>
@@ -3035,9 +4014,32 @@
               </a:rPr>
               <a:t>Lösung:</a:t>
             </a:r>
-            <a:endParaRPr lang="en-US" sz="1000" dirty="0"/>
-          </a:p>
-        </p:txBody>
+            <a:endParaRPr lang="en-US" sz="900" dirty="0"/>
+          </a:p>
+        </p:txBody>
+      </p:sp>
+      <p:sp>
+        <p:nvSpPr>
+          <p:cNvPr id="14" name="Shape 9"/>
+          <p:cNvSpPr/>
+          <p:nvPr/>
+        </p:nvSpPr>
+        <p:spPr>
+          <a:xfrm>
+            <a:off x="1554480" y="2793492"/>
+            <a:ext cx="1965960" cy="0"/>
+          </a:xfrm>
+          <a:prstGeom prst="line">
+            <a:avLst/>
+          </a:prstGeom>
+          <a:noFill/>
+          <a:ln w="15875">
+            <a:solidFill>
+              <a:srgbClr val="8DBBF2"/>
+            </a:solidFill>
+            <a:prstDash val="sysDot"/>
+          </a:ln>
+        </p:spPr>
       </p:sp>
       <p:sp>
         <p:nvSpPr>
@@ -3047,35 +4049,12 @@
         </p:nvSpPr>
         <p:spPr>
           <a:xfrm>
-            <a:off x="2606040" y="3401568"/>
-            <a:ext cx="2743200" cy="0"/>
-          </a:xfrm>
-          <a:prstGeom prst="line">
-            <a:avLst/>
-          </a:prstGeom>
-          <a:noFill/>
-          <a:ln w="15875">
-            <a:solidFill>
-              <a:srgbClr val="8DBBF2"/>
-            </a:solidFill>
-            <a:prstDash val="sysDot"/>
-          </a:ln>
-        </p:spPr>
-      </p:sp>
-      <p:sp>
-        <p:nvSpPr>
-          <p:cNvPr id="16" name="Shape 11"/>
-          <p:cNvSpPr/>
-          <p:nvPr/>
-        </p:nvSpPr>
-        <p:spPr>
-          <a:xfrm>
-            <a:off x="548640" y="3813048"/>
-            <a:ext cx="6464808" cy="1709928"/>
+            <a:off x="3858768" y="1371600"/>
+            <a:ext cx="3154680" cy="1810512"/>
           </a:xfrm>
           <a:prstGeom prst="roundRect">
             <a:avLst>
-              <a:gd name="adj" fmla="val 8021"/>
+              <a:gd name="adj" fmla="val 7576"/>
             </a:avLst>
           </a:prstGeom>
           <a:solidFill>
@@ -3091,14 +4070,14 @@
       </p:sp>
       <p:sp>
         <p:nvSpPr>
-          <p:cNvPr id="17" name="Shape 12"/>
-          <p:cNvSpPr/>
-          <p:nvPr/>
-        </p:nvSpPr>
-        <p:spPr>
-          <a:xfrm>
-            <a:off x="749808" y="4014216"/>
-            <a:ext cx="457200" cy="457200"/>
+          <p:cNvPr id="16" name="Shape 11"/>
+          <p:cNvSpPr/>
+          <p:nvPr/>
+        </p:nvSpPr>
+        <p:spPr>
+          <a:xfrm>
+            <a:off x="3986784" y="1499616"/>
+            <a:ext cx="384048" cy="384048"/>
           </a:xfrm>
           <a:prstGeom prst="ellipse">
             <a:avLst/>
@@ -3116,53 +4095,53 @@
       </p:sp>
       <p:sp>
         <p:nvSpPr>
+          <p:cNvPr id="17" name="Text 12"/>
+          <p:cNvSpPr txBox="1"/>
+          <p:nvPr/>
+        </p:nvSpPr>
+        <p:spPr>
+          <a:xfrm>
+            <a:off x="3986784" y="1499616"/>
+            <a:ext cx="384048" cy="384048"/>
+          </a:xfrm>
+          <a:prstGeom prst="rect">
+            <a:avLst/>
+          </a:prstGeom>
+          <a:noFill/>
+          <a:ln/>
+        </p:spPr>
+        <p:txBody>
+          <a:bodyPr wrap="square" lIns="0" tIns="0" rIns="0" bIns="0" rtlCol="0" anchor="ctr"/>
+          <a:lstStyle/>
+          <a:p>
+            <a:pPr algn="ctr" indent="0" marL="0">
+              <a:buNone/>
+            </a:pPr>
+            <a:r>
+              <a:rPr lang="en-US" sz="1600" b="1" dirty="0">
+                <a:solidFill>
+                  <a:srgbClr val="0B1E3A"/>
+                </a:solidFill>
+                <a:latin typeface="Poppins" pitchFamily="34" charset="0"/>
+                <a:ea typeface="Poppins" pitchFamily="34" charset="-122"/>
+                <a:cs typeface="Poppins" pitchFamily="34" charset="-120"/>
+              </a:rPr>
+              <a:t>10</a:t>
+            </a:r>
+            <a:endParaRPr lang="en-US" sz="1600" dirty="0"/>
+          </a:p>
+        </p:txBody>
+      </p:sp>
+      <p:sp>
+        <p:nvSpPr>
           <p:cNvPr id="18" name="Text 13"/>
           <p:cNvSpPr txBox="1"/>
           <p:nvPr/>
         </p:nvSpPr>
         <p:spPr>
           <a:xfrm>
-            <a:off x="749808" y="4014216"/>
-            <a:ext cx="457200" cy="457200"/>
-          </a:xfrm>
-          <a:prstGeom prst="rect">
-            <a:avLst/>
-          </a:prstGeom>
-          <a:noFill/>
-          <a:ln/>
-        </p:spPr>
-        <p:txBody>
-          <a:bodyPr wrap="square" lIns="0" tIns="0" rIns="0" bIns="0" rtlCol="0" anchor="ctr"/>
-          <a:lstStyle/>
-          <a:p>
-            <a:pPr algn="ctr" indent="0" marL="0">
-              <a:buNone/>
-            </a:pPr>
-            <a:r>
-              <a:rPr lang="en-US" sz="1600" b="1" dirty="0">
-                <a:solidFill>
-                  <a:srgbClr val="0B1E3A"/>
-                </a:solidFill>
-                <a:latin typeface="Poppins" pitchFamily="34" charset="0"/>
-                <a:ea typeface="Poppins" pitchFamily="34" charset="-122"/>
-                <a:cs typeface="Poppins" pitchFamily="34" charset="-120"/>
-              </a:rPr>
-              <a:t>5</a:t>
-            </a:r>
-            <a:endParaRPr lang="en-US" sz="1600" dirty="0"/>
-          </a:p>
-        </p:txBody>
-      </p:sp>
-      <p:sp>
-        <p:nvSpPr>
-          <p:cNvPr id="19" name="Text 14"/>
-          <p:cNvSpPr txBox="1"/>
-          <p:nvPr/>
-        </p:nvSpPr>
-        <p:spPr>
-          <a:xfrm>
-            <a:off x="1417320" y="3995928"/>
-            <a:ext cx="5367528" cy="338328"/>
+            <a:off x="4498848" y="1499616"/>
+            <a:ext cx="2377440" cy="822960"/>
           </a:xfrm>
           <a:prstGeom prst="rect">
             <a:avLst/>
@@ -3176,12 +4155,12 @@
           <a:p>
             <a:pPr indent="0" marL="0">
               <a:lnSpc>
-                <a:spcPct val="120000"/>
+                <a:spcPct val="110000"/>
               </a:lnSpc>
               <a:buNone/>
             </a:pPr>
             <a:r>
-              <a:rPr lang="en-US" sz="1250" dirty="0">
+              <a:rPr lang="en-US" sz="1150" dirty="0">
                 <a:solidFill>
                   <a:srgbClr val="0B1E3A"/>
                 </a:solidFill>
@@ -3189,22 +4168,22 @@
                 <a:ea typeface="Poppins" pitchFamily="34" charset="-122"/>
                 <a:cs typeface="Poppins" pitchFamily="34" charset="-120"/>
               </a:rPr>
-              <a:t>Das Dreifache einer Zahl ist 81. Wie lautet die Zahl?</a:t>
-            </a:r>
-            <a:endParaRPr lang="en-US" sz="1250" dirty="0"/>
-          </a:p>
-        </p:txBody>
-      </p:sp>
-      <p:sp>
-        <p:nvSpPr>
-          <p:cNvPr id="20" name="Text 15"/>
-          <p:cNvSpPr txBox="1"/>
-          <p:nvPr/>
-        </p:nvSpPr>
-        <p:spPr>
-          <a:xfrm>
-            <a:off x="1417320" y="4471416"/>
-            <a:ext cx="1188720" cy="365760"/>
+              <a:t>Die Hälfte einer Zahl ist um 25 kleiner als das um 10 vermehrte Doppelte dieser Zahl. Wie lautet die Zahl?</a:t>
+            </a:r>
+            <a:endParaRPr lang="en-US" sz="1150" dirty="0"/>
+          </a:p>
+        </p:txBody>
+      </p:sp>
+      <p:sp>
+        <p:nvSpPr>
+          <p:cNvPr id="19" name="Text 14"/>
+          <p:cNvSpPr txBox="1"/>
+          <p:nvPr/>
+        </p:nvSpPr>
+        <p:spPr>
+          <a:xfrm>
+            <a:off x="4041648" y="2450592"/>
+            <a:ext cx="914400" cy="274320"/>
           </a:xfrm>
           <a:prstGeom prst="rect">
             <a:avLst/>
@@ -3220,7 +4199,7 @@
               <a:buNone/>
             </a:pPr>
             <a:r>
-              <a:rPr lang="en-US" sz="1000" dirty="0">
+              <a:rPr lang="en-US" sz="900" dirty="0">
                 <a:solidFill>
                   <a:srgbClr val="4A5F7A"/>
                 </a:solidFill>
@@ -3230,20 +4209,20 @@
               </a:rPr>
               <a:t>Gleichung:</a:t>
             </a:r>
-            <a:endParaRPr lang="en-US" sz="1000" dirty="0"/>
-          </a:p>
-        </p:txBody>
-      </p:sp>
-      <p:sp>
-        <p:nvSpPr>
-          <p:cNvPr id="21" name="Shape 16"/>
-          <p:cNvSpPr/>
-          <p:nvPr/>
-        </p:nvSpPr>
-        <p:spPr>
-          <a:xfrm>
-            <a:off x="2606040" y="4791456"/>
-            <a:ext cx="4178808" cy="0"/>
+            <a:endParaRPr lang="en-US" sz="900" dirty="0"/>
+          </a:p>
+        </p:txBody>
+      </p:sp>
+      <p:sp>
+        <p:nvSpPr>
+          <p:cNvPr id="20" name="Shape 15"/>
+          <p:cNvSpPr/>
+          <p:nvPr/>
+        </p:nvSpPr>
+        <p:spPr>
+          <a:xfrm>
+            <a:off x="4864608" y="2697480"/>
+            <a:ext cx="1965960" cy="0"/>
           </a:xfrm>
           <a:prstGeom prst="line">
             <a:avLst/>
@@ -3259,14 +4238,14 @@
       </p:sp>
       <p:sp>
         <p:nvSpPr>
-          <p:cNvPr id="22" name="Text 17"/>
-          <p:cNvSpPr txBox="1"/>
-          <p:nvPr/>
-        </p:nvSpPr>
-        <p:spPr>
-          <a:xfrm>
-            <a:off x="1417320" y="4928616"/>
-            <a:ext cx="1188720" cy="365760"/>
+          <p:cNvPr id="21" name="Text 16"/>
+          <p:cNvSpPr txBox="1"/>
+          <p:nvPr/>
+        </p:nvSpPr>
+        <p:spPr>
+          <a:xfrm>
+            <a:off x="4041648" y="2752344"/>
+            <a:ext cx="914400" cy="274320"/>
           </a:xfrm>
           <a:prstGeom prst="rect">
             <a:avLst/>
@@ -3282,7 +4261,7 @@
               <a:buNone/>
             </a:pPr>
             <a:r>
-              <a:rPr lang="en-US" sz="1000" dirty="0">
+              <a:rPr lang="en-US" sz="900" dirty="0">
                 <a:solidFill>
                   <a:srgbClr val="4A5F7A"/>
                 </a:solidFill>
@@ -3292,9 +4271,32 @@
               </a:rPr>
               <a:t>Lösung:</a:t>
             </a:r>
-            <a:endParaRPr lang="en-US" sz="1000" dirty="0"/>
-          </a:p>
-        </p:txBody>
+            <a:endParaRPr lang="en-US" sz="900" dirty="0"/>
+          </a:p>
+        </p:txBody>
+      </p:sp>
+      <p:sp>
+        <p:nvSpPr>
+          <p:cNvPr id="22" name="Shape 17"/>
+          <p:cNvSpPr/>
+          <p:nvPr/>
+        </p:nvSpPr>
+        <p:spPr>
+          <a:xfrm>
+            <a:off x="4864608" y="2999232"/>
+            <a:ext cx="1965960" cy="0"/>
+          </a:xfrm>
+          <a:prstGeom prst="line">
+            <a:avLst/>
+          </a:prstGeom>
+          <a:noFill/>
+          <a:ln w="15875">
+            <a:solidFill>
+              <a:srgbClr val="8DBBF2"/>
+            </a:solidFill>
+            <a:prstDash val="sysDot"/>
+          </a:ln>
+        </p:spPr>
       </p:sp>
       <p:sp>
         <p:nvSpPr>
@@ -3304,35 +4306,12 @@
         </p:nvSpPr>
         <p:spPr>
           <a:xfrm>
-            <a:off x="2606040" y="5248656"/>
-            <a:ext cx="2743200" cy="0"/>
-          </a:xfrm>
-          <a:prstGeom prst="line">
-            <a:avLst/>
-          </a:prstGeom>
-          <a:noFill/>
-          <a:ln w="15875">
-            <a:solidFill>
-              <a:srgbClr val="8DBBF2"/>
-            </a:solidFill>
-            <a:prstDash val="sysDot"/>
-          </a:ln>
-        </p:spPr>
-      </p:sp>
-      <p:sp>
-        <p:nvSpPr>
-          <p:cNvPr id="24" name="Shape 19"/>
-          <p:cNvSpPr/>
-          <p:nvPr/>
-        </p:nvSpPr>
-        <p:spPr>
-          <a:xfrm>
-            <a:off x="548640" y="5660136"/>
-            <a:ext cx="6464808" cy="1956816"/>
+            <a:off x="548640" y="3291840"/>
+            <a:ext cx="3154680" cy="2016252"/>
           </a:xfrm>
           <a:prstGeom prst="roundRect">
             <a:avLst>
-              <a:gd name="adj" fmla="val 7009"/>
+              <a:gd name="adj" fmla="val 6803"/>
             </a:avLst>
           </a:prstGeom>
           <a:solidFill>
@@ -3348,14 +4327,14 @@
       </p:sp>
       <p:sp>
         <p:nvSpPr>
-          <p:cNvPr id="25" name="Shape 20"/>
-          <p:cNvSpPr/>
-          <p:nvPr/>
-        </p:nvSpPr>
-        <p:spPr>
-          <a:xfrm>
-            <a:off x="749808" y="5861304"/>
-            <a:ext cx="457200" cy="457200"/>
+          <p:cNvPr id="24" name="Shape 19"/>
+          <p:cNvSpPr/>
+          <p:nvPr/>
+        </p:nvSpPr>
+        <p:spPr>
+          <a:xfrm>
+            <a:off x="676656" y="3419856"/>
+            <a:ext cx="384048" cy="384048"/>
           </a:xfrm>
           <a:prstGeom prst="ellipse">
             <a:avLst/>
@@ -3373,53 +4352,53 @@
       </p:sp>
       <p:sp>
         <p:nvSpPr>
+          <p:cNvPr id="25" name="Text 20"/>
+          <p:cNvSpPr txBox="1"/>
+          <p:nvPr/>
+        </p:nvSpPr>
+        <p:spPr>
+          <a:xfrm>
+            <a:off x="676656" y="3419856"/>
+            <a:ext cx="384048" cy="384048"/>
+          </a:xfrm>
+          <a:prstGeom prst="rect">
+            <a:avLst/>
+          </a:prstGeom>
+          <a:noFill/>
+          <a:ln/>
+        </p:spPr>
+        <p:txBody>
+          <a:bodyPr wrap="square" lIns="0" tIns="0" rIns="0" bIns="0" rtlCol="0" anchor="ctr"/>
+          <a:lstStyle/>
+          <a:p>
+            <a:pPr algn="ctr" indent="0" marL="0">
+              <a:buNone/>
+            </a:pPr>
+            <a:r>
+              <a:rPr lang="en-US" sz="1600" b="1" dirty="0">
+                <a:solidFill>
+                  <a:srgbClr val="0B1E3A"/>
+                </a:solidFill>
+                <a:latin typeface="Poppins" pitchFamily="34" charset="0"/>
+                <a:ea typeface="Poppins" pitchFamily="34" charset="-122"/>
+                <a:cs typeface="Poppins" pitchFamily="34" charset="-120"/>
+              </a:rPr>
+              <a:t>11</a:t>
+            </a:r>
+            <a:endParaRPr lang="en-US" sz="1600" dirty="0"/>
+          </a:p>
+        </p:txBody>
+      </p:sp>
+      <p:sp>
+        <p:nvSpPr>
           <p:cNvPr id="26" name="Text 21"/>
           <p:cNvSpPr txBox="1"/>
           <p:nvPr/>
         </p:nvSpPr>
         <p:spPr>
           <a:xfrm>
-            <a:off x="749808" y="5861304"/>
-            <a:ext cx="457200" cy="457200"/>
-          </a:xfrm>
-          <a:prstGeom prst="rect">
-            <a:avLst/>
-          </a:prstGeom>
-          <a:noFill/>
-          <a:ln/>
-        </p:spPr>
-        <p:txBody>
-          <a:bodyPr wrap="square" lIns="0" tIns="0" rIns="0" bIns="0" rtlCol="0" anchor="ctr"/>
-          <a:lstStyle/>
-          <a:p>
-            <a:pPr algn="ctr" indent="0" marL="0">
-              <a:buNone/>
-            </a:pPr>
-            <a:r>
-              <a:rPr lang="en-US" sz="1600" b="1" dirty="0">
-                <a:solidFill>
-                  <a:srgbClr val="0B1E3A"/>
-                </a:solidFill>
-                <a:latin typeface="Poppins" pitchFamily="34" charset="0"/>
-                <a:ea typeface="Poppins" pitchFamily="34" charset="-122"/>
-                <a:cs typeface="Poppins" pitchFamily="34" charset="-120"/>
-              </a:rPr>
-              <a:t>6</a:t>
-            </a:r>
-            <a:endParaRPr lang="en-US" sz="1600" dirty="0"/>
-          </a:p>
-        </p:txBody>
-      </p:sp>
-      <p:sp>
-        <p:nvSpPr>
-          <p:cNvPr id="27" name="Text 22"/>
-          <p:cNvSpPr txBox="1"/>
-          <p:nvPr/>
-        </p:nvSpPr>
-        <p:spPr>
-          <a:xfrm>
-            <a:off x="1417320" y="5843016"/>
-            <a:ext cx="5367528" cy="585216"/>
+            <a:off x="1188720" y="3419856"/>
+            <a:ext cx="2377440" cy="822960"/>
           </a:xfrm>
           <a:prstGeom prst="rect">
             <a:avLst/>
@@ -3433,12 +4412,12 @@
           <a:p>
             <a:pPr indent="0" marL="0">
               <a:lnSpc>
-                <a:spcPct val="120000"/>
+                <a:spcPct val="110000"/>
               </a:lnSpc>
               <a:buNone/>
             </a:pPr>
             <a:r>
-              <a:rPr lang="en-US" sz="1250" dirty="0">
+              <a:rPr lang="en-US" sz="1150" dirty="0">
                 <a:solidFill>
                   <a:srgbClr val="0B1E3A"/>
                 </a:solidFill>
@@ -3446,22 +4425,22 @@
                 <a:ea typeface="Poppins" pitchFamily="34" charset="-122"/>
                 <a:cs typeface="Poppins" pitchFamily="34" charset="-120"/>
               </a:rPr>
-              <a:t>Das Doppelte einer Zahl ist 7 kleiner als 43. Wie lautet die Zahl?</a:t>
-            </a:r>
-            <a:endParaRPr lang="en-US" sz="1250" dirty="0"/>
-          </a:p>
-        </p:txBody>
-      </p:sp>
-      <p:sp>
-        <p:nvSpPr>
-          <p:cNvPr id="28" name="Text 23"/>
-          <p:cNvSpPr txBox="1"/>
-          <p:nvPr/>
-        </p:nvSpPr>
-        <p:spPr>
-          <a:xfrm>
-            <a:off x="1417320" y="6565392"/>
-            <a:ext cx="1188720" cy="365760"/>
+              <a:t>Verena ist um 8 Jahre älter als ihr Bruder Roman. Beide zusammen sind 32 Jahre alt. Wie alt ist Roman?</a:t>
+            </a:r>
+            <a:endParaRPr lang="en-US" sz="1150" dirty="0"/>
+          </a:p>
+        </p:txBody>
+      </p:sp>
+      <p:sp>
+        <p:nvSpPr>
+          <p:cNvPr id="27" name="Text 22"/>
+          <p:cNvSpPr txBox="1"/>
+          <p:nvPr/>
+        </p:nvSpPr>
+        <p:spPr>
+          <a:xfrm>
+            <a:off x="731520" y="4370832"/>
+            <a:ext cx="914400" cy="274320"/>
           </a:xfrm>
           <a:prstGeom prst="rect">
             <a:avLst/>
@@ -3477,7 +4456,7 @@
               <a:buNone/>
             </a:pPr>
             <a:r>
-              <a:rPr lang="en-US" sz="1000" dirty="0">
+              <a:rPr lang="en-US" sz="900" dirty="0">
                 <a:solidFill>
                   <a:srgbClr val="4A5F7A"/>
                 </a:solidFill>
@@ -3487,20 +4466,20 @@
               </a:rPr>
               <a:t>Gleichung:</a:t>
             </a:r>
-            <a:endParaRPr lang="en-US" sz="1000" dirty="0"/>
-          </a:p>
-        </p:txBody>
-      </p:sp>
-      <p:sp>
-        <p:nvSpPr>
-          <p:cNvPr id="29" name="Shape 24"/>
-          <p:cNvSpPr/>
-          <p:nvPr/>
-        </p:nvSpPr>
-        <p:spPr>
-          <a:xfrm>
-            <a:off x="2606040" y="6885432"/>
-            <a:ext cx="4178808" cy="0"/>
+            <a:endParaRPr lang="en-US" sz="900" dirty="0"/>
+          </a:p>
+        </p:txBody>
+      </p:sp>
+      <p:sp>
+        <p:nvSpPr>
+          <p:cNvPr id="28" name="Shape 23"/>
+          <p:cNvSpPr/>
+          <p:nvPr/>
+        </p:nvSpPr>
+        <p:spPr>
+          <a:xfrm>
+            <a:off x="1554480" y="4617720"/>
+            <a:ext cx="1965960" cy="0"/>
           </a:xfrm>
           <a:prstGeom prst="line">
             <a:avLst/>
@@ -3516,14 +4495,14 @@
       </p:sp>
       <p:sp>
         <p:nvSpPr>
-          <p:cNvPr id="30" name="Text 25"/>
-          <p:cNvSpPr txBox="1"/>
-          <p:nvPr/>
-        </p:nvSpPr>
-        <p:spPr>
-          <a:xfrm>
-            <a:off x="1417320" y="7022592"/>
-            <a:ext cx="1188720" cy="365760"/>
+          <p:cNvPr id="29" name="Text 24"/>
+          <p:cNvSpPr txBox="1"/>
+          <p:nvPr/>
+        </p:nvSpPr>
+        <p:spPr>
+          <a:xfrm>
+            <a:off x="731520" y="4672584"/>
+            <a:ext cx="914400" cy="274320"/>
           </a:xfrm>
           <a:prstGeom prst="rect">
             <a:avLst/>
@@ -3539,7 +4518,7 @@
               <a:buNone/>
             </a:pPr>
             <a:r>
-              <a:rPr lang="en-US" sz="1000" dirty="0">
+              <a:rPr lang="en-US" sz="900" dirty="0">
                 <a:solidFill>
                   <a:srgbClr val="4A5F7A"/>
                 </a:solidFill>
@@ -3549,9 +4528,32 @@
               </a:rPr>
               <a:t>Lösung:</a:t>
             </a:r>
-            <a:endParaRPr lang="en-US" sz="1000" dirty="0"/>
-          </a:p>
-        </p:txBody>
+            <a:endParaRPr lang="en-US" sz="900" dirty="0"/>
+          </a:p>
+        </p:txBody>
+      </p:sp>
+      <p:sp>
+        <p:nvSpPr>
+          <p:cNvPr id="30" name="Shape 25"/>
+          <p:cNvSpPr/>
+          <p:nvPr/>
+        </p:nvSpPr>
+        <p:spPr>
+          <a:xfrm>
+            <a:off x="1554480" y="4919472"/>
+            <a:ext cx="1965960" cy="0"/>
+          </a:xfrm>
+          <a:prstGeom prst="line">
+            <a:avLst/>
+          </a:prstGeom>
+          <a:noFill/>
+          <a:ln w="15875">
+            <a:solidFill>
+              <a:srgbClr val="8DBBF2"/>
+            </a:solidFill>
+            <a:prstDash val="sysDot"/>
+          </a:ln>
+        </p:spPr>
       </p:sp>
       <p:sp>
         <p:nvSpPr>
@@ -3561,35 +4563,12 @@
         </p:nvSpPr>
         <p:spPr>
           <a:xfrm>
-            <a:off x="2606040" y="7342632"/>
-            <a:ext cx="2743200" cy="0"/>
-          </a:xfrm>
-          <a:prstGeom prst="line">
-            <a:avLst/>
-          </a:prstGeom>
-          <a:noFill/>
-          <a:ln w="15875">
-            <a:solidFill>
-              <a:srgbClr val="8DBBF2"/>
-            </a:solidFill>
-            <a:prstDash val="sysDot"/>
-          </a:ln>
-        </p:spPr>
-      </p:sp>
-      <p:sp>
-        <p:nvSpPr>
-          <p:cNvPr id="32" name="Shape 27"/>
-          <p:cNvSpPr/>
-          <p:nvPr/>
-        </p:nvSpPr>
-        <p:spPr>
-          <a:xfrm>
-            <a:off x="548640" y="7754112"/>
-            <a:ext cx="6464808" cy="1956816"/>
+            <a:off x="3858768" y="3291840"/>
+            <a:ext cx="3154680" cy="2016252"/>
           </a:xfrm>
           <a:prstGeom prst="roundRect">
             <a:avLst>
-              <a:gd name="adj" fmla="val 7009"/>
+              <a:gd name="adj" fmla="val 6803"/>
             </a:avLst>
           </a:prstGeom>
           <a:solidFill>
@@ -3605,14 +4584,14 @@
       </p:sp>
       <p:sp>
         <p:nvSpPr>
-          <p:cNvPr id="33" name="Shape 28"/>
-          <p:cNvSpPr/>
-          <p:nvPr/>
-        </p:nvSpPr>
-        <p:spPr>
-          <a:xfrm>
-            <a:off x="749808" y="7955280"/>
-            <a:ext cx="457200" cy="457200"/>
+          <p:cNvPr id="32" name="Shape 27"/>
+          <p:cNvSpPr/>
+          <p:nvPr/>
+        </p:nvSpPr>
+        <p:spPr>
+          <a:xfrm>
+            <a:off x="3986784" y="3419856"/>
+            <a:ext cx="384048" cy="384048"/>
           </a:xfrm>
           <a:prstGeom prst="ellipse">
             <a:avLst/>
@@ -3630,53 +4609,53 @@
       </p:sp>
       <p:sp>
         <p:nvSpPr>
+          <p:cNvPr id="33" name="Text 28"/>
+          <p:cNvSpPr txBox="1"/>
+          <p:nvPr/>
+        </p:nvSpPr>
+        <p:spPr>
+          <a:xfrm>
+            <a:off x="3986784" y="3419856"/>
+            <a:ext cx="384048" cy="384048"/>
+          </a:xfrm>
+          <a:prstGeom prst="rect">
+            <a:avLst/>
+          </a:prstGeom>
+          <a:noFill/>
+          <a:ln/>
+        </p:spPr>
+        <p:txBody>
+          <a:bodyPr wrap="square" lIns="0" tIns="0" rIns="0" bIns="0" rtlCol="0" anchor="ctr"/>
+          <a:lstStyle/>
+          <a:p>
+            <a:pPr algn="ctr" indent="0" marL="0">
+              <a:buNone/>
+            </a:pPr>
+            <a:r>
+              <a:rPr lang="en-US" sz="1600" b="1" dirty="0">
+                <a:solidFill>
+                  <a:srgbClr val="0B1E3A"/>
+                </a:solidFill>
+                <a:latin typeface="Poppins" pitchFamily="34" charset="0"/>
+                <a:ea typeface="Poppins" pitchFamily="34" charset="-122"/>
+                <a:cs typeface="Poppins" pitchFamily="34" charset="-120"/>
+              </a:rPr>
+              <a:t>12</a:t>
+            </a:r>
+            <a:endParaRPr lang="en-US" sz="1600" dirty="0"/>
+          </a:p>
+        </p:txBody>
+      </p:sp>
+      <p:sp>
+        <p:nvSpPr>
           <p:cNvPr id="34" name="Text 29"/>
           <p:cNvSpPr txBox="1"/>
           <p:nvPr/>
         </p:nvSpPr>
         <p:spPr>
           <a:xfrm>
-            <a:off x="749808" y="7955280"/>
-            <a:ext cx="457200" cy="457200"/>
-          </a:xfrm>
-          <a:prstGeom prst="rect">
-            <a:avLst/>
-          </a:prstGeom>
-          <a:noFill/>
-          <a:ln/>
-        </p:spPr>
-        <p:txBody>
-          <a:bodyPr wrap="square" lIns="0" tIns="0" rIns="0" bIns="0" rtlCol="0" anchor="ctr"/>
-          <a:lstStyle/>
-          <a:p>
-            <a:pPr algn="ctr" indent="0" marL="0">
-              <a:buNone/>
-            </a:pPr>
-            <a:r>
-              <a:rPr lang="en-US" sz="1600" b="1" dirty="0">
-                <a:solidFill>
-                  <a:srgbClr val="0B1E3A"/>
-                </a:solidFill>
-                <a:latin typeface="Poppins" pitchFamily="34" charset="0"/>
-                <a:ea typeface="Poppins" pitchFamily="34" charset="-122"/>
-                <a:cs typeface="Poppins" pitchFamily="34" charset="-120"/>
-              </a:rPr>
-              <a:t>7</a:t>
-            </a:r>
-            <a:endParaRPr lang="en-US" sz="1600" dirty="0"/>
-          </a:p>
-        </p:txBody>
-      </p:sp>
-      <p:sp>
-        <p:nvSpPr>
-          <p:cNvPr id="35" name="Text 30"/>
-          <p:cNvSpPr txBox="1"/>
-          <p:nvPr/>
-        </p:nvSpPr>
-        <p:spPr>
-          <a:xfrm>
-            <a:off x="1417320" y="7936992"/>
-            <a:ext cx="5367528" cy="585216"/>
+            <a:off x="4498848" y="3419856"/>
+            <a:ext cx="2377440" cy="1028700"/>
           </a:xfrm>
           <a:prstGeom prst="rect">
             <a:avLst/>
@@ -3690,12 +4669,12 @@
           <a:p>
             <a:pPr indent="0" marL="0">
               <a:lnSpc>
-                <a:spcPct val="120000"/>
+                <a:spcPct val="110000"/>
               </a:lnSpc>
               <a:buNone/>
             </a:pPr>
             <a:r>
-              <a:rPr lang="en-US" sz="1250" dirty="0">
+              <a:rPr lang="en-US" sz="1150" dirty="0">
                 <a:solidFill>
                   <a:srgbClr val="0B1E3A"/>
                 </a:solidFill>
@@ -3703,22 +4682,22 @@
                 <a:ea typeface="Poppins" pitchFamily="34" charset="-122"/>
                 <a:cs typeface="Poppins" pitchFamily="34" charset="-120"/>
               </a:rPr>
-              <a:t>Das Dreifache einer Zahl ist um 11 größer als 76. Wie lautet die Zahl?</a:t>
-            </a:r>
-            <a:endParaRPr lang="en-US" sz="1250" dirty="0"/>
-          </a:p>
-        </p:txBody>
-      </p:sp>
-      <p:sp>
-        <p:nvSpPr>
-          <p:cNvPr id="36" name="Text 31"/>
-          <p:cNvSpPr txBox="1"/>
-          <p:nvPr/>
-        </p:nvSpPr>
-        <p:spPr>
-          <a:xfrm>
-            <a:off x="1417320" y="8659368"/>
-            <a:ext cx="1188720" cy="365760"/>
+              <a:t>Petra, Konrad und Leon sind zusammen 42 Jahre alt. Leon ist um 5 Jahre älter als Petra und Konrad ist um 7 Jahre älter als Petra. Wie alt ist Leon?</a:t>
+            </a:r>
+            <a:endParaRPr lang="en-US" sz="1150" dirty="0"/>
+          </a:p>
+        </p:txBody>
+      </p:sp>
+      <p:sp>
+        <p:nvSpPr>
+          <p:cNvPr id="35" name="Text 30"/>
+          <p:cNvSpPr txBox="1"/>
+          <p:nvPr/>
+        </p:nvSpPr>
+        <p:spPr>
+          <a:xfrm>
+            <a:off x="4041648" y="4576572"/>
+            <a:ext cx="914400" cy="274320"/>
           </a:xfrm>
           <a:prstGeom prst="rect">
             <a:avLst/>
@@ -3734,7 +4713,7 @@
               <a:buNone/>
             </a:pPr>
             <a:r>
-              <a:rPr lang="en-US" sz="1000" dirty="0">
+              <a:rPr lang="en-US" sz="900" dirty="0">
                 <a:solidFill>
                   <a:srgbClr val="4A5F7A"/>
                 </a:solidFill>
@@ -3744,20 +4723,20 @@
               </a:rPr>
               <a:t>Gleichung:</a:t>
             </a:r>
-            <a:endParaRPr lang="en-US" sz="1000" dirty="0"/>
-          </a:p>
-        </p:txBody>
-      </p:sp>
-      <p:sp>
-        <p:nvSpPr>
-          <p:cNvPr id="37" name="Shape 32"/>
-          <p:cNvSpPr/>
-          <p:nvPr/>
-        </p:nvSpPr>
-        <p:spPr>
-          <a:xfrm>
-            <a:off x="2606040" y="8979408"/>
-            <a:ext cx="4178808" cy="0"/>
+            <a:endParaRPr lang="en-US" sz="900" dirty="0"/>
+          </a:p>
+        </p:txBody>
+      </p:sp>
+      <p:sp>
+        <p:nvSpPr>
+          <p:cNvPr id="36" name="Shape 31"/>
+          <p:cNvSpPr/>
+          <p:nvPr/>
+        </p:nvSpPr>
+        <p:spPr>
+          <a:xfrm>
+            <a:off x="4864608" y="4823460"/>
+            <a:ext cx="1965960" cy="0"/>
           </a:xfrm>
           <a:prstGeom prst="line">
             <a:avLst/>
@@ -3773,14 +4752,14 @@
       </p:sp>
       <p:sp>
         <p:nvSpPr>
-          <p:cNvPr id="38" name="Text 33"/>
-          <p:cNvSpPr txBox="1"/>
-          <p:nvPr/>
-        </p:nvSpPr>
-        <p:spPr>
-          <a:xfrm>
-            <a:off x="1417320" y="9116568"/>
-            <a:ext cx="1188720" cy="365760"/>
+          <p:cNvPr id="37" name="Text 32"/>
+          <p:cNvSpPr txBox="1"/>
+          <p:nvPr/>
+        </p:nvSpPr>
+        <p:spPr>
+          <a:xfrm>
+            <a:off x="4041648" y="4878324"/>
+            <a:ext cx="914400" cy="274320"/>
           </a:xfrm>
           <a:prstGeom prst="rect">
             <a:avLst/>
@@ -3796,7 +4775,7 @@
               <a:buNone/>
             </a:pPr>
             <a:r>
-              <a:rPr lang="en-US" sz="1000" dirty="0">
+              <a:rPr lang="en-US" sz="900" dirty="0">
                 <a:solidFill>
                   <a:srgbClr val="4A5F7A"/>
                 </a:solidFill>
@@ -3806,9 +4785,32 @@
               </a:rPr>
               <a:t>Lösung:</a:t>
             </a:r>
-            <a:endParaRPr lang="en-US" sz="1000" dirty="0"/>
-          </a:p>
-        </p:txBody>
+            <a:endParaRPr lang="en-US" sz="900" dirty="0"/>
+          </a:p>
+        </p:txBody>
+      </p:sp>
+      <p:sp>
+        <p:nvSpPr>
+          <p:cNvPr id="38" name="Shape 33"/>
+          <p:cNvSpPr/>
+          <p:nvPr/>
+        </p:nvSpPr>
+        <p:spPr>
+          <a:xfrm>
+            <a:off x="4864608" y="5125212"/>
+            <a:ext cx="1965960" cy="0"/>
+          </a:xfrm>
+          <a:prstGeom prst="line">
+            <a:avLst/>
+          </a:prstGeom>
+          <a:noFill/>
+          <a:ln w="15875">
+            <a:solidFill>
+              <a:srgbClr val="8DBBF2"/>
+            </a:solidFill>
+            <a:prstDash val="sysDot"/>
+          </a:ln>
+        </p:spPr>
       </p:sp>
       <p:sp>
         <p:nvSpPr>
@@ -3818,232 +4820,12 @@
         </p:nvSpPr>
         <p:spPr>
           <a:xfrm>
-            <a:off x="2606040" y="9436608"/>
-            <a:ext cx="2743200" cy="0"/>
-          </a:xfrm>
-          <a:prstGeom prst="line">
-            <a:avLst/>
-          </a:prstGeom>
-          <a:noFill/>
-          <a:ln w="15875">
-            <a:solidFill>
-              <a:srgbClr val="8DBBF2"/>
-            </a:solidFill>
-            <a:prstDash val="sysDot"/>
-          </a:ln>
-        </p:spPr>
-      </p:sp>
-    </p:spTree>
-  </p:cSld>
-  <p:clrMapOvr>
-    <a:masterClrMapping/>
-  </p:clrMapOvr>
-</p:sld>
-</file>
-
-<file path=ppt/slides/slide3.xml><?xml version="1.0" encoding="utf-8"?>
-<p:sld xmlns:a="http://schemas.openxmlformats.org/drawingml/2006/main" xmlns:r="http://schemas.openxmlformats.org/officeDocument/2006/relationships" xmlns:p="http://schemas.openxmlformats.org/presentationml/2006/main">
-  <p:cSld name="Slide 3">
-    <p:spTree>
-      <p:nvGrpSpPr>
-        <p:cNvPr id="1" name=""/>
-        <p:cNvGrpSpPr/>
-        <p:nvPr/>
-      </p:nvGrpSpPr>
-      <p:grpSpPr>
-        <a:xfrm>
-          <a:off x="0" y="0"/>
-          <a:ext cx="0" cy="0"/>
-          <a:chOff x="0" y="0"/>
-          <a:chExt cx="0" cy="0"/>
-        </a:xfrm>
-      </p:grpSpPr>
-      <p:pic>
-        <p:nvPicPr>
-          <p:cNvPr id="3" name="Image 0" descr="cleverbox – modern. kostenlos. lehrreich.">    </p:cNvPr>
-          <p:cNvPicPr>
-            <a:picLocks noChangeAspect="1"/>
-          </p:cNvPicPr>
-          <p:nvPr/>
-        </p:nvPicPr>
-        <p:blipFill>
-          <a:blip r:embed="rId1"/>
-          <a:stretch>
-            <a:fillRect/>
-          </a:stretch>
-        </p:blipFill>
-        <p:spPr>
-          <a:xfrm>
-            <a:off x="548640" y="201168"/>
-            <a:ext cx="2331720" cy="864835"/>
-          </a:xfrm>
-          <a:prstGeom prst="rect">
-            <a:avLst/>
-          </a:prstGeom>
-        </p:spPr>
-      </p:pic>
-      <p:pic>
-        <p:nvPicPr>
-          <p:cNvPr id="4" name="Image 1" descr="QR-Code zu www.cleverbox.co.at">    </p:cNvPr>
-          <p:cNvPicPr>
-            <a:picLocks noChangeAspect="1"/>
-          </p:cNvPicPr>
-          <p:nvPr/>
-        </p:nvPicPr>
-        <p:blipFill>
-          <a:blip r:embed="rId2"/>
-          <a:stretch>
-            <a:fillRect/>
-          </a:stretch>
-        </p:blipFill>
-        <p:spPr>
-          <a:xfrm>
-            <a:off x="6144768" y="228600"/>
-            <a:ext cx="868680" cy="868680"/>
-          </a:xfrm>
-          <a:prstGeom prst="rect">
-            <a:avLst/>
-          </a:prstGeom>
-        </p:spPr>
-      </p:pic>
-      <p:sp>
-        <p:nvSpPr>
-          <p:cNvPr id="5" name="Text 0"/>
-          <p:cNvSpPr txBox="1"/>
-          <p:nvPr/>
-        </p:nvSpPr>
-        <p:spPr>
-          <a:xfrm>
-            <a:off x="3767328" y="274320"/>
-            <a:ext cx="2286000" cy="777240"/>
-          </a:xfrm>
-          <a:prstGeom prst="rect">
-            <a:avLst/>
-          </a:prstGeom>
-          <a:noFill/>
-          <a:ln/>
-        </p:spPr>
-        <p:txBody>
-          <a:bodyPr wrap="square" lIns="0" tIns="0" rIns="0" bIns="0" rtlCol="0" anchor="ctr"/>
-          <a:lstStyle/>
-          <a:p>
-            <a:pPr algn="r" indent="0" marL="0">
-              <a:lnSpc>
-                <a:spcPct val="120000"/>
-              </a:lnSpc>
-              <a:buNone/>
-            </a:pPr>
-            <a:r>
-              <a:rPr lang="en-US" sz="1000" dirty="0">
-                <a:solidFill>
-                  <a:srgbClr val="4A5F7A"/>
-                </a:solidFill>
-                <a:latin typeface="Poppins" pitchFamily="34" charset="0"/>
-                <a:ea typeface="Poppins" pitchFamily="34" charset="-122"/>
-                <a:cs typeface="Poppins" pitchFamily="34" charset="-120"/>
-              </a:rPr>
-              <a:t>Mehr Material:</a:t>
-            </a:r>
-            <a:endParaRPr lang="en-US" sz="1000" dirty="0"/>
-          </a:p>
-          <a:p>
-            <a:pPr algn="r" indent="0" marL="0">
-              <a:lnSpc>
-                <a:spcPct val="120000"/>
-              </a:lnSpc>
-              <a:buNone/>
-            </a:pPr>
-            <a:r>
-              <a:rPr lang="en-US" sz="1000" dirty="0">
-                <a:solidFill>
-                  <a:srgbClr val="4A5F7A"/>
-                </a:solidFill>
-                <a:latin typeface="Poppins" pitchFamily="34" charset="0"/>
-                <a:ea typeface="Poppins" pitchFamily="34" charset="-122"/>
-                <a:cs typeface="Poppins" pitchFamily="34" charset="-120"/>
-              </a:rPr>
-              <a:t>www.cleverbox.co.at</a:t>
-            </a:r>
-            <a:endParaRPr lang="en-US" sz="1000" dirty="0"/>
-          </a:p>
-        </p:txBody>
-      </p:sp>
-      <p:sp>
-        <p:nvSpPr>
-          <p:cNvPr id="6" name="Shape 1"/>
-          <p:cNvSpPr/>
-          <p:nvPr/>
-        </p:nvSpPr>
-        <p:spPr>
-          <a:xfrm>
-            <a:off x="548640" y="1188720"/>
-            <a:ext cx="6464808" cy="0"/>
-          </a:xfrm>
-          <a:prstGeom prst="line">
-            <a:avLst/>
-          </a:prstGeom>
-          <a:noFill/>
-          <a:ln w="15875">
-            <a:solidFill>
-              <a:srgbClr val="8DBBF2"/>
-            </a:solidFill>
-            <a:prstDash val="solid"/>
-          </a:ln>
-        </p:spPr>
-      </p:sp>
-      <p:sp>
-        <p:nvSpPr>
-          <p:cNvPr id="7" name="Text 2"/>
-          <p:cNvSpPr txBox="1"/>
-          <p:nvPr/>
-        </p:nvSpPr>
-        <p:spPr>
-          <a:xfrm>
-            <a:off x="548640" y="1371600"/>
-            <a:ext cx="6400800" cy="365760"/>
-          </a:xfrm>
-          <a:prstGeom prst="rect">
-            <a:avLst/>
-          </a:prstGeom>
-          <a:noFill/>
-          <a:ln/>
-        </p:spPr>
-        <p:txBody>
-          <a:bodyPr wrap="square" lIns="0" tIns="0" rIns="0" bIns="0" rtlCol="0" anchor="t"/>
-          <a:lstStyle/>
-          <a:p>
-            <a:pPr indent="0" marL="0">
-              <a:buNone/>
-            </a:pPr>
-            <a:r>
-              <a:rPr lang="en-US" sz="1800" b="1" dirty="0">
-                <a:solidFill>
-                  <a:srgbClr val="14459A"/>
-                </a:solidFill>
-                <a:latin typeface="Poppins" pitchFamily="34" charset="0"/>
-                <a:ea typeface="Poppins" pitchFamily="34" charset="-122"/>
-                <a:cs typeface="Poppins" pitchFamily="34" charset="-120"/>
-              </a:rPr>
-              <a:t>Einfache Textgleichungen · Seite 3</a:t>
-            </a:r>
-            <a:endParaRPr lang="en-US" sz="1800" dirty="0"/>
-          </a:p>
-        </p:txBody>
-      </p:sp>
-      <p:sp>
-        <p:nvSpPr>
-          <p:cNvPr id="8" name="Shape 3"/>
-          <p:cNvSpPr/>
-          <p:nvPr/>
-        </p:nvSpPr>
-        <p:spPr>
-          <a:xfrm>
-            <a:off x="548640" y="1965960"/>
-            <a:ext cx="6464808" cy="1956816"/>
+            <a:off x="548640" y="5417820"/>
+            <a:ext cx="3154680" cy="2363724"/>
           </a:xfrm>
           <a:prstGeom prst="roundRect">
             <a:avLst>
-              <a:gd name="adj" fmla="val 7009"/>
+              <a:gd name="adj" fmla="val 5803"/>
             </a:avLst>
           </a:prstGeom>
           <a:solidFill>
@@ -4059,14 +4841,14 @@
       </p:sp>
       <p:sp>
         <p:nvSpPr>
-          <p:cNvPr id="9" name="Shape 4"/>
-          <p:cNvSpPr/>
-          <p:nvPr/>
-        </p:nvSpPr>
-        <p:spPr>
-          <a:xfrm>
-            <a:off x="749808" y="2167128"/>
-            <a:ext cx="457200" cy="457200"/>
+          <p:cNvPr id="40" name="Shape 35"/>
+          <p:cNvSpPr/>
+          <p:nvPr/>
+        </p:nvSpPr>
+        <p:spPr>
+          <a:xfrm>
+            <a:off x="676656" y="5545836"/>
+            <a:ext cx="384048" cy="384048"/>
           </a:xfrm>
           <a:prstGeom prst="ellipse">
             <a:avLst/>
@@ -4084,14 +4866,14 @@
       </p:sp>
       <p:sp>
         <p:nvSpPr>
-          <p:cNvPr id="10" name="Text 5"/>
-          <p:cNvSpPr txBox="1"/>
-          <p:nvPr/>
-        </p:nvSpPr>
-        <p:spPr>
-          <a:xfrm>
-            <a:off x="749808" y="2167128"/>
-            <a:ext cx="457200" cy="457200"/>
+          <p:cNvPr id="41" name="Text 36"/>
+          <p:cNvSpPr txBox="1"/>
+          <p:nvPr/>
+        </p:nvSpPr>
+        <p:spPr>
+          <a:xfrm>
+            <a:off x="676656" y="5545836"/>
+            <a:ext cx="384048" cy="384048"/>
           </a:xfrm>
           <a:prstGeom prst="rect">
             <a:avLst/>
@@ -4115,7 +4897,7 @@
                 <a:ea typeface="Poppins" pitchFamily="34" charset="-122"/>
                 <a:cs typeface="Poppins" pitchFamily="34" charset="-120"/>
               </a:rPr>
-              <a:t>8</a:t>
+              <a:t>13</a:t>
             </a:r>
             <a:endParaRPr lang="en-US" sz="1600" dirty="0"/>
           </a:p>
@@ -4123,14 +4905,14 @@
       </p:sp>
       <p:sp>
         <p:nvSpPr>
-          <p:cNvPr id="11" name="Text 6"/>
-          <p:cNvSpPr txBox="1"/>
-          <p:nvPr/>
-        </p:nvSpPr>
-        <p:spPr>
-          <a:xfrm>
-            <a:off x="1417320" y="2148840"/>
-            <a:ext cx="5367528" cy="585216"/>
+          <p:cNvPr id="42" name="Text 37"/>
+          <p:cNvSpPr txBox="1"/>
+          <p:nvPr/>
+        </p:nvSpPr>
+        <p:spPr>
+          <a:xfrm>
+            <a:off x="1188720" y="5545836"/>
+            <a:ext cx="2377440" cy="1028700"/>
           </a:xfrm>
           <a:prstGeom prst="rect">
             <a:avLst/>
@@ -4144,12 +4926,12 @@
           <a:p>
             <a:pPr indent="0" marL="0">
               <a:lnSpc>
-                <a:spcPct val="120000"/>
+                <a:spcPct val="110000"/>
               </a:lnSpc>
               <a:buNone/>
             </a:pPr>
             <a:r>
-              <a:rPr lang="en-US" sz="1250" dirty="0">
+              <a:rPr lang="en-US" sz="1150" dirty="0">
                 <a:solidFill>
                   <a:srgbClr val="0B1E3A"/>
                 </a:solidFill>
@@ -4157,22 +4939,22 @@
                 <a:ea typeface="Poppins" pitchFamily="34" charset="-122"/>
                 <a:cs typeface="Poppins" pitchFamily="34" charset="-120"/>
               </a:rPr>
-              <a:t>Zieht man vom 11fachen einer Zahl das Dreifache dieser Zahl ab, so erhält man 56. Wie lautet die Zahl?</a:t>
-            </a:r>
-            <a:endParaRPr lang="en-US" sz="1250" dirty="0"/>
-          </a:p>
-        </p:txBody>
-      </p:sp>
-      <p:sp>
-        <p:nvSpPr>
-          <p:cNvPr id="12" name="Text 7"/>
-          <p:cNvSpPr txBox="1"/>
-          <p:nvPr/>
-        </p:nvSpPr>
-        <p:spPr>
-          <a:xfrm>
-            <a:off x="1417320" y="2871216"/>
-            <a:ext cx="1188720" cy="365760"/>
+              <a:t>Anja, Armin und Alina sind zusammen 32 Jahre alt. Anja ist um 10 Jahre älter als Alina und Armin ist um 6 Jahre jünger als Anja. Wie alt ist Armin?</a:t>
+            </a:r>
+            <a:endParaRPr lang="en-US" sz="1150" dirty="0"/>
+          </a:p>
+        </p:txBody>
+      </p:sp>
+      <p:sp>
+        <p:nvSpPr>
+          <p:cNvPr id="43" name="Text 38"/>
+          <p:cNvSpPr txBox="1"/>
+          <p:nvPr/>
+        </p:nvSpPr>
+        <p:spPr>
+          <a:xfrm>
+            <a:off x="731520" y="6702552"/>
+            <a:ext cx="914400" cy="274320"/>
           </a:xfrm>
           <a:prstGeom prst="rect">
             <a:avLst/>
@@ -4188,7 +4970,7 @@
               <a:buNone/>
             </a:pPr>
             <a:r>
-              <a:rPr lang="en-US" sz="1000" dirty="0">
+              <a:rPr lang="en-US" sz="900" dirty="0">
                 <a:solidFill>
                   <a:srgbClr val="4A5F7A"/>
                 </a:solidFill>
@@ -4198,20 +4980,20 @@
               </a:rPr>
               <a:t>Gleichung:</a:t>
             </a:r>
-            <a:endParaRPr lang="en-US" sz="1000" dirty="0"/>
-          </a:p>
-        </p:txBody>
-      </p:sp>
-      <p:sp>
-        <p:nvSpPr>
-          <p:cNvPr id="13" name="Shape 8"/>
-          <p:cNvSpPr/>
-          <p:nvPr/>
-        </p:nvSpPr>
-        <p:spPr>
-          <a:xfrm>
-            <a:off x="2606040" y="3191256"/>
-            <a:ext cx="4178808" cy="0"/>
+            <a:endParaRPr lang="en-US" sz="900" dirty="0"/>
+          </a:p>
+        </p:txBody>
+      </p:sp>
+      <p:sp>
+        <p:nvSpPr>
+          <p:cNvPr id="44" name="Shape 39"/>
+          <p:cNvSpPr/>
+          <p:nvPr/>
+        </p:nvSpPr>
+        <p:spPr>
+          <a:xfrm>
+            <a:off x="1554480" y="6949440"/>
+            <a:ext cx="1965960" cy="0"/>
           </a:xfrm>
           <a:prstGeom prst="line">
             <a:avLst/>
@@ -4227,14 +5009,14 @@
       </p:sp>
       <p:sp>
         <p:nvSpPr>
-          <p:cNvPr id="14" name="Text 9"/>
-          <p:cNvSpPr txBox="1"/>
-          <p:nvPr/>
-        </p:nvSpPr>
-        <p:spPr>
-          <a:xfrm>
-            <a:off x="1417320" y="3328416"/>
-            <a:ext cx="1188720" cy="365760"/>
+          <p:cNvPr id="45" name="Text 40"/>
+          <p:cNvSpPr txBox="1"/>
+          <p:nvPr/>
+        </p:nvSpPr>
+        <p:spPr>
+          <a:xfrm>
+            <a:off x="731520" y="7004304"/>
+            <a:ext cx="914400" cy="274320"/>
           </a:xfrm>
           <a:prstGeom prst="rect">
             <a:avLst/>
@@ -4250,7 +5032,7 @@
               <a:buNone/>
             </a:pPr>
             <a:r>
-              <a:rPr lang="en-US" sz="1000" dirty="0">
+              <a:rPr lang="en-US" sz="900" dirty="0">
                 <a:solidFill>
                   <a:srgbClr val="4A5F7A"/>
                 </a:solidFill>
@@ -4260,20 +5042,20 @@
               </a:rPr>
               <a:t>Lösung:</a:t>
             </a:r>
-            <a:endParaRPr lang="en-US" sz="1000" dirty="0"/>
-          </a:p>
-        </p:txBody>
-      </p:sp>
-      <p:sp>
-        <p:nvSpPr>
-          <p:cNvPr id="15" name="Shape 10"/>
-          <p:cNvSpPr/>
-          <p:nvPr/>
-        </p:nvSpPr>
-        <p:spPr>
-          <a:xfrm>
-            <a:off x="2606040" y="3648456"/>
-            <a:ext cx="2743200" cy="0"/>
+            <a:endParaRPr lang="en-US" sz="900" dirty="0"/>
+          </a:p>
+        </p:txBody>
+      </p:sp>
+      <p:sp>
+        <p:nvSpPr>
+          <p:cNvPr id="46" name="Shape 41"/>
+          <p:cNvSpPr/>
+          <p:nvPr/>
+        </p:nvSpPr>
+        <p:spPr>
+          <a:xfrm>
+            <a:off x="1554480" y="7251192"/>
+            <a:ext cx="1965960" cy="0"/>
           </a:xfrm>
           <a:prstGeom prst="line">
             <a:avLst/>
@@ -4289,18 +5071,18 @@
       </p:sp>
       <p:sp>
         <p:nvSpPr>
-          <p:cNvPr id="16" name="Shape 11"/>
-          <p:cNvSpPr/>
-          <p:nvPr/>
-        </p:nvSpPr>
-        <p:spPr>
-          <a:xfrm>
-            <a:off x="548640" y="4059936"/>
-            <a:ext cx="6464808" cy="1956816"/>
+          <p:cNvPr id="47" name="Shape 42"/>
+          <p:cNvSpPr/>
+          <p:nvPr/>
+        </p:nvSpPr>
+        <p:spPr>
+          <a:xfrm>
+            <a:off x="3858768" y="5417820"/>
+            <a:ext cx="3154680" cy="2363724"/>
           </a:xfrm>
           <a:prstGeom prst="roundRect">
             <a:avLst>
-              <a:gd name="adj" fmla="val 7009"/>
+              <a:gd name="adj" fmla="val 5803"/>
             </a:avLst>
           </a:prstGeom>
           <a:solidFill>
@@ -4316,14 +5098,14 @@
       </p:sp>
       <p:sp>
         <p:nvSpPr>
-          <p:cNvPr id="17" name="Shape 12"/>
-          <p:cNvSpPr/>
-          <p:nvPr/>
-        </p:nvSpPr>
-        <p:spPr>
-          <a:xfrm>
-            <a:off x="749808" y="4261104"/>
-            <a:ext cx="457200" cy="457200"/>
+          <p:cNvPr id="48" name="Shape 43"/>
+          <p:cNvSpPr/>
+          <p:nvPr/>
+        </p:nvSpPr>
+        <p:spPr>
+          <a:xfrm>
+            <a:off x="3986784" y="5545836"/>
+            <a:ext cx="384048" cy="384048"/>
           </a:xfrm>
           <a:prstGeom prst="ellipse">
             <a:avLst/>
@@ -4341,14 +5123,14 @@
       </p:sp>
       <p:sp>
         <p:nvSpPr>
-          <p:cNvPr id="18" name="Text 13"/>
-          <p:cNvSpPr txBox="1"/>
-          <p:nvPr/>
-        </p:nvSpPr>
-        <p:spPr>
-          <a:xfrm>
-            <a:off x="749808" y="4261104"/>
-            <a:ext cx="457200" cy="457200"/>
+          <p:cNvPr id="49" name="Text 44"/>
+          <p:cNvSpPr txBox="1"/>
+          <p:nvPr/>
+        </p:nvSpPr>
+        <p:spPr>
+          <a:xfrm>
+            <a:off x="3986784" y="5545836"/>
+            <a:ext cx="384048" cy="384048"/>
           </a:xfrm>
           <a:prstGeom prst="rect">
             <a:avLst/>
@@ -4372,7 +5154,7 @@
                 <a:ea typeface="Poppins" pitchFamily="34" charset="-122"/>
                 <a:cs typeface="Poppins" pitchFamily="34" charset="-120"/>
               </a:rPr>
-              <a:t>9</a:t>
+              <a:t>14</a:t>
             </a:r>
             <a:endParaRPr lang="en-US" sz="1600" dirty="0"/>
           </a:p>
@@ -4380,14 +5162,14 @@
       </p:sp>
       <p:sp>
         <p:nvSpPr>
-          <p:cNvPr id="19" name="Text 14"/>
-          <p:cNvSpPr txBox="1"/>
-          <p:nvPr/>
-        </p:nvSpPr>
-        <p:spPr>
-          <a:xfrm>
-            <a:off x="1417320" y="4242816"/>
-            <a:ext cx="5367528" cy="585216"/>
+          <p:cNvPr id="50" name="Text 45"/>
+          <p:cNvSpPr txBox="1"/>
+          <p:nvPr/>
+        </p:nvSpPr>
+        <p:spPr>
+          <a:xfrm>
+            <a:off x="4498848" y="5545836"/>
+            <a:ext cx="2377440" cy="1028700"/>
           </a:xfrm>
           <a:prstGeom prst="rect">
             <a:avLst/>
@@ -4401,12 +5183,12 @@
           <a:p>
             <a:pPr indent="0" marL="0">
               <a:lnSpc>
-                <a:spcPct val="120000"/>
+                <a:spcPct val="110000"/>
               </a:lnSpc>
               <a:buNone/>
             </a:pPr>
             <a:r>
-              <a:rPr lang="en-US" sz="1250" dirty="0">
+              <a:rPr lang="en-US" sz="1150" dirty="0">
                 <a:solidFill>
                   <a:srgbClr val="0B1E3A"/>
                 </a:solidFill>
@@ -4414,22 +5196,62 @@
                 <a:ea typeface="Poppins" pitchFamily="34" charset="-122"/>
                 <a:cs typeface="Poppins" pitchFamily="34" charset="-120"/>
               </a:rPr>
-              <a:t>Vermindert man das Dreifache einer Zahl um 9, so erhält man 27. Wie lautet die Zahl?</a:t>
-            </a:r>
-            <a:endParaRPr lang="en-US" sz="1250" dirty="0"/>
-          </a:p>
-        </p:txBody>
-      </p:sp>
-      <p:sp>
-        <p:nvSpPr>
-          <p:cNvPr id="20" name="Text 15"/>
-          <p:cNvSpPr txBox="1"/>
-          <p:nvPr/>
-        </p:nvSpPr>
-        <p:spPr>
-          <a:xfrm>
-            <a:off x="1417320" y="4965192"/>
-            <a:ext cx="1188720" cy="365760"/>
+              <a:t>In einem rechtwinkeligen Dreieck ist α viermal so groß wie β.</a:t>
+            </a:r>
+            <a:endParaRPr lang="en-US" sz="1150" dirty="0"/>
+          </a:p>
+          <a:p>
+            <a:pPr indent="0" marL="0">
+              <a:lnSpc>
+                <a:spcPct val="110000"/>
+              </a:lnSpc>
+              <a:buNone/>
+            </a:pPr>
+            <a:r>
+              <a:rPr lang="en-US" sz="1150" dirty="0">
+                <a:solidFill>
+                  <a:srgbClr val="0B1E3A"/>
+                </a:solidFill>
+                <a:latin typeface="Poppins" pitchFamily="34" charset="0"/>
+                <a:ea typeface="Poppins" pitchFamily="34" charset="-122"/>
+                <a:cs typeface="Poppins" pitchFamily="34" charset="-120"/>
+              </a:rPr>
+              <a:t>a) Wie groß ist der rechte Winkel?</a:t>
+            </a:r>
+            <a:endParaRPr lang="en-US" sz="1150" dirty="0"/>
+          </a:p>
+          <a:p>
+            <a:pPr indent="0" marL="0">
+              <a:lnSpc>
+                <a:spcPct val="110000"/>
+              </a:lnSpc>
+              <a:buNone/>
+            </a:pPr>
+            <a:r>
+              <a:rPr lang="en-US" sz="1150" dirty="0">
+                <a:solidFill>
+                  <a:srgbClr val="0B1E3A"/>
+                </a:solidFill>
+                <a:latin typeface="Poppins" pitchFamily="34" charset="0"/>
+                <a:ea typeface="Poppins" pitchFamily="34" charset="-122"/>
+                <a:cs typeface="Poppins" pitchFamily="34" charset="-120"/>
+              </a:rPr>
+              <a:t>b) Wie groß ist α?</a:t>
+            </a:r>
+            <a:endParaRPr lang="en-US" sz="1150" dirty="0"/>
+          </a:p>
+        </p:txBody>
+      </p:sp>
+      <p:sp>
+        <p:nvSpPr>
+          <p:cNvPr id="51" name="Text 46"/>
+          <p:cNvSpPr txBox="1"/>
+          <p:nvPr/>
+        </p:nvSpPr>
+        <p:spPr>
+          <a:xfrm>
+            <a:off x="4041648" y="6702552"/>
+            <a:ext cx="914400" cy="274320"/>
           </a:xfrm>
           <a:prstGeom prst="rect">
             <a:avLst/>
@@ -4445,7 +5267,7 @@
               <a:buNone/>
             </a:pPr>
             <a:r>
-              <a:rPr lang="en-US" sz="1000" dirty="0">
+              <a:rPr lang="en-US" sz="900" dirty="0">
                 <a:solidFill>
                   <a:srgbClr val="4A5F7A"/>
                 </a:solidFill>
@@ -4455,20 +5277,20 @@
               </a:rPr>
               <a:t>Gleichung:</a:t>
             </a:r>
-            <a:endParaRPr lang="en-US" sz="1000" dirty="0"/>
-          </a:p>
-        </p:txBody>
-      </p:sp>
-      <p:sp>
-        <p:nvSpPr>
-          <p:cNvPr id="21" name="Shape 16"/>
-          <p:cNvSpPr/>
-          <p:nvPr/>
-        </p:nvSpPr>
-        <p:spPr>
-          <a:xfrm>
-            <a:off x="2606040" y="5285232"/>
-            <a:ext cx="4178808" cy="0"/>
+            <a:endParaRPr lang="en-US" sz="900" dirty="0"/>
+          </a:p>
+        </p:txBody>
+      </p:sp>
+      <p:sp>
+        <p:nvSpPr>
+          <p:cNvPr id="52" name="Shape 47"/>
+          <p:cNvSpPr/>
+          <p:nvPr/>
+        </p:nvSpPr>
+        <p:spPr>
+          <a:xfrm>
+            <a:off x="4864608" y="6949440"/>
+            <a:ext cx="1965960" cy="0"/>
           </a:xfrm>
           <a:prstGeom prst="line">
             <a:avLst/>
@@ -4484,14 +5306,14 @@
       </p:sp>
       <p:sp>
         <p:nvSpPr>
-          <p:cNvPr id="22" name="Text 17"/>
-          <p:cNvSpPr txBox="1"/>
-          <p:nvPr/>
-        </p:nvSpPr>
-        <p:spPr>
-          <a:xfrm>
-            <a:off x="1417320" y="5422392"/>
-            <a:ext cx="1188720" cy="365760"/>
+          <p:cNvPr id="53" name="Text 48"/>
+          <p:cNvSpPr txBox="1"/>
+          <p:nvPr/>
+        </p:nvSpPr>
+        <p:spPr>
+          <a:xfrm>
+            <a:off x="4041648" y="7004304"/>
+            <a:ext cx="365760" cy="274320"/>
           </a:xfrm>
           <a:prstGeom prst="rect">
             <a:avLst/>
@@ -4507,7 +5329,7 @@
               <a:buNone/>
             </a:pPr>
             <a:r>
-              <a:rPr lang="en-US" sz="1000" dirty="0">
+              <a:rPr lang="en-US" sz="950" b="1" dirty="0">
                 <a:solidFill>
                   <a:srgbClr val="4A5F7A"/>
                 </a:solidFill>
@@ -4515,22 +5337,22 @@
                 <a:ea typeface="Poppins" pitchFamily="34" charset="-122"/>
                 <a:cs typeface="Poppins" pitchFamily="34" charset="-120"/>
               </a:rPr>
-              <a:t>Lösung:</a:t>
-            </a:r>
-            <a:endParaRPr lang="en-US" sz="1000" dirty="0"/>
-          </a:p>
-        </p:txBody>
-      </p:sp>
-      <p:sp>
-        <p:nvSpPr>
-          <p:cNvPr id="23" name="Shape 18"/>
-          <p:cNvSpPr/>
-          <p:nvPr/>
-        </p:nvSpPr>
-        <p:spPr>
-          <a:xfrm>
-            <a:off x="2606040" y="5742432"/>
-            <a:ext cx="2743200" cy="0"/>
+              <a:t>a)</a:t>
+            </a:r>
+            <a:endParaRPr lang="en-US" sz="950" dirty="0"/>
+          </a:p>
+        </p:txBody>
+      </p:sp>
+      <p:sp>
+        <p:nvSpPr>
+          <p:cNvPr id="54" name="Shape 49"/>
+          <p:cNvSpPr/>
+          <p:nvPr/>
+        </p:nvSpPr>
+        <p:spPr>
+          <a:xfrm>
+            <a:off x="4407408" y="7251192"/>
+            <a:ext cx="2423160" cy="0"/>
           </a:xfrm>
           <a:prstGeom prst="line">
             <a:avLst/>
@@ -4546,18 +5368,80 @@
       </p:sp>
       <p:sp>
         <p:nvSpPr>
-          <p:cNvPr id="24" name="Shape 19"/>
-          <p:cNvSpPr/>
-          <p:nvPr/>
-        </p:nvSpPr>
-        <p:spPr>
-          <a:xfrm>
-            <a:off x="548640" y="6153912"/>
-            <a:ext cx="6464808" cy="1956816"/>
+          <p:cNvPr id="55" name="Text 50"/>
+          <p:cNvSpPr txBox="1"/>
+          <p:nvPr/>
+        </p:nvSpPr>
+        <p:spPr>
+          <a:xfrm>
+            <a:off x="4041648" y="7306056"/>
+            <a:ext cx="365760" cy="274320"/>
+          </a:xfrm>
+          <a:prstGeom prst="rect">
+            <a:avLst/>
+          </a:prstGeom>
+          <a:noFill/>
+          <a:ln/>
+        </p:spPr>
+        <p:txBody>
+          <a:bodyPr wrap="square" lIns="0" tIns="0" rIns="0" bIns="0" rtlCol="0" anchor="ctr"/>
+          <a:lstStyle/>
+          <a:p>
+            <a:pPr indent="0" marL="0">
+              <a:buNone/>
+            </a:pPr>
+            <a:r>
+              <a:rPr lang="en-US" sz="950" b="1" dirty="0">
+                <a:solidFill>
+                  <a:srgbClr val="4A5F7A"/>
+                </a:solidFill>
+                <a:latin typeface="Poppins" pitchFamily="34" charset="0"/>
+                <a:ea typeface="Poppins" pitchFamily="34" charset="-122"/>
+                <a:cs typeface="Poppins" pitchFamily="34" charset="-120"/>
+              </a:rPr>
+              <a:t>b)</a:t>
+            </a:r>
+            <a:endParaRPr lang="en-US" sz="950" dirty="0"/>
+          </a:p>
+        </p:txBody>
+      </p:sp>
+      <p:sp>
+        <p:nvSpPr>
+          <p:cNvPr id="56" name="Shape 51"/>
+          <p:cNvSpPr/>
+          <p:nvPr/>
+        </p:nvSpPr>
+        <p:spPr>
+          <a:xfrm>
+            <a:off x="4407408" y="7552944"/>
+            <a:ext cx="2423160" cy="0"/>
+          </a:xfrm>
+          <a:prstGeom prst="line">
+            <a:avLst/>
+          </a:prstGeom>
+          <a:noFill/>
+          <a:ln w="15875">
+            <a:solidFill>
+              <a:srgbClr val="8DBBF2"/>
+            </a:solidFill>
+            <a:prstDash val="sysDot"/>
+          </a:ln>
+        </p:spPr>
+      </p:sp>
+      <p:sp>
+        <p:nvSpPr>
+          <p:cNvPr id="57" name="Shape 52"/>
+          <p:cNvSpPr/>
+          <p:nvPr/>
+        </p:nvSpPr>
+        <p:spPr>
+          <a:xfrm>
+            <a:off x="548640" y="7891272"/>
+            <a:ext cx="3154680" cy="2016252"/>
           </a:xfrm>
           <a:prstGeom prst="roundRect">
             <a:avLst>
-              <a:gd name="adj" fmla="val 7009"/>
+              <a:gd name="adj" fmla="val 6803"/>
             </a:avLst>
           </a:prstGeom>
           <a:solidFill>
@@ -4573,14 +5457,14 @@
       </p:sp>
       <p:sp>
         <p:nvSpPr>
-          <p:cNvPr id="25" name="Shape 20"/>
-          <p:cNvSpPr/>
-          <p:nvPr/>
-        </p:nvSpPr>
-        <p:spPr>
-          <a:xfrm>
-            <a:off x="749808" y="6355080"/>
-            <a:ext cx="457200" cy="457200"/>
+          <p:cNvPr id="58" name="Shape 53"/>
+          <p:cNvSpPr/>
+          <p:nvPr/>
+        </p:nvSpPr>
+        <p:spPr>
+          <a:xfrm>
+            <a:off x="676656" y="8019288"/>
+            <a:ext cx="384048" cy="384048"/>
           </a:xfrm>
           <a:prstGeom prst="ellipse">
             <a:avLst/>
@@ -4598,14 +5482,14 @@
       </p:sp>
       <p:sp>
         <p:nvSpPr>
-          <p:cNvPr id="26" name="Text 21"/>
-          <p:cNvSpPr txBox="1"/>
-          <p:nvPr/>
-        </p:nvSpPr>
-        <p:spPr>
-          <a:xfrm>
-            <a:off x="749808" y="6355080"/>
-            <a:ext cx="457200" cy="457200"/>
+          <p:cNvPr id="59" name="Text 54"/>
+          <p:cNvSpPr txBox="1"/>
+          <p:nvPr/>
+        </p:nvSpPr>
+        <p:spPr>
+          <a:xfrm>
+            <a:off x="676656" y="8019288"/>
+            <a:ext cx="384048" cy="384048"/>
           </a:xfrm>
           <a:prstGeom prst="rect">
             <a:avLst/>
@@ -4629,7 +5513,7 @@
                 <a:ea typeface="Poppins" pitchFamily="34" charset="-122"/>
                 <a:cs typeface="Poppins" pitchFamily="34" charset="-120"/>
               </a:rPr>
-              <a:t>10</a:t>
+              <a:t>15</a:t>
             </a:r>
             <a:endParaRPr lang="en-US" sz="1600" dirty="0"/>
           </a:p>
@@ -4637,14 +5521,14 @@
       </p:sp>
       <p:sp>
         <p:nvSpPr>
-          <p:cNvPr id="27" name="Text 22"/>
-          <p:cNvSpPr txBox="1"/>
-          <p:nvPr/>
-        </p:nvSpPr>
-        <p:spPr>
-          <a:xfrm>
-            <a:off x="1417320" y="6336792"/>
-            <a:ext cx="5367528" cy="585216"/>
+          <p:cNvPr id="60" name="Text 55"/>
+          <p:cNvSpPr txBox="1"/>
+          <p:nvPr/>
+        </p:nvSpPr>
+        <p:spPr>
+          <a:xfrm>
+            <a:off x="1188720" y="8019288"/>
+            <a:ext cx="2377440" cy="1028700"/>
           </a:xfrm>
           <a:prstGeom prst="rect">
             <a:avLst/>
@@ -4658,12 +5542,12 @@
           <a:p>
             <a:pPr indent="0" marL="0">
               <a:lnSpc>
-                <a:spcPct val="120000"/>
+                <a:spcPct val="110000"/>
               </a:lnSpc>
               <a:buNone/>
             </a:pPr>
             <a:r>
-              <a:rPr lang="en-US" sz="1250" dirty="0">
+              <a:rPr lang="en-US" sz="1150" dirty="0">
                 <a:solidFill>
                   <a:srgbClr val="0B1E3A"/>
                 </a:solidFill>
@@ -4671,22 +5555,22 @@
                 <a:ea typeface="Poppins" pitchFamily="34" charset="-122"/>
                 <a:cs typeface="Poppins" pitchFamily="34" charset="-120"/>
               </a:rPr>
-              <a:t>Die Hälfte einer Zahl ist um 25 kleiner als das um 10 vermehrte Doppelte dieser Zahl. Wie lautet die Zahl?</a:t>
-            </a:r>
-            <a:endParaRPr lang="en-US" sz="1250" dirty="0"/>
-          </a:p>
-        </p:txBody>
-      </p:sp>
-      <p:sp>
-        <p:nvSpPr>
-          <p:cNvPr id="28" name="Text 23"/>
-          <p:cNvSpPr txBox="1"/>
-          <p:nvPr/>
-        </p:nvSpPr>
-        <p:spPr>
-          <a:xfrm>
-            <a:off x="1417320" y="7059168"/>
-            <a:ext cx="1188720" cy="365760"/>
+              <a:t>Georg, Nicole und Carina sind zusammen 43 Jahre alt. Georg ist um 7 Jahre älter als Nicole und Carina ist um 9 Jahre älter als Nicole. Wie alt ist Nicole?</a:t>
+            </a:r>
+            <a:endParaRPr lang="en-US" sz="1150" dirty="0"/>
+          </a:p>
+        </p:txBody>
+      </p:sp>
+      <p:sp>
+        <p:nvSpPr>
+          <p:cNvPr id="61" name="Text 56"/>
+          <p:cNvSpPr txBox="1"/>
+          <p:nvPr/>
+        </p:nvSpPr>
+        <p:spPr>
+          <a:xfrm>
+            <a:off x="731520" y="9176004"/>
+            <a:ext cx="914400" cy="274320"/>
           </a:xfrm>
           <a:prstGeom prst="rect">
             <a:avLst/>
@@ -4702,7 +5586,7 @@
               <a:buNone/>
             </a:pPr>
             <a:r>
-              <a:rPr lang="en-US" sz="1000" dirty="0">
+              <a:rPr lang="en-US" sz="900" dirty="0">
                 <a:solidFill>
                   <a:srgbClr val="4A5F7A"/>
                 </a:solidFill>
@@ -4712,20 +5596,20 @@
               </a:rPr>
               <a:t>Gleichung:</a:t>
             </a:r>
-            <a:endParaRPr lang="en-US" sz="1000" dirty="0"/>
-          </a:p>
-        </p:txBody>
-      </p:sp>
-      <p:sp>
-        <p:nvSpPr>
-          <p:cNvPr id="29" name="Shape 24"/>
-          <p:cNvSpPr/>
-          <p:nvPr/>
-        </p:nvSpPr>
-        <p:spPr>
-          <a:xfrm>
-            <a:off x="2606040" y="7379208"/>
-            <a:ext cx="4178808" cy="0"/>
+            <a:endParaRPr lang="en-US" sz="900" dirty="0"/>
+          </a:p>
+        </p:txBody>
+      </p:sp>
+      <p:sp>
+        <p:nvSpPr>
+          <p:cNvPr id="62" name="Shape 57"/>
+          <p:cNvSpPr/>
+          <p:nvPr/>
+        </p:nvSpPr>
+        <p:spPr>
+          <a:xfrm>
+            <a:off x="1554480" y="9422892"/>
+            <a:ext cx="1965960" cy="0"/>
           </a:xfrm>
           <a:prstGeom prst="line">
             <a:avLst/>
@@ -4741,14 +5625,14 @@
       </p:sp>
       <p:sp>
         <p:nvSpPr>
-          <p:cNvPr id="30" name="Text 25"/>
-          <p:cNvSpPr txBox="1"/>
-          <p:nvPr/>
-        </p:nvSpPr>
-        <p:spPr>
-          <a:xfrm>
-            <a:off x="1417320" y="7516368"/>
-            <a:ext cx="1188720" cy="365760"/>
+          <p:cNvPr id="63" name="Text 58"/>
+          <p:cNvSpPr txBox="1"/>
+          <p:nvPr/>
+        </p:nvSpPr>
+        <p:spPr>
+          <a:xfrm>
+            <a:off x="731520" y="9477756"/>
+            <a:ext cx="914400" cy="274320"/>
           </a:xfrm>
           <a:prstGeom prst="rect">
             <a:avLst/>
@@ -4764,7 +5648,7 @@
               <a:buNone/>
             </a:pPr>
             <a:r>
-              <a:rPr lang="en-US" sz="1000" dirty="0">
+              <a:rPr lang="en-US" sz="900" dirty="0">
                 <a:solidFill>
                   <a:srgbClr val="4A5F7A"/>
                 </a:solidFill>
@@ -4774,20 +5658,20 @@
               </a:rPr>
               <a:t>Lösung:</a:t>
             </a:r>
-            <a:endParaRPr lang="en-US" sz="1000" dirty="0"/>
-          </a:p>
-        </p:txBody>
-      </p:sp>
-      <p:sp>
-        <p:nvSpPr>
-          <p:cNvPr id="31" name="Shape 26"/>
-          <p:cNvSpPr/>
-          <p:nvPr/>
-        </p:nvSpPr>
-        <p:spPr>
-          <a:xfrm>
-            <a:off x="2606040" y="7836408"/>
-            <a:ext cx="2743200" cy="0"/>
+            <a:endParaRPr lang="en-US" sz="900" dirty="0"/>
+          </a:p>
+        </p:txBody>
+      </p:sp>
+      <p:sp>
+        <p:nvSpPr>
+          <p:cNvPr id="64" name="Shape 59"/>
+          <p:cNvSpPr/>
+          <p:nvPr/>
+        </p:nvSpPr>
+        <p:spPr>
+          <a:xfrm>
+            <a:off x="1554480" y="9724644"/>
+            <a:ext cx="1965960" cy="0"/>
           </a:xfrm>
           <a:prstGeom prst="line">
             <a:avLst/>
@@ -4801,217 +5685,20 @@
           </a:ln>
         </p:spPr>
       </p:sp>
-    </p:spTree>
-  </p:cSld>
-  <p:clrMapOvr>
-    <a:masterClrMapping/>
-  </p:clrMapOvr>
-</p:sld>
-</file>
-
-<file path=ppt/slides/slide4.xml><?xml version="1.0" encoding="utf-8"?>
-<p:sld xmlns:a="http://schemas.openxmlformats.org/drawingml/2006/main" xmlns:r="http://schemas.openxmlformats.org/officeDocument/2006/relationships" xmlns:p="http://schemas.openxmlformats.org/presentationml/2006/main">
-  <p:cSld name="Slide 4">
-    <p:spTree>
-      <p:nvGrpSpPr>
-        <p:cNvPr id="1" name=""/>
-        <p:cNvGrpSpPr/>
-        <p:nvPr/>
-      </p:nvGrpSpPr>
-      <p:grpSpPr>
-        <a:xfrm>
-          <a:off x="0" y="0"/>
-          <a:ext cx="0" cy="0"/>
-          <a:chOff x="0" y="0"/>
-          <a:chExt cx="0" cy="0"/>
-        </a:xfrm>
-      </p:grpSpPr>
-      <p:pic>
-        <p:nvPicPr>
-          <p:cNvPr id="3" name="Image 0" descr="cleverbox – modern. kostenlos. lehrreich.">    </p:cNvPr>
-          <p:cNvPicPr>
-            <a:picLocks noChangeAspect="1"/>
-          </p:cNvPicPr>
-          <p:nvPr/>
-        </p:nvPicPr>
-        <p:blipFill>
-          <a:blip r:embed="rId1"/>
-          <a:stretch>
-            <a:fillRect/>
-          </a:stretch>
-        </p:blipFill>
-        <p:spPr>
-          <a:xfrm>
-            <a:off x="548640" y="201168"/>
-            <a:ext cx="2331720" cy="864835"/>
-          </a:xfrm>
-          <a:prstGeom prst="rect">
-            <a:avLst/>
-          </a:prstGeom>
-        </p:spPr>
-      </p:pic>
-      <p:pic>
-        <p:nvPicPr>
-          <p:cNvPr id="4" name="Image 1" descr="QR-Code zu www.cleverbox.co.at">    </p:cNvPr>
-          <p:cNvPicPr>
-            <a:picLocks noChangeAspect="1"/>
-          </p:cNvPicPr>
-          <p:nvPr/>
-        </p:nvPicPr>
-        <p:blipFill>
-          <a:blip r:embed="rId2"/>
-          <a:stretch>
-            <a:fillRect/>
-          </a:stretch>
-        </p:blipFill>
-        <p:spPr>
-          <a:xfrm>
-            <a:off x="6144768" y="228600"/>
-            <a:ext cx="868680" cy="868680"/>
-          </a:xfrm>
-          <a:prstGeom prst="rect">
-            <a:avLst/>
-          </a:prstGeom>
-        </p:spPr>
-      </p:pic>
-      <p:sp>
-        <p:nvSpPr>
-          <p:cNvPr id="5" name="Text 0"/>
-          <p:cNvSpPr txBox="1"/>
-          <p:nvPr/>
-        </p:nvSpPr>
-        <p:spPr>
-          <a:xfrm>
-            <a:off x="3767328" y="274320"/>
-            <a:ext cx="2286000" cy="777240"/>
-          </a:xfrm>
-          <a:prstGeom prst="rect">
-            <a:avLst/>
-          </a:prstGeom>
-          <a:noFill/>
-          <a:ln/>
-        </p:spPr>
-        <p:txBody>
-          <a:bodyPr wrap="square" lIns="0" tIns="0" rIns="0" bIns="0" rtlCol="0" anchor="ctr"/>
-          <a:lstStyle/>
-          <a:p>
-            <a:pPr algn="r" indent="0" marL="0">
-              <a:lnSpc>
-                <a:spcPct val="120000"/>
-              </a:lnSpc>
-              <a:buNone/>
-            </a:pPr>
-            <a:r>
-              <a:rPr lang="en-US" sz="1000" dirty="0">
-                <a:solidFill>
-                  <a:srgbClr val="4A5F7A"/>
-                </a:solidFill>
-                <a:latin typeface="Poppins" pitchFamily="34" charset="0"/>
-                <a:ea typeface="Poppins" pitchFamily="34" charset="-122"/>
-                <a:cs typeface="Poppins" pitchFamily="34" charset="-120"/>
-              </a:rPr>
-              <a:t>Mehr Material:</a:t>
-            </a:r>
-            <a:endParaRPr lang="en-US" sz="1000" dirty="0"/>
-          </a:p>
-          <a:p>
-            <a:pPr algn="r" indent="0" marL="0">
-              <a:lnSpc>
-                <a:spcPct val="120000"/>
-              </a:lnSpc>
-              <a:buNone/>
-            </a:pPr>
-            <a:r>
-              <a:rPr lang="en-US" sz="1000" dirty="0">
-                <a:solidFill>
-                  <a:srgbClr val="4A5F7A"/>
-                </a:solidFill>
-                <a:latin typeface="Poppins" pitchFamily="34" charset="0"/>
-                <a:ea typeface="Poppins" pitchFamily="34" charset="-122"/>
-                <a:cs typeface="Poppins" pitchFamily="34" charset="-120"/>
-              </a:rPr>
-              <a:t>www.cleverbox.co.at</a:t>
-            </a:r>
-            <a:endParaRPr lang="en-US" sz="1000" dirty="0"/>
-          </a:p>
-        </p:txBody>
-      </p:sp>
-      <p:sp>
-        <p:nvSpPr>
-          <p:cNvPr id="6" name="Shape 1"/>
-          <p:cNvSpPr/>
-          <p:nvPr/>
-        </p:nvSpPr>
-        <p:spPr>
-          <a:xfrm>
-            <a:off x="548640" y="1188720"/>
-            <a:ext cx="6464808" cy="0"/>
-          </a:xfrm>
-          <a:prstGeom prst="line">
-            <a:avLst/>
-          </a:prstGeom>
-          <a:noFill/>
-          <a:ln w="15875">
-            <a:solidFill>
-              <a:srgbClr val="8DBBF2"/>
-            </a:solidFill>
-            <a:prstDash val="solid"/>
-          </a:ln>
-        </p:spPr>
-      </p:sp>
-      <p:sp>
-        <p:nvSpPr>
-          <p:cNvPr id="7" name="Text 2"/>
-          <p:cNvSpPr txBox="1"/>
-          <p:nvPr/>
-        </p:nvSpPr>
-        <p:spPr>
-          <a:xfrm>
-            <a:off x="548640" y="1371600"/>
-            <a:ext cx="6400800" cy="365760"/>
-          </a:xfrm>
-          <a:prstGeom prst="rect">
-            <a:avLst/>
-          </a:prstGeom>
-          <a:noFill/>
-          <a:ln/>
-        </p:spPr>
-        <p:txBody>
-          <a:bodyPr wrap="square" lIns="0" tIns="0" rIns="0" bIns="0" rtlCol="0" anchor="t"/>
-          <a:lstStyle/>
-          <a:p>
-            <a:pPr indent="0" marL="0">
-              <a:buNone/>
-            </a:pPr>
-            <a:r>
-              <a:rPr lang="en-US" sz="1800" b="1" dirty="0">
-                <a:solidFill>
-                  <a:srgbClr val="14459A"/>
-                </a:solidFill>
-                <a:latin typeface="Poppins" pitchFamily="34" charset="0"/>
-                <a:ea typeface="Poppins" pitchFamily="34" charset="-122"/>
-                <a:cs typeface="Poppins" pitchFamily="34" charset="-120"/>
-              </a:rPr>
-              <a:t>Einfache Textgleichungen · Seite 4</a:t>
-            </a:r>
-            <a:endParaRPr lang="en-US" sz="1800" dirty="0"/>
-          </a:p>
-        </p:txBody>
-      </p:sp>
-      <p:sp>
-        <p:nvSpPr>
-          <p:cNvPr id="8" name="Shape 3"/>
-          <p:cNvSpPr/>
-          <p:nvPr/>
-        </p:nvSpPr>
-        <p:spPr>
-          <a:xfrm>
-            <a:off x="548640" y="1965960"/>
-            <a:ext cx="6464808" cy="1956816"/>
+      <p:sp>
+        <p:nvSpPr>
+          <p:cNvPr id="65" name="Shape 60"/>
+          <p:cNvSpPr/>
+          <p:nvPr/>
+        </p:nvSpPr>
+        <p:spPr>
+          <a:xfrm>
+            <a:off x="3858768" y="7891272"/>
+            <a:ext cx="3154680" cy="2016252"/>
           </a:xfrm>
           <a:prstGeom prst="roundRect">
             <a:avLst>
-              <a:gd name="adj" fmla="val 7009"/>
+              <a:gd name="adj" fmla="val 6803"/>
             </a:avLst>
           </a:prstGeom>
           <a:solidFill>
@@ -5027,14 +5714,14 @@
       </p:sp>
       <p:sp>
         <p:nvSpPr>
-          <p:cNvPr id="9" name="Shape 4"/>
-          <p:cNvSpPr/>
-          <p:nvPr/>
-        </p:nvSpPr>
-        <p:spPr>
-          <a:xfrm>
-            <a:off x="749808" y="2167128"/>
-            <a:ext cx="457200" cy="457200"/>
+          <p:cNvPr id="66" name="Shape 61"/>
+          <p:cNvSpPr/>
+          <p:nvPr/>
+        </p:nvSpPr>
+        <p:spPr>
+          <a:xfrm>
+            <a:off x="3986784" y="8019288"/>
+            <a:ext cx="384048" cy="384048"/>
           </a:xfrm>
           <a:prstGeom prst="ellipse">
             <a:avLst/>
@@ -5052,14 +5739,14 @@
       </p:sp>
       <p:sp>
         <p:nvSpPr>
-          <p:cNvPr id="10" name="Text 5"/>
-          <p:cNvSpPr txBox="1"/>
-          <p:nvPr/>
-        </p:nvSpPr>
-        <p:spPr>
-          <a:xfrm>
-            <a:off x="749808" y="2167128"/>
-            <a:ext cx="457200" cy="457200"/>
+          <p:cNvPr id="67" name="Text 62"/>
+          <p:cNvSpPr txBox="1"/>
+          <p:nvPr/>
+        </p:nvSpPr>
+        <p:spPr>
+          <a:xfrm>
+            <a:off x="3986784" y="8019288"/>
+            <a:ext cx="384048" cy="384048"/>
           </a:xfrm>
           <a:prstGeom prst="rect">
             <a:avLst/>
@@ -5083,7 +5770,7 @@
                 <a:ea typeface="Poppins" pitchFamily="34" charset="-122"/>
                 <a:cs typeface="Poppins" pitchFamily="34" charset="-120"/>
               </a:rPr>
-              <a:t>11</a:t>
+              <a:t>16</a:t>
             </a:r>
             <a:endParaRPr lang="en-US" sz="1600" dirty="0"/>
           </a:p>
@@ -5091,14 +5778,14 @@
       </p:sp>
       <p:sp>
         <p:nvSpPr>
-          <p:cNvPr id="11" name="Text 6"/>
-          <p:cNvSpPr txBox="1"/>
-          <p:nvPr/>
-        </p:nvSpPr>
-        <p:spPr>
-          <a:xfrm>
-            <a:off x="1417320" y="2148840"/>
-            <a:ext cx="5367528" cy="585216"/>
+          <p:cNvPr id="68" name="Text 63"/>
+          <p:cNvSpPr txBox="1"/>
+          <p:nvPr/>
+        </p:nvSpPr>
+        <p:spPr>
+          <a:xfrm>
+            <a:off x="4498848" y="8019288"/>
+            <a:ext cx="2377440" cy="1028700"/>
           </a:xfrm>
           <a:prstGeom prst="rect">
             <a:avLst/>
@@ -5112,12 +5799,12 @@
           <a:p>
             <a:pPr indent="0" marL="0">
               <a:lnSpc>
-                <a:spcPct val="120000"/>
+                <a:spcPct val="110000"/>
               </a:lnSpc>
               <a:buNone/>
             </a:pPr>
             <a:r>
-              <a:rPr lang="en-US" sz="1250" dirty="0">
+              <a:rPr lang="en-US" sz="1150" dirty="0">
                 <a:solidFill>
                   <a:srgbClr val="0B1E3A"/>
                 </a:solidFill>
@@ -5125,22 +5812,22 @@
                 <a:ea typeface="Poppins" pitchFamily="34" charset="-122"/>
                 <a:cs typeface="Poppins" pitchFamily="34" charset="-120"/>
               </a:rPr>
-              <a:t>Verena ist um 8 Jahre älter als ihr Bruder Roman. Beide zusammen sind 32 Jahre alt. Wie alt ist Roman?</a:t>
-            </a:r>
-            <a:endParaRPr lang="en-US" sz="1250" dirty="0"/>
-          </a:p>
-        </p:txBody>
-      </p:sp>
-      <p:sp>
-        <p:nvSpPr>
-          <p:cNvPr id="12" name="Text 7"/>
-          <p:cNvSpPr txBox="1"/>
-          <p:nvPr/>
-        </p:nvSpPr>
-        <p:spPr>
-          <a:xfrm>
-            <a:off x="1417320" y="2871216"/>
-            <a:ext cx="1188720" cy="365760"/>
+              <a:t>Pia, Johannes und Elisabeth sind zusammen 39 Jahre alt. Pia ist um 4 Jahre älter als Elisabeth und Johannes ist um 2 Jahre jünger als Pia. Wie alt ist Pia?</a:t>
+            </a:r>
+            <a:endParaRPr lang="en-US" sz="1150" dirty="0"/>
+          </a:p>
+        </p:txBody>
+      </p:sp>
+      <p:sp>
+        <p:nvSpPr>
+          <p:cNvPr id="69" name="Text 64"/>
+          <p:cNvSpPr txBox="1"/>
+          <p:nvPr/>
+        </p:nvSpPr>
+        <p:spPr>
+          <a:xfrm>
+            <a:off x="4041648" y="9176004"/>
+            <a:ext cx="914400" cy="274320"/>
           </a:xfrm>
           <a:prstGeom prst="rect">
             <a:avLst/>
@@ -5156,7 +5843,7 @@
               <a:buNone/>
             </a:pPr>
             <a:r>
-              <a:rPr lang="en-US" sz="1000" dirty="0">
+              <a:rPr lang="en-US" sz="900" dirty="0">
                 <a:solidFill>
                   <a:srgbClr val="4A5F7A"/>
                 </a:solidFill>
@@ -5166,20 +5853,20 @@
               </a:rPr>
               <a:t>Gleichung:</a:t>
             </a:r>
-            <a:endParaRPr lang="en-US" sz="1000" dirty="0"/>
-          </a:p>
-        </p:txBody>
-      </p:sp>
-      <p:sp>
-        <p:nvSpPr>
-          <p:cNvPr id="13" name="Shape 8"/>
-          <p:cNvSpPr/>
-          <p:nvPr/>
-        </p:nvSpPr>
-        <p:spPr>
-          <a:xfrm>
-            <a:off x="2606040" y="3191256"/>
-            <a:ext cx="4178808" cy="0"/>
+            <a:endParaRPr lang="en-US" sz="900" dirty="0"/>
+          </a:p>
+        </p:txBody>
+      </p:sp>
+      <p:sp>
+        <p:nvSpPr>
+          <p:cNvPr id="70" name="Shape 65"/>
+          <p:cNvSpPr/>
+          <p:nvPr/>
+        </p:nvSpPr>
+        <p:spPr>
+          <a:xfrm>
+            <a:off x="4864608" y="9422892"/>
+            <a:ext cx="1965960" cy="0"/>
           </a:xfrm>
           <a:prstGeom prst="line">
             <a:avLst/>
@@ -5195,14 +5882,14 @@
       </p:sp>
       <p:sp>
         <p:nvSpPr>
-          <p:cNvPr id="14" name="Text 9"/>
-          <p:cNvSpPr txBox="1"/>
-          <p:nvPr/>
-        </p:nvSpPr>
-        <p:spPr>
-          <a:xfrm>
-            <a:off x="1417320" y="3328416"/>
-            <a:ext cx="1188720" cy="365760"/>
+          <p:cNvPr id="71" name="Text 66"/>
+          <p:cNvSpPr txBox="1"/>
+          <p:nvPr/>
+        </p:nvSpPr>
+        <p:spPr>
+          <a:xfrm>
+            <a:off x="4041648" y="9477756"/>
+            <a:ext cx="914400" cy="274320"/>
           </a:xfrm>
           <a:prstGeom prst="rect">
             <a:avLst/>
@@ -5218,7 +5905,7 @@
               <a:buNone/>
             </a:pPr>
             <a:r>
-              <a:rPr lang="en-US" sz="1000" dirty="0">
+              <a:rPr lang="en-US" sz="900" dirty="0">
                 <a:solidFill>
                   <a:srgbClr val="4A5F7A"/>
                 </a:solidFill>
@@ -5228,1604 +5915,20 @@
               </a:rPr>
               <a:t>Lösung:</a:t>
             </a:r>
-            <a:endParaRPr lang="en-US" sz="1000" dirty="0"/>
-          </a:p>
-        </p:txBody>
-      </p:sp>
-      <p:sp>
-        <p:nvSpPr>
-          <p:cNvPr id="15" name="Shape 10"/>
-          <p:cNvSpPr/>
-          <p:nvPr/>
-        </p:nvSpPr>
-        <p:spPr>
-          <a:xfrm>
-            <a:off x="2606040" y="3648456"/>
-            <a:ext cx="2743200" cy="0"/>
-          </a:xfrm>
-          <a:prstGeom prst="line">
-            <a:avLst/>
-          </a:prstGeom>
-          <a:noFill/>
-          <a:ln w="15875">
-            <a:solidFill>
-              <a:srgbClr val="8DBBF2"/>
-            </a:solidFill>
-            <a:prstDash val="sysDot"/>
-          </a:ln>
-        </p:spPr>
-      </p:sp>
-      <p:sp>
-        <p:nvSpPr>
-          <p:cNvPr id="16" name="Shape 11"/>
-          <p:cNvSpPr/>
-          <p:nvPr/>
-        </p:nvSpPr>
-        <p:spPr>
-          <a:xfrm>
-            <a:off x="548640" y="4059936"/>
-            <a:ext cx="6464808" cy="2203704"/>
-          </a:xfrm>
-          <a:prstGeom prst="roundRect">
-            <a:avLst>
-              <a:gd name="adj" fmla="val 6224"/>
-            </a:avLst>
-          </a:prstGeom>
-          <a:solidFill>
-            <a:srgbClr val="FFFFFF"/>
-          </a:solidFill>
-          <a:ln w="15875">
-            <a:solidFill>
-              <a:srgbClr val="8DBBF2"/>
-            </a:solidFill>
-            <a:prstDash val="solid"/>
-          </a:ln>
-        </p:spPr>
-      </p:sp>
-      <p:sp>
-        <p:nvSpPr>
-          <p:cNvPr id="17" name="Shape 12"/>
-          <p:cNvSpPr/>
-          <p:nvPr/>
-        </p:nvSpPr>
-        <p:spPr>
-          <a:xfrm>
-            <a:off x="749808" y="4261104"/>
-            <a:ext cx="457200" cy="457200"/>
-          </a:xfrm>
-          <a:prstGeom prst="ellipse">
-            <a:avLst/>
-          </a:prstGeom>
-          <a:solidFill>
-            <a:srgbClr val="BCD6F5"/>
-          </a:solidFill>
-          <a:ln w="12700">
-            <a:solidFill>
-              <a:srgbClr val="BCD6F5"/>
-            </a:solidFill>
-            <a:prstDash val="solid"/>
-          </a:ln>
-        </p:spPr>
-      </p:sp>
-      <p:sp>
-        <p:nvSpPr>
-          <p:cNvPr id="18" name="Text 13"/>
-          <p:cNvSpPr txBox="1"/>
-          <p:nvPr/>
-        </p:nvSpPr>
-        <p:spPr>
-          <a:xfrm>
-            <a:off x="749808" y="4261104"/>
-            <a:ext cx="457200" cy="457200"/>
-          </a:xfrm>
-          <a:prstGeom prst="rect">
-            <a:avLst/>
-          </a:prstGeom>
-          <a:noFill/>
-          <a:ln/>
-        </p:spPr>
-        <p:txBody>
-          <a:bodyPr wrap="square" lIns="0" tIns="0" rIns="0" bIns="0" rtlCol="0" anchor="ctr"/>
-          <a:lstStyle/>
-          <a:p>
-            <a:pPr algn="ctr" indent="0" marL="0">
-              <a:buNone/>
-            </a:pPr>
-            <a:r>
-              <a:rPr lang="en-US" sz="1600" b="1" dirty="0">
-                <a:solidFill>
-                  <a:srgbClr val="0B1E3A"/>
-                </a:solidFill>
-                <a:latin typeface="Poppins" pitchFamily="34" charset="0"/>
-                <a:ea typeface="Poppins" pitchFamily="34" charset="-122"/>
-                <a:cs typeface="Poppins" pitchFamily="34" charset="-120"/>
-              </a:rPr>
-              <a:t>12</a:t>
-            </a:r>
-            <a:endParaRPr lang="en-US" sz="1600" dirty="0"/>
-          </a:p>
-        </p:txBody>
-      </p:sp>
-      <p:sp>
-        <p:nvSpPr>
-          <p:cNvPr id="19" name="Text 14"/>
-          <p:cNvSpPr txBox="1"/>
-          <p:nvPr/>
-        </p:nvSpPr>
-        <p:spPr>
-          <a:xfrm>
-            <a:off x="1417320" y="4242816"/>
-            <a:ext cx="5367528" cy="832104"/>
-          </a:xfrm>
-          <a:prstGeom prst="rect">
-            <a:avLst/>
-          </a:prstGeom>
-          <a:noFill/>
-          <a:ln/>
-        </p:spPr>
-        <p:txBody>
-          <a:bodyPr wrap="square" lIns="0" tIns="0" rIns="0" bIns="0" rtlCol="0" anchor="t"/>
-          <a:lstStyle/>
-          <a:p>
-            <a:pPr indent="0" marL="0">
-              <a:lnSpc>
-                <a:spcPct val="120000"/>
-              </a:lnSpc>
-              <a:buNone/>
-            </a:pPr>
-            <a:r>
-              <a:rPr lang="en-US" sz="1250" dirty="0">
-                <a:solidFill>
-                  <a:srgbClr val="0B1E3A"/>
-                </a:solidFill>
-                <a:latin typeface="Poppins" pitchFamily="34" charset="0"/>
-                <a:ea typeface="Poppins" pitchFamily="34" charset="-122"/>
-                <a:cs typeface="Poppins" pitchFamily="34" charset="-120"/>
-              </a:rPr>
-              <a:t>Petra, Konrad und Leon sind zusammen 42 Jahre alt. Leon ist um 5 Jahre älter als Petra und Konrad ist um 7 Jahre älter als Petra. Wie alt ist Leon?</a:t>
-            </a:r>
-            <a:endParaRPr lang="en-US" sz="1250" dirty="0"/>
-          </a:p>
-        </p:txBody>
-      </p:sp>
-      <p:sp>
-        <p:nvSpPr>
-          <p:cNvPr id="20" name="Text 15"/>
-          <p:cNvSpPr txBox="1"/>
-          <p:nvPr/>
-        </p:nvSpPr>
-        <p:spPr>
-          <a:xfrm>
-            <a:off x="1417320" y="5212080"/>
-            <a:ext cx="1188720" cy="365760"/>
-          </a:xfrm>
-          <a:prstGeom prst="rect">
-            <a:avLst/>
-          </a:prstGeom>
-          <a:noFill/>
-          <a:ln/>
-        </p:spPr>
-        <p:txBody>
-          <a:bodyPr wrap="square" lIns="0" tIns="0" rIns="0" bIns="0" rtlCol="0" anchor="ctr"/>
-          <a:lstStyle/>
-          <a:p>
-            <a:pPr indent="0" marL="0">
-              <a:buNone/>
-            </a:pPr>
-            <a:r>
-              <a:rPr lang="en-US" sz="1000" dirty="0">
-                <a:solidFill>
-                  <a:srgbClr val="4A5F7A"/>
-                </a:solidFill>
-                <a:latin typeface="Poppins" pitchFamily="34" charset="0"/>
-                <a:ea typeface="Poppins" pitchFamily="34" charset="-122"/>
-                <a:cs typeface="Poppins" pitchFamily="34" charset="-120"/>
-              </a:rPr>
-              <a:t>Gleichung:</a:t>
-            </a:r>
-            <a:endParaRPr lang="en-US" sz="1000" dirty="0"/>
-          </a:p>
-        </p:txBody>
-      </p:sp>
-      <p:sp>
-        <p:nvSpPr>
-          <p:cNvPr id="21" name="Shape 16"/>
-          <p:cNvSpPr/>
-          <p:nvPr/>
-        </p:nvSpPr>
-        <p:spPr>
-          <a:xfrm>
-            <a:off x="2606040" y="5532120"/>
-            <a:ext cx="4178808" cy="0"/>
-          </a:xfrm>
-          <a:prstGeom prst="line">
-            <a:avLst/>
-          </a:prstGeom>
-          <a:noFill/>
-          <a:ln w="15875">
-            <a:solidFill>
-              <a:srgbClr val="8DBBF2"/>
-            </a:solidFill>
-            <a:prstDash val="sysDot"/>
-          </a:ln>
-        </p:spPr>
-      </p:sp>
-      <p:sp>
-        <p:nvSpPr>
-          <p:cNvPr id="22" name="Text 17"/>
-          <p:cNvSpPr txBox="1"/>
-          <p:nvPr/>
-        </p:nvSpPr>
-        <p:spPr>
-          <a:xfrm>
-            <a:off x="1417320" y="5669280"/>
-            <a:ext cx="1188720" cy="365760"/>
-          </a:xfrm>
-          <a:prstGeom prst="rect">
-            <a:avLst/>
-          </a:prstGeom>
-          <a:noFill/>
-          <a:ln/>
-        </p:spPr>
-        <p:txBody>
-          <a:bodyPr wrap="square" lIns="0" tIns="0" rIns="0" bIns="0" rtlCol="0" anchor="ctr"/>
-          <a:lstStyle/>
-          <a:p>
-            <a:pPr indent="0" marL="0">
-              <a:buNone/>
-            </a:pPr>
-            <a:r>
-              <a:rPr lang="en-US" sz="1000" dirty="0">
-                <a:solidFill>
-                  <a:srgbClr val="4A5F7A"/>
-                </a:solidFill>
-                <a:latin typeface="Poppins" pitchFamily="34" charset="0"/>
-                <a:ea typeface="Poppins" pitchFamily="34" charset="-122"/>
-                <a:cs typeface="Poppins" pitchFamily="34" charset="-120"/>
-              </a:rPr>
-              <a:t>Lösung:</a:t>
-            </a:r>
-            <a:endParaRPr lang="en-US" sz="1000" dirty="0"/>
-          </a:p>
-        </p:txBody>
-      </p:sp>
-      <p:sp>
-        <p:nvSpPr>
-          <p:cNvPr id="23" name="Shape 18"/>
-          <p:cNvSpPr/>
-          <p:nvPr/>
-        </p:nvSpPr>
-        <p:spPr>
-          <a:xfrm>
-            <a:off x="2606040" y="5989320"/>
-            <a:ext cx="2743200" cy="0"/>
-          </a:xfrm>
-          <a:prstGeom prst="line">
-            <a:avLst/>
-          </a:prstGeom>
-          <a:noFill/>
-          <a:ln w="15875">
-            <a:solidFill>
-              <a:srgbClr val="8DBBF2"/>
-            </a:solidFill>
-            <a:prstDash val="sysDot"/>
-          </a:ln>
-        </p:spPr>
-      </p:sp>
-      <p:sp>
-        <p:nvSpPr>
-          <p:cNvPr id="24" name="Shape 19"/>
-          <p:cNvSpPr/>
-          <p:nvPr/>
-        </p:nvSpPr>
-        <p:spPr>
-          <a:xfrm>
-            <a:off x="548640" y="6400800"/>
-            <a:ext cx="6464808" cy="2203704"/>
-          </a:xfrm>
-          <a:prstGeom prst="roundRect">
-            <a:avLst>
-              <a:gd name="adj" fmla="val 6224"/>
-            </a:avLst>
-          </a:prstGeom>
-          <a:solidFill>
-            <a:srgbClr val="FFFFFF"/>
-          </a:solidFill>
-          <a:ln w="15875">
-            <a:solidFill>
-              <a:srgbClr val="8DBBF2"/>
-            </a:solidFill>
-            <a:prstDash val="solid"/>
-          </a:ln>
-        </p:spPr>
-      </p:sp>
-      <p:sp>
-        <p:nvSpPr>
-          <p:cNvPr id="25" name="Shape 20"/>
-          <p:cNvSpPr/>
-          <p:nvPr/>
-        </p:nvSpPr>
-        <p:spPr>
-          <a:xfrm>
-            <a:off x="749808" y="6601968"/>
-            <a:ext cx="457200" cy="457200"/>
-          </a:xfrm>
-          <a:prstGeom prst="ellipse">
-            <a:avLst/>
-          </a:prstGeom>
-          <a:solidFill>
-            <a:srgbClr val="BCD6F5"/>
-          </a:solidFill>
-          <a:ln w="12700">
-            <a:solidFill>
-              <a:srgbClr val="BCD6F5"/>
-            </a:solidFill>
-            <a:prstDash val="solid"/>
-          </a:ln>
-        </p:spPr>
-      </p:sp>
-      <p:sp>
-        <p:nvSpPr>
-          <p:cNvPr id="26" name="Text 21"/>
-          <p:cNvSpPr txBox="1"/>
-          <p:nvPr/>
-        </p:nvSpPr>
-        <p:spPr>
-          <a:xfrm>
-            <a:off x="749808" y="6601968"/>
-            <a:ext cx="457200" cy="457200"/>
-          </a:xfrm>
-          <a:prstGeom prst="rect">
-            <a:avLst/>
-          </a:prstGeom>
-          <a:noFill/>
-          <a:ln/>
-        </p:spPr>
-        <p:txBody>
-          <a:bodyPr wrap="square" lIns="0" tIns="0" rIns="0" bIns="0" rtlCol="0" anchor="ctr"/>
-          <a:lstStyle/>
-          <a:p>
-            <a:pPr algn="ctr" indent="0" marL="0">
-              <a:buNone/>
-            </a:pPr>
-            <a:r>
-              <a:rPr lang="en-US" sz="1600" b="1" dirty="0">
-                <a:solidFill>
-                  <a:srgbClr val="0B1E3A"/>
-                </a:solidFill>
-                <a:latin typeface="Poppins" pitchFamily="34" charset="0"/>
-                <a:ea typeface="Poppins" pitchFamily="34" charset="-122"/>
-                <a:cs typeface="Poppins" pitchFamily="34" charset="-120"/>
-              </a:rPr>
-              <a:t>13</a:t>
-            </a:r>
-            <a:endParaRPr lang="en-US" sz="1600" dirty="0"/>
-          </a:p>
-        </p:txBody>
-      </p:sp>
-      <p:sp>
-        <p:nvSpPr>
-          <p:cNvPr id="27" name="Text 22"/>
-          <p:cNvSpPr txBox="1"/>
-          <p:nvPr/>
-        </p:nvSpPr>
-        <p:spPr>
-          <a:xfrm>
-            <a:off x="1417320" y="6583680"/>
-            <a:ext cx="5367528" cy="832104"/>
-          </a:xfrm>
-          <a:prstGeom prst="rect">
-            <a:avLst/>
-          </a:prstGeom>
-          <a:noFill/>
-          <a:ln/>
-        </p:spPr>
-        <p:txBody>
-          <a:bodyPr wrap="square" lIns="0" tIns="0" rIns="0" bIns="0" rtlCol="0" anchor="t"/>
-          <a:lstStyle/>
-          <a:p>
-            <a:pPr indent="0" marL="0">
-              <a:lnSpc>
-                <a:spcPct val="120000"/>
-              </a:lnSpc>
-              <a:buNone/>
-            </a:pPr>
-            <a:r>
-              <a:rPr lang="en-US" sz="1250" dirty="0">
-                <a:solidFill>
-                  <a:srgbClr val="0B1E3A"/>
-                </a:solidFill>
-                <a:latin typeface="Poppins" pitchFamily="34" charset="0"/>
-                <a:ea typeface="Poppins" pitchFamily="34" charset="-122"/>
-                <a:cs typeface="Poppins" pitchFamily="34" charset="-120"/>
-              </a:rPr>
-              <a:t>Anja, Armin und Alina sind zusammen 32 Jahre alt. Anja ist um 10 Jahre älter als Alina und Armin ist um 6 Jahre jünger als Anja. Wie alt ist Armin?</a:t>
-            </a:r>
-            <a:endParaRPr lang="en-US" sz="1250" dirty="0"/>
-          </a:p>
-        </p:txBody>
-      </p:sp>
-      <p:sp>
-        <p:nvSpPr>
-          <p:cNvPr id="28" name="Text 23"/>
-          <p:cNvSpPr txBox="1"/>
-          <p:nvPr/>
-        </p:nvSpPr>
-        <p:spPr>
-          <a:xfrm>
-            <a:off x="1417320" y="7552944"/>
-            <a:ext cx="1188720" cy="365760"/>
-          </a:xfrm>
-          <a:prstGeom prst="rect">
-            <a:avLst/>
-          </a:prstGeom>
-          <a:noFill/>
-          <a:ln/>
-        </p:spPr>
-        <p:txBody>
-          <a:bodyPr wrap="square" lIns="0" tIns="0" rIns="0" bIns="0" rtlCol="0" anchor="ctr"/>
-          <a:lstStyle/>
-          <a:p>
-            <a:pPr indent="0" marL="0">
-              <a:buNone/>
-            </a:pPr>
-            <a:r>
-              <a:rPr lang="en-US" sz="1000" dirty="0">
-                <a:solidFill>
-                  <a:srgbClr val="4A5F7A"/>
-                </a:solidFill>
-                <a:latin typeface="Poppins" pitchFamily="34" charset="0"/>
-                <a:ea typeface="Poppins" pitchFamily="34" charset="-122"/>
-                <a:cs typeface="Poppins" pitchFamily="34" charset="-120"/>
-              </a:rPr>
-              <a:t>Gleichung:</a:t>
-            </a:r>
-            <a:endParaRPr lang="en-US" sz="1000" dirty="0"/>
-          </a:p>
-        </p:txBody>
-      </p:sp>
-      <p:sp>
-        <p:nvSpPr>
-          <p:cNvPr id="29" name="Shape 24"/>
-          <p:cNvSpPr/>
-          <p:nvPr/>
-        </p:nvSpPr>
-        <p:spPr>
-          <a:xfrm>
-            <a:off x="2606040" y="7872984"/>
-            <a:ext cx="4178808" cy="0"/>
-          </a:xfrm>
-          <a:prstGeom prst="line">
-            <a:avLst/>
-          </a:prstGeom>
-          <a:noFill/>
-          <a:ln w="15875">
-            <a:solidFill>
-              <a:srgbClr val="8DBBF2"/>
-            </a:solidFill>
-            <a:prstDash val="sysDot"/>
-          </a:ln>
-        </p:spPr>
-      </p:sp>
-      <p:sp>
-        <p:nvSpPr>
-          <p:cNvPr id="30" name="Text 25"/>
-          <p:cNvSpPr txBox="1"/>
-          <p:nvPr/>
-        </p:nvSpPr>
-        <p:spPr>
-          <a:xfrm>
-            <a:off x="1417320" y="8010144"/>
-            <a:ext cx="1188720" cy="365760"/>
-          </a:xfrm>
-          <a:prstGeom prst="rect">
-            <a:avLst/>
-          </a:prstGeom>
-          <a:noFill/>
-          <a:ln/>
-        </p:spPr>
-        <p:txBody>
-          <a:bodyPr wrap="square" lIns="0" tIns="0" rIns="0" bIns="0" rtlCol="0" anchor="ctr"/>
-          <a:lstStyle/>
-          <a:p>
-            <a:pPr indent="0" marL="0">
-              <a:buNone/>
-            </a:pPr>
-            <a:r>
-              <a:rPr lang="en-US" sz="1000" dirty="0">
-                <a:solidFill>
-                  <a:srgbClr val="4A5F7A"/>
-                </a:solidFill>
-                <a:latin typeface="Poppins" pitchFamily="34" charset="0"/>
-                <a:ea typeface="Poppins" pitchFamily="34" charset="-122"/>
-                <a:cs typeface="Poppins" pitchFamily="34" charset="-120"/>
-              </a:rPr>
-              <a:t>Lösung:</a:t>
-            </a:r>
-            <a:endParaRPr lang="en-US" sz="1000" dirty="0"/>
-          </a:p>
-        </p:txBody>
-      </p:sp>
-      <p:sp>
-        <p:nvSpPr>
-          <p:cNvPr id="31" name="Shape 26"/>
-          <p:cNvSpPr/>
-          <p:nvPr/>
-        </p:nvSpPr>
-        <p:spPr>
-          <a:xfrm>
-            <a:off x="2606040" y="8330184"/>
-            <a:ext cx="2743200" cy="0"/>
-          </a:xfrm>
-          <a:prstGeom prst="line">
-            <a:avLst/>
-          </a:prstGeom>
-          <a:noFill/>
-          <a:ln w="15875">
-            <a:solidFill>
-              <a:srgbClr val="8DBBF2"/>
-            </a:solidFill>
-            <a:prstDash val="sysDot"/>
-          </a:ln>
-        </p:spPr>
-      </p:sp>
-    </p:spTree>
-  </p:cSld>
-  <p:clrMapOvr>
-    <a:masterClrMapping/>
-  </p:clrMapOvr>
-</p:sld>
-</file>
-
-<file path=ppt/slides/slide5.xml><?xml version="1.0" encoding="utf-8"?>
-<p:sld xmlns:a="http://schemas.openxmlformats.org/drawingml/2006/main" xmlns:r="http://schemas.openxmlformats.org/officeDocument/2006/relationships" xmlns:p="http://schemas.openxmlformats.org/presentationml/2006/main">
-  <p:cSld name="Slide 5">
-    <p:spTree>
-      <p:nvGrpSpPr>
-        <p:cNvPr id="1" name=""/>
-        <p:cNvGrpSpPr/>
-        <p:nvPr/>
-      </p:nvGrpSpPr>
-      <p:grpSpPr>
-        <a:xfrm>
-          <a:off x="0" y="0"/>
-          <a:ext cx="0" cy="0"/>
-          <a:chOff x="0" y="0"/>
-          <a:chExt cx="0" cy="0"/>
-        </a:xfrm>
-      </p:grpSpPr>
-      <p:pic>
-        <p:nvPicPr>
-          <p:cNvPr id="3" name="Image 0" descr="cleverbox – modern. kostenlos. lehrreich.">    </p:cNvPr>
-          <p:cNvPicPr>
-            <a:picLocks noChangeAspect="1"/>
-          </p:cNvPicPr>
-          <p:nvPr/>
-        </p:nvPicPr>
-        <p:blipFill>
-          <a:blip r:embed="rId1"/>
-          <a:stretch>
-            <a:fillRect/>
-          </a:stretch>
-        </p:blipFill>
-        <p:spPr>
-          <a:xfrm>
-            <a:off x="548640" y="201168"/>
-            <a:ext cx="2331720" cy="864835"/>
-          </a:xfrm>
-          <a:prstGeom prst="rect">
-            <a:avLst/>
-          </a:prstGeom>
-        </p:spPr>
-      </p:pic>
-      <p:pic>
-        <p:nvPicPr>
-          <p:cNvPr id="4" name="Image 1" descr="QR-Code zu www.cleverbox.co.at">    </p:cNvPr>
-          <p:cNvPicPr>
-            <a:picLocks noChangeAspect="1"/>
-          </p:cNvPicPr>
-          <p:nvPr/>
-        </p:nvPicPr>
-        <p:blipFill>
-          <a:blip r:embed="rId2"/>
-          <a:stretch>
-            <a:fillRect/>
-          </a:stretch>
-        </p:blipFill>
-        <p:spPr>
-          <a:xfrm>
-            <a:off x="6144768" y="228600"/>
-            <a:ext cx="868680" cy="868680"/>
-          </a:xfrm>
-          <a:prstGeom prst="rect">
-            <a:avLst/>
-          </a:prstGeom>
-        </p:spPr>
-      </p:pic>
-      <p:sp>
-        <p:nvSpPr>
-          <p:cNvPr id="5" name="Text 0"/>
-          <p:cNvSpPr txBox="1"/>
-          <p:nvPr/>
-        </p:nvSpPr>
-        <p:spPr>
-          <a:xfrm>
-            <a:off x="3767328" y="274320"/>
-            <a:ext cx="2286000" cy="777240"/>
-          </a:xfrm>
-          <a:prstGeom prst="rect">
-            <a:avLst/>
-          </a:prstGeom>
-          <a:noFill/>
-          <a:ln/>
-        </p:spPr>
-        <p:txBody>
-          <a:bodyPr wrap="square" lIns="0" tIns="0" rIns="0" bIns="0" rtlCol="0" anchor="ctr"/>
-          <a:lstStyle/>
-          <a:p>
-            <a:pPr algn="r" indent="0" marL="0">
-              <a:lnSpc>
-                <a:spcPct val="120000"/>
-              </a:lnSpc>
-              <a:buNone/>
-            </a:pPr>
-            <a:r>
-              <a:rPr lang="en-US" sz="1000" dirty="0">
-                <a:solidFill>
-                  <a:srgbClr val="4A5F7A"/>
-                </a:solidFill>
-                <a:latin typeface="Poppins" pitchFamily="34" charset="0"/>
-                <a:ea typeface="Poppins" pitchFamily="34" charset="-122"/>
-                <a:cs typeface="Poppins" pitchFamily="34" charset="-120"/>
-              </a:rPr>
-              <a:t>Mehr Material:</a:t>
-            </a:r>
-            <a:endParaRPr lang="en-US" sz="1000" dirty="0"/>
-          </a:p>
-          <a:p>
-            <a:pPr algn="r" indent="0" marL="0">
-              <a:lnSpc>
-                <a:spcPct val="120000"/>
-              </a:lnSpc>
-              <a:buNone/>
-            </a:pPr>
-            <a:r>
-              <a:rPr lang="en-US" sz="1000" dirty="0">
-                <a:solidFill>
-                  <a:srgbClr val="4A5F7A"/>
-                </a:solidFill>
-                <a:latin typeface="Poppins" pitchFamily="34" charset="0"/>
-                <a:ea typeface="Poppins" pitchFamily="34" charset="-122"/>
-                <a:cs typeface="Poppins" pitchFamily="34" charset="-120"/>
-              </a:rPr>
-              <a:t>www.cleverbox.co.at</a:t>
-            </a:r>
-            <a:endParaRPr lang="en-US" sz="1000" dirty="0"/>
-          </a:p>
-        </p:txBody>
-      </p:sp>
-      <p:sp>
-        <p:nvSpPr>
-          <p:cNvPr id="6" name="Shape 1"/>
-          <p:cNvSpPr/>
-          <p:nvPr/>
-        </p:nvSpPr>
-        <p:spPr>
-          <a:xfrm>
-            <a:off x="548640" y="1188720"/>
-            <a:ext cx="6464808" cy="0"/>
-          </a:xfrm>
-          <a:prstGeom prst="line">
-            <a:avLst/>
-          </a:prstGeom>
-          <a:noFill/>
-          <a:ln w="15875">
-            <a:solidFill>
-              <a:srgbClr val="8DBBF2"/>
-            </a:solidFill>
-            <a:prstDash val="solid"/>
-          </a:ln>
-        </p:spPr>
-      </p:sp>
-      <p:sp>
-        <p:nvSpPr>
-          <p:cNvPr id="7" name="Text 2"/>
-          <p:cNvSpPr txBox="1"/>
-          <p:nvPr/>
-        </p:nvSpPr>
-        <p:spPr>
-          <a:xfrm>
-            <a:off x="548640" y="1371600"/>
-            <a:ext cx="6400800" cy="365760"/>
-          </a:xfrm>
-          <a:prstGeom prst="rect">
-            <a:avLst/>
-          </a:prstGeom>
-          <a:noFill/>
-          <a:ln/>
-        </p:spPr>
-        <p:txBody>
-          <a:bodyPr wrap="square" lIns="0" tIns="0" rIns="0" bIns="0" rtlCol="0" anchor="t"/>
-          <a:lstStyle/>
-          <a:p>
-            <a:pPr indent="0" marL="0">
-              <a:buNone/>
-            </a:pPr>
-            <a:r>
-              <a:rPr lang="en-US" sz="1800" b="1" dirty="0">
-                <a:solidFill>
-                  <a:srgbClr val="14459A"/>
-                </a:solidFill>
-                <a:latin typeface="Poppins" pitchFamily="34" charset="0"/>
-                <a:ea typeface="Poppins" pitchFamily="34" charset="-122"/>
-                <a:cs typeface="Poppins" pitchFamily="34" charset="-120"/>
-              </a:rPr>
-              <a:t>Einfache Textgleichungen · Seite 5</a:t>
-            </a:r>
-            <a:endParaRPr lang="en-US" sz="1800" dirty="0"/>
-          </a:p>
-        </p:txBody>
-      </p:sp>
-      <p:sp>
-        <p:nvSpPr>
-          <p:cNvPr id="8" name="Shape 3"/>
-          <p:cNvSpPr/>
-          <p:nvPr/>
-        </p:nvSpPr>
-        <p:spPr>
-          <a:xfrm>
-            <a:off x="548640" y="1965960"/>
-            <a:ext cx="6464808" cy="3136392"/>
-          </a:xfrm>
-          <a:prstGeom prst="roundRect">
-            <a:avLst>
-              <a:gd name="adj" fmla="val 4373"/>
-            </a:avLst>
-          </a:prstGeom>
-          <a:solidFill>
-            <a:srgbClr val="FFFFFF"/>
-          </a:solidFill>
-          <a:ln w="15875">
-            <a:solidFill>
-              <a:srgbClr val="8DBBF2"/>
-            </a:solidFill>
-            <a:prstDash val="solid"/>
-          </a:ln>
-        </p:spPr>
-      </p:sp>
-      <p:sp>
-        <p:nvSpPr>
-          <p:cNvPr id="9" name="Shape 4"/>
-          <p:cNvSpPr/>
-          <p:nvPr/>
-        </p:nvSpPr>
-        <p:spPr>
-          <a:xfrm>
-            <a:off x="749808" y="2167128"/>
-            <a:ext cx="457200" cy="457200"/>
-          </a:xfrm>
-          <a:prstGeom prst="ellipse">
-            <a:avLst/>
-          </a:prstGeom>
-          <a:solidFill>
-            <a:srgbClr val="BCD6F5"/>
-          </a:solidFill>
-          <a:ln w="12700">
-            <a:solidFill>
-              <a:srgbClr val="BCD6F5"/>
-            </a:solidFill>
-            <a:prstDash val="solid"/>
-          </a:ln>
-        </p:spPr>
-      </p:sp>
-      <p:sp>
-        <p:nvSpPr>
-          <p:cNvPr id="10" name="Text 5"/>
-          <p:cNvSpPr txBox="1"/>
-          <p:nvPr/>
-        </p:nvSpPr>
-        <p:spPr>
-          <a:xfrm>
-            <a:off x="749808" y="2167128"/>
-            <a:ext cx="457200" cy="457200"/>
-          </a:xfrm>
-          <a:prstGeom prst="rect">
-            <a:avLst/>
-          </a:prstGeom>
-          <a:noFill/>
-          <a:ln/>
-        </p:spPr>
-        <p:txBody>
-          <a:bodyPr wrap="square" lIns="0" tIns="0" rIns="0" bIns="0" rtlCol="0" anchor="ctr"/>
-          <a:lstStyle/>
-          <a:p>
-            <a:pPr algn="ctr" indent="0" marL="0">
-              <a:buNone/>
-            </a:pPr>
-            <a:r>
-              <a:rPr lang="en-US" sz="1600" b="1" dirty="0">
-                <a:solidFill>
-                  <a:srgbClr val="0B1E3A"/>
-                </a:solidFill>
-                <a:latin typeface="Poppins" pitchFamily="34" charset="0"/>
-                <a:ea typeface="Poppins" pitchFamily="34" charset="-122"/>
-                <a:cs typeface="Poppins" pitchFamily="34" charset="-120"/>
-              </a:rPr>
-              <a:t>14</a:t>
-            </a:r>
-            <a:endParaRPr lang="en-US" sz="1600" dirty="0"/>
-          </a:p>
-        </p:txBody>
-      </p:sp>
-      <p:sp>
-        <p:nvSpPr>
-          <p:cNvPr id="11" name="Text 6"/>
-          <p:cNvSpPr txBox="1"/>
-          <p:nvPr/>
-        </p:nvSpPr>
-        <p:spPr>
-          <a:xfrm>
-            <a:off x="1417320" y="2148840"/>
-            <a:ext cx="5367528" cy="1078992"/>
-          </a:xfrm>
-          <a:prstGeom prst="rect">
-            <a:avLst/>
-          </a:prstGeom>
-          <a:noFill/>
-          <a:ln/>
-        </p:spPr>
-        <p:txBody>
-          <a:bodyPr wrap="square" lIns="0" tIns="0" rIns="0" bIns="0" rtlCol="0" anchor="t"/>
-          <a:lstStyle/>
-          <a:p>
-            <a:pPr indent="0" marL="0">
-              <a:lnSpc>
-                <a:spcPct val="120000"/>
-              </a:lnSpc>
-              <a:buNone/>
-            </a:pPr>
-            <a:r>
-              <a:rPr lang="en-US" sz="1250" dirty="0">
-                <a:solidFill>
-                  <a:srgbClr val="0B1E3A"/>
-                </a:solidFill>
-                <a:latin typeface="Poppins" pitchFamily="34" charset="0"/>
-                <a:ea typeface="Poppins" pitchFamily="34" charset="-122"/>
-                <a:cs typeface="Poppins" pitchFamily="34" charset="-120"/>
-              </a:rPr>
-              <a:t>In einem rechtwinkeligen Dreieck ist α viermal so groß wie β.</a:t>
-            </a:r>
-            <a:endParaRPr lang="en-US" sz="1250" dirty="0"/>
-          </a:p>
-          <a:p>
-            <a:pPr indent="0" marL="0">
-              <a:lnSpc>
-                <a:spcPct val="120000"/>
-              </a:lnSpc>
-              <a:buNone/>
-            </a:pPr>
-            <a:r>
-              <a:rPr lang="en-US" sz="1250" dirty="0">
-                <a:solidFill>
-                  <a:srgbClr val="0B1E3A"/>
-                </a:solidFill>
-                <a:latin typeface="Poppins" pitchFamily="34" charset="0"/>
-                <a:ea typeface="Poppins" pitchFamily="34" charset="-122"/>
-                <a:cs typeface="Poppins" pitchFamily="34" charset="-120"/>
-              </a:rPr>
-              <a:t>a) Wie groß ist der rechte Winkel?</a:t>
-            </a:r>
-            <a:endParaRPr lang="en-US" sz="1250" dirty="0"/>
-          </a:p>
-          <a:p>
-            <a:pPr indent="0" marL="0">
-              <a:lnSpc>
-                <a:spcPct val="120000"/>
-              </a:lnSpc>
-              <a:buNone/>
-            </a:pPr>
-            <a:r>
-              <a:rPr lang="en-US" sz="1250" dirty="0">
-                <a:solidFill>
-                  <a:srgbClr val="0B1E3A"/>
-                </a:solidFill>
-                <a:latin typeface="Poppins" pitchFamily="34" charset="0"/>
-                <a:ea typeface="Poppins" pitchFamily="34" charset="-122"/>
-                <a:cs typeface="Poppins" pitchFamily="34" charset="-120"/>
-              </a:rPr>
-              <a:t>b) Wie groß ist α?</a:t>
-            </a:r>
-            <a:endParaRPr lang="en-US" sz="1250" dirty="0"/>
-          </a:p>
-        </p:txBody>
-      </p:sp>
-      <p:sp>
-        <p:nvSpPr>
-          <p:cNvPr id="12" name="Text 7"/>
-          <p:cNvSpPr txBox="1"/>
-          <p:nvPr/>
-        </p:nvSpPr>
-        <p:spPr>
-          <a:xfrm>
-            <a:off x="1417320" y="3364992"/>
-            <a:ext cx="1188720" cy="365760"/>
-          </a:xfrm>
-          <a:prstGeom prst="rect">
-            <a:avLst/>
-          </a:prstGeom>
-          <a:noFill/>
-          <a:ln/>
-        </p:spPr>
-        <p:txBody>
-          <a:bodyPr wrap="square" lIns="0" tIns="0" rIns="0" bIns="0" rtlCol="0" anchor="ctr"/>
-          <a:lstStyle/>
-          <a:p>
-            <a:pPr indent="0" marL="0">
-              <a:buNone/>
-            </a:pPr>
-            <a:r>
-              <a:rPr lang="en-US" sz="1000" dirty="0">
-                <a:solidFill>
-                  <a:srgbClr val="4A5F7A"/>
-                </a:solidFill>
-                <a:latin typeface="Poppins" pitchFamily="34" charset="0"/>
-                <a:ea typeface="Poppins" pitchFamily="34" charset="-122"/>
-                <a:cs typeface="Poppins" pitchFamily="34" charset="-120"/>
-              </a:rPr>
-              <a:t>Gleichung:</a:t>
-            </a:r>
-            <a:endParaRPr lang="en-US" sz="1000" dirty="0"/>
-          </a:p>
-        </p:txBody>
-      </p:sp>
-      <p:sp>
-        <p:nvSpPr>
-          <p:cNvPr id="13" name="Shape 8"/>
-          <p:cNvSpPr/>
-          <p:nvPr/>
-        </p:nvSpPr>
-        <p:spPr>
-          <a:xfrm>
-            <a:off x="2606040" y="3685032"/>
-            <a:ext cx="4178808" cy="0"/>
-          </a:xfrm>
-          <a:prstGeom prst="line">
-            <a:avLst/>
-          </a:prstGeom>
-          <a:noFill/>
-          <a:ln w="15875">
-            <a:solidFill>
-              <a:srgbClr val="8DBBF2"/>
-            </a:solidFill>
-            <a:prstDash val="sysDot"/>
-          </a:ln>
-        </p:spPr>
-      </p:sp>
-      <p:sp>
-        <p:nvSpPr>
-          <p:cNvPr id="14" name="Text 9"/>
-          <p:cNvSpPr txBox="1"/>
-          <p:nvPr/>
-        </p:nvSpPr>
-        <p:spPr>
-          <a:xfrm>
-            <a:off x="1417320" y="3822192"/>
-            <a:ext cx="457200" cy="365760"/>
-          </a:xfrm>
-          <a:prstGeom prst="rect">
-            <a:avLst/>
-          </a:prstGeom>
-          <a:noFill/>
-          <a:ln/>
-        </p:spPr>
-        <p:txBody>
-          <a:bodyPr wrap="square" lIns="0" tIns="0" rIns="0" bIns="0" rtlCol="0" anchor="ctr"/>
-          <a:lstStyle/>
-          <a:p>
-            <a:pPr indent="0" marL="0">
-              <a:buNone/>
-            </a:pPr>
-            <a:r>
-              <a:rPr lang="en-US" sz="1050" b="1" dirty="0">
-                <a:solidFill>
-                  <a:srgbClr val="4A5F7A"/>
-                </a:solidFill>
-                <a:latin typeface="Poppins" pitchFamily="34" charset="0"/>
-                <a:ea typeface="Poppins" pitchFamily="34" charset="-122"/>
-                <a:cs typeface="Poppins" pitchFamily="34" charset="-120"/>
-              </a:rPr>
-              <a:t>a)</a:t>
-            </a:r>
-            <a:endParaRPr lang="en-US" sz="1050" dirty="0"/>
-          </a:p>
-        </p:txBody>
-      </p:sp>
-      <p:sp>
-        <p:nvSpPr>
-          <p:cNvPr id="15" name="Shape 10"/>
-          <p:cNvSpPr/>
-          <p:nvPr/>
-        </p:nvSpPr>
-        <p:spPr>
-          <a:xfrm>
-            <a:off x="1828800" y="4142232"/>
-            <a:ext cx="4956048" cy="0"/>
-          </a:xfrm>
-          <a:prstGeom prst="line">
-            <a:avLst/>
-          </a:prstGeom>
-          <a:noFill/>
-          <a:ln w="15875">
-            <a:solidFill>
-              <a:srgbClr val="8DBBF2"/>
-            </a:solidFill>
-            <a:prstDash val="sysDot"/>
-          </a:ln>
-        </p:spPr>
-      </p:sp>
-      <p:sp>
-        <p:nvSpPr>
-          <p:cNvPr id="16" name="Text 11"/>
-          <p:cNvSpPr txBox="1"/>
-          <p:nvPr/>
-        </p:nvSpPr>
-        <p:spPr>
-          <a:xfrm>
-            <a:off x="1417320" y="4325112"/>
-            <a:ext cx="457200" cy="365760"/>
-          </a:xfrm>
-          <a:prstGeom prst="rect">
-            <a:avLst/>
-          </a:prstGeom>
-          <a:noFill/>
-          <a:ln/>
-        </p:spPr>
-        <p:txBody>
-          <a:bodyPr wrap="square" lIns="0" tIns="0" rIns="0" bIns="0" rtlCol="0" anchor="ctr"/>
-          <a:lstStyle/>
-          <a:p>
-            <a:pPr indent="0" marL="0">
-              <a:buNone/>
-            </a:pPr>
-            <a:r>
-              <a:rPr lang="en-US" sz="1050" b="1" dirty="0">
-                <a:solidFill>
-                  <a:srgbClr val="4A5F7A"/>
-                </a:solidFill>
-                <a:latin typeface="Poppins" pitchFamily="34" charset="0"/>
-                <a:ea typeface="Poppins" pitchFamily="34" charset="-122"/>
-                <a:cs typeface="Poppins" pitchFamily="34" charset="-120"/>
-              </a:rPr>
-              <a:t>b)</a:t>
-            </a:r>
-            <a:endParaRPr lang="en-US" sz="1050" dirty="0"/>
-          </a:p>
-        </p:txBody>
-      </p:sp>
-      <p:sp>
-        <p:nvSpPr>
-          <p:cNvPr id="17" name="Shape 12"/>
-          <p:cNvSpPr/>
-          <p:nvPr/>
-        </p:nvSpPr>
-        <p:spPr>
-          <a:xfrm>
-            <a:off x="1828800" y="4645152"/>
-            <a:ext cx="4956048" cy="0"/>
-          </a:xfrm>
-          <a:prstGeom prst="line">
-            <a:avLst/>
-          </a:prstGeom>
-          <a:noFill/>
-          <a:ln w="15875">
-            <a:solidFill>
-              <a:srgbClr val="8DBBF2"/>
-            </a:solidFill>
-            <a:prstDash val="sysDot"/>
-          </a:ln>
-        </p:spPr>
-      </p:sp>
-      <p:sp>
-        <p:nvSpPr>
-          <p:cNvPr id="18" name="Shape 13"/>
-          <p:cNvSpPr/>
-          <p:nvPr/>
-        </p:nvSpPr>
-        <p:spPr>
-          <a:xfrm>
-            <a:off x="548640" y="5239512"/>
-            <a:ext cx="6464808" cy="2203704"/>
-          </a:xfrm>
-          <a:prstGeom prst="roundRect">
-            <a:avLst>
-              <a:gd name="adj" fmla="val 6224"/>
-            </a:avLst>
-          </a:prstGeom>
-          <a:solidFill>
-            <a:srgbClr val="FFFFFF"/>
-          </a:solidFill>
-          <a:ln w="15875">
-            <a:solidFill>
-              <a:srgbClr val="8DBBF2"/>
-            </a:solidFill>
-            <a:prstDash val="solid"/>
-          </a:ln>
-        </p:spPr>
-      </p:sp>
-      <p:sp>
-        <p:nvSpPr>
-          <p:cNvPr id="19" name="Shape 14"/>
-          <p:cNvSpPr/>
-          <p:nvPr/>
-        </p:nvSpPr>
-        <p:spPr>
-          <a:xfrm>
-            <a:off x="749808" y="5440680"/>
-            <a:ext cx="457200" cy="457200"/>
-          </a:xfrm>
-          <a:prstGeom prst="ellipse">
-            <a:avLst/>
-          </a:prstGeom>
-          <a:solidFill>
-            <a:srgbClr val="BCD6F5"/>
-          </a:solidFill>
-          <a:ln w="12700">
-            <a:solidFill>
-              <a:srgbClr val="BCD6F5"/>
-            </a:solidFill>
-            <a:prstDash val="solid"/>
-          </a:ln>
-        </p:spPr>
-      </p:sp>
-      <p:sp>
-        <p:nvSpPr>
-          <p:cNvPr id="20" name="Text 15"/>
-          <p:cNvSpPr txBox="1"/>
-          <p:nvPr/>
-        </p:nvSpPr>
-        <p:spPr>
-          <a:xfrm>
-            <a:off x="749808" y="5440680"/>
-            <a:ext cx="457200" cy="457200"/>
-          </a:xfrm>
-          <a:prstGeom prst="rect">
-            <a:avLst/>
-          </a:prstGeom>
-          <a:noFill/>
-          <a:ln/>
-        </p:spPr>
-        <p:txBody>
-          <a:bodyPr wrap="square" lIns="0" tIns="0" rIns="0" bIns="0" rtlCol="0" anchor="ctr"/>
-          <a:lstStyle/>
-          <a:p>
-            <a:pPr algn="ctr" indent="0" marL="0">
-              <a:buNone/>
-            </a:pPr>
-            <a:r>
-              <a:rPr lang="en-US" sz="1600" b="1" dirty="0">
-                <a:solidFill>
-                  <a:srgbClr val="0B1E3A"/>
-                </a:solidFill>
-                <a:latin typeface="Poppins" pitchFamily="34" charset="0"/>
-                <a:ea typeface="Poppins" pitchFamily="34" charset="-122"/>
-                <a:cs typeface="Poppins" pitchFamily="34" charset="-120"/>
-              </a:rPr>
-              <a:t>15</a:t>
-            </a:r>
-            <a:endParaRPr lang="en-US" sz="1600" dirty="0"/>
-          </a:p>
-        </p:txBody>
-      </p:sp>
-      <p:sp>
-        <p:nvSpPr>
-          <p:cNvPr id="21" name="Text 16"/>
-          <p:cNvSpPr txBox="1"/>
-          <p:nvPr/>
-        </p:nvSpPr>
-        <p:spPr>
-          <a:xfrm>
-            <a:off x="1417320" y="5422392"/>
-            <a:ext cx="5367528" cy="832104"/>
-          </a:xfrm>
-          <a:prstGeom prst="rect">
-            <a:avLst/>
-          </a:prstGeom>
-          <a:noFill/>
-          <a:ln/>
-        </p:spPr>
-        <p:txBody>
-          <a:bodyPr wrap="square" lIns="0" tIns="0" rIns="0" bIns="0" rtlCol="0" anchor="t"/>
-          <a:lstStyle/>
-          <a:p>
-            <a:pPr indent="0" marL="0">
-              <a:lnSpc>
-                <a:spcPct val="120000"/>
-              </a:lnSpc>
-              <a:buNone/>
-            </a:pPr>
-            <a:r>
-              <a:rPr lang="en-US" sz="1250" dirty="0">
-                <a:solidFill>
-                  <a:srgbClr val="0B1E3A"/>
-                </a:solidFill>
-                <a:latin typeface="Poppins" pitchFamily="34" charset="0"/>
-                <a:ea typeface="Poppins" pitchFamily="34" charset="-122"/>
-                <a:cs typeface="Poppins" pitchFamily="34" charset="-120"/>
-              </a:rPr>
-              <a:t>Georg, Nicole und Carina sind zusammen 43 Jahre alt. Georg ist um 7 Jahre älter als Nicole und Carina ist um 9 Jahre älter als Nicole. Wie alt ist Nicole?</a:t>
-            </a:r>
-            <a:endParaRPr lang="en-US" sz="1250" dirty="0"/>
-          </a:p>
-        </p:txBody>
-      </p:sp>
-      <p:sp>
-        <p:nvSpPr>
-          <p:cNvPr id="22" name="Text 17"/>
-          <p:cNvSpPr txBox="1"/>
-          <p:nvPr/>
-        </p:nvSpPr>
-        <p:spPr>
-          <a:xfrm>
-            <a:off x="1417320" y="6391656"/>
-            <a:ext cx="1188720" cy="365760"/>
-          </a:xfrm>
-          <a:prstGeom prst="rect">
-            <a:avLst/>
-          </a:prstGeom>
-          <a:noFill/>
-          <a:ln/>
-        </p:spPr>
-        <p:txBody>
-          <a:bodyPr wrap="square" lIns="0" tIns="0" rIns="0" bIns="0" rtlCol="0" anchor="ctr"/>
-          <a:lstStyle/>
-          <a:p>
-            <a:pPr indent="0" marL="0">
-              <a:buNone/>
-            </a:pPr>
-            <a:r>
-              <a:rPr lang="en-US" sz="1000" dirty="0">
-                <a:solidFill>
-                  <a:srgbClr val="4A5F7A"/>
-                </a:solidFill>
-                <a:latin typeface="Poppins" pitchFamily="34" charset="0"/>
-                <a:ea typeface="Poppins" pitchFamily="34" charset="-122"/>
-                <a:cs typeface="Poppins" pitchFamily="34" charset="-120"/>
-              </a:rPr>
-              <a:t>Gleichung:</a:t>
-            </a:r>
-            <a:endParaRPr lang="en-US" sz="1000" dirty="0"/>
-          </a:p>
-        </p:txBody>
-      </p:sp>
-      <p:sp>
-        <p:nvSpPr>
-          <p:cNvPr id="23" name="Shape 18"/>
-          <p:cNvSpPr/>
-          <p:nvPr/>
-        </p:nvSpPr>
-        <p:spPr>
-          <a:xfrm>
-            <a:off x="2606040" y="6711696"/>
-            <a:ext cx="4178808" cy="0"/>
-          </a:xfrm>
-          <a:prstGeom prst="line">
-            <a:avLst/>
-          </a:prstGeom>
-          <a:noFill/>
-          <a:ln w="15875">
-            <a:solidFill>
-              <a:srgbClr val="8DBBF2"/>
-            </a:solidFill>
-            <a:prstDash val="sysDot"/>
-          </a:ln>
-        </p:spPr>
-      </p:sp>
-      <p:sp>
-        <p:nvSpPr>
-          <p:cNvPr id="24" name="Text 19"/>
-          <p:cNvSpPr txBox="1"/>
-          <p:nvPr/>
-        </p:nvSpPr>
-        <p:spPr>
-          <a:xfrm>
-            <a:off x="1417320" y="6848856"/>
-            <a:ext cx="1188720" cy="365760"/>
-          </a:xfrm>
-          <a:prstGeom prst="rect">
-            <a:avLst/>
-          </a:prstGeom>
-          <a:noFill/>
-          <a:ln/>
-        </p:spPr>
-        <p:txBody>
-          <a:bodyPr wrap="square" lIns="0" tIns="0" rIns="0" bIns="0" rtlCol="0" anchor="ctr"/>
-          <a:lstStyle/>
-          <a:p>
-            <a:pPr indent="0" marL="0">
-              <a:buNone/>
-            </a:pPr>
-            <a:r>
-              <a:rPr lang="en-US" sz="1000" dirty="0">
-                <a:solidFill>
-                  <a:srgbClr val="4A5F7A"/>
-                </a:solidFill>
-                <a:latin typeface="Poppins" pitchFamily="34" charset="0"/>
-                <a:ea typeface="Poppins" pitchFamily="34" charset="-122"/>
-                <a:cs typeface="Poppins" pitchFamily="34" charset="-120"/>
-              </a:rPr>
-              <a:t>Lösung:</a:t>
-            </a:r>
-            <a:endParaRPr lang="en-US" sz="1000" dirty="0"/>
-          </a:p>
-        </p:txBody>
-      </p:sp>
-      <p:sp>
-        <p:nvSpPr>
-          <p:cNvPr id="25" name="Shape 20"/>
-          <p:cNvSpPr/>
-          <p:nvPr/>
-        </p:nvSpPr>
-        <p:spPr>
-          <a:xfrm>
-            <a:off x="2606040" y="7168896"/>
-            <a:ext cx="2743200" cy="0"/>
-          </a:xfrm>
-          <a:prstGeom prst="line">
-            <a:avLst/>
-          </a:prstGeom>
-          <a:noFill/>
-          <a:ln w="15875">
-            <a:solidFill>
-              <a:srgbClr val="8DBBF2"/>
-            </a:solidFill>
-            <a:prstDash val="sysDot"/>
-          </a:ln>
-        </p:spPr>
-      </p:sp>
-      <p:sp>
-        <p:nvSpPr>
-          <p:cNvPr id="26" name="Shape 21"/>
-          <p:cNvSpPr/>
-          <p:nvPr/>
-        </p:nvSpPr>
-        <p:spPr>
-          <a:xfrm>
-            <a:off x="548640" y="7580376"/>
-            <a:ext cx="6464808" cy="2203704"/>
-          </a:xfrm>
-          <a:prstGeom prst="roundRect">
-            <a:avLst>
-              <a:gd name="adj" fmla="val 6224"/>
-            </a:avLst>
-          </a:prstGeom>
-          <a:solidFill>
-            <a:srgbClr val="FFFFFF"/>
-          </a:solidFill>
-          <a:ln w="15875">
-            <a:solidFill>
-              <a:srgbClr val="8DBBF2"/>
-            </a:solidFill>
-            <a:prstDash val="solid"/>
-          </a:ln>
-        </p:spPr>
-      </p:sp>
-      <p:sp>
-        <p:nvSpPr>
-          <p:cNvPr id="27" name="Shape 22"/>
-          <p:cNvSpPr/>
-          <p:nvPr/>
-        </p:nvSpPr>
-        <p:spPr>
-          <a:xfrm>
-            <a:off x="749808" y="7781544"/>
-            <a:ext cx="457200" cy="457200"/>
-          </a:xfrm>
-          <a:prstGeom prst="ellipse">
-            <a:avLst/>
-          </a:prstGeom>
-          <a:solidFill>
-            <a:srgbClr val="BCD6F5"/>
-          </a:solidFill>
-          <a:ln w="12700">
-            <a:solidFill>
-              <a:srgbClr val="BCD6F5"/>
-            </a:solidFill>
-            <a:prstDash val="solid"/>
-          </a:ln>
-        </p:spPr>
-      </p:sp>
-      <p:sp>
-        <p:nvSpPr>
-          <p:cNvPr id="28" name="Text 23"/>
-          <p:cNvSpPr txBox="1"/>
-          <p:nvPr/>
-        </p:nvSpPr>
-        <p:spPr>
-          <a:xfrm>
-            <a:off x="749808" y="7781544"/>
-            <a:ext cx="457200" cy="457200"/>
-          </a:xfrm>
-          <a:prstGeom prst="rect">
-            <a:avLst/>
-          </a:prstGeom>
-          <a:noFill/>
-          <a:ln/>
-        </p:spPr>
-        <p:txBody>
-          <a:bodyPr wrap="square" lIns="0" tIns="0" rIns="0" bIns="0" rtlCol="0" anchor="ctr"/>
-          <a:lstStyle/>
-          <a:p>
-            <a:pPr algn="ctr" indent="0" marL="0">
-              <a:buNone/>
-            </a:pPr>
-            <a:r>
-              <a:rPr lang="en-US" sz="1600" b="1" dirty="0">
-                <a:solidFill>
-                  <a:srgbClr val="0B1E3A"/>
-                </a:solidFill>
-                <a:latin typeface="Poppins" pitchFamily="34" charset="0"/>
-                <a:ea typeface="Poppins" pitchFamily="34" charset="-122"/>
-                <a:cs typeface="Poppins" pitchFamily="34" charset="-120"/>
-              </a:rPr>
-              <a:t>16</a:t>
-            </a:r>
-            <a:endParaRPr lang="en-US" sz="1600" dirty="0"/>
-          </a:p>
-        </p:txBody>
-      </p:sp>
-      <p:sp>
-        <p:nvSpPr>
-          <p:cNvPr id="29" name="Text 24"/>
-          <p:cNvSpPr txBox="1"/>
-          <p:nvPr/>
-        </p:nvSpPr>
-        <p:spPr>
-          <a:xfrm>
-            <a:off x="1417320" y="7763256"/>
-            <a:ext cx="5367528" cy="832104"/>
-          </a:xfrm>
-          <a:prstGeom prst="rect">
-            <a:avLst/>
-          </a:prstGeom>
-          <a:noFill/>
-          <a:ln/>
-        </p:spPr>
-        <p:txBody>
-          <a:bodyPr wrap="square" lIns="0" tIns="0" rIns="0" bIns="0" rtlCol="0" anchor="t"/>
-          <a:lstStyle/>
-          <a:p>
-            <a:pPr indent="0" marL="0">
-              <a:lnSpc>
-                <a:spcPct val="120000"/>
-              </a:lnSpc>
-              <a:buNone/>
-            </a:pPr>
-            <a:r>
-              <a:rPr lang="en-US" sz="1250" dirty="0">
-                <a:solidFill>
-                  <a:srgbClr val="0B1E3A"/>
-                </a:solidFill>
-                <a:latin typeface="Poppins" pitchFamily="34" charset="0"/>
-                <a:ea typeface="Poppins" pitchFamily="34" charset="-122"/>
-                <a:cs typeface="Poppins" pitchFamily="34" charset="-120"/>
-              </a:rPr>
-              <a:t>Pia, Johannes und Elisabeth sind zusammen 39 Jahre alt. Pia ist um 4 Jahre älter als Elisabeth und Johannes ist um 2 Jahre jünger als Pia. Wie alt ist Pia?</a:t>
-            </a:r>
-            <a:endParaRPr lang="en-US" sz="1250" dirty="0"/>
-          </a:p>
-        </p:txBody>
-      </p:sp>
-      <p:sp>
-        <p:nvSpPr>
-          <p:cNvPr id="30" name="Text 25"/>
-          <p:cNvSpPr txBox="1"/>
-          <p:nvPr/>
-        </p:nvSpPr>
-        <p:spPr>
-          <a:xfrm>
-            <a:off x="1417320" y="8732520"/>
-            <a:ext cx="1188720" cy="365760"/>
-          </a:xfrm>
-          <a:prstGeom prst="rect">
-            <a:avLst/>
-          </a:prstGeom>
-          <a:noFill/>
-          <a:ln/>
-        </p:spPr>
-        <p:txBody>
-          <a:bodyPr wrap="square" lIns="0" tIns="0" rIns="0" bIns="0" rtlCol="0" anchor="ctr"/>
-          <a:lstStyle/>
-          <a:p>
-            <a:pPr indent="0" marL="0">
-              <a:buNone/>
-            </a:pPr>
-            <a:r>
-              <a:rPr lang="en-US" sz="1000" dirty="0">
-                <a:solidFill>
-                  <a:srgbClr val="4A5F7A"/>
-                </a:solidFill>
-                <a:latin typeface="Poppins" pitchFamily="34" charset="0"/>
-                <a:ea typeface="Poppins" pitchFamily="34" charset="-122"/>
-                <a:cs typeface="Poppins" pitchFamily="34" charset="-120"/>
-              </a:rPr>
-              <a:t>Gleichung:</a:t>
-            </a:r>
-            <a:endParaRPr lang="en-US" sz="1000" dirty="0"/>
-          </a:p>
-        </p:txBody>
-      </p:sp>
-      <p:sp>
-        <p:nvSpPr>
-          <p:cNvPr id="31" name="Shape 26"/>
-          <p:cNvSpPr/>
-          <p:nvPr/>
-        </p:nvSpPr>
-        <p:spPr>
-          <a:xfrm>
-            <a:off x="2606040" y="9052560"/>
-            <a:ext cx="4178808" cy="0"/>
-          </a:xfrm>
-          <a:prstGeom prst="line">
-            <a:avLst/>
-          </a:prstGeom>
-          <a:noFill/>
-          <a:ln w="15875">
-            <a:solidFill>
-              <a:srgbClr val="8DBBF2"/>
-            </a:solidFill>
-            <a:prstDash val="sysDot"/>
-          </a:ln>
-        </p:spPr>
-      </p:sp>
-      <p:sp>
-        <p:nvSpPr>
-          <p:cNvPr id="32" name="Text 27"/>
-          <p:cNvSpPr txBox="1"/>
-          <p:nvPr/>
-        </p:nvSpPr>
-        <p:spPr>
-          <a:xfrm>
-            <a:off x="1417320" y="9189720"/>
-            <a:ext cx="1188720" cy="365760"/>
-          </a:xfrm>
-          <a:prstGeom prst="rect">
-            <a:avLst/>
-          </a:prstGeom>
-          <a:noFill/>
-          <a:ln/>
-        </p:spPr>
-        <p:txBody>
-          <a:bodyPr wrap="square" lIns="0" tIns="0" rIns="0" bIns="0" rtlCol="0" anchor="ctr"/>
-          <a:lstStyle/>
-          <a:p>
-            <a:pPr indent="0" marL="0">
-              <a:buNone/>
-            </a:pPr>
-            <a:r>
-              <a:rPr lang="en-US" sz="1000" dirty="0">
-                <a:solidFill>
-                  <a:srgbClr val="4A5F7A"/>
-                </a:solidFill>
-                <a:latin typeface="Poppins" pitchFamily="34" charset="0"/>
-                <a:ea typeface="Poppins" pitchFamily="34" charset="-122"/>
-                <a:cs typeface="Poppins" pitchFamily="34" charset="-120"/>
-              </a:rPr>
-              <a:t>Lösung:</a:t>
-            </a:r>
-            <a:endParaRPr lang="en-US" sz="1000" dirty="0"/>
-          </a:p>
-        </p:txBody>
-      </p:sp>
-      <p:sp>
-        <p:nvSpPr>
-          <p:cNvPr id="33" name="Shape 28"/>
-          <p:cNvSpPr/>
-          <p:nvPr/>
-        </p:nvSpPr>
-        <p:spPr>
-          <a:xfrm>
-            <a:off x="2606040" y="9509760"/>
-            <a:ext cx="2743200" cy="0"/>
+            <a:endParaRPr lang="en-US" sz="900" dirty="0"/>
+          </a:p>
+        </p:txBody>
+      </p:sp>
+      <p:sp>
+        <p:nvSpPr>
+          <p:cNvPr id="72" name="Shape 67"/>
+          <p:cNvSpPr/>
+          <p:nvPr/>
+        </p:nvSpPr>
+        <p:spPr>
+          <a:xfrm>
+            <a:off x="4864608" y="9724644"/>
+            <a:ext cx="1965960" cy="0"/>
           </a:xfrm>
           <a:prstGeom prst="line">
             <a:avLst/>
